--- a/Lectures/01.Foundations/Lecture01.pptx
+++ b/Lectures/01.Foundations/Lecture01.pptx
@@ -5,40 +5,37 @@
     <p:sldMasterId id="2147483648" r:id="rId1"/>
   </p:sldMasterIdLst>
   <p:notesMasterIdLst>
-    <p:notesMasterId r:id="rId30"/>
+    <p:notesMasterId r:id="rId27"/>
   </p:notesMasterIdLst>
   <p:handoutMasterIdLst>
-    <p:handoutMasterId r:id="rId31"/>
+    <p:handoutMasterId r:id="rId28"/>
   </p:handoutMasterIdLst>
   <p:sldIdLst>
     <p:sldId id="256" r:id="rId2"/>
     <p:sldId id="783" r:id="rId3"/>
     <p:sldId id="1026" r:id="rId4"/>
-    <p:sldId id="991" r:id="rId5"/>
-    <p:sldId id="780" r:id="rId6"/>
-    <p:sldId id="466" r:id="rId7"/>
-    <p:sldId id="745" r:id="rId8"/>
-    <p:sldId id="785" r:id="rId9"/>
-    <p:sldId id="784" r:id="rId10"/>
-    <p:sldId id="1001" r:id="rId11"/>
-    <p:sldId id="787" r:id="rId12"/>
-    <p:sldId id="782" r:id="rId13"/>
-    <p:sldId id="781" r:id="rId14"/>
-    <p:sldId id="788" r:id="rId15"/>
-    <p:sldId id="789" r:id="rId16"/>
-    <p:sldId id="988" r:id="rId17"/>
-    <p:sldId id="641" r:id="rId18"/>
-    <p:sldId id="1000" r:id="rId19"/>
-    <p:sldId id="994" r:id="rId20"/>
-    <p:sldId id="1006" r:id="rId21"/>
-    <p:sldId id="1007" r:id="rId22"/>
-    <p:sldId id="1008" r:id="rId23"/>
-    <p:sldId id="997" r:id="rId24"/>
-    <p:sldId id="1009" r:id="rId25"/>
-    <p:sldId id="1010" r:id="rId26"/>
-    <p:sldId id="1011" r:id="rId27"/>
-    <p:sldId id="1021" r:id="rId28"/>
-    <p:sldId id="998" r:id="rId29"/>
+    <p:sldId id="780" r:id="rId5"/>
+    <p:sldId id="1001" r:id="rId6"/>
+    <p:sldId id="1027" r:id="rId7"/>
+    <p:sldId id="789" r:id="rId8"/>
+    <p:sldId id="1031" r:id="rId9"/>
+    <p:sldId id="1029" r:id="rId10"/>
+    <p:sldId id="787" r:id="rId11"/>
+    <p:sldId id="782" r:id="rId12"/>
+    <p:sldId id="781" r:id="rId13"/>
+    <p:sldId id="788" r:id="rId14"/>
+    <p:sldId id="1030" r:id="rId15"/>
+    <p:sldId id="641" r:id="rId16"/>
+    <p:sldId id="1000" r:id="rId17"/>
+    <p:sldId id="994" r:id="rId18"/>
+    <p:sldId id="1006" r:id="rId19"/>
+    <p:sldId id="1007" r:id="rId20"/>
+    <p:sldId id="1008" r:id="rId21"/>
+    <p:sldId id="997" r:id="rId22"/>
+    <p:sldId id="1010" r:id="rId23"/>
+    <p:sldId id="1011" r:id="rId24"/>
+    <p:sldId id="1021" r:id="rId25"/>
+    <p:sldId id="998" r:id="rId26"/>
   </p:sldIdLst>
   <p:sldSz cx="9144000" cy="6858000" type="letter"/>
   <p:notesSz cx="9601200" cy="7315200"/>
@@ -892,7 +889,7 @@
               <a:pPr>
                 <a:defRPr/>
               </a:pPr>
-              <a:t>22</a:t>
+              <a:t>12</a:t>
             </a:fld>
             <a:endParaRPr lang="en-US"/>
           </a:p>
@@ -901,7 +898,7 @@
     </p:spTree>
     <p:extLst>
       <p:ext uri="{BB962C8B-B14F-4D97-AF65-F5344CB8AC3E}">
-        <p14:creationId xmlns:p14="http://schemas.microsoft.com/office/powerpoint/2010/main" val="4180232172"/>
+        <p14:creationId xmlns:p14="http://schemas.microsoft.com/office/powerpoint/2010/main" val="1716474878"/>
       </p:ext>
     </p:extLst>
   </p:cSld>
@@ -1007,7 +1004,7 @@
               <a:pPr>
                 <a:defRPr/>
               </a:pPr>
-              <a:t>24</a:t>
+              <a:t>20</a:t>
             </a:fld>
             <a:endParaRPr lang="en-US"/>
           </a:p>
@@ -1016,7 +1013,7 @@
     </p:spTree>
     <p:extLst>
       <p:ext uri="{BB962C8B-B14F-4D97-AF65-F5344CB8AC3E}">
-        <p14:creationId xmlns:p14="http://schemas.microsoft.com/office/powerpoint/2010/main" val="4082851617"/>
+        <p14:creationId xmlns:p14="http://schemas.microsoft.com/office/powerpoint/2010/main" val="4180232172"/>
       </p:ext>
     </p:extLst>
   </p:cSld>
@@ -1122,7 +1119,7 @@
               <a:pPr>
                 <a:defRPr/>
               </a:pPr>
-              <a:t>25</a:t>
+              <a:t>22</a:t>
             </a:fld>
             <a:endParaRPr lang="en-US"/>
           </a:p>
@@ -1237,7 +1234,7 @@
               <a:pPr>
                 <a:defRPr/>
               </a:pPr>
-              <a:t>26</a:t>
+              <a:t>23</a:t>
             </a:fld>
             <a:endParaRPr lang="en-US"/>
           </a:p>
@@ -1352,7 +1349,7 @@
               <a:pPr>
                 <a:defRPr/>
               </a:pPr>
-              <a:t>27</a:t>
+              <a:t>24</a:t>
             </a:fld>
             <a:endParaRPr lang="en-US"/>
           </a:p>
@@ -3074,140 +3071,6 @@
       </p:grpSpPr>
       <p:sp>
         <p:nvSpPr>
-          <p:cNvPr id="6" name="Footer Placeholder 5">
-            <a:extLst>
-              <a:ext uri="{FF2B5EF4-FFF2-40B4-BE49-F238E27FC236}">
-                <a16:creationId xmlns:a16="http://schemas.microsoft.com/office/drawing/2014/main" id="{B1AA5662-D508-36C9-59CC-F694F0E27019}"/>
-              </a:ext>
-            </a:extLst>
-          </p:cNvPr>
-          <p:cNvSpPr>
-            <a:spLocks noGrp="1"/>
-          </p:cNvSpPr>
-          <p:nvPr>
-            <p:ph type="ftr" sz="quarter" idx="10"/>
-          </p:nvPr>
-        </p:nvSpPr>
-        <p:spPr/>
-        <p:txBody>
-          <a:bodyPr/>
-          <a:lstStyle/>
-          <a:p>
-            <a:pPr>
-              <a:defRPr/>
-            </a:pPr>
-            <a:r>
-              <a:rPr lang="en-US"/>
-              <a:t>FSU: Machine Learning in Physics</a:t>
-            </a:r>
-            <a:endParaRPr lang="en-US" dirty="0"/>
-          </a:p>
-        </p:txBody>
-      </p:sp>
-      <p:sp>
-        <p:nvSpPr>
-          <p:cNvPr id="5" name="Slide Number Placeholder 4">
-            <a:extLst>
-              <a:ext uri="{FF2B5EF4-FFF2-40B4-BE49-F238E27FC236}">
-                <a16:creationId xmlns:a16="http://schemas.microsoft.com/office/drawing/2014/main" id="{2F4A2233-EFBF-F4A6-CB98-DD45B6059F97}"/>
-              </a:ext>
-            </a:extLst>
-          </p:cNvPr>
-          <p:cNvSpPr>
-            <a:spLocks noGrp="1"/>
-          </p:cNvSpPr>
-          <p:nvPr>
-            <p:ph type="sldNum" sz="quarter" idx="11"/>
-          </p:nvPr>
-        </p:nvSpPr>
-        <p:spPr/>
-        <p:txBody>
-          <a:bodyPr/>
-          <a:lstStyle/>
-          <a:p>
-            <a:pPr>
-              <a:defRPr/>
-            </a:pPr>
-            <a:fld id="{84EEE8D3-405F-8246-8864-9DF28E2D288A}" type="slidenum">
-              <a:rPr lang="en-US" smtClean="0"/>
-              <a:pPr>
-                <a:defRPr/>
-              </a:pPr>
-              <a:t>10</a:t>
-            </a:fld>
-            <a:endParaRPr lang="en-US"/>
-          </a:p>
-        </p:txBody>
-      </p:sp>
-      <p:pic>
-        <p:nvPicPr>
-          <p:cNvPr id="11" name="Picture 10" descr="A screenshot of a phone&#10;&#10;AI-generated content may be incorrect.">
-            <a:extLst>
-              <a:ext uri="{FF2B5EF4-FFF2-40B4-BE49-F238E27FC236}">
-                <a16:creationId xmlns:a16="http://schemas.microsoft.com/office/drawing/2014/main" id="{1ADDAD57-19E1-16EF-9E91-B6F05D266C15}"/>
-              </a:ext>
-            </a:extLst>
-          </p:cNvPr>
-          <p:cNvPicPr>
-            <a:picLocks noChangeAspect="1"/>
-          </p:cNvPicPr>
-          <p:nvPr/>
-        </p:nvPicPr>
-        <p:blipFill>
-          <a:blip r:embed="rId2"/>
-          <a:stretch>
-            <a:fillRect/>
-          </a:stretch>
-        </p:blipFill>
-        <p:spPr>
-          <a:xfrm>
-            <a:off x="2213899" y="762000"/>
-            <a:ext cx="4716201" cy="4838700"/>
-          </a:xfrm>
-          <a:prstGeom prst="rect">
-            <a:avLst/>
-          </a:prstGeom>
-          <a:effectLst>
-            <a:outerShdw blurRad="50800" dist="38100" dir="2700000" algn="tl" rotWithShape="0">
-              <a:prstClr val="black">
-                <a:alpha val="40000"/>
-              </a:prstClr>
-            </a:outerShdw>
-          </a:effectLst>
-        </p:spPr>
-      </p:pic>
-    </p:spTree>
-    <p:extLst>
-      <p:ext uri="{BB962C8B-B14F-4D97-AF65-F5344CB8AC3E}">
-        <p14:creationId xmlns:p14="http://schemas.microsoft.com/office/powerpoint/2010/main" val="2359021910"/>
-      </p:ext>
-    </p:extLst>
-  </p:cSld>
-  <p:clrMapOvr>
-    <a:masterClrMapping/>
-  </p:clrMapOvr>
-</p:sld>
-</file>
-
-<file path=ppt/slides/slide11.xml><?xml version="1.0" encoding="utf-8"?>
-<p:sld xmlns:a="http://schemas.openxmlformats.org/drawingml/2006/main" xmlns:r="http://schemas.openxmlformats.org/officeDocument/2006/relationships" xmlns:p="http://schemas.openxmlformats.org/presentationml/2006/main">
-  <p:cSld>
-    <p:spTree>
-      <p:nvGrpSpPr>
-        <p:cNvPr id="1" name=""/>
-        <p:cNvGrpSpPr/>
-        <p:nvPr/>
-      </p:nvGrpSpPr>
-      <p:grpSpPr>
-        <a:xfrm>
-          <a:off x="0" y="0"/>
-          <a:ext cx="0" cy="0"/>
-          <a:chOff x="0" y="0"/>
-          <a:chExt cx="0" cy="0"/>
-        </a:xfrm>
-      </p:grpSpPr>
-      <p:sp>
-        <p:nvSpPr>
           <p:cNvPr id="3" name="Title 2">
             <a:extLst>
               <a:ext uri="{FF2B5EF4-FFF2-40B4-BE49-F238E27FC236}">
@@ -3263,7 +3126,7 @@
               <a:pPr>
                 <a:defRPr/>
               </a:pPr>
-              <a:t>11</a:t>
+              <a:t>10</a:t>
             </a:fld>
             <a:endParaRPr lang="en-US"/>
           </a:p>
@@ -3487,7 +3350,7 @@
 </p:sld>
 </file>
 
-<file path=ppt/slides/slide12.xml><?xml version="1.0" encoding="utf-8"?>
+<file path=ppt/slides/slide11.xml><?xml version="1.0" encoding="utf-8"?>
 <p:sld xmlns:a="http://schemas.openxmlformats.org/drawingml/2006/main" xmlns:r="http://schemas.openxmlformats.org/officeDocument/2006/relationships" xmlns:p="http://schemas.openxmlformats.org/presentationml/2006/main">
   <p:cSld>
     <p:spTree>
@@ -3986,7 +3849,7 @@
               <a:pPr>
                 <a:defRPr/>
               </a:pPr>
-              <a:t>12</a:t>
+              <a:t>11</a:t>
             </a:fld>
             <a:endParaRPr lang="en-US"/>
           </a:p>
@@ -4323,7 +4186,7 @@
 </p:sld>
 </file>
 
-<file path=ppt/slides/slide13.xml><?xml version="1.0" encoding="utf-8"?>
+<file path=ppt/slides/slide12.xml><?xml version="1.0" encoding="utf-8"?>
 <p:sld xmlns:a="http://schemas.openxmlformats.org/drawingml/2006/main" xmlns:r="http://schemas.openxmlformats.org/officeDocument/2006/relationships" xmlns:p="http://schemas.openxmlformats.org/presentationml/2006/main">
   <p:cSld>
     <p:spTree>
@@ -4582,7 +4445,7 @@
             </p:nvSpPr>
             <p:spPr>
               <a:blipFill>
-                <a:blip r:embed="rId2"/>
+                <a:blip r:embed="rId3"/>
                 <a:stretch>
                   <a:fillRect l="-3322" t="-1579" r="-3987" b="-7895"/>
                 </a:stretch>
@@ -4863,7 +4726,7 @@
                 <a:ext cx="4013200" cy="4819650"/>
               </a:xfrm>
               <a:blipFill>
-                <a:blip r:embed="rId3"/>
+                <a:blip r:embed="rId4"/>
                 <a:stretch>
                   <a:fillRect l="-3165" t="-1579" r="-949" b="-5000"/>
                 </a:stretch>
@@ -4944,7 +4807,7 @@
               <a:pPr>
                 <a:defRPr/>
               </a:pPr>
-              <a:t>13</a:t>
+              <a:t>12</a:t>
             </a:fld>
             <a:endParaRPr lang="en-US"/>
           </a:p>
@@ -5238,7 +5101,7 @@
 </p:sld>
 </file>
 
-<file path=ppt/slides/slide14.xml><?xml version="1.0" encoding="utf-8"?>
+<file path=ppt/slides/slide13.xml><?xml version="1.0" encoding="utf-8"?>
 <p:sld xmlns:a="http://schemas.openxmlformats.org/drawingml/2006/main" xmlns:r="http://schemas.openxmlformats.org/officeDocument/2006/relationships" xmlns:p="http://schemas.openxmlformats.org/presentationml/2006/main">
   <p:cSld>
     <p:spTree>
@@ -5312,7 +5175,7 @@
               <a:pPr>
                 <a:defRPr/>
               </a:pPr>
-              <a:t>14</a:t>
+              <a:t>13</a:t>
             </a:fld>
             <a:endParaRPr lang="en-US"/>
           </a:p>
@@ -5586,12 +5449,18 @@
 </p:sld>
 </file>
 
-<file path=ppt/slides/slide15.xml><?xml version="1.0" encoding="utf-8"?>
+<file path=ppt/slides/slide14.xml><?xml version="1.0" encoding="utf-8"?>
 <p:sld xmlns:a="http://schemas.openxmlformats.org/drawingml/2006/main" xmlns:r="http://schemas.openxmlformats.org/officeDocument/2006/relationships" xmlns:p="http://schemas.openxmlformats.org/presentationml/2006/main">
   <p:cSld>
     <p:spTree>
       <p:nvGrpSpPr>
-        <p:cNvPr id="1" name=""/>
+        <p:cNvPr id="1" name="">
+          <a:extLst>
+            <a:ext uri="{FF2B5EF4-FFF2-40B4-BE49-F238E27FC236}">
+              <a16:creationId xmlns:a16="http://schemas.microsoft.com/office/drawing/2014/main" id="{E908BAEF-41EE-270A-F78C-52A4F977C37F}"/>
+            </a:ext>
+          </a:extLst>
+        </p:cNvPr>
         <p:cNvGrpSpPr/>
         <p:nvPr/>
       </p:nvGrpSpPr>
@@ -5608,7 +5477,7 @@
           <p:cNvPr id="2" name="Title 1">
             <a:extLst>
               <a:ext uri="{FF2B5EF4-FFF2-40B4-BE49-F238E27FC236}">
-                <a16:creationId xmlns:a16="http://schemas.microsoft.com/office/drawing/2014/main" id="{C14C336A-B1E2-257B-F246-56AC338F0D8D}"/>
+                <a16:creationId xmlns:a16="http://schemas.microsoft.com/office/drawing/2014/main" id="{B5784A1D-4E7C-0483-5A15-CB991F4E3F1F}"/>
               </a:ext>
             </a:extLst>
           </p:cNvPr>
@@ -5631,14 +5500,14 @@
           </a:p>
         </p:txBody>
       </p:sp>
-      <mc:AlternateContent xmlns:mc="http://schemas.openxmlformats.org/markup-compatibility/2006" xmlns:a14="http://schemas.microsoft.com/office/drawing/2010/main">
-        <mc:Choice Requires="a14">
+      <mc:AlternateContent xmlns:mc="http://schemas.openxmlformats.org/markup-compatibility/2006">
+        <mc:Choice xmlns:a14="http://schemas.microsoft.com/office/drawing/2010/main" Requires="a14">
           <p:sp>
             <p:nvSpPr>
               <p:cNvPr id="5" name="Content Placeholder 4">
                 <a:extLst>
                   <a:ext uri="{FF2B5EF4-FFF2-40B4-BE49-F238E27FC236}">
-                    <a16:creationId xmlns:a16="http://schemas.microsoft.com/office/drawing/2014/main" id="{11EC73F8-CE15-F37F-36B8-8FB0C783AC87}"/>
+                    <a16:creationId xmlns:a16="http://schemas.microsoft.com/office/drawing/2014/main" id="{F17B20DC-CB9D-AD75-DB41-C253E24669E5}"/>
                   </a:ext>
                 </a:extLst>
               </p:cNvPr>
@@ -5672,7 +5541,7 @@
                 </a:r>
                 <a:r>
                   <a:rPr lang="en-US" dirty="0"/>
-                  <a:t>is the science and art of fitting models to data using functions formed by </a:t>
+                  <a:t>is the science and art of fitting models to data using functions formed through </a:t>
                 </a:r>
                 <a:r>
                   <a:rPr lang="en-US" i="1" dirty="0">
@@ -5680,11 +5549,11 @@
                       <a:srgbClr val="0033CC"/>
                     </a:solidFill>
                   </a:rPr>
-                  <a:t>composing</a:t>
+                  <a:t>composition</a:t>
                 </a:r>
                 <a:r>
                   <a:rPr lang="en-US" dirty="0"/>
-                  <a:t> nonlinear parameterized functions, </a:t>
+                  <a:t>:</a:t>
                 </a:r>
               </a:p>
               <a:p>
@@ -5699,10 +5568,7 @@
                 </a:pPr>
                 <a14:m>
                   <m:oMathPara xmlns:m="http://schemas.openxmlformats.org/officeDocument/2006/math">
-                    <m:oMathParaPr>
-                      <m:jc m:val="centerGroup"/>
-                    </m:oMathParaPr>
-                    <m:oMath xmlns:m="http://schemas.openxmlformats.org/officeDocument/2006/math">
+                    <m:oMath>
                       <m:r>
                         <a:rPr lang="en-US" b="0" i="1" smtClean="0">
                           <a:latin typeface="Cambria Math" panose="02040503050406030204" pitchFamily="18" charset="0"/>
@@ -5927,7 +5793,7 @@
                     <m:d>
                       <m:dPr>
                         <m:ctrlPr>
-                          <a:rPr lang="en-US" b="0" i="1" smtClean="0">
+                          <a:rPr lang="en-US" i="1">
                             <a:latin typeface="Cambria Math" panose="02040503050406030204" pitchFamily="18" charset="0"/>
                             <a:ea typeface="Cambria Math" panose="02040503050406030204" pitchFamily="18" charset="0"/>
                           </a:rPr>
@@ -6023,6 +5889,12 @@
                 <a:pPr marL="0" indent="0">
                   <a:buNone/>
                 </a:pPr>
+                <a:endParaRPr lang="en-US" dirty="0"/>
+              </a:p>
+              <a:p>
+                <a:pPr marL="0" indent="0">
+                  <a:buNone/>
+                </a:pPr>
                 <a:r>
                   <a:rPr lang="en-US" dirty="0"/>
                   <a:t>Each of these functions is referred to as a </a:t>
@@ -6037,7 +5909,7 @@
                 </a:r>
                 <a:r>
                   <a:rPr lang="en-US" dirty="0"/>
-                  <a:t>. The ChatGPT3 function has </a:t>
+                  <a:t>. The ChatGPT3 LLM has </a:t>
                 </a:r>
                 <a:r>
                   <a:rPr lang="en-US" b="1" dirty="0"/>
@@ -6065,13 +5937,13 @@
             </p:txBody>
           </p:sp>
         </mc:Choice>
-        <mc:Fallback xmlns="">
+        <mc:Fallback>
           <p:sp>
             <p:nvSpPr>
               <p:cNvPr id="5" name="Content Placeholder 4">
                 <a:extLst>
                   <a:ext uri="{FF2B5EF4-FFF2-40B4-BE49-F238E27FC236}">
-                    <a16:creationId xmlns:a16="http://schemas.microsoft.com/office/drawing/2014/main" id="{11EC73F8-CE15-F37F-36B8-8FB0C783AC87}"/>
+                    <a16:creationId xmlns:a16="http://schemas.microsoft.com/office/drawing/2014/main" id="{F17B20DC-CB9D-AD75-DB41-C253E24669E5}"/>
                   </a:ext>
                 </a:extLst>
               </p:cNvPr>
@@ -6090,7 +5962,7 @@
               <a:blipFill>
                 <a:blip r:embed="rId2"/>
                 <a:stretch>
-                  <a:fillRect l="-1288" t="-1316" r="-1288"/>
+                  <a:fillRect l="-1288" t="-1316" b="-263"/>
                 </a:stretch>
               </a:blipFill>
             </p:spPr>
@@ -6114,7 +5986,7 @@
           <p:cNvPr id="21" name="Group 20">
             <a:extLst>
               <a:ext uri="{FF2B5EF4-FFF2-40B4-BE49-F238E27FC236}">
-                <a16:creationId xmlns:a16="http://schemas.microsoft.com/office/drawing/2014/main" id="{3553216A-4744-50C2-9D25-D5C25F852E25}"/>
+                <a16:creationId xmlns:a16="http://schemas.microsoft.com/office/drawing/2014/main" id="{E9EC598B-8324-5820-ED96-36B8FA083BAB}"/>
               </a:ext>
             </a:extLst>
           </p:cNvPr>
@@ -6134,7 +6006,7 @@
             <p:cNvPr id="6" name="Group 5">
               <a:extLst>
                 <a:ext uri="{FF2B5EF4-FFF2-40B4-BE49-F238E27FC236}">
-                  <a16:creationId xmlns:a16="http://schemas.microsoft.com/office/drawing/2014/main" id="{B5E5423B-A942-51E2-0CD9-F8BD0E1988E4}"/>
+                  <a16:creationId xmlns:a16="http://schemas.microsoft.com/office/drawing/2014/main" id="{EE6C74E4-14F9-A1DE-0506-C5613D45D0A0}"/>
                 </a:ext>
               </a:extLst>
             </p:cNvPr>
@@ -6154,7 +6026,7 @@
               <p:cNvPr id="7" name="Direct Access Storage 6">
                 <a:extLst>
                   <a:ext uri="{FF2B5EF4-FFF2-40B4-BE49-F238E27FC236}">
-                    <a16:creationId xmlns:a16="http://schemas.microsoft.com/office/drawing/2014/main" id="{085D08B9-9BE3-3444-E848-AE2FE517BA25}"/>
+                    <a16:creationId xmlns:a16="http://schemas.microsoft.com/office/drawing/2014/main" id="{15766E36-AE65-F473-0B69-C6198FA14EEF}"/>
                   </a:ext>
                 </a:extLst>
               </p:cNvPr>
@@ -6228,7 +6100,7 @@
               <p:cNvPr id="8" name="Direct Access Storage 7">
                 <a:extLst>
                   <a:ext uri="{FF2B5EF4-FFF2-40B4-BE49-F238E27FC236}">
-                    <a16:creationId xmlns:a16="http://schemas.microsoft.com/office/drawing/2014/main" id="{FCA2FFD6-871A-7C69-BD06-6B675F2F8014}"/>
+                    <a16:creationId xmlns:a16="http://schemas.microsoft.com/office/drawing/2014/main" id="{B005D003-3C67-6673-E8F4-4C1715DDD6D4}"/>
                   </a:ext>
                 </a:extLst>
               </p:cNvPr>
@@ -6302,7 +6174,7 @@
               <p:cNvPr id="9" name="Direct Access Storage 8">
                 <a:extLst>
                   <a:ext uri="{FF2B5EF4-FFF2-40B4-BE49-F238E27FC236}">
-                    <a16:creationId xmlns:a16="http://schemas.microsoft.com/office/drawing/2014/main" id="{ECAC5E9E-A435-BABA-0328-003148E3A4F9}"/>
+                    <a16:creationId xmlns:a16="http://schemas.microsoft.com/office/drawing/2014/main" id="{A8F266F7-E795-7FF8-6A7D-9F09B463A0AB}"/>
                   </a:ext>
                 </a:extLst>
               </p:cNvPr>
@@ -6376,7 +6248,7 @@
               <p:cNvPr id="10" name="Right Arrow 9">
                 <a:extLst>
                   <a:ext uri="{FF2B5EF4-FFF2-40B4-BE49-F238E27FC236}">
-                    <a16:creationId xmlns:a16="http://schemas.microsoft.com/office/drawing/2014/main" id="{9EB959BF-1063-1B3D-7B99-42A31FCE1DF5}"/>
+                    <a16:creationId xmlns:a16="http://schemas.microsoft.com/office/drawing/2014/main" id="{A0CCC2DE-AB7B-06E8-952F-F21B6C562F90}"/>
                   </a:ext>
                 </a:extLst>
               </p:cNvPr>
@@ -6450,7 +6322,7 @@
               <p:cNvPr id="11" name="Right Arrow 10">
                 <a:extLst>
                   <a:ext uri="{FF2B5EF4-FFF2-40B4-BE49-F238E27FC236}">
-                    <a16:creationId xmlns:a16="http://schemas.microsoft.com/office/drawing/2014/main" id="{FDD4BEEC-B386-B188-2999-F402A9DE713C}"/>
+                    <a16:creationId xmlns:a16="http://schemas.microsoft.com/office/drawing/2014/main" id="{9A302C5B-2EBB-1F43-440C-CF68188AD4CE}"/>
                   </a:ext>
                 </a:extLst>
               </p:cNvPr>
@@ -6524,7 +6396,7 @@
               <p:cNvPr id="12" name="Right Arrow 11">
                 <a:extLst>
                   <a:ext uri="{FF2B5EF4-FFF2-40B4-BE49-F238E27FC236}">
-                    <a16:creationId xmlns:a16="http://schemas.microsoft.com/office/drawing/2014/main" id="{D35A1307-79E3-B70D-6A6A-0DF9935846F5}"/>
+                    <a16:creationId xmlns:a16="http://schemas.microsoft.com/office/drawing/2014/main" id="{66F2C753-4DDA-FC8B-B96C-3A6BEDDF5716}"/>
                   </a:ext>
                 </a:extLst>
               </p:cNvPr>
@@ -6598,7 +6470,7 @@
               <p:cNvPr id="13" name="TextBox 12">
                 <a:extLst>
                   <a:ext uri="{FF2B5EF4-FFF2-40B4-BE49-F238E27FC236}">
-                    <a16:creationId xmlns:a16="http://schemas.microsoft.com/office/drawing/2014/main" id="{85F384BD-A270-5143-A7BC-C1B827F3356A}"/>
+                    <a16:creationId xmlns:a16="http://schemas.microsoft.com/office/drawing/2014/main" id="{706677D2-BE8E-FF7A-15B5-9276F9025EFB}"/>
                   </a:ext>
                 </a:extLst>
               </p:cNvPr>
@@ -6629,14 +6501,14 @@
             </p:txBody>
           </p:sp>
         </p:grpSp>
-        <mc:AlternateContent xmlns:mc="http://schemas.openxmlformats.org/markup-compatibility/2006" xmlns:a14="http://schemas.microsoft.com/office/drawing/2010/main">
-          <mc:Choice Requires="a14">
+        <mc:AlternateContent xmlns:mc="http://schemas.openxmlformats.org/markup-compatibility/2006">
+          <mc:Choice xmlns:a14="http://schemas.microsoft.com/office/drawing/2010/main" Requires="a14">
             <p:sp>
               <p:nvSpPr>
                 <p:cNvPr id="14" name="TextBox 13">
                   <a:extLst>
                     <a:ext uri="{FF2B5EF4-FFF2-40B4-BE49-F238E27FC236}">
-                      <a16:creationId xmlns:a16="http://schemas.microsoft.com/office/drawing/2014/main" id="{53191A2A-A00C-2C5F-752E-0DAD4BA7399E}"/>
+                      <a16:creationId xmlns:a16="http://schemas.microsoft.com/office/drawing/2014/main" id="{9CD2D12A-4EAD-7098-BC83-1F519F189FE1}"/>
                     </a:ext>
                   </a:extLst>
                 </p:cNvPr>
@@ -6662,10 +6534,7 @@
                   <a:pPr/>
                   <a14:m>
                     <m:oMathPara xmlns:m="http://schemas.openxmlformats.org/officeDocument/2006/math">
-                      <m:oMathParaPr>
-                        <m:jc m:val="centerGroup"/>
-                      </m:oMathParaPr>
-                      <m:oMath xmlns:m="http://schemas.openxmlformats.org/officeDocument/2006/math">
+                      <m:oMath>
                         <m:r>
                           <a:rPr lang="en-US" sz="3200" b="0" i="1" smtClean="0">
                             <a:latin typeface="Cambria Math" panose="02040503050406030204" pitchFamily="18" charset="0"/>
@@ -6698,13 +6567,13 @@
               </p:txBody>
             </p:sp>
           </mc:Choice>
-          <mc:Fallback xmlns="">
+          <mc:Fallback>
             <p:sp>
               <p:nvSpPr>
                 <p:cNvPr id="14" name="TextBox 13">
                   <a:extLst>
                     <a:ext uri="{FF2B5EF4-FFF2-40B4-BE49-F238E27FC236}">
-                      <a16:creationId xmlns:a16="http://schemas.microsoft.com/office/drawing/2014/main" id="{53191A2A-A00C-2C5F-752E-0DAD4BA7399E}"/>
+                      <a16:creationId xmlns:a16="http://schemas.microsoft.com/office/drawing/2014/main" id="{9CD2D12A-4EAD-7098-BC83-1F519F189FE1}"/>
                     </a:ext>
                   </a:extLst>
                 </p:cNvPr>
@@ -6743,14 +6612,14 @@
             </p:sp>
           </mc:Fallback>
         </mc:AlternateContent>
-        <mc:AlternateContent xmlns:mc="http://schemas.openxmlformats.org/markup-compatibility/2006" xmlns:a14="http://schemas.microsoft.com/office/drawing/2010/main">
-          <mc:Choice Requires="a14">
+        <mc:AlternateContent xmlns:mc="http://schemas.openxmlformats.org/markup-compatibility/2006">
+          <mc:Choice xmlns:a14="http://schemas.microsoft.com/office/drawing/2010/main" Requires="a14">
             <p:sp>
               <p:nvSpPr>
                 <p:cNvPr id="15" name="TextBox 14">
                   <a:extLst>
                     <a:ext uri="{FF2B5EF4-FFF2-40B4-BE49-F238E27FC236}">
-                      <a16:creationId xmlns:a16="http://schemas.microsoft.com/office/drawing/2014/main" id="{5AB3FB81-530F-6136-1D04-E8FC240BFADF}"/>
+                      <a16:creationId xmlns:a16="http://schemas.microsoft.com/office/drawing/2014/main" id="{1009765F-38AD-2B1B-14EE-DA3E365B37D5}"/>
                     </a:ext>
                   </a:extLst>
                 </p:cNvPr>
@@ -6776,10 +6645,7 @@
                   <a:pPr/>
                   <a14:m>
                     <m:oMathPara xmlns:m="http://schemas.openxmlformats.org/officeDocument/2006/math">
-                      <m:oMathParaPr>
-                        <m:jc m:val="centerGroup"/>
-                      </m:oMathParaPr>
-                      <m:oMath xmlns:m="http://schemas.openxmlformats.org/officeDocument/2006/math">
+                      <m:oMath>
                         <m:r>
                           <a:rPr lang="en-US" sz="3200" b="0" i="1" smtClean="0">
                             <a:latin typeface="Cambria Math" panose="02040503050406030204" pitchFamily="18" charset="0"/>
@@ -6794,13 +6660,13 @@
               </p:txBody>
             </p:sp>
           </mc:Choice>
-          <mc:Fallback xmlns="">
+          <mc:Fallback>
             <p:sp>
               <p:nvSpPr>
                 <p:cNvPr id="15" name="TextBox 14">
                   <a:extLst>
                     <a:ext uri="{FF2B5EF4-FFF2-40B4-BE49-F238E27FC236}">
-                      <a16:creationId xmlns:a16="http://schemas.microsoft.com/office/drawing/2014/main" id="{5AB3FB81-530F-6136-1D04-E8FC240BFADF}"/>
+                      <a16:creationId xmlns:a16="http://schemas.microsoft.com/office/drawing/2014/main" id="{1009765F-38AD-2B1B-14EE-DA3E365B37D5}"/>
                     </a:ext>
                   </a:extLst>
                 </p:cNvPr>
@@ -6844,7 +6710,7 @@
             <p:cNvPr id="16" name="Right Arrow 15">
               <a:extLst>
                 <a:ext uri="{FF2B5EF4-FFF2-40B4-BE49-F238E27FC236}">
-                  <a16:creationId xmlns:a16="http://schemas.microsoft.com/office/drawing/2014/main" id="{3DCB90A2-B421-7DA1-032E-45126FCB7BDB}"/>
+                  <a16:creationId xmlns:a16="http://schemas.microsoft.com/office/drawing/2014/main" id="{61EE9FF1-FAA2-BFFB-2C27-9AC25669A248}"/>
                 </a:ext>
               </a:extLst>
             </p:cNvPr>
@@ -6913,14 +6779,14 @@
             </a:p>
           </p:txBody>
         </p:sp>
-        <mc:AlternateContent xmlns:mc="http://schemas.openxmlformats.org/markup-compatibility/2006" xmlns:a14="http://schemas.microsoft.com/office/drawing/2010/main">
-          <mc:Choice Requires="a14">
+        <mc:AlternateContent xmlns:mc="http://schemas.openxmlformats.org/markup-compatibility/2006">
+          <mc:Choice xmlns:a14="http://schemas.microsoft.com/office/drawing/2010/main" Requires="a14">
             <p:sp>
               <p:nvSpPr>
                 <p:cNvPr id="18" name="TextBox 17">
                   <a:extLst>
                     <a:ext uri="{FF2B5EF4-FFF2-40B4-BE49-F238E27FC236}">
-                      <a16:creationId xmlns:a16="http://schemas.microsoft.com/office/drawing/2014/main" id="{1C0B6C29-0336-F27D-66FF-60E364A5A440}"/>
+                      <a16:creationId xmlns:a16="http://schemas.microsoft.com/office/drawing/2014/main" id="{59BF0495-C1B1-B58D-E9E5-62C231B4AEC4}"/>
                     </a:ext>
                   </a:extLst>
                 </p:cNvPr>
@@ -6946,10 +6812,7 @@
                   <a:pPr/>
                   <a14:m>
                     <m:oMathPara xmlns:m="http://schemas.openxmlformats.org/officeDocument/2006/math">
-                      <m:oMathParaPr>
-                        <m:jc m:val="centerGroup"/>
-                      </m:oMathParaPr>
-                      <m:oMath xmlns:m="http://schemas.openxmlformats.org/officeDocument/2006/math">
+                      <m:oMath>
                         <m:sSub>
                           <m:sSubPr>
                             <m:ctrlPr>
@@ -6983,13 +6846,13 @@
               </p:txBody>
             </p:sp>
           </mc:Choice>
-          <mc:Fallback xmlns="">
+          <mc:Fallback>
             <p:sp>
               <p:nvSpPr>
                 <p:cNvPr id="18" name="TextBox 17">
                   <a:extLst>
                     <a:ext uri="{FF2B5EF4-FFF2-40B4-BE49-F238E27FC236}">
-                      <a16:creationId xmlns:a16="http://schemas.microsoft.com/office/drawing/2014/main" id="{1C0B6C29-0336-F27D-66FF-60E364A5A440}"/>
+                      <a16:creationId xmlns:a16="http://schemas.microsoft.com/office/drawing/2014/main" id="{59BF0495-C1B1-B58D-E9E5-62C231B4AEC4}"/>
                     </a:ext>
                   </a:extLst>
                 </p:cNvPr>
@@ -7028,14 +6891,14 @@
             </p:sp>
           </mc:Fallback>
         </mc:AlternateContent>
-        <mc:AlternateContent xmlns:mc="http://schemas.openxmlformats.org/markup-compatibility/2006" xmlns:a14="http://schemas.microsoft.com/office/drawing/2010/main">
-          <mc:Choice Requires="a14">
+        <mc:AlternateContent xmlns:mc="http://schemas.openxmlformats.org/markup-compatibility/2006">
+          <mc:Choice xmlns:a14="http://schemas.microsoft.com/office/drawing/2010/main" Requires="a14">
             <p:sp>
               <p:nvSpPr>
                 <p:cNvPr id="19" name="TextBox 18">
                   <a:extLst>
                     <a:ext uri="{FF2B5EF4-FFF2-40B4-BE49-F238E27FC236}">
-                      <a16:creationId xmlns:a16="http://schemas.microsoft.com/office/drawing/2014/main" id="{F64758F1-B19A-AD64-D36A-8D2B8B0FD3D5}"/>
+                      <a16:creationId xmlns:a16="http://schemas.microsoft.com/office/drawing/2014/main" id="{38617D38-177D-7628-FF83-7F151C108FA6}"/>
                     </a:ext>
                   </a:extLst>
                 </p:cNvPr>
@@ -7061,10 +6924,7 @@
                   <a:pPr/>
                   <a14:m>
                     <m:oMathPara xmlns:m="http://schemas.openxmlformats.org/officeDocument/2006/math">
-                      <m:oMathParaPr>
-                        <m:jc m:val="centerGroup"/>
-                      </m:oMathParaPr>
-                      <m:oMath xmlns:m="http://schemas.openxmlformats.org/officeDocument/2006/math">
+                      <m:oMath>
                         <m:sSub>
                           <m:sSubPr>
                             <m:ctrlPr>
@@ -7104,13 +6964,13 @@
               </p:txBody>
             </p:sp>
           </mc:Choice>
-          <mc:Fallback xmlns="">
+          <mc:Fallback>
             <p:sp>
               <p:nvSpPr>
                 <p:cNvPr id="19" name="TextBox 18">
                   <a:extLst>
                     <a:ext uri="{FF2B5EF4-FFF2-40B4-BE49-F238E27FC236}">
-                      <a16:creationId xmlns:a16="http://schemas.microsoft.com/office/drawing/2014/main" id="{F64758F1-B19A-AD64-D36A-8D2B8B0FD3D5}"/>
+                      <a16:creationId xmlns:a16="http://schemas.microsoft.com/office/drawing/2014/main" id="{38617D38-177D-7628-FF83-7F151C108FA6}"/>
                     </a:ext>
                   </a:extLst>
                 </p:cNvPr>
@@ -7149,14 +7009,14 @@
             </p:sp>
           </mc:Fallback>
         </mc:AlternateContent>
-        <mc:AlternateContent xmlns:mc="http://schemas.openxmlformats.org/markup-compatibility/2006" xmlns:a14="http://schemas.microsoft.com/office/drawing/2010/main">
-          <mc:Choice Requires="a14">
+        <mc:AlternateContent xmlns:mc="http://schemas.openxmlformats.org/markup-compatibility/2006">
+          <mc:Choice xmlns:a14="http://schemas.microsoft.com/office/drawing/2010/main" Requires="a14">
             <p:sp>
               <p:nvSpPr>
                 <p:cNvPr id="20" name="TextBox 19">
                   <a:extLst>
                     <a:ext uri="{FF2B5EF4-FFF2-40B4-BE49-F238E27FC236}">
-                      <a16:creationId xmlns:a16="http://schemas.microsoft.com/office/drawing/2014/main" id="{B2B74BAB-F9C5-A08D-DBE1-C6AE23F13FE3}"/>
+                      <a16:creationId xmlns:a16="http://schemas.microsoft.com/office/drawing/2014/main" id="{70295E9D-2215-CB75-7D62-3274E6E7D70F}"/>
                     </a:ext>
                   </a:extLst>
                 </p:cNvPr>
@@ -7182,10 +7042,7 @@
                   <a:pPr/>
                   <a14:m>
                     <m:oMathPara xmlns:m="http://schemas.openxmlformats.org/officeDocument/2006/math">
-                      <m:oMathParaPr>
-                        <m:jc m:val="centerGroup"/>
-                      </m:oMathParaPr>
-                      <m:oMath xmlns:m="http://schemas.openxmlformats.org/officeDocument/2006/math">
+                      <m:oMath>
                         <m:sSub>
                           <m:sSubPr>
                             <m:ctrlPr>
@@ -7219,13 +7076,13 @@
               </p:txBody>
             </p:sp>
           </mc:Choice>
-          <mc:Fallback xmlns="">
+          <mc:Fallback>
             <p:sp>
               <p:nvSpPr>
                 <p:cNvPr id="20" name="TextBox 19">
                   <a:extLst>
                     <a:ext uri="{FF2B5EF4-FFF2-40B4-BE49-F238E27FC236}">
-                      <a16:creationId xmlns:a16="http://schemas.microsoft.com/office/drawing/2014/main" id="{B2B74BAB-F9C5-A08D-DBE1-C6AE23F13FE3}"/>
+                      <a16:creationId xmlns:a16="http://schemas.microsoft.com/office/drawing/2014/main" id="{70295E9D-2215-CB75-7D62-3274E6E7D70F}"/>
                     </a:ext>
                   </a:extLst>
                 </p:cNvPr>
@@ -7268,7 +7125,7 @@
     </p:spTree>
     <p:extLst>
       <p:ext uri="{BB962C8B-B14F-4D97-AF65-F5344CB8AC3E}">
-        <p14:creationId xmlns:p14="http://schemas.microsoft.com/office/powerpoint/2010/main" val="3397883490"/>
+        <p14:creationId xmlns:p14="http://schemas.microsoft.com/office/powerpoint/2010/main" val="1316534225"/>
       </p:ext>
     </p:extLst>
   </p:cSld>
@@ -7278,2197 +7135,7 @@
 </p:sld>
 </file>
 
-<file path=ppt/slides/slide16.xml><?xml version="1.0" encoding="utf-8"?>
-<p:sld xmlns:a="http://schemas.openxmlformats.org/drawingml/2006/main" xmlns:r="http://schemas.openxmlformats.org/officeDocument/2006/relationships" xmlns:p="http://schemas.openxmlformats.org/presentationml/2006/main">
-  <p:cSld>
-    <p:spTree>
-      <p:nvGrpSpPr>
-        <p:cNvPr id="1" name=""/>
-        <p:cNvGrpSpPr/>
-        <p:nvPr/>
-      </p:nvGrpSpPr>
-      <p:grpSpPr>
-        <a:xfrm>
-          <a:off x="0" y="0"/>
-          <a:ext cx="0" cy="0"/>
-          <a:chOff x="0" y="0"/>
-          <a:chExt cx="0" cy="0"/>
-        </a:xfrm>
-      </p:grpSpPr>
-      <p:sp>
-        <p:nvSpPr>
-          <p:cNvPr id="7" name="Title 6">
-            <a:extLst>
-              <a:ext uri="{FF2B5EF4-FFF2-40B4-BE49-F238E27FC236}">
-                <a16:creationId xmlns:a16="http://schemas.microsoft.com/office/drawing/2014/main" id="{4133C49B-E18E-B592-6DB3-BEB05321E9B0}"/>
-              </a:ext>
-            </a:extLst>
-          </p:cNvPr>
-          <p:cNvSpPr>
-            <a:spLocks noGrp="1"/>
-          </p:cNvSpPr>
-          <p:nvPr>
-            <p:ph type="title"/>
-          </p:nvPr>
-        </p:nvSpPr>
-        <p:spPr/>
-        <p:txBody>
-          <a:bodyPr/>
-          <a:lstStyle/>
-          <a:p>
-            <a:r>
-              <a:rPr lang="en-US" dirty="0"/>
-              <a:t>What is Deep Learning? </a:t>
-            </a:r>
-            <a:r>
-              <a:rPr lang="en-US" dirty="0">
-                <a:solidFill>
-                  <a:schemeClr val="accent1"/>
-                </a:solidFill>
-              </a:rPr>
-              <a:t>Example</a:t>
-            </a:r>
-          </a:p>
-        </p:txBody>
-      </p:sp>
-      <mc:AlternateContent xmlns:mc="http://schemas.openxmlformats.org/markup-compatibility/2006" xmlns:a14="http://schemas.microsoft.com/office/drawing/2010/main">
-        <mc:Choice Requires="a14">
-          <p:sp>
-            <p:nvSpPr>
-              <p:cNvPr id="8" name="Content Placeholder 7">
-                <a:extLst>
-                  <a:ext uri="{FF2B5EF4-FFF2-40B4-BE49-F238E27FC236}">
-                    <a16:creationId xmlns:a16="http://schemas.microsoft.com/office/drawing/2014/main" id="{6B7FD4A5-149A-DC10-64B0-5360009C4E14}"/>
-                  </a:ext>
-                </a:extLst>
-              </p:cNvPr>
-              <p:cNvSpPr>
-                <a:spLocks noGrp="1"/>
-              </p:cNvSpPr>
-              <p:nvPr>
-                <p:ph idx="1"/>
-              </p:nvPr>
-            </p:nvSpPr>
-            <p:spPr>
-              <a:xfrm>
-                <a:off x="711200" y="1295400"/>
-                <a:ext cx="8204200" cy="4819650"/>
-              </a:xfrm>
-            </p:spPr>
-            <p:txBody>
-              <a:bodyPr/>
-              <a:lstStyle/>
-              <a:p>
-                <a:pPr marL="0" marR="0" lvl="0" indent="0" defTabSz="914400" eaLnBrk="1" fontAlgn="auto" latinLnBrk="0" hangingPunct="1">
-                  <a:lnSpc>
-                    <a:spcPct val="100000"/>
-                  </a:lnSpc>
-                  <a:spcBef>
-                    <a:spcPts val="0"/>
-                  </a:spcBef>
-                  <a:spcAft>
-                    <a:spcPts val="0"/>
-                  </a:spcAft>
-                  <a:buClrTx/>
-                  <a:buSzTx/>
-                  <a:buFontTx/>
-                  <a:buNone/>
-                  <a:tabLst/>
-                  <a:defRPr/>
-                </a:pPr>
-                <a:r>
-                  <a:rPr lang="en-US" dirty="0"/>
-                  <a:t>Here is a simple example of a classifier:</a:t>
-                </a:r>
-              </a:p>
-              <a:p>
-                <a:pPr marL="0" marR="0" lvl="0" indent="0" defTabSz="914400" eaLnBrk="1" fontAlgn="auto" latinLnBrk="0" hangingPunct="1">
-                  <a:lnSpc>
-                    <a:spcPct val="100000"/>
-                  </a:lnSpc>
-                  <a:spcBef>
-                    <a:spcPts val="0"/>
-                  </a:spcBef>
-                  <a:spcAft>
-                    <a:spcPts val="0"/>
-                  </a:spcAft>
-                  <a:buClrTx/>
-                  <a:buSzTx/>
-                  <a:buFontTx/>
-                  <a:buNone/>
-                  <a:tabLst/>
-                  <a:defRPr/>
-                </a:pPr>
-                <a14:m>
-                  <m:oMathPara xmlns:m="http://schemas.openxmlformats.org/officeDocument/2006/math">
-                    <m:oMathParaPr>
-                      <m:jc m:val="centerGroup"/>
-                    </m:oMathParaPr>
-                    <m:oMath xmlns:m="http://schemas.openxmlformats.org/officeDocument/2006/math">
-                      <m:r>
-                        <a:rPr lang="en-US" b="0" i="1" smtClean="0">
-                          <a:latin typeface="Cambria Math" panose="02040503050406030204" pitchFamily="18" charset="0"/>
-                        </a:rPr>
-                        <m:t>𝑓</m:t>
-                      </m:r>
-                      <m:r>
-                        <a:rPr lang="en-US" b="0" i="1" smtClean="0">
-                          <a:latin typeface="Cambria Math" panose="02040503050406030204" pitchFamily="18" charset="0"/>
-                        </a:rPr>
-                        <m:t>(</m:t>
-                      </m:r>
-                      <m:r>
-                        <a:rPr lang="en-US" b="0" i="1" smtClean="0">
-                          <a:latin typeface="Cambria Math" panose="02040503050406030204" pitchFamily="18" charset="0"/>
-                        </a:rPr>
-                        <m:t>𝑥</m:t>
-                      </m:r>
-                      <m:r>
-                        <a:rPr lang="en-US" b="0" i="1" smtClean="0">
-                          <a:latin typeface="Cambria Math" panose="02040503050406030204" pitchFamily="18" charset="0"/>
-                        </a:rPr>
-                        <m:t>)=</m:t>
-                      </m:r>
-                      <m:r>
-                        <m:rPr>
-                          <m:nor/>
-                        </m:rPr>
-                        <a:rPr lang="en-US" b="0" i="0" smtClean="0">
-                          <a:solidFill>
-                            <a:srgbClr val="0033CC"/>
-                          </a:solidFill>
-                          <a:latin typeface="Cambria Math" panose="02040503050406030204" pitchFamily="18" charset="0"/>
-                        </a:rPr>
-                        <m:t>softmax</m:t>
-                      </m:r>
-                      <m:d>
-                        <m:dPr>
-                          <m:ctrlPr>
-                            <a:rPr lang="en-US" b="0" i="1" smtClean="0">
-                              <a:latin typeface="Cambria Math" panose="02040503050406030204" pitchFamily="18" charset="0"/>
-                            </a:rPr>
-                          </m:ctrlPr>
-                        </m:dPr>
-                        <m:e>
-                          <m:r>
-                            <m:rPr>
-                              <m:sty m:val="p"/>
-                            </m:rPr>
-                            <a:rPr lang="en-US" b="0" i="0" smtClean="0">
-                              <a:solidFill>
-                                <a:srgbClr val="0033CC"/>
-                              </a:solidFill>
-                              <a:latin typeface="Cambria Math" panose="02040503050406030204" pitchFamily="18" charset="0"/>
-                            </a:rPr>
-                            <m:t>dropout</m:t>
-                          </m:r>
-                          <m:r>
-                            <a:rPr lang="en-US" b="0" i="1" smtClean="0">
-                              <a:solidFill>
-                                <a:srgbClr val="0033CC"/>
-                              </a:solidFill>
-                              <a:latin typeface="Cambria Math" panose="02040503050406030204" pitchFamily="18" charset="0"/>
-                            </a:rPr>
-                            <m:t>(</m:t>
-                          </m:r>
-                          <m:r>
-                            <m:rPr>
-                              <m:sty m:val="p"/>
-                            </m:rPr>
-                            <a:rPr lang="en-US" b="0" i="0" smtClean="0">
-                              <a:solidFill>
-                                <a:srgbClr val="0033CC"/>
-                              </a:solidFill>
-                              <a:latin typeface="Cambria Math" panose="02040503050406030204" pitchFamily="18" charset="0"/>
-                            </a:rPr>
-                            <m:t>linear</m:t>
-                          </m:r>
-                          <m:r>
-                            <a:rPr lang="en-US" b="0" i="0" smtClean="0">
-                              <a:solidFill>
-                                <a:srgbClr val="0033CC"/>
-                              </a:solidFill>
-                              <a:latin typeface="Cambria Math" panose="02040503050406030204" pitchFamily="18" charset="0"/>
-                            </a:rPr>
-                            <m:t>(</m:t>
-                          </m:r>
-                          <m:r>
-                            <m:rPr>
-                              <m:sty m:val="p"/>
-                            </m:rPr>
-                            <a:rPr lang="en-US" b="0" i="0" smtClean="0">
-                              <a:solidFill>
-                                <a:srgbClr val="0033CC"/>
-                              </a:solidFill>
-                              <a:latin typeface="Cambria Math" panose="02040503050406030204" pitchFamily="18" charset="0"/>
-                            </a:rPr>
-                            <m:t>flatten</m:t>
-                          </m:r>
-                          <m:d>
-                            <m:dPr>
-                              <m:ctrlPr>
-                                <a:rPr lang="en-US" b="0" i="1" smtClean="0">
-                                  <a:latin typeface="Cambria Math" panose="02040503050406030204" pitchFamily="18" charset="0"/>
-                                </a:rPr>
-                              </m:ctrlPr>
-                            </m:dPr>
-                            <m:e>
-                              <m:r>
-                                <a:rPr lang="en-US" b="1" i="1" smtClean="0">
-                                  <a:solidFill>
-                                    <a:srgbClr val="0033CC"/>
-                                  </a:solidFill>
-                                  <a:latin typeface="Cambria Math" panose="02040503050406030204" pitchFamily="18" charset="0"/>
-                                </a:rPr>
-                                <m:t>𝒈</m:t>
-                              </m:r>
-                              <m:r>
-                                <a:rPr lang="en-US" b="0" i="1" smtClean="0">
-                                  <a:latin typeface="Cambria Math" panose="02040503050406030204" pitchFamily="18" charset="0"/>
-                                </a:rPr>
-                                <m:t>(</m:t>
-                              </m:r>
-                              <m:r>
-                                <m:rPr>
-                                  <m:nor/>
-                                </m:rPr>
-                                <a:rPr lang="en-US" b="1" i="1" smtClean="0">
-                                  <a:solidFill>
-                                    <a:srgbClr val="C00000"/>
-                                  </a:solidFill>
-                                  <a:latin typeface="Cambria Math" panose="02040503050406030204" pitchFamily="18" charset="0"/>
-                                </a:rPr>
-                                <m:t>c</m:t>
-                              </m:r>
-                              <m:r>
-                                <m:rPr>
-                                  <m:nor/>
-                                </m:rPr>
-                                <a:rPr lang="en-US" b="1" i="1" smtClean="0">
-                                  <a:latin typeface="Cambria Math" panose="02040503050406030204" pitchFamily="18" charset="0"/>
-                                </a:rPr>
-                                <m:t> </m:t>
-                              </m:r>
-                              <m:d>
-                                <m:dPr>
-                                  <m:ctrlPr>
-                                    <a:rPr lang="en-US" b="0" i="1" smtClean="0">
-                                      <a:latin typeface="Cambria Math" panose="02040503050406030204" pitchFamily="18" charset="0"/>
-                                    </a:rPr>
-                                  </m:ctrlPr>
-                                </m:dPr>
-                                <m:e>
-                                  <m:r>
-                                    <a:rPr lang="en-US" b="1" i="1" smtClean="0">
-                                      <a:solidFill>
-                                        <a:srgbClr val="0033CC"/>
-                                      </a:solidFill>
-                                      <a:latin typeface="Cambria Math" panose="02040503050406030204" pitchFamily="18" charset="0"/>
-                                    </a:rPr>
-                                    <m:t>𝒉</m:t>
-                                  </m:r>
-                                  <m:d>
-                                    <m:dPr>
-                                      <m:ctrlPr>
-                                        <a:rPr lang="en-US" b="0" i="1" smtClean="0">
-                                          <a:latin typeface="Cambria Math" panose="02040503050406030204" pitchFamily="18" charset="0"/>
-                                        </a:rPr>
-                                      </m:ctrlPr>
-                                    </m:dPr>
-                                    <m:e>
-                                      <m:r>
-                                        <m:rPr>
-                                          <m:nor/>
-                                        </m:rPr>
-                                        <a:rPr lang="en-US" b="1" i="1" smtClean="0">
-                                          <a:solidFill>
-                                            <a:srgbClr val="C00000"/>
-                                          </a:solidFill>
-                                          <a:latin typeface="Cambria Math" panose="02040503050406030204" pitchFamily="18" charset="0"/>
-                                        </a:rPr>
-                                        <m:t>c</m:t>
-                                      </m:r>
-                                      <m:r>
-                                        <m:rPr>
-                                          <m:nor/>
-                                        </m:rPr>
-                                        <a:rPr lang="en-US" b="1" i="1" smtClean="0">
-                                          <a:solidFill>
-                                            <a:srgbClr val="C00000"/>
-                                          </a:solidFill>
-                                          <a:latin typeface="Cambria Math" panose="02040503050406030204" pitchFamily="18" charset="0"/>
-                                        </a:rPr>
-                                        <m:t> </m:t>
-                                      </m:r>
-                                      <m:d>
-                                        <m:dPr>
-                                          <m:ctrlPr>
-                                            <a:rPr lang="en-US" b="0" i="1" smtClean="0">
-                                              <a:latin typeface="Cambria Math" panose="02040503050406030204" pitchFamily="18" charset="0"/>
-                                            </a:rPr>
-                                          </m:ctrlPr>
-                                        </m:dPr>
-                                        <m:e>
-                                          <m:r>
-                                            <a:rPr lang="en-US" b="0" i="1" smtClean="0">
-                                              <a:latin typeface="Cambria Math" panose="02040503050406030204" pitchFamily="18" charset="0"/>
-                                            </a:rPr>
-                                            <m:t>𝑥</m:t>
-                                          </m:r>
-                                        </m:e>
-                                      </m:d>
-                                      <m:r>
-                                        <a:rPr lang="en-US" b="0" i="1" smtClean="0">
-                                          <a:latin typeface="Cambria Math" panose="02040503050406030204" pitchFamily="18" charset="0"/>
-                                        </a:rPr>
-                                        <m:t>)))</m:t>
-                                      </m:r>
-                                    </m:e>
-                                  </m:d>
-                                </m:e>
-                              </m:d>
-                            </m:e>
-                          </m:d>
-                        </m:e>
-                      </m:d>
-                    </m:oMath>
-                  </m:oMathPara>
-                </a14:m>
-                <a:endParaRPr lang="en-US" dirty="0"/>
-              </a:p>
-              <a:p>
-                <a:pPr marL="0" marR="0" lvl="0" indent="0" defTabSz="914400" eaLnBrk="1" fontAlgn="auto" latinLnBrk="0" hangingPunct="1">
-                  <a:lnSpc>
-                    <a:spcPct val="100000"/>
-                  </a:lnSpc>
-                  <a:spcBef>
-                    <a:spcPts val="0"/>
-                  </a:spcBef>
-                  <a:spcAft>
-                    <a:spcPts val="0"/>
-                  </a:spcAft>
-                  <a:buClrTx/>
-                  <a:buSzTx/>
-                  <a:buFontTx/>
-                  <a:buNone/>
-                  <a:tabLst/>
-                  <a:defRPr/>
-                </a:pPr>
-                <a:endParaRPr lang="en-US" dirty="0"/>
-              </a:p>
-              <a:p>
-                <a:pPr marL="0" indent="0">
-                  <a:buNone/>
-                </a:pPr>
-                <a:r>
-                  <a:rPr lang="en-US" dirty="0"/>
-                  <a:t>Here is an algorithm-level view:</a:t>
-                </a:r>
-              </a:p>
-              <a:p>
-                <a:pPr marL="0" indent="0">
-                  <a:buNone/>
-                </a:pPr>
-                <a:r>
-                  <a:rPr lang="en-US" dirty="0"/>
-                  <a:t>And here is a code-level view:</a:t>
-                </a:r>
-              </a:p>
-            </p:txBody>
-          </p:sp>
-        </mc:Choice>
-        <mc:Fallback xmlns="">
-          <p:sp>
-            <p:nvSpPr>
-              <p:cNvPr id="8" name="Content Placeholder 7">
-                <a:extLst>
-                  <a:ext uri="{FF2B5EF4-FFF2-40B4-BE49-F238E27FC236}">
-                    <a16:creationId xmlns:a16="http://schemas.microsoft.com/office/drawing/2014/main" id="{6B7FD4A5-149A-DC10-64B0-5360009C4E14}"/>
-                  </a:ext>
-                </a:extLst>
-              </p:cNvPr>
-              <p:cNvSpPr>
-                <a:spLocks noGrp="1" noRot="1" noChangeAspect="1" noMove="1" noResize="1" noEditPoints="1" noAdjustHandles="1" noChangeArrowheads="1" noChangeShapeType="1" noTextEdit="1"/>
-              </p:cNvSpPr>
-              <p:nvPr>
-                <p:ph idx="1"/>
-              </p:nvPr>
-            </p:nvSpPr>
-            <p:spPr>
-              <a:xfrm>
-                <a:off x="711200" y="1295400"/>
-                <a:ext cx="8204200" cy="4819650"/>
-              </a:xfrm>
-              <a:blipFill>
-                <a:blip r:embed="rId2"/>
-                <a:stretch>
-                  <a:fillRect l="-1236" t="-1316"/>
-                </a:stretch>
-              </a:blipFill>
-            </p:spPr>
-            <p:txBody>
-              <a:bodyPr/>
-              <a:lstStyle/>
-              <a:p>
-                <a:r>
-                  <a:rPr lang="en-US">
-                    <a:noFill/>
-                  </a:rPr>
-                  <a:t> </a:t>
-                </a:r>
-              </a:p>
-            </p:txBody>
-          </p:sp>
-        </mc:Fallback>
-      </mc:AlternateContent>
-      <p:sp>
-        <p:nvSpPr>
-          <p:cNvPr id="6" name="Footer Placeholder 5">
-            <a:extLst>
-              <a:ext uri="{FF2B5EF4-FFF2-40B4-BE49-F238E27FC236}">
-                <a16:creationId xmlns:a16="http://schemas.microsoft.com/office/drawing/2014/main" id="{65DECC7E-70DE-C1BE-F7FD-2DE50A82C941}"/>
-              </a:ext>
-            </a:extLst>
-          </p:cNvPr>
-          <p:cNvSpPr>
-            <a:spLocks noGrp="1"/>
-          </p:cNvSpPr>
-          <p:nvPr>
-            <p:ph type="ftr" sz="quarter" idx="10"/>
-          </p:nvPr>
-        </p:nvSpPr>
-        <p:spPr/>
-        <p:txBody>
-          <a:bodyPr/>
-          <a:lstStyle/>
-          <a:p>
-            <a:pPr>
-              <a:defRPr/>
-            </a:pPr>
-            <a:r>
-              <a:rPr lang="en-US"/>
-              <a:t>FSU: Machine Learning in Physics</a:t>
-            </a:r>
-            <a:endParaRPr lang="en-US" dirty="0"/>
-          </a:p>
-        </p:txBody>
-      </p:sp>
-      <p:sp>
-        <p:nvSpPr>
-          <p:cNvPr id="5" name="Slide Number Placeholder 4">
-            <a:extLst>
-              <a:ext uri="{FF2B5EF4-FFF2-40B4-BE49-F238E27FC236}">
-                <a16:creationId xmlns:a16="http://schemas.microsoft.com/office/drawing/2014/main" id="{BFA47EF4-BF6E-36AC-9720-F9DD5BED63CC}"/>
-              </a:ext>
-            </a:extLst>
-          </p:cNvPr>
-          <p:cNvSpPr>
-            <a:spLocks noGrp="1"/>
-          </p:cNvSpPr>
-          <p:nvPr>
-            <p:ph type="sldNum" sz="quarter" idx="11"/>
-          </p:nvPr>
-        </p:nvSpPr>
-        <p:spPr/>
-        <p:txBody>
-          <a:bodyPr/>
-          <a:lstStyle/>
-          <a:p>
-            <a:pPr>
-              <a:defRPr/>
-            </a:pPr>
-            <a:fld id="{84EEE8D3-405F-8246-8864-9DF28E2D288A}" type="slidenum">
-              <a:rPr lang="en-US" smtClean="0"/>
-              <a:pPr>
-                <a:defRPr/>
-              </a:pPr>
-              <a:t>16</a:t>
-            </a:fld>
-            <a:endParaRPr lang="en-US"/>
-          </a:p>
-        </p:txBody>
-      </p:sp>
-      <p:grpSp>
-        <p:nvGrpSpPr>
-          <p:cNvPr id="10" name="Group 9">
-            <a:extLst>
-              <a:ext uri="{FF2B5EF4-FFF2-40B4-BE49-F238E27FC236}">
-                <a16:creationId xmlns:a16="http://schemas.microsoft.com/office/drawing/2014/main" id="{F9846AD8-7E40-BE6F-EA7A-C02563A708EF}"/>
-              </a:ext>
-            </a:extLst>
-          </p:cNvPr>
-          <p:cNvGrpSpPr/>
-          <p:nvPr/>
-        </p:nvGrpSpPr>
-        <p:grpSpPr>
-          <a:xfrm>
-            <a:off x="4724400" y="2190906"/>
-            <a:ext cx="1752600" cy="1471159"/>
-            <a:chOff x="4505325" y="2190906"/>
-            <a:chExt cx="1752600" cy="1471159"/>
-          </a:xfrm>
-        </p:grpSpPr>
-        <mc:AlternateContent xmlns:mc="http://schemas.openxmlformats.org/markup-compatibility/2006" xmlns:a14="http://schemas.microsoft.com/office/drawing/2010/main">
-          <mc:Choice Requires="a14">
-            <p:sp>
-              <p:nvSpPr>
-                <p:cNvPr id="11" name="TextBox 10">
-                  <a:extLst>
-                    <a:ext uri="{FF2B5EF4-FFF2-40B4-BE49-F238E27FC236}">
-                      <a16:creationId xmlns:a16="http://schemas.microsoft.com/office/drawing/2014/main" id="{CC5F9496-A0DB-9815-6676-846AC075B4E2}"/>
-                    </a:ext>
-                  </a:extLst>
-                </p:cNvPr>
-                <p:cNvSpPr txBox="1"/>
-                <p:nvPr/>
-              </p:nvSpPr>
-              <p:spPr>
-                <a:xfrm>
-                  <a:off x="4505325" y="2190906"/>
-                  <a:ext cx="1685925" cy="461665"/>
-                </a:xfrm>
-                <a:prstGeom prst="rect">
-                  <a:avLst/>
-                </a:prstGeom>
-                <a:noFill/>
-              </p:spPr>
-              <p:txBody>
-                <a:bodyPr wrap="square">
-                  <a:spAutoFit/>
-                </a:bodyPr>
-                <a:lstStyle/>
-                <a:p>
-                  <a:pPr/>
-                  <a14:m>
-                    <m:oMathPara xmlns:m="http://schemas.openxmlformats.org/officeDocument/2006/math">
-                      <m:oMathParaPr>
-                        <m:jc m:val="centerGroup"/>
-                      </m:oMathParaPr>
-                      <m:oMath xmlns:m="http://schemas.openxmlformats.org/officeDocument/2006/math">
-                        <m:sSub>
-                          <m:sSubPr>
-                            <m:ctrlPr>
-                              <a:rPr lang="en-US" b="0" i="1" smtClean="0">
-                                <a:latin typeface="Cambria Math" panose="02040503050406030204" pitchFamily="18" charset="0"/>
-                              </a:rPr>
-                            </m:ctrlPr>
-                          </m:sSubPr>
-                          <m:e>
-                            <m:r>
-                              <a:rPr lang="en-US" b="0" i="1" smtClean="0">
-                                <a:latin typeface="Cambria Math" panose="02040503050406030204" pitchFamily="18" charset="0"/>
-                              </a:rPr>
-                              <m:t>𝑦</m:t>
-                            </m:r>
-                          </m:e>
-                          <m:sub>
-                            <m:r>
-                              <a:rPr lang="en-US" b="0" i="1" smtClean="0">
-                                <a:latin typeface="Cambria Math" panose="02040503050406030204" pitchFamily="18" charset="0"/>
-                              </a:rPr>
-                              <m:t>1</m:t>
-                            </m:r>
-                          </m:sub>
-                        </m:sSub>
-                        <m:r>
-                          <a:rPr lang="en-US" b="0" i="1" smtClean="0">
-                            <a:latin typeface="Cambria Math" panose="02040503050406030204" pitchFamily="18" charset="0"/>
-                          </a:rPr>
-                          <m:t>=</m:t>
-                        </m:r>
-                        <m:r>
-                          <a:rPr lang="en-US" b="1" i="1" smtClean="0">
-                            <a:solidFill>
-                              <a:srgbClr val="C00000"/>
-                            </a:solidFill>
-                            <a:latin typeface="Cambria Math" panose="02040503050406030204" pitchFamily="18" charset="0"/>
-                          </a:rPr>
-                          <m:t>𝒄</m:t>
-                        </m:r>
-                        <m:r>
-                          <a:rPr lang="en-US" b="0" i="1" smtClean="0">
-                            <a:latin typeface="Cambria Math" panose="02040503050406030204" pitchFamily="18" charset="0"/>
-                          </a:rPr>
-                          <m:t>(</m:t>
-                        </m:r>
-                        <m:r>
-                          <a:rPr lang="en-US" b="0" i="1" smtClean="0">
-                            <a:latin typeface="Cambria Math" panose="02040503050406030204" pitchFamily="18" charset="0"/>
-                          </a:rPr>
-                          <m:t>𝑥</m:t>
-                        </m:r>
-                        <m:r>
-                          <a:rPr lang="en-US" b="0" i="1" smtClean="0">
-                            <a:latin typeface="Cambria Math" panose="02040503050406030204" pitchFamily="18" charset="0"/>
-                          </a:rPr>
-                          <m:t>)</m:t>
-                        </m:r>
-                      </m:oMath>
-                    </m:oMathPara>
-                  </a14:m>
-                  <a:endParaRPr lang="en-US" dirty="0"/>
-                </a:p>
-              </p:txBody>
-            </p:sp>
-          </mc:Choice>
-          <mc:Fallback xmlns="">
-            <p:sp>
-              <p:nvSpPr>
-                <p:cNvPr id="11" name="TextBox 10">
-                  <a:extLst>
-                    <a:ext uri="{FF2B5EF4-FFF2-40B4-BE49-F238E27FC236}">
-                      <a16:creationId xmlns:a16="http://schemas.microsoft.com/office/drawing/2014/main" id="{CC5F9496-A0DB-9815-6676-846AC075B4E2}"/>
-                    </a:ext>
-                  </a:extLst>
-                </p:cNvPr>
-                <p:cNvSpPr txBox="1">
-                  <a:spLocks noRot="1" noChangeAspect="1" noMove="1" noResize="1" noEditPoints="1" noAdjustHandles="1" noChangeArrowheads="1" noChangeShapeType="1" noTextEdit="1"/>
-                </p:cNvSpPr>
-                <p:nvPr/>
-              </p:nvSpPr>
-              <p:spPr>
-                <a:xfrm>
-                  <a:off x="4505325" y="2190906"/>
-                  <a:ext cx="1685925" cy="461665"/>
-                </a:xfrm>
-                <a:prstGeom prst="rect">
-                  <a:avLst/>
-                </a:prstGeom>
-                <a:blipFill>
-                  <a:blip r:embed="rId3"/>
-                  <a:stretch>
-                    <a:fillRect b="-18919"/>
-                  </a:stretch>
-                </a:blipFill>
-              </p:spPr>
-              <p:txBody>
-                <a:bodyPr/>
-                <a:lstStyle/>
-                <a:p>
-                  <a:r>
-                    <a:rPr lang="en-US">
-                      <a:noFill/>
-                    </a:rPr>
-                    <a:t> </a:t>
-                  </a:r>
-                </a:p>
-              </p:txBody>
-            </p:sp>
-          </mc:Fallback>
-        </mc:AlternateContent>
-        <mc:AlternateContent xmlns:mc="http://schemas.openxmlformats.org/markup-compatibility/2006" xmlns:a14="http://schemas.microsoft.com/office/drawing/2010/main">
-          <mc:Choice Requires="a14">
-            <p:sp>
-              <p:nvSpPr>
-                <p:cNvPr id="12" name="TextBox 11">
-                  <a:extLst>
-                    <a:ext uri="{FF2B5EF4-FFF2-40B4-BE49-F238E27FC236}">
-                      <a16:creationId xmlns:a16="http://schemas.microsoft.com/office/drawing/2014/main" id="{073079B7-B973-7828-3925-8650EAF9F414}"/>
-                    </a:ext>
-                  </a:extLst>
-                </p:cNvPr>
-                <p:cNvSpPr txBox="1"/>
-                <p:nvPr/>
-              </p:nvSpPr>
-              <p:spPr>
-                <a:xfrm>
-                  <a:off x="4572000" y="2535622"/>
-                  <a:ext cx="1685925" cy="461665"/>
-                </a:xfrm>
-                <a:prstGeom prst="rect">
-                  <a:avLst/>
-                </a:prstGeom>
-                <a:noFill/>
-              </p:spPr>
-              <p:txBody>
-                <a:bodyPr wrap="square">
-                  <a:spAutoFit/>
-                </a:bodyPr>
-                <a:lstStyle/>
-                <a:p>
-                  <a:pPr/>
-                  <a14:m>
-                    <m:oMathPara xmlns:m="http://schemas.openxmlformats.org/officeDocument/2006/math">
-                      <m:oMathParaPr>
-                        <m:jc m:val="centerGroup"/>
-                      </m:oMathParaPr>
-                      <m:oMath xmlns:m="http://schemas.openxmlformats.org/officeDocument/2006/math">
-                        <m:sSub>
-                          <m:sSubPr>
-                            <m:ctrlPr>
-                              <a:rPr lang="en-US" b="0" i="1" smtClean="0">
-                                <a:latin typeface="Cambria Math" panose="02040503050406030204" pitchFamily="18" charset="0"/>
-                              </a:rPr>
-                            </m:ctrlPr>
-                          </m:sSubPr>
-                          <m:e>
-                            <m:r>
-                              <a:rPr lang="en-US" b="0" i="1" smtClean="0">
-                                <a:latin typeface="Cambria Math" panose="02040503050406030204" pitchFamily="18" charset="0"/>
-                              </a:rPr>
-                              <m:t>𝑦</m:t>
-                            </m:r>
-                          </m:e>
-                          <m:sub>
-                            <m:r>
-                              <a:rPr lang="en-US" b="0" i="1" smtClean="0">
-                                <a:latin typeface="Cambria Math" panose="02040503050406030204" pitchFamily="18" charset="0"/>
-                              </a:rPr>
-                              <m:t>2</m:t>
-                            </m:r>
-                          </m:sub>
-                        </m:sSub>
-                        <m:r>
-                          <a:rPr lang="en-US" b="0" i="1" smtClean="0">
-                            <a:latin typeface="Cambria Math" panose="02040503050406030204" pitchFamily="18" charset="0"/>
-                          </a:rPr>
-                          <m:t>=</m:t>
-                        </m:r>
-                        <m:r>
-                          <a:rPr lang="en-US" b="1" i="1" smtClean="0">
-                            <a:solidFill>
-                              <a:srgbClr val="0033CC"/>
-                            </a:solidFill>
-                            <a:latin typeface="Cambria Math" panose="02040503050406030204" pitchFamily="18" charset="0"/>
-                          </a:rPr>
-                          <m:t>𝒉</m:t>
-                        </m:r>
-                        <m:r>
-                          <a:rPr lang="en-US" b="0" i="1" smtClean="0">
-                            <a:latin typeface="Cambria Math" panose="02040503050406030204" pitchFamily="18" charset="0"/>
-                          </a:rPr>
-                          <m:t>(</m:t>
-                        </m:r>
-                        <m:sSub>
-                          <m:sSubPr>
-                            <m:ctrlPr>
-                              <a:rPr lang="en-US" b="0" i="1" smtClean="0">
-                                <a:solidFill>
-                                  <a:srgbClr val="0033CC"/>
-                                </a:solidFill>
-                                <a:latin typeface="Cambria Math" panose="02040503050406030204" pitchFamily="18" charset="0"/>
-                              </a:rPr>
-                            </m:ctrlPr>
-                          </m:sSubPr>
-                          <m:e>
-                            <m:r>
-                              <a:rPr lang="en-US" b="0" i="1" smtClean="0">
-                                <a:latin typeface="Cambria Math" panose="02040503050406030204" pitchFamily="18" charset="0"/>
-                              </a:rPr>
-                              <m:t>𝑦</m:t>
-                            </m:r>
-                          </m:e>
-                          <m:sub>
-                            <m:r>
-                              <a:rPr lang="en-US" b="0" i="1" smtClean="0">
-                                <a:latin typeface="Cambria Math" panose="02040503050406030204" pitchFamily="18" charset="0"/>
-                              </a:rPr>
-                              <m:t>1</m:t>
-                            </m:r>
-                          </m:sub>
-                        </m:sSub>
-                        <m:r>
-                          <a:rPr lang="en-US" b="0" i="1" smtClean="0">
-                            <a:latin typeface="Cambria Math" panose="02040503050406030204" pitchFamily="18" charset="0"/>
-                          </a:rPr>
-                          <m:t>)</m:t>
-                        </m:r>
-                      </m:oMath>
-                    </m:oMathPara>
-                  </a14:m>
-                  <a:endParaRPr lang="en-US" dirty="0"/>
-                </a:p>
-              </p:txBody>
-            </p:sp>
-          </mc:Choice>
-          <mc:Fallback xmlns="">
-            <p:sp>
-              <p:nvSpPr>
-                <p:cNvPr id="12" name="TextBox 11">
-                  <a:extLst>
-                    <a:ext uri="{FF2B5EF4-FFF2-40B4-BE49-F238E27FC236}">
-                      <a16:creationId xmlns:a16="http://schemas.microsoft.com/office/drawing/2014/main" id="{073079B7-B973-7828-3925-8650EAF9F414}"/>
-                    </a:ext>
-                  </a:extLst>
-                </p:cNvPr>
-                <p:cNvSpPr txBox="1">
-                  <a:spLocks noRot="1" noChangeAspect="1" noMove="1" noResize="1" noEditPoints="1" noAdjustHandles="1" noChangeArrowheads="1" noChangeShapeType="1" noTextEdit="1"/>
-                </p:cNvSpPr>
-                <p:nvPr/>
-              </p:nvSpPr>
-              <p:spPr>
-                <a:xfrm>
-                  <a:off x="4572000" y="2535622"/>
-                  <a:ext cx="1685925" cy="461665"/>
-                </a:xfrm>
-                <a:prstGeom prst="rect">
-                  <a:avLst/>
-                </a:prstGeom>
-                <a:blipFill>
-                  <a:blip r:embed="rId4"/>
-                  <a:stretch>
-                    <a:fillRect r="-746" b="-15789"/>
-                  </a:stretch>
-                </a:blipFill>
-              </p:spPr>
-              <p:txBody>
-                <a:bodyPr/>
-                <a:lstStyle/>
-                <a:p>
-                  <a:r>
-                    <a:rPr lang="en-US">
-                      <a:noFill/>
-                    </a:rPr>
-                    <a:t> </a:t>
-                  </a:r>
-                </a:p>
-              </p:txBody>
-            </p:sp>
-          </mc:Fallback>
-        </mc:AlternateContent>
-        <mc:AlternateContent xmlns:mc="http://schemas.openxmlformats.org/markup-compatibility/2006" xmlns:a14="http://schemas.microsoft.com/office/drawing/2010/main">
-          <mc:Choice Requires="a14">
-            <p:sp>
-              <p:nvSpPr>
-                <p:cNvPr id="13" name="TextBox 12">
-                  <a:extLst>
-                    <a:ext uri="{FF2B5EF4-FFF2-40B4-BE49-F238E27FC236}">
-                      <a16:creationId xmlns:a16="http://schemas.microsoft.com/office/drawing/2014/main" id="{E620D838-06F9-19F1-5C28-966803316F1E}"/>
-                    </a:ext>
-                  </a:extLst>
-                </p:cNvPr>
-                <p:cNvSpPr txBox="1"/>
-                <p:nvPr/>
-              </p:nvSpPr>
-              <p:spPr>
-                <a:xfrm>
-                  <a:off x="4571999" y="3200400"/>
-                  <a:ext cx="1685925" cy="461665"/>
-                </a:xfrm>
-                <a:prstGeom prst="rect">
-                  <a:avLst/>
-                </a:prstGeom>
-                <a:noFill/>
-              </p:spPr>
-              <p:txBody>
-                <a:bodyPr wrap="square">
-                  <a:spAutoFit/>
-                </a:bodyPr>
-                <a:lstStyle/>
-                <a:p>
-                  <a:pPr/>
-                  <a14:m>
-                    <m:oMathPara xmlns:m="http://schemas.openxmlformats.org/officeDocument/2006/math">
-                      <m:oMathParaPr>
-                        <m:jc m:val="centerGroup"/>
-                      </m:oMathParaPr>
-                      <m:oMath xmlns:m="http://schemas.openxmlformats.org/officeDocument/2006/math">
-                        <m:sSub>
-                          <m:sSubPr>
-                            <m:ctrlPr>
-                              <a:rPr lang="en-US" b="0" i="1" smtClean="0">
-                                <a:latin typeface="Cambria Math" panose="02040503050406030204" pitchFamily="18" charset="0"/>
-                              </a:rPr>
-                            </m:ctrlPr>
-                          </m:sSubPr>
-                          <m:e>
-                            <m:r>
-                              <a:rPr lang="en-US" b="0" i="1" smtClean="0">
-                                <a:latin typeface="Cambria Math" panose="02040503050406030204" pitchFamily="18" charset="0"/>
-                              </a:rPr>
-                              <m:t>𝑦</m:t>
-                            </m:r>
-                          </m:e>
-                          <m:sub>
-                            <m:r>
-                              <a:rPr lang="en-US" b="0" i="1" smtClean="0">
-                                <a:latin typeface="Cambria Math" panose="02040503050406030204" pitchFamily="18" charset="0"/>
-                              </a:rPr>
-                              <m:t>4</m:t>
-                            </m:r>
-                          </m:sub>
-                        </m:sSub>
-                        <m:r>
-                          <a:rPr lang="en-US" b="0" i="1" smtClean="0">
-                            <a:latin typeface="Cambria Math" panose="02040503050406030204" pitchFamily="18" charset="0"/>
-                          </a:rPr>
-                          <m:t>=</m:t>
-                        </m:r>
-                        <m:r>
-                          <a:rPr lang="en-US" b="1" i="1" smtClean="0">
-                            <a:solidFill>
-                              <a:srgbClr val="0033CC"/>
-                            </a:solidFill>
-                            <a:latin typeface="Cambria Math" panose="02040503050406030204" pitchFamily="18" charset="0"/>
-                          </a:rPr>
-                          <m:t>𝒈</m:t>
-                        </m:r>
-                        <m:r>
-                          <a:rPr lang="en-US" b="0" i="1" smtClean="0">
-                            <a:latin typeface="Cambria Math" panose="02040503050406030204" pitchFamily="18" charset="0"/>
-                          </a:rPr>
-                          <m:t>(</m:t>
-                        </m:r>
-                        <m:sSub>
-                          <m:sSubPr>
-                            <m:ctrlPr>
-                              <a:rPr lang="en-US" b="0" i="1" smtClean="0">
-                                <a:solidFill>
-                                  <a:srgbClr val="0033CC"/>
-                                </a:solidFill>
-                                <a:latin typeface="Cambria Math" panose="02040503050406030204" pitchFamily="18" charset="0"/>
-                              </a:rPr>
-                            </m:ctrlPr>
-                          </m:sSubPr>
-                          <m:e>
-                            <m:r>
-                              <a:rPr lang="en-US" b="0" i="1" smtClean="0">
-                                <a:latin typeface="Cambria Math" panose="02040503050406030204" pitchFamily="18" charset="0"/>
-                              </a:rPr>
-                              <m:t>𝑦</m:t>
-                            </m:r>
-                          </m:e>
-                          <m:sub>
-                            <m:r>
-                              <a:rPr lang="en-US" b="0" i="1" smtClean="0">
-                                <a:latin typeface="Cambria Math" panose="02040503050406030204" pitchFamily="18" charset="0"/>
-                              </a:rPr>
-                              <m:t>3</m:t>
-                            </m:r>
-                          </m:sub>
-                        </m:sSub>
-                        <m:r>
-                          <a:rPr lang="en-US" b="0" i="1" smtClean="0">
-                            <a:latin typeface="Cambria Math" panose="02040503050406030204" pitchFamily="18" charset="0"/>
-                          </a:rPr>
-                          <m:t>)</m:t>
-                        </m:r>
-                      </m:oMath>
-                    </m:oMathPara>
-                  </a14:m>
-                  <a:endParaRPr lang="en-US" dirty="0"/>
-                </a:p>
-              </p:txBody>
-            </p:sp>
-          </mc:Choice>
-          <mc:Fallback xmlns="">
-            <p:sp>
-              <p:nvSpPr>
-                <p:cNvPr id="13" name="TextBox 12">
-                  <a:extLst>
-                    <a:ext uri="{FF2B5EF4-FFF2-40B4-BE49-F238E27FC236}">
-                      <a16:creationId xmlns:a16="http://schemas.microsoft.com/office/drawing/2014/main" id="{E620D838-06F9-19F1-5C28-966803316F1E}"/>
-                    </a:ext>
-                  </a:extLst>
-                </p:cNvPr>
-                <p:cNvSpPr txBox="1">
-                  <a:spLocks noRot="1" noChangeAspect="1" noMove="1" noResize="1" noEditPoints="1" noAdjustHandles="1" noChangeArrowheads="1" noChangeShapeType="1" noTextEdit="1"/>
-                </p:cNvSpPr>
-                <p:nvPr/>
-              </p:nvSpPr>
-              <p:spPr>
-                <a:xfrm>
-                  <a:off x="4571999" y="3200400"/>
-                  <a:ext cx="1685925" cy="461665"/>
-                </a:xfrm>
-                <a:prstGeom prst="rect">
-                  <a:avLst/>
-                </a:prstGeom>
-                <a:blipFill>
-                  <a:blip r:embed="rId5"/>
-                  <a:stretch>
-                    <a:fillRect r="-1504" b="-16216"/>
-                  </a:stretch>
-                </a:blipFill>
-              </p:spPr>
-              <p:txBody>
-                <a:bodyPr/>
-                <a:lstStyle/>
-                <a:p>
-                  <a:r>
-                    <a:rPr lang="en-US">
-                      <a:noFill/>
-                    </a:rPr>
-                    <a:t> </a:t>
-                  </a:r>
-                </a:p>
-              </p:txBody>
-            </p:sp>
-          </mc:Fallback>
-        </mc:AlternateContent>
-        <mc:AlternateContent xmlns:mc="http://schemas.openxmlformats.org/markup-compatibility/2006" xmlns:a14="http://schemas.microsoft.com/office/drawing/2010/main">
-          <mc:Choice Requires="a14">
-            <p:sp>
-              <p:nvSpPr>
-                <p:cNvPr id="14" name="TextBox 13">
-                  <a:extLst>
-                    <a:ext uri="{FF2B5EF4-FFF2-40B4-BE49-F238E27FC236}">
-                      <a16:creationId xmlns:a16="http://schemas.microsoft.com/office/drawing/2014/main" id="{559FC146-202C-4591-6C7E-3A982DA4C675}"/>
-                    </a:ext>
-                  </a:extLst>
-                </p:cNvPr>
-                <p:cNvSpPr txBox="1"/>
-                <p:nvPr/>
-              </p:nvSpPr>
-              <p:spPr>
-                <a:xfrm>
-                  <a:off x="4562475" y="2891135"/>
-                  <a:ext cx="1685925" cy="461665"/>
-                </a:xfrm>
-                <a:prstGeom prst="rect">
-                  <a:avLst/>
-                </a:prstGeom>
-                <a:noFill/>
-              </p:spPr>
-              <p:txBody>
-                <a:bodyPr wrap="square">
-                  <a:spAutoFit/>
-                </a:bodyPr>
-                <a:lstStyle/>
-                <a:p>
-                  <a:pPr/>
-                  <a14:m>
-                    <m:oMathPara xmlns:m="http://schemas.openxmlformats.org/officeDocument/2006/math">
-                      <m:oMathParaPr>
-                        <m:jc m:val="centerGroup"/>
-                      </m:oMathParaPr>
-                      <m:oMath xmlns:m="http://schemas.openxmlformats.org/officeDocument/2006/math">
-                        <m:sSub>
-                          <m:sSubPr>
-                            <m:ctrlPr>
-                              <a:rPr lang="en-US" b="0" i="1" smtClean="0">
-                                <a:latin typeface="Cambria Math" panose="02040503050406030204" pitchFamily="18" charset="0"/>
-                              </a:rPr>
-                            </m:ctrlPr>
-                          </m:sSubPr>
-                          <m:e>
-                            <m:r>
-                              <a:rPr lang="en-US" b="0" i="1" smtClean="0">
-                                <a:latin typeface="Cambria Math" panose="02040503050406030204" pitchFamily="18" charset="0"/>
-                              </a:rPr>
-                              <m:t>𝑦</m:t>
-                            </m:r>
-                          </m:e>
-                          <m:sub>
-                            <m:r>
-                              <a:rPr lang="en-US" b="0" i="1" smtClean="0">
-                                <a:latin typeface="Cambria Math" panose="02040503050406030204" pitchFamily="18" charset="0"/>
-                              </a:rPr>
-                              <m:t>3</m:t>
-                            </m:r>
-                          </m:sub>
-                        </m:sSub>
-                        <m:r>
-                          <a:rPr lang="en-US" b="0" i="1" smtClean="0">
-                            <a:latin typeface="Cambria Math" panose="02040503050406030204" pitchFamily="18" charset="0"/>
-                          </a:rPr>
-                          <m:t>=</m:t>
-                        </m:r>
-                        <m:r>
-                          <a:rPr lang="en-US" b="1" i="1" smtClean="0">
-                            <a:solidFill>
-                              <a:srgbClr val="C00000"/>
-                            </a:solidFill>
-                            <a:latin typeface="Cambria Math" panose="02040503050406030204" pitchFamily="18" charset="0"/>
-                          </a:rPr>
-                          <m:t>𝒄</m:t>
-                        </m:r>
-                        <m:r>
-                          <a:rPr lang="en-US" b="0" i="1" smtClean="0">
-                            <a:latin typeface="Cambria Math" panose="02040503050406030204" pitchFamily="18" charset="0"/>
-                          </a:rPr>
-                          <m:t>(</m:t>
-                        </m:r>
-                        <m:sSub>
-                          <m:sSubPr>
-                            <m:ctrlPr>
-                              <a:rPr lang="en-US" b="0" i="1" smtClean="0">
-                                <a:solidFill>
-                                  <a:srgbClr val="C00000"/>
-                                </a:solidFill>
-                                <a:latin typeface="Cambria Math" panose="02040503050406030204" pitchFamily="18" charset="0"/>
-                              </a:rPr>
-                            </m:ctrlPr>
-                          </m:sSubPr>
-                          <m:e>
-                            <m:r>
-                              <a:rPr lang="en-US" b="0" i="1" smtClean="0">
-                                <a:latin typeface="Cambria Math" panose="02040503050406030204" pitchFamily="18" charset="0"/>
-                              </a:rPr>
-                              <m:t>𝑦</m:t>
-                            </m:r>
-                          </m:e>
-                          <m:sub>
-                            <m:r>
-                              <a:rPr lang="en-US" b="0" i="1" smtClean="0">
-                                <a:latin typeface="Cambria Math" panose="02040503050406030204" pitchFamily="18" charset="0"/>
-                              </a:rPr>
-                              <m:t>2</m:t>
-                            </m:r>
-                          </m:sub>
-                        </m:sSub>
-                        <m:r>
-                          <a:rPr lang="en-US" b="0" i="1" smtClean="0">
-                            <a:latin typeface="Cambria Math" panose="02040503050406030204" pitchFamily="18" charset="0"/>
-                          </a:rPr>
-                          <m:t>)</m:t>
-                        </m:r>
-                      </m:oMath>
-                    </m:oMathPara>
-                  </a14:m>
-                  <a:endParaRPr lang="en-US" dirty="0"/>
-                </a:p>
-              </p:txBody>
-            </p:sp>
-          </mc:Choice>
-          <mc:Fallback xmlns="">
-            <p:sp>
-              <p:nvSpPr>
-                <p:cNvPr id="14" name="TextBox 13">
-                  <a:extLst>
-                    <a:ext uri="{FF2B5EF4-FFF2-40B4-BE49-F238E27FC236}">
-                      <a16:creationId xmlns:a16="http://schemas.microsoft.com/office/drawing/2014/main" id="{559FC146-202C-4591-6C7E-3A982DA4C675}"/>
-                    </a:ext>
-                  </a:extLst>
-                </p:cNvPr>
-                <p:cNvSpPr txBox="1">
-                  <a:spLocks noRot="1" noChangeAspect="1" noMove="1" noResize="1" noEditPoints="1" noAdjustHandles="1" noChangeArrowheads="1" noChangeShapeType="1" noTextEdit="1"/>
-                </p:cNvSpPr>
-                <p:nvPr/>
-              </p:nvSpPr>
-              <p:spPr>
-                <a:xfrm>
-                  <a:off x="4562475" y="2891135"/>
-                  <a:ext cx="1685925" cy="461665"/>
-                </a:xfrm>
-                <a:prstGeom prst="rect">
-                  <a:avLst/>
-                </a:prstGeom>
-                <a:blipFill>
-                  <a:blip r:embed="rId6"/>
-                  <a:stretch>
-                    <a:fillRect b="-18919"/>
-                  </a:stretch>
-                </a:blipFill>
-              </p:spPr>
-              <p:txBody>
-                <a:bodyPr/>
-                <a:lstStyle/>
-                <a:p>
-                  <a:r>
-                    <a:rPr lang="en-US">
-                      <a:noFill/>
-                    </a:rPr>
-                    <a:t> </a:t>
-                  </a:r>
-                </a:p>
-              </p:txBody>
-            </p:sp>
-          </mc:Fallback>
-        </mc:AlternateContent>
-      </p:grpSp>
-      <p:pic>
-        <p:nvPicPr>
-          <p:cNvPr id="15" name="Picture 14" descr="A white text with black text&#10;&#10;Description automatically generated">
-            <a:extLst>
-              <a:ext uri="{FF2B5EF4-FFF2-40B4-BE49-F238E27FC236}">
-                <a16:creationId xmlns:a16="http://schemas.microsoft.com/office/drawing/2014/main" id="{B24B8007-32B1-726B-2548-20FD2195FF4A}"/>
-              </a:ext>
-            </a:extLst>
-          </p:cNvPr>
-          <p:cNvPicPr>
-            <a:picLocks noChangeAspect="1"/>
-          </p:cNvPicPr>
-          <p:nvPr/>
-        </p:nvPicPr>
-        <p:blipFill>
-          <a:blip r:embed="rId7"/>
-          <a:stretch>
-            <a:fillRect/>
-          </a:stretch>
-        </p:blipFill>
-        <p:spPr>
-          <a:xfrm>
-            <a:off x="381000" y="3712472"/>
-            <a:ext cx="8436200" cy="2764528"/>
-          </a:xfrm>
-          <a:prstGeom prst="rect">
-            <a:avLst/>
-          </a:prstGeom>
-          <a:effectLst>
-            <a:outerShdw blurRad="50800" dist="38100" dir="2700000" algn="tl" rotWithShape="0">
-              <a:prstClr val="black">
-                <a:alpha val="40000"/>
-              </a:prstClr>
-            </a:outerShdw>
-          </a:effectLst>
-        </p:spPr>
-      </p:pic>
-      <p:grpSp>
-        <p:nvGrpSpPr>
-          <p:cNvPr id="16" name="Group 15">
-            <a:extLst>
-              <a:ext uri="{FF2B5EF4-FFF2-40B4-BE49-F238E27FC236}">
-                <a16:creationId xmlns:a16="http://schemas.microsoft.com/office/drawing/2014/main" id="{5C686732-3EAA-BA0C-07BA-02C809778E84}"/>
-              </a:ext>
-            </a:extLst>
-          </p:cNvPr>
-          <p:cNvGrpSpPr/>
-          <p:nvPr/>
-        </p:nvGrpSpPr>
-        <p:grpSpPr>
-          <a:xfrm>
-            <a:off x="6464359" y="2199769"/>
-            <a:ext cx="2565337" cy="1534031"/>
-            <a:chOff x="4532247" y="2190906"/>
-            <a:chExt cx="1881534" cy="1534031"/>
-          </a:xfrm>
-        </p:grpSpPr>
-        <mc:AlternateContent xmlns:mc="http://schemas.openxmlformats.org/markup-compatibility/2006" xmlns:a14="http://schemas.microsoft.com/office/drawing/2010/main">
-          <mc:Choice Requires="a14">
-            <p:sp>
-              <p:nvSpPr>
-                <p:cNvPr id="17" name="TextBox 16">
-                  <a:extLst>
-                    <a:ext uri="{FF2B5EF4-FFF2-40B4-BE49-F238E27FC236}">
-                      <a16:creationId xmlns:a16="http://schemas.microsoft.com/office/drawing/2014/main" id="{790D5B21-5A3B-C78E-036C-30CDC35D7305}"/>
-                    </a:ext>
-                  </a:extLst>
-                </p:cNvPr>
-                <p:cNvSpPr txBox="1"/>
-                <p:nvPr/>
-              </p:nvSpPr>
-              <p:spPr>
-                <a:xfrm>
-                  <a:off x="4572000" y="2190906"/>
-                  <a:ext cx="1685925" cy="461665"/>
-                </a:xfrm>
-                <a:prstGeom prst="rect">
-                  <a:avLst/>
-                </a:prstGeom>
-                <a:noFill/>
-              </p:spPr>
-              <p:txBody>
-                <a:bodyPr wrap="square">
-                  <a:spAutoFit/>
-                </a:bodyPr>
-                <a:lstStyle/>
-                <a:p>
-                  <a:pPr/>
-                  <a14:m>
-                    <m:oMathPara xmlns:m="http://schemas.openxmlformats.org/officeDocument/2006/math">
-                      <m:oMathParaPr>
-                        <m:jc m:val="centerGroup"/>
-                      </m:oMathParaPr>
-                      <m:oMath xmlns:m="http://schemas.openxmlformats.org/officeDocument/2006/math">
-                        <m:sSub>
-                          <m:sSubPr>
-                            <m:ctrlPr>
-                              <a:rPr lang="en-US" b="0" i="1" smtClean="0">
-                                <a:latin typeface="Cambria Math" panose="02040503050406030204" pitchFamily="18" charset="0"/>
-                              </a:rPr>
-                            </m:ctrlPr>
-                          </m:sSubPr>
-                          <m:e>
-                            <m:r>
-                              <a:rPr lang="en-US" b="0" i="1" smtClean="0">
-                                <a:latin typeface="Cambria Math" panose="02040503050406030204" pitchFamily="18" charset="0"/>
-                              </a:rPr>
-                              <m:t>𝑦</m:t>
-                            </m:r>
-                          </m:e>
-                          <m:sub>
-                            <m:r>
-                              <a:rPr lang="en-US" b="0" i="1" smtClean="0">
-                                <a:latin typeface="Cambria Math" panose="02040503050406030204" pitchFamily="18" charset="0"/>
-                              </a:rPr>
-                              <m:t>5</m:t>
-                            </m:r>
-                          </m:sub>
-                        </m:sSub>
-                        <m:r>
-                          <a:rPr lang="en-US" b="0" i="1" smtClean="0">
-                            <a:latin typeface="Cambria Math" panose="02040503050406030204" pitchFamily="18" charset="0"/>
-                          </a:rPr>
-                          <m:t>=</m:t>
-                        </m:r>
-                        <m:r>
-                          <m:rPr>
-                            <m:nor/>
-                          </m:rPr>
-                          <a:rPr lang="en-US" b="0" i="0" smtClean="0">
-                            <a:solidFill>
-                              <a:srgbClr val="0033CC"/>
-                            </a:solidFill>
-                            <a:latin typeface="Cambria Math" panose="02040503050406030204" pitchFamily="18" charset="0"/>
-                          </a:rPr>
-                          <m:t>flatten</m:t>
-                        </m:r>
-                        <m:r>
-                          <a:rPr lang="en-US" b="0" i="1" smtClean="0">
-                            <a:latin typeface="Cambria Math" panose="02040503050406030204" pitchFamily="18" charset="0"/>
-                          </a:rPr>
-                          <m:t>(</m:t>
-                        </m:r>
-                        <m:sSub>
-                          <m:sSubPr>
-                            <m:ctrlPr>
-                              <a:rPr lang="en-US" b="0" i="1" smtClean="0">
-                                <a:solidFill>
-                                  <a:srgbClr val="0033CC"/>
-                                </a:solidFill>
-                                <a:latin typeface="Cambria Math" panose="02040503050406030204" pitchFamily="18" charset="0"/>
-                              </a:rPr>
-                            </m:ctrlPr>
-                          </m:sSubPr>
-                          <m:e>
-                            <m:r>
-                              <a:rPr lang="en-US" b="0" i="1" smtClean="0">
-                                <a:latin typeface="Cambria Math" panose="02040503050406030204" pitchFamily="18" charset="0"/>
-                              </a:rPr>
-                              <m:t>𝑦</m:t>
-                            </m:r>
-                          </m:e>
-                          <m:sub>
-                            <m:r>
-                              <a:rPr lang="en-US" b="0" i="1" smtClean="0">
-                                <a:latin typeface="Cambria Math" panose="02040503050406030204" pitchFamily="18" charset="0"/>
-                              </a:rPr>
-                              <m:t>4</m:t>
-                            </m:r>
-                          </m:sub>
-                        </m:sSub>
-                        <m:r>
-                          <a:rPr lang="en-US" b="0" i="1" smtClean="0">
-                            <a:latin typeface="Cambria Math" panose="02040503050406030204" pitchFamily="18" charset="0"/>
-                          </a:rPr>
-                          <m:t>)</m:t>
-                        </m:r>
-                      </m:oMath>
-                    </m:oMathPara>
-                  </a14:m>
-                  <a:endParaRPr lang="en-US" dirty="0"/>
-                </a:p>
-              </p:txBody>
-            </p:sp>
-          </mc:Choice>
-          <mc:Fallback xmlns="">
-            <p:sp>
-              <p:nvSpPr>
-                <p:cNvPr id="17" name="TextBox 16">
-                  <a:extLst>
-                    <a:ext uri="{FF2B5EF4-FFF2-40B4-BE49-F238E27FC236}">
-                      <a16:creationId xmlns:a16="http://schemas.microsoft.com/office/drawing/2014/main" id="{790D5B21-5A3B-C78E-036C-30CDC35D7305}"/>
-                    </a:ext>
-                  </a:extLst>
-                </p:cNvPr>
-                <p:cNvSpPr txBox="1">
-                  <a:spLocks noRot="1" noChangeAspect="1" noMove="1" noResize="1" noEditPoints="1" noAdjustHandles="1" noChangeArrowheads="1" noChangeShapeType="1" noTextEdit="1"/>
-                </p:cNvSpPr>
-                <p:nvPr/>
-              </p:nvSpPr>
-              <p:spPr>
-                <a:xfrm>
-                  <a:off x="4572000" y="2190906"/>
-                  <a:ext cx="1685925" cy="461665"/>
-                </a:xfrm>
-                <a:prstGeom prst="rect">
-                  <a:avLst/>
-                </a:prstGeom>
-                <a:blipFill>
-                  <a:blip r:embed="rId8"/>
-                  <a:stretch>
-                    <a:fillRect r="-1099" b="-18919"/>
-                  </a:stretch>
-                </a:blipFill>
-              </p:spPr>
-              <p:txBody>
-                <a:bodyPr/>
-                <a:lstStyle/>
-                <a:p>
-                  <a:r>
-                    <a:rPr lang="en-US">
-                      <a:noFill/>
-                    </a:rPr>
-                    <a:t> </a:t>
-                  </a:r>
-                </a:p>
-              </p:txBody>
-            </p:sp>
-          </mc:Fallback>
-        </mc:AlternateContent>
-        <mc:AlternateContent xmlns:mc="http://schemas.openxmlformats.org/markup-compatibility/2006" xmlns:a14="http://schemas.microsoft.com/office/drawing/2010/main">
-          <mc:Choice Requires="a14">
-            <p:sp>
-              <p:nvSpPr>
-                <p:cNvPr id="18" name="TextBox 17">
-                  <a:extLst>
-                    <a:ext uri="{FF2B5EF4-FFF2-40B4-BE49-F238E27FC236}">
-                      <a16:creationId xmlns:a16="http://schemas.microsoft.com/office/drawing/2014/main" id="{A9280B4A-7DF8-280F-4537-321BB80A97E3}"/>
-                    </a:ext>
-                  </a:extLst>
-                </p:cNvPr>
-                <p:cNvSpPr txBox="1"/>
-                <p:nvPr/>
-              </p:nvSpPr>
-              <p:spPr>
-                <a:xfrm>
-                  <a:off x="4532247" y="2535622"/>
-                  <a:ext cx="1685925" cy="461665"/>
-                </a:xfrm>
-                <a:prstGeom prst="rect">
-                  <a:avLst/>
-                </a:prstGeom>
-                <a:noFill/>
-              </p:spPr>
-              <p:txBody>
-                <a:bodyPr wrap="square">
-                  <a:spAutoFit/>
-                </a:bodyPr>
-                <a:lstStyle/>
-                <a:p>
-                  <a:pPr/>
-                  <a14:m>
-                    <m:oMathPara xmlns:m="http://schemas.openxmlformats.org/officeDocument/2006/math">
-                      <m:oMathParaPr>
-                        <m:jc m:val="centerGroup"/>
-                      </m:oMathParaPr>
-                      <m:oMath xmlns:m="http://schemas.openxmlformats.org/officeDocument/2006/math">
-                        <m:sSub>
-                          <m:sSubPr>
-                            <m:ctrlPr>
-                              <a:rPr lang="en-US" b="0" i="1" smtClean="0">
-                                <a:latin typeface="Cambria Math" panose="02040503050406030204" pitchFamily="18" charset="0"/>
-                              </a:rPr>
-                            </m:ctrlPr>
-                          </m:sSubPr>
-                          <m:e>
-                            <m:r>
-                              <a:rPr lang="en-US" b="0" i="1" smtClean="0">
-                                <a:latin typeface="Cambria Math" panose="02040503050406030204" pitchFamily="18" charset="0"/>
-                              </a:rPr>
-                              <m:t>𝑦</m:t>
-                            </m:r>
-                          </m:e>
-                          <m:sub>
-                            <m:r>
-                              <a:rPr lang="en-US" b="0" i="1" smtClean="0">
-                                <a:latin typeface="Cambria Math" panose="02040503050406030204" pitchFamily="18" charset="0"/>
-                              </a:rPr>
-                              <m:t>6</m:t>
-                            </m:r>
-                          </m:sub>
-                        </m:sSub>
-                        <m:r>
-                          <a:rPr lang="en-US" b="0" i="1" smtClean="0">
-                            <a:latin typeface="Cambria Math" panose="02040503050406030204" pitchFamily="18" charset="0"/>
-                          </a:rPr>
-                          <m:t>=</m:t>
-                        </m:r>
-                        <m:r>
-                          <m:rPr>
-                            <m:nor/>
-                          </m:rPr>
-                          <a:rPr lang="en-US" b="0" i="0" smtClean="0">
-                            <a:solidFill>
-                              <a:srgbClr val="0033CC"/>
-                            </a:solidFill>
-                            <a:latin typeface="Cambria Math" panose="02040503050406030204" pitchFamily="18" charset="0"/>
-                          </a:rPr>
-                          <m:t>linear</m:t>
-                        </m:r>
-                        <m:r>
-                          <a:rPr lang="en-US" b="0" i="1" smtClean="0">
-                            <a:latin typeface="Cambria Math" panose="02040503050406030204" pitchFamily="18" charset="0"/>
-                          </a:rPr>
-                          <m:t>(</m:t>
-                        </m:r>
-                        <m:sSub>
-                          <m:sSubPr>
-                            <m:ctrlPr>
-                              <a:rPr lang="en-US" b="0" i="1" smtClean="0">
-                                <a:solidFill>
-                                  <a:srgbClr val="0033CC"/>
-                                </a:solidFill>
-                                <a:latin typeface="Cambria Math" panose="02040503050406030204" pitchFamily="18" charset="0"/>
-                              </a:rPr>
-                            </m:ctrlPr>
-                          </m:sSubPr>
-                          <m:e>
-                            <m:r>
-                              <a:rPr lang="en-US" b="0" i="1" smtClean="0">
-                                <a:latin typeface="Cambria Math" panose="02040503050406030204" pitchFamily="18" charset="0"/>
-                              </a:rPr>
-                              <m:t>𝑦</m:t>
-                            </m:r>
-                          </m:e>
-                          <m:sub>
-                            <m:r>
-                              <a:rPr lang="en-US" b="0" i="1" smtClean="0">
-                                <a:latin typeface="Cambria Math" panose="02040503050406030204" pitchFamily="18" charset="0"/>
-                              </a:rPr>
-                              <m:t>5</m:t>
-                            </m:r>
-                          </m:sub>
-                        </m:sSub>
-                        <m:r>
-                          <a:rPr lang="en-US" b="0" i="1" smtClean="0">
-                            <a:latin typeface="Cambria Math" panose="02040503050406030204" pitchFamily="18" charset="0"/>
-                          </a:rPr>
-                          <m:t>)</m:t>
-                        </m:r>
-                      </m:oMath>
-                    </m:oMathPara>
-                  </a14:m>
-                  <a:endParaRPr lang="en-US" dirty="0"/>
-                </a:p>
-              </p:txBody>
-            </p:sp>
-          </mc:Choice>
-          <mc:Fallback xmlns="">
-            <p:sp>
-              <p:nvSpPr>
-                <p:cNvPr id="18" name="TextBox 17">
-                  <a:extLst>
-                    <a:ext uri="{FF2B5EF4-FFF2-40B4-BE49-F238E27FC236}">
-                      <a16:creationId xmlns:a16="http://schemas.microsoft.com/office/drawing/2014/main" id="{A9280B4A-7DF8-280F-4537-321BB80A97E3}"/>
-                    </a:ext>
-                  </a:extLst>
-                </p:cNvPr>
-                <p:cNvSpPr txBox="1">
-                  <a:spLocks noRot="1" noChangeAspect="1" noMove="1" noResize="1" noEditPoints="1" noAdjustHandles="1" noChangeArrowheads="1" noChangeShapeType="1" noTextEdit="1"/>
-                </p:cNvSpPr>
-                <p:nvPr/>
-              </p:nvSpPr>
-              <p:spPr>
-                <a:xfrm>
-                  <a:off x="4532247" y="2535622"/>
-                  <a:ext cx="1685925" cy="461665"/>
-                </a:xfrm>
-                <a:prstGeom prst="rect">
-                  <a:avLst/>
-                </a:prstGeom>
-                <a:blipFill>
-                  <a:blip r:embed="rId9"/>
-                  <a:stretch>
-                    <a:fillRect r="-549" b="-18919"/>
-                  </a:stretch>
-                </a:blipFill>
-              </p:spPr>
-              <p:txBody>
-                <a:bodyPr/>
-                <a:lstStyle/>
-                <a:p>
-                  <a:r>
-                    <a:rPr lang="en-US">
-                      <a:noFill/>
-                    </a:rPr>
-                    <a:t> </a:t>
-                  </a:r>
-                </a:p>
-              </p:txBody>
-            </p:sp>
-          </mc:Fallback>
-        </mc:AlternateContent>
-        <mc:AlternateContent xmlns:mc="http://schemas.openxmlformats.org/markup-compatibility/2006" xmlns:a14="http://schemas.microsoft.com/office/drawing/2010/main">
-          <mc:Choice Requires="a14">
-            <p:sp>
-              <p:nvSpPr>
-                <p:cNvPr id="19" name="TextBox 18">
-                  <a:extLst>
-                    <a:ext uri="{FF2B5EF4-FFF2-40B4-BE49-F238E27FC236}">
-                      <a16:creationId xmlns:a16="http://schemas.microsoft.com/office/drawing/2014/main" id="{91AC9E56-9A26-9144-D205-2E7DBA42BF69}"/>
-                    </a:ext>
-                  </a:extLst>
-                </p:cNvPr>
-                <p:cNvSpPr txBox="1"/>
-                <p:nvPr/>
-              </p:nvSpPr>
-              <p:spPr>
-                <a:xfrm>
-                  <a:off x="4597407" y="3263272"/>
-                  <a:ext cx="1772295" cy="461665"/>
-                </a:xfrm>
-                <a:prstGeom prst="rect">
-                  <a:avLst/>
-                </a:prstGeom>
-                <a:noFill/>
-              </p:spPr>
-              <p:txBody>
-                <a:bodyPr wrap="square">
-                  <a:spAutoFit/>
-                </a:bodyPr>
-                <a:lstStyle/>
-                <a:p>
-                  <a:pPr/>
-                  <a14:m>
-                    <m:oMathPara xmlns:m="http://schemas.openxmlformats.org/officeDocument/2006/math">
-                      <m:oMathParaPr>
-                        <m:jc m:val="centerGroup"/>
-                      </m:oMathParaPr>
-                      <m:oMath xmlns:m="http://schemas.openxmlformats.org/officeDocument/2006/math">
-                        <m:r>
-                          <a:rPr lang="en-US" b="0" i="1" smtClean="0">
-                            <a:latin typeface="Cambria Math" panose="02040503050406030204" pitchFamily="18" charset="0"/>
-                          </a:rPr>
-                          <m:t>𝑓</m:t>
-                        </m:r>
-                        <m:r>
-                          <a:rPr lang="en-US" b="0" i="1" smtClean="0">
-                            <a:latin typeface="Cambria Math" panose="02040503050406030204" pitchFamily="18" charset="0"/>
-                          </a:rPr>
-                          <m:t>=</m:t>
-                        </m:r>
-                        <m:r>
-                          <m:rPr>
-                            <m:nor/>
-                          </m:rPr>
-                          <a:rPr lang="en-US" b="0" i="0" smtClean="0">
-                            <a:solidFill>
-                              <a:srgbClr val="0033CC"/>
-                            </a:solidFill>
-                            <a:latin typeface="Cambria Math" panose="02040503050406030204" pitchFamily="18" charset="0"/>
-                          </a:rPr>
-                          <m:t>softmax</m:t>
-                        </m:r>
-                        <m:r>
-                          <a:rPr lang="en-US" b="0" i="1" smtClean="0">
-                            <a:latin typeface="Cambria Math" panose="02040503050406030204" pitchFamily="18" charset="0"/>
-                          </a:rPr>
-                          <m:t>(</m:t>
-                        </m:r>
-                        <m:sSub>
-                          <m:sSubPr>
-                            <m:ctrlPr>
-                              <a:rPr lang="en-US" b="0" i="1" smtClean="0">
-                                <a:solidFill>
-                                  <a:srgbClr val="0033CC"/>
-                                </a:solidFill>
-                                <a:latin typeface="Cambria Math" panose="02040503050406030204" pitchFamily="18" charset="0"/>
-                              </a:rPr>
-                            </m:ctrlPr>
-                          </m:sSubPr>
-                          <m:e>
-                            <m:r>
-                              <a:rPr lang="en-US" b="0" i="1" smtClean="0">
-                                <a:latin typeface="Cambria Math" panose="02040503050406030204" pitchFamily="18" charset="0"/>
-                              </a:rPr>
-                              <m:t>𝑦</m:t>
-                            </m:r>
-                          </m:e>
-                          <m:sub>
-                            <m:r>
-                              <a:rPr lang="en-US" b="0" i="1" smtClean="0">
-                                <a:latin typeface="Cambria Math" panose="02040503050406030204" pitchFamily="18" charset="0"/>
-                              </a:rPr>
-                              <m:t>7</m:t>
-                            </m:r>
-                          </m:sub>
-                        </m:sSub>
-                        <m:r>
-                          <a:rPr lang="en-US" b="0" i="1" smtClean="0">
-                            <a:latin typeface="Cambria Math" panose="02040503050406030204" pitchFamily="18" charset="0"/>
-                          </a:rPr>
-                          <m:t>)</m:t>
-                        </m:r>
-                      </m:oMath>
-                    </m:oMathPara>
-                  </a14:m>
-                  <a:endParaRPr lang="en-US" dirty="0"/>
-                </a:p>
-              </p:txBody>
-            </p:sp>
-          </mc:Choice>
-          <mc:Fallback xmlns="">
-            <p:sp>
-              <p:nvSpPr>
-                <p:cNvPr id="19" name="TextBox 18">
-                  <a:extLst>
-                    <a:ext uri="{FF2B5EF4-FFF2-40B4-BE49-F238E27FC236}">
-                      <a16:creationId xmlns:a16="http://schemas.microsoft.com/office/drawing/2014/main" id="{91AC9E56-9A26-9144-D205-2E7DBA42BF69}"/>
-                    </a:ext>
-                  </a:extLst>
-                </p:cNvPr>
-                <p:cNvSpPr txBox="1">
-                  <a:spLocks noRot="1" noChangeAspect="1" noMove="1" noResize="1" noEditPoints="1" noAdjustHandles="1" noChangeArrowheads="1" noChangeShapeType="1" noTextEdit="1"/>
-                </p:cNvSpPr>
-                <p:nvPr/>
-              </p:nvSpPr>
-              <p:spPr>
-                <a:xfrm>
-                  <a:off x="4597407" y="3263272"/>
-                  <a:ext cx="1772295" cy="461665"/>
-                </a:xfrm>
-                <a:prstGeom prst="rect">
-                  <a:avLst/>
-                </a:prstGeom>
-                <a:blipFill>
-                  <a:blip r:embed="rId10"/>
-                  <a:stretch>
-                    <a:fillRect l="-1047" r="-524" b="-15789"/>
-                  </a:stretch>
-                </a:blipFill>
-              </p:spPr>
-              <p:txBody>
-                <a:bodyPr/>
-                <a:lstStyle/>
-                <a:p>
-                  <a:r>
-                    <a:rPr lang="en-US">
-                      <a:noFill/>
-                    </a:rPr>
-                    <a:t> </a:t>
-                  </a:r>
-                </a:p>
-              </p:txBody>
-            </p:sp>
-          </mc:Fallback>
-        </mc:AlternateContent>
-        <mc:AlternateContent xmlns:mc="http://schemas.openxmlformats.org/markup-compatibility/2006" xmlns:a14="http://schemas.microsoft.com/office/drawing/2010/main">
-          <mc:Choice Requires="a14">
-            <p:sp>
-              <p:nvSpPr>
-                <p:cNvPr id="20" name="TextBox 19">
-                  <a:extLst>
-                    <a:ext uri="{FF2B5EF4-FFF2-40B4-BE49-F238E27FC236}">
-                      <a16:creationId xmlns:a16="http://schemas.microsoft.com/office/drawing/2014/main" id="{2149BF42-FD06-FAF4-A98A-A604BEC5A9A7}"/>
-                    </a:ext>
-                  </a:extLst>
-                </p:cNvPr>
-                <p:cNvSpPr txBox="1"/>
-                <p:nvPr/>
-              </p:nvSpPr>
-              <p:spPr>
-                <a:xfrm>
-                  <a:off x="4541518" y="2915239"/>
-                  <a:ext cx="1872263" cy="461665"/>
-                </a:xfrm>
-                <a:prstGeom prst="rect">
-                  <a:avLst/>
-                </a:prstGeom>
-                <a:noFill/>
-              </p:spPr>
-              <p:txBody>
-                <a:bodyPr wrap="square">
-                  <a:spAutoFit/>
-                </a:bodyPr>
-                <a:lstStyle/>
-                <a:p>
-                  <a:pPr/>
-                  <a14:m>
-                    <m:oMathPara xmlns:m="http://schemas.openxmlformats.org/officeDocument/2006/math">
-                      <m:oMathParaPr>
-                        <m:jc m:val="centerGroup"/>
-                      </m:oMathParaPr>
-                      <m:oMath xmlns:m="http://schemas.openxmlformats.org/officeDocument/2006/math">
-                        <m:sSub>
-                          <m:sSubPr>
-                            <m:ctrlPr>
-                              <a:rPr lang="en-US" b="0" i="1" smtClean="0">
-                                <a:latin typeface="Cambria Math" panose="02040503050406030204" pitchFamily="18" charset="0"/>
-                              </a:rPr>
-                            </m:ctrlPr>
-                          </m:sSubPr>
-                          <m:e>
-                            <m:r>
-                              <a:rPr lang="en-US" b="0" i="1" smtClean="0">
-                                <a:latin typeface="Cambria Math" panose="02040503050406030204" pitchFamily="18" charset="0"/>
-                              </a:rPr>
-                              <m:t>𝑦</m:t>
-                            </m:r>
-                          </m:e>
-                          <m:sub>
-                            <m:r>
-                              <a:rPr lang="en-US" b="0" i="1" smtClean="0">
-                                <a:latin typeface="Cambria Math" panose="02040503050406030204" pitchFamily="18" charset="0"/>
-                              </a:rPr>
-                              <m:t>7</m:t>
-                            </m:r>
-                          </m:sub>
-                        </m:sSub>
-                        <m:r>
-                          <a:rPr lang="en-US" b="0" i="1" smtClean="0">
-                            <a:latin typeface="Cambria Math" panose="02040503050406030204" pitchFamily="18" charset="0"/>
-                          </a:rPr>
-                          <m:t>=</m:t>
-                        </m:r>
-                        <m:r>
-                          <m:rPr>
-                            <m:nor/>
-                          </m:rPr>
-                          <a:rPr lang="en-US" b="0" i="0" smtClean="0">
-                            <a:solidFill>
-                              <a:srgbClr val="0033CC"/>
-                            </a:solidFill>
-                            <a:latin typeface="Cambria Math" panose="02040503050406030204" pitchFamily="18" charset="0"/>
-                          </a:rPr>
-                          <m:t>dropout</m:t>
-                        </m:r>
-                        <m:r>
-                          <a:rPr lang="en-US" b="0" i="1" smtClean="0">
-                            <a:latin typeface="Cambria Math" panose="02040503050406030204" pitchFamily="18" charset="0"/>
-                          </a:rPr>
-                          <m:t>(</m:t>
-                        </m:r>
-                        <m:sSub>
-                          <m:sSubPr>
-                            <m:ctrlPr>
-                              <a:rPr lang="en-US" b="0" i="1" smtClean="0">
-                                <a:solidFill>
-                                  <a:srgbClr val="0033CC"/>
-                                </a:solidFill>
-                                <a:latin typeface="Cambria Math" panose="02040503050406030204" pitchFamily="18" charset="0"/>
-                              </a:rPr>
-                            </m:ctrlPr>
-                          </m:sSubPr>
-                          <m:e>
-                            <m:r>
-                              <a:rPr lang="en-US" b="0" i="1" smtClean="0">
-                                <a:latin typeface="Cambria Math" panose="02040503050406030204" pitchFamily="18" charset="0"/>
-                              </a:rPr>
-                              <m:t>𝑦</m:t>
-                            </m:r>
-                          </m:e>
-                          <m:sub>
-                            <m:r>
-                              <a:rPr lang="en-US" b="0" i="1" smtClean="0">
-                                <a:latin typeface="Cambria Math" panose="02040503050406030204" pitchFamily="18" charset="0"/>
-                              </a:rPr>
-                              <m:t>6</m:t>
-                            </m:r>
-                          </m:sub>
-                        </m:sSub>
-                        <m:r>
-                          <a:rPr lang="en-US" b="0" i="1" smtClean="0">
-                            <a:latin typeface="Cambria Math" panose="02040503050406030204" pitchFamily="18" charset="0"/>
-                          </a:rPr>
-                          <m:t>)</m:t>
-                        </m:r>
-                      </m:oMath>
-                    </m:oMathPara>
-                  </a14:m>
-                  <a:endParaRPr lang="en-US" dirty="0"/>
-                </a:p>
-              </p:txBody>
-            </p:sp>
-          </mc:Choice>
-          <mc:Fallback xmlns="">
-            <p:sp>
-              <p:nvSpPr>
-                <p:cNvPr id="20" name="TextBox 19">
-                  <a:extLst>
-                    <a:ext uri="{FF2B5EF4-FFF2-40B4-BE49-F238E27FC236}">
-                      <a16:creationId xmlns:a16="http://schemas.microsoft.com/office/drawing/2014/main" id="{2149BF42-FD06-FAF4-A98A-A604BEC5A9A7}"/>
-                    </a:ext>
-                  </a:extLst>
-                </p:cNvPr>
-                <p:cNvSpPr txBox="1">
-                  <a:spLocks noRot="1" noChangeAspect="1" noMove="1" noResize="1" noEditPoints="1" noAdjustHandles="1" noChangeArrowheads="1" noChangeShapeType="1" noTextEdit="1"/>
-                </p:cNvSpPr>
-                <p:nvPr/>
-              </p:nvSpPr>
-              <p:spPr>
-                <a:xfrm>
-                  <a:off x="4541518" y="2915239"/>
-                  <a:ext cx="1872263" cy="461665"/>
-                </a:xfrm>
-                <a:prstGeom prst="rect">
-                  <a:avLst/>
-                </a:prstGeom>
-                <a:blipFill>
-                  <a:blip r:embed="rId11"/>
-                  <a:stretch>
-                    <a:fillRect r="-990" b="-18919"/>
-                  </a:stretch>
-                </a:blipFill>
-              </p:spPr>
-              <p:txBody>
-                <a:bodyPr/>
-                <a:lstStyle/>
-                <a:p>
-                  <a:r>
-                    <a:rPr lang="en-US">
-                      <a:noFill/>
-                    </a:rPr>
-                    <a:t> </a:t>
-                  </a:r>
-                </a:p>
-              </p:txBody>
-            </p:sp>
-          </mc:Fallback>
-        </mc:AlternateContent>
-      </p:grpSp>
-    </p:spTree>
-    <p:extLst>
-      <p:ext uri="{BB962C8B-B14F-4D97-AF65-F5344CB8AC3E}">
-        <p14:creationId xmlns:p14="http://schemas.microsoft.com/office/powerpoint/2010/main" val="4157462812"/>
-      </p:ext>
-    </p:extLst>
-  </p:cSld>
-  <p:clrMapOvr>
-    <a:masterClrMapping/>
-  </p:clrMapOvr>
-  <p:timing>
-    <p:tnLst>
-      <p:par>
-        <p:cTn id="1" dur="indefinite" restart="never" nodeType="tmRoot">
-          <p:childTnLst>
-            <p:seq concurrent="1" nextAc="seek">
-              <p:cTn id="2" dur="indefinite" nodeType="mainSeq">
-                <p:childTnLst>
-                  <p:par>
-                    <p:cTn id="3" fill="hold">
-                      <p:stCondLst>
-                        <p:cond delay="indefinite"/>
-                      </p:stCondLst>
-                      <p:childTnLst>
-                        <p:par>
-                          <p:cTn id="4" fill="hold">
-                            <p:stCondLst>
-                              <p:cond delay="0"/>
-                            </p:stCondLst>
-                            <p:childTnLst>
-                              <p:par>
-                                <p:cTn id="5" presetID="10" presetClass="entr" presetSubtype="0" fill="hold" nodeType="clickEffect">
-                                  <p:stCondLst>
-                                    <p:cond delay="0"/>
-                                  </p:stCondLst>
-                                  <p:childTnLst>
-                                    <p:set>
-                                      <p:cBhvr>
-                                        <p:cTn id="6" dur="1" fill="hold">
-                                          <p:stCondLst>
-                                            <p:cond delay="0"/>
-                                          </p:stCondLst>
-                                        </p:cTn>
-                                        <p:tgtEl>
-                                          <p:spTgt spid="8">
-                                            <p:txEl>
-                                              <p:pRg st="3" end="3"/>
-                                            </p:txEl>
-                                          </p:spTgt>
-                                        </p:tgtEl>
-                                        <p:attrNameLst>
-                                          <p:attrName>style.visibility</p:attrName>
-                                        </p:attrNameLst>
-                                      </p:cBhvr>
-                                      <p:to>
-                                        <p:strVal val="visible"/>
-                                      </p:to>
-                                    </p:set>
-                                    <p:animEffect transition="in" filter="fade">
-                                      <p:cBhvr>
-                                        <p:cTn id="7" dur="500"/>
-                                        <p:tgtEl>
-                                          <p:spTgt spid="8">
-                                            <p:txEl>
-                                              <p:pRg st="3" end="3"/>
-                                            </p:txEl>
-                                          </p:spTgt>
-                                        </p:tgtEl>
-                                      </p:cBhvr>
-                                    </p:animEffect>
-                                  </p:childTnLst>
-                                </p:cTn>
-                              </p:par>
-                              <p:par>
-                                <p:cTn id="8" presetID="10" presetClass="entr" presetSubtype="0" fill="hold" nodeType="withEffect">
-                                  <p:stCondLst>
-                                    <p:cond delay="0"/>
-                                  </p:stCondLst>
-                                  <p:childTnLst>
-                                    <p:set>
-                                      <p:cBhvr>
-                                        <p:cTn id="9" dur="1" fill="hold">
-                                          <p:stCondLst>
-                                            <p:cond delay="0"/>
-                                          </p:stCondLst>
-                                        </p:cTn>
-                                        <p:tgtEl>
-                                          <p:spTgt spid="10"/>
-                                        </p:tgtEl>
-                                        <p:attrNameLst>
-                                          <p:attrName>style.visibility</p:attrName>
-                                        </p:attrNameLst>
-                                      </p:cBhvr>
-                                      <p:to>
-                                        <p:strVal val="visible"/>
-                                      </p:to>
-                                    </p:set>
-                                    <p:animEffect transition="in" filter="fade">
-                                      <p:cBhvr>
-                                        <p:cTn id="10" dur="500"/>
-                                        <p:tgtEl>
-                                          <p:spTgt spid="10"/>
-                                        </p:tgtEl>
-                                      </p:cBhvr>
-                                    </p:animEffect>
-                                  </p:childTnLst>
-                                </p:cTn>
-                              </p:par>
-                              <p:par>
-                                <p:cTn id="11" presetID="10" presetClass="entr" presetSubtype="0" fill="hold" nodeType="withEffect">
-                                  <p:stCondLst>
-                                    <p:cond delay="0"/>
-                                  </p:stCondLst>
-                                  <p:childTnLst>
-                                    <p:set>
-                                      <p:cBhvr>
-                                        <p:cTn id="12" dur="1" fill="hold">
-                                          <p:stCondLst>
-                                            <p:cond delay="0"/>
-                                          </p:stCondLst>
-                                        </p:cTn>
-                                        <p:tgtEl>
-                                          <p:spTgt spid="16"/>
-                                        </p:tgtEl>
-                                        <p:attrNameLst>
-                                          <p:attrName>style.visibility</p:attrName>
-                                        </p:attrNameLst>
-                                      </p:cBhvr>
-                                      <p:to>
-                                        <p:strVal val="visible"/>
-                                      </p:to>
-                                    </p:set>
-                                    <p:animEffect transition="in" filter="fade">
-                                      <p:cBhvr>
-                                        <p:cTn id="13" dur="500"/>
-                                        <p:tgtEl>
-                                          <p:spTgt spid="16"/>
-                                        </p:tgtEl>
-                                      </p:cBhvr>
-                                    </p:animEffect>
-                                  </p:childTnLst>
-                                </p:cTn>
-                              </p:par>
-                            </p:childTnLst>
-                          </p:cTn>
-                        </p:par>
-                      </p:childTnLst>
-                    </p:cTn>
-                  </p:par>
-                  <p:par>
-                    <p:cTn id="14" fill="hold">
-                      <p:stCondLst>
-                        <p:cond delay="indefinite"/>
-                      </p:stCondLst>
-                      <p:childTnLst>
-                        <p:par>
-                          <p:cTn id="15" fill="hold">
-                            <p:stCondLst>
-                              <p:cond delay="0"/>
-                            </p:stCondLst>
-                            <p:childTnLst>
-                              <p:par>
-                                <p:cTn id="16" presetID="10" presetClass="entr" presetSubtype="0" fill="hold" nodeType="clickEffect">
-                                  <p:stCondLst>
-                                    <p:cond delay="0"/>
-                                  </p:stCondLst>
-                                  <p:childTnLst>
-                                    <p:set>
-                                      <p:cBhvr>
-                                        <p:cTn id="17" dur="1" fill="hold">
-                                          <p:stCondLst>
-                                            <p:cond delay="0"/>
-                                          </p:stCondLst>
-                                        </p:cTn>
-                                        <p:tgtEl>
-                                          <p:spTgt spid="8">
-                                            <p:txEl>
-                                              <p:pRg st="4" end="4"/>
-                                            </p:txEl>
-                                          </p:spTgt>
-                                        </p:tgtEl>
-                                        <p:attrNameLst>
-                                          <p:attrName>style.visibility</p:attrName>
-                                        </p:attrNameLst>
-                                      </p:cBhvr>
-                                      <p:to>
-                                        <p:strVal val="visible"/>
-                                      </p:to>
-                                    </p:set>
-                                    <p:animEffect transition="in" filter="fade">
-                                      <p:cBhvr>
-                                        <p:cTn id="18" dur="500"/>
-                                        <p:tgtEl>
-                                          <p:spTgt spid="8">
-                                            <p:txEl>
-                                              <p:pRg st="4" end="4"/>
-                                            </p:txEl>
-                                          </p:spTgt>
-                                        </p:tgtEl>
-                                      </p:cBhvr>
-                                    </p:animEffect>
-                                  </p:childTnLst>
-                                </p:cTn>
-                              </p:par>
-                              <p:par>
-                                <p:cTn id="19" presetID="10" presetClass="entr" presetSubtype="0" fill="hold" nodeType="withEffect">
-                                  <p:stCondLst>
-                                    <p:cond delay="0"/>
-                                  </p:stCondLst>
-                                  <p:childTnLst>
-                                    <p:set>
-                                      <p:cBhvr>
-                                        <p:cTn id="20" dur="1" fill="hold">
-                                          <p:stCondLst>
-                                            <p:cond delay="0"/>
-                                          </p:stCondLst>
-                                        </p:cTn>
-                                        <p:tgtEl>
-                                          <p:spTgt spid="15"/>
-                                        </p:tgtEl>
-                                        <p:attrNameLst>
-                                          <p:attrName>style.visibility</p:attrName>
-                                        </p:attrNameLst>
-                                      </p:cBhvr>
-                                      <p:to>
-                                        <p:strVal val="visible"/>
-                                      </p:to>
-                                    </p:set>
-                                    <p:animEffect transition="in" filter="fade">
-                                      <p:cBhvr>
-                                        <p:cTn id="21" dur="500"/>
-                                        <p:tgtEl>
-                                          <p:spTgt spid="15"/>
-                                        </p:tgtEl>
-                                      </p:cBhvr>
-                                    </p:animEffect>
-                                  </p:childTnLst>
-                                </p:cTn>
-                              </p:par>
-                            </p:childTnLst>
-                          </p:cTn>
-                        </p:par>
-                      </p:childTnLst>
-                    </p:cTn>
-                  </p:par>
-                </p:childTnLst>
-              </p:cTn>
-              <p:prevCondLst>
-                <p:cond evt="onPrev" delay="0">
-                  <p:tgtEl>
-                    <p:sldTgt/>
-                  </p:tgtEl>
-                </p:cond>
-              </p:prevCondLst>
-              <p:nextCondLst>
-                <p:cond evt="onNext" delay="0">
-                  <p:tgtEl>
-                    <p:sldTgt/>
-                  </p:tgtEl>
-                </p:cond>
-              </p:nextCondLst>
-            </p:seq>
-          </p:childTnLst>
-        </p:cTn>
-      </p:par>
-    </p:tnLst>
-  </p:timing>
-</p:sld>
-</file>
-
-<file path=ppt/slides/slide17.xml><?xml version="1.0" encoding="utf-8"?>
+<file path=ppt/slides/slide15.xml><?xml version="1.0" encoding="utf-8"?>
 <p:sld xmlns:a="http://schemas.openxmlformats.org/drawingml/2006/main" xmlns:r="http://schemas.openxmlformats.org/officeDocument/2006/relationships" xmlns:p="http://schemas.openxmlformats.org/presentationml/2006/main">
   <p:cSld>
     <p:bg>
@@ -9577,7 +7244,7 @@
 </p:sld>
 </file>
 
-<file path=ppt/slides/slide18.xml><?xml version="1.0" encoding="utf-8"?>
+<file path=ppt/slides/slide16.xml><?xml version="1.0" encoding="utf-8"?>
 <p:sld xmlns:a="http://schemas.openxmlformats.org/drawingml/2006/main" xmlns:r="http://schemas.openxmlformats.org/officeDocument/2006/relationships" xmlns:p="http://schemas.openxmlformats.org/presentationml/2006/main">
   <p:cSld>
     <p:spTree>
@@ -9683,7 +7350,7 @@
               <a:pPr>
                 <a:defRPr/>
               </a:pPr>
-              <a:t>18</a:t>
+              <a:t>16</a:t>
             </a:fld>
             <a:endParaRPr lang="en-US"/>
           </a:p>
@@ -9777,7 +7444,7 @@
 </p:sld>
 </file>
 
-<file path=ppt/slides/slide19.xml><?xml version="1.0" encoding="utf-8"?>
+<file path=ppt/slides/slide17.xml><?xml version="1.0" encoding="utf-8"?>
 <p:sld xmlns:a="http://schemas.openxmlformats.org/drawingml/2006/main" xmlns:r="http://schemas.openxmlformats.org/officeDocument/2006/relationships" xmlns:p="http://schemas.openxmlformats.org/presentationml/2006/main">
   <p:cSld>
     <p:spTree>
@@ -9858,10 +7525,7 @@
                 </a:pPr>
                 <a14:m>
                   <m:oMathPara xmlns:m="http://schemas.openxmlformats.org/officeDocument/2006/math">
-                    <m:oMathParaPr>
-                      <m:jc m:val="centerGroup"/>
-                    </m:oMathParaPr>
-                    <m:oMath xmlns:m="http://schemas.openxmlformats.org/officeDocument/2006/math">
+                    <m:oMath>
                       <m:r>
                         <a:rPr lang="en-US" sz="2800" b="0" i="1" smtClean="0">
                           <a:latin typeface="Cambria Math" panose="02040503050406030204" pitchFamily="18" charset="0"/>
@@ -9899,6 +7563,9 @@
                             <m:sSupPr>
                               <m:ctrlPr>
                                 <a:rPr lang="en-US" sz="2800" b="0" i="1" smtClean="0">
+                                  <a:solidFill>
+                                    <a:srgbClr val="0033CC"/>
+                                  </a:solidFill>
                                   <a:latin typeface="Cambria Math" panose="02040503050406030204" pitchFamily="18" charset="0"/>
                                 </a:rPr>
                               </m:ctrlPr>
@@ -10342,7 +8009,7 @@
               <a:pPr>
                 <a:defRPr/>
               </a:pPr>
-              <a:t>19</a:t>
+              <a:t>17</a:t>
             </a:fld>
             <a:endParaRPr lang="en-US"/>
           </a:p>
@@ -10421,10 +8088,7 @@
                     <a:pPr/>
                     <a14:m>
                       <m:oMathPara xmlns:m="http://schemas.openxmlformats.org/officeDocument/2006/math">
-                        <m:oMathParaPr>
-                          <m:jc m:val="centerGroup"/>
-                        </m:oMathParaPr>
-                        <m:oMath xmlns:m="http://schemas.openxmlformats.org/officeDocument/2006/math">
+                        <m:oMath>
                           <m:sSub>
                             <m:sSubPr>
                               <m:ctrlPr>
@@ -10464,10 +8128,7 @@
                     <a:pPr/>
                     <a14:m>
                       <m:oMathPara xmlns:m="http://schemas.openxmlformats.org/officeDocument/2006/math">
-                        <m:oMathParaPr>
-                          <m:jc m:val="centerGroup"/>
-                        </m:oMathParaPr>
-                        <m:oMath xmlns:m="http://schemas.openxmlformats.org/officeDocument/2006/math">
+                        <m:oMath>
                           <m:sSub>
                             <m:sSubPr>
                               <m:ctrlPr>
@@ -10508,10 +8169,7 @@
                     <a:pPr/>
                     <a14:m>
                       <m:oMathPara xmlns:m="http://schemas.openxmlformats.org/officeDocument/2006/math">
-                        <m:oMathParaPr>
-                          <m:jc m:val="centerGroup"/>
-                        </m:oMathParaPr>
-                        <m:oMath xmlns:m="http://schemas.openxmlformats.org/officeDocument/2006/math">
+                        <m:oMath>
                           <m:r>
                             <a:rPr lang="en-US" sz="3200" b="0" i="1" smtClean="0">
                               <a:latin typeface="Cambria Math" panose="02040503050406030204" pitchFamily="18" charset="0"/>
@@ -10528,10 +8186,7 @@
                     <a:pPr/>
                     <a14:m>
                       <m:oMathPara xmlns:m="http://schemas.openxmlformats.org/officeDocument/2006/math">
-                        <m:oMathParaPr>
-                          <m:jc m:val="centerGroup"/>
-                        </m:oMathParaPr>
-                        <m:oMath xmlns:m="http://schemas.openxmlformats.org/officeDocument/2006/math">
+                        <m:oMath>
                           <m:sSub>
                             <m:sSubPr>
                               <m:ctrlPr>
@@ -10697,10 +8352,7 @@
                       </a:pPr>
                       <a14:m>
                         <m:oMathPara xmlns:m="http://schemas.openxmlformats.org/officeDocument/2006/math">
-                          <m:oMathParaPr>
-                            <m:jc m:val="centerGroup"/>
-                          </m:oMathParaPr>
-                          <m:oMath xmlns:m="http://schemas.openxmlformats.org/officeDocument/2006/math">
+                          <m:oMath>
                             <m:r>
                               <a:rPr kumimoji="0" lang="en-US" sz="3200" b="0" i="1" u="none" strike="noStrike" cap="none" normalizeH="0" baseline="0" smtClean="0">
                                 <a:ln>
@@ -11264,10 +8916,7 @@
                       <a:pPr/>
                       <a14:m>
                         <m:oMathPara xmlns:m="http://schemas.openxmlformats.org/officeDocument/2006/math">
-                          <m:oMathParaPr>
-                            <m:jc m:val="centerGroup"/>
-                          </m:oMathParaPr>
-                          <m:oMath xmlns:m="http://schemas.openxmlformats.org/officeDocument/2006/math">
+                          <m:oMath>
                             <m:r>
                               <a:rPr lang="en-US" sz="3200" b="0" i="1" smtClean="0">
                                 <a:latin typeface="Cambria Math" panose="02040503050406030204" pitchFamily="18" charset="0"/>
@@ -11390,10 +9039,7 @@
                   </a:pPr>
                   <a14:m>
                     <m:oMathPara xmlns:m="http://schemas.openxmlformats.org/officeDocument/2006/math">
-                      <m:oMathParaPr>
-                        <m:jc m:val="centerGroup"/>
-                      </m:oMathParaPr>
-                      <m:oMath xmlns:m="http://schemas.openxmlformats.org/officeDocument/2006/math">
+                      <m:oMath>
                         <m:r>
                           <a:rPr kumimoji="0" lang="en-US" sz="2800" b="0" i="1" u="none" strike="noStrike" cap="none" normalizeH="0" baseline="0" smtClean="0">
                             <a:ln>
@@ -11564,346 +9210,7 @@
 </p:sld>
 </file>
 
-<file path=ppt/slides/slide2.xml><?xml version="1.0" encoding="utf-8"?>
-<p:sld xmlns:a="http://schemas.openxmlformats.org/drawingml/2006/main" xmlns:r="http://schemas.openxmlformats.org/officeDocument/2006/relationships" xmlns:p="http://schemas.openxmlformats.org/presentationml/2006/main">
-  <p:cSld>
-    <p:spTree>
-      <p:nvGrpSpPr>
-        <p:cNvPr id="1" name=""/>
-        <p:cNvGrpSpPr/>
-        <p:nvPr/>
-      </p:nvGrpSpPr>
-      <p:grpSpPr>
-        <a:xfrm>
-          <a:off x="0" y="0"/>
-          <a:ext cx="0" cy="0"/>
-          <a:chOff x="0" y="0"/>
-          <a:chExt cx="0" cy="0"/>
-        </a:xfrm>
-      </p:grpSpPr>
-      <p:sp>
-        <p:nvSpPr>
-          <p:cNvPr id="3" name="Title 2">
-            <a:extLst>
-              <a:ext uri="{FF2B5EF4-FFF2-40B4-BE49-F238E27FC236}">
-                <a16:creationId xmlns:a16="http://schemas.microsoft.com/office/drawing/2014/main" id="{F07DFD11-B4D0-7399-FC57-2E795EDC9417}"/>
-              </a:ext>
-            </a:extLst>
-          </p:cNvPr>
-          <p:cNvSpPr>
-            <a:spLocks noGrp="1"/>
-          </p:cNvSpPr>
-          <p:nvPr>
-            <p:ph type="title"/>
-          </p:nvPr>
-        </p:nvSpPr>
-        <p:spPr/>
-        <p:txBody>
-          <a:bodyPr/>
-          <a:lstStyle/>
-          <a:p>
-            <a:r>
-              <a:rPr lang="en-US" dirty="0"/>
-              <a:t>Goals of this Course</a:t>
-            </a:r>
-          </a:p>
-        </p:txBody>
-      </p:sp>
-      <p:sp>
-        <p:nvSpPr>
-          <p:cNvPr id="4" name="Content Placeholder 3">
-            <a:extLst>
-              <a:ext uri="{FF2B5EF4-FFF2-40B4-BE49-F238E27FC236}">
-                <a16:creationId xmlns:a16="http://schemas.microsoft.com/office/drawing/2014/main" id="{098AC74C-D46C-DC2D-A2A6-253EDFA513E5}"/>
-              </a:ext>
-            </a:extLst>
-          </p:cNvPr>
-          <p:cNvSpPr>
-            <a:spLocks noGrp="1"/>
-          </p:cNvSpPr>
-          <p:nvPr>
-            <p:ph idx="1"/>
-          </p:nvPr>
-        </p:nvSpPr>
-        <p:spPr/>
-        <p:txBody>
-          <a:bodyPr/>
-          <a:lstStyle/>
-          <a:p>
-            <a:pPr marL="457200" indent="-457200">
-              <a:buFont typeface="+mj-lt"/>
-              <a:buAutoNum type="arabicPeriod"/>
-            </a:pPr>
-            <a:r>
-              <a:rPr lang="en-US" dirty="0"/>
-              <a:t>Gain a good understanding of the mathematical basis of machine learning (ML).</a:t>
-            </a:r>
-            <a:br>
-              <a:rPr lang="en-US" dirty="0"/>
-            </a:br>
-            <a:endParaRPr lang="en-US" dirty="0"/>
-          </a:p>
-          <a:p>
-            <a:pPr marL="457200" indent="-457200">
-              <a:buFont typeface="+mj-lt"/>
-              <a:buAutoNum type="arabicPeriod"/>
-            </a:pPr>
-            <a:r>
-              <a:rPr lang="en-US" dirty="0"/>
-              <a:t>Gain experience building ML models using </a:t>
-            </a:r>
-            <a:r>
-              <a:rPr lang="en-US" b="1" dirty="0" err="1">
-                <a:solidFill>
-                  <a:srgbClr val="0033CC"/>
-                </a:solidFill>
-              </a:rPr>
-              <a:t>PyTorch</a:t>
-            </a:r>
-            <a:r>
-              <a:rPr lang="en-US" dirty="0"/>
-              <a:t> to solve data science problems in physics.</a:t>
-            </a:r>
-            <a:br>
-              <a:rPr lang="en-US" dirty="0"/>
-            </a:br>
-            <a:endParaRPr lang="en-US" dirty="0"/>
-          </a:p>
-          <a:p>
-            <a:pPr marL="457200" indent="-457200">
-              <a:buFont typeface="+mj-lt"/>
-              <a:buAutoNum type="arabicPeriod"/>
-            </a:pPr>
-            <a:r>
-              <a:rPr lang="en-US" dirty="0"/>
-              <a:t>Gain experience with different ML models.</a:t>
-            </a:r>
-            <a:br>
-              <a:rPr lang="en-US" dirty="0"/>
-            </a:br>
-            <a:endParaRPr lang="en-US" dirty="0"/>
-          </a:p>
-          <a:p>
-            <a:pPr marL="457200" indent="-457200">
-              <a:buFont typeface="+mj-lt"/>
-              <a:buAutoNum type="arabicPeriod"/>
-            </a:pPr>
-            <a:r>
-              <a:rPr lang="en-US" dirty="0"/>
-              <a:t>Gain an appreciation of the power of ML models as well as their (current) limitations.</a:t>
-            </a:r>
-          </a:p>
-          <a:p>
-            <a:pPr marL="0" indent="0">
-              <a:buNone/>
-            </a:pPr>
-            <a:endParaRPr lang="en-US" dirty="0"/>
-          </a:p>
-        </p:txBody>
-      </p:sp>
-    </p:spTree>
-    <p:extLst>
-      <p:ext uri="{BB962C8B-B14F-4D97-AF65-F5344CB8AC3E}">
-        <p14:creationId xmlns:p14="http://schemas.microsoft.com/office/powerpoint/2010/main" val="2535860759"/>
-      </p:ext>
-    </p:extLst>
-  </p:cSld>
-  <p:clrMapOvr>
-    <a:masterClrMapping/>
-  </p:clrMapOvr>
-  <mc:AlternateContent xmlns:mc="http://schemas.openxmlformats.org/markup-compatibility/2006" xmlns:p14="http://schemas.microsoft.com/office/powerpoint/2010/main">
-    <mc:Choice Requires="p14">
-      <p:transition spd="med" p14:dur="700">
-        <p:fade/>
-      </p:transition>
-    </mc:Choice>
-    <mc:Fallback xmlns="">
-      <p:transition spd="med">
-        <p:fade/>
-      </p:transition>
-    </mc:Fallback>
-  </mc:AlternateContent>
-  <p:timing>
-    <p:tnLst>
-      <p:par>
-        <p:cTn id="1" dur="indefinite" restart="never" nodeType="tmRoot">
-          <p:childTnLst>
-            <p:seq concurrent="1" nextAc="seek">
-              <p:cTn id="2" dur="indefinite" nodeType="mainSeq">
-                <p:childTnLst>
-                  <p:par>
-                    <p:cTn id="3" fill="hold">
-                      <p:stCondLst>
-                        <p:cond delay="indefinite"/>
-                      </p:stCondLst>
-                      <p:childTnLst>
-                        <p:par>
-                          <p:cTn id="4" fill="hold">
-                            <p:stCondLst>
-                              <p:cond delay="0"/>
-                            </p:stCondLst>
-                            <p:childTnLst>
-                              <p:par>
-                                <p:cTn id="5" presetID="1" presetClass="entr" presetSubtype="0" fill="hold" nodeType="clickEffect">
-                                  <p:stCondLst>
-                                    <p:cond delay="0"/>
-                                  </p:stCondLst>
-                                  <p:childTnLst>
-                                    <p:set>
-                                      <p:cBhvr>
-                                        <p:cTn id="6" dur="1" fill="hold">
-                                          <p:stCondLst>
-                                            <p:cond delay="0"/>
-                                          </p:stCondLst>
-                                        </p:cTn>
-                                        <p:tgtEl>
-                                          <p:spTgt spid="4">
-                                            <p:txEl>
-                                              <p:pRg st="1" end="1"/>
-                                            </p:txEl>
-                                          </p:spTgt>
-                                        </p:tgtEl>
-                                        <p:attrNameLst>
-                                          <p:attrName>style.visibility</p:attrName>
-                                        </p:attrNameLst>
-                                      </p:cBhvr>
-                                      <p:to>
-                                        <p:strVal val="visible"/>
-                                      </p:to>
-                                    </p:set>
-                                  </p:childTnLst>
-                                </p:cTn>
-                              </p:par>
-                            </p:childTnLst>
-                          </p:cTn>
-                        </p:par>
-                      </p:childTnLst>
-                    </p:cTn>
-                  </p:par>
-                  <p:par>
-                    <p:cTn id="7" fill="hold">
-                      <p:stCondLst>
-                        <p:cond delay="indefinite"/>
-                      </p:stCondLst>
-                      <p:childTnLst>
-                        <p:par>
-                          <p:cTn id="8" fill="hold">
-                            <p:stCondLst>
-                              <p:cond delay="0"/>
-                            </p:stCondLst>
-                            <p:childTnLst>
-                              <p:par>
-                                <p:cTn id="9" presetID="1" presetClass="entr" presetSubtype="0" fill="hold" nodeType="clickEffect">
-                                  <p:stCondLst>
-                                    <p:cond delay="0"/>
-                                  </p:stCondLst>
-                                  <p:childTnLst>
-                                    <p:set>
-                                      <p:cBhvr>
-                                        <p:cTn id="10" dur="1" fill="hold">
-                                          <p:stCondLst>
-                                            <p:cond delay="0"/>
-                                          </p:stCondLst>
-                                        </p:cTn>
-                                        <p:tgtEl>
-                                          <p:spTgt spid="4">
-                                            <p:txEl>
-                                              <p:pRg st="2" end="2"/>
-                                            </p:txEl>
-                                          </p:spTgt>
-                                        </p:tgtEl>
-                                        <p:attrNameLst>
-                                          <p:attrName>style.visibility</p:attrName>
-                                        </p:attrNameLst>
-                                      </p:cBhvr>
-                                      <p:to>
-                                        <p:strVal val="visible"/>
-                                      </p:to>
-                                    </p:set>
-                                  </p:childTnLst>
-                                </p:cTn>
-                              </p:par>
-                            </p:childTnLst>
-                          </p:cTn>
-                        </p:par>
-                      </p:childTnLst>
-                    </p:cTn>
-                  </p:par>
-                  <p:par>
-                    <p:cTn id="11" fill="hold">
-                      <p:stCondLst>
-                        <p:cond delay="indefinite"/>
-                      </p:stCondLst>
-                      <p:childTnLst>
-                        <p:par>
-                          <p:cTn id="12" fill="hold">
-                            <p:stCondLst>
-                              <p:cond delay="0"/>
-                            </p:stCondLst>
-                            <p:childTnLst>
-                              <p:par>
-                                <p:cTn id="13" presetID="1" presetClass="entr" presetSubtype="0" fill="hold" nodeType="clickEffect">
-                                  <p:stCondLst>
-                                    <p:cond delay="0"/>
-                                  </p:stCondLst>
-                                  <p:childTnLst>
-                                    <p:set>
-                                      <p:cBhvr>
-                                        <p:cTn id="14" dur="1" fill="hold">
-                                          <p:stCondLst>
-                                            <p:cond delay="0"/>
-                                          </p:stCondLst>
-                                        </p:cTn>
-                                        <p:tgtEl>
-                                          <p:spTgt spid="4">
-                                            <p:txEl>
-                                              <p:pRg st="3" end="3"/>
-                                            </p:txEl>
-                                          </p:spTgt>
-                                        </p:tgtEl>
-                                        <p:attrNameLst>
-                                          <p:attrName>style.visibility</p:attrName>
-                                        </p:attrNameLst>
-                                      </p:cBhvr>
-                                      <p:to>
-                                        <p:strVal val="visible"/>
-                                      </p:to>
-                                    </p:set>
-                                  </p:childTnLst>
-                                </p:cTn>
-                              </p:par>
-                            </p:childTnLst>
-                          </p:cTn>
-                        </p:par>
-                      </p:childTnLst>
-                    </p:cTn>
-                  </p:par>
-                </p:childTnLst>
-              </p:cTn>
-              <p:prevCondLst>
-                <p:cond evt="onPrev" delay="0">
-                  <p:tgtEl>
-                    <p:sldTgt/>
-                  </p:tgtEl>
-                </p:cond>
-              </p:prevCondLst>
-              <p:nextCondLst>
-                <p:cond evt="onNext" delay="0">
-                  <p:tgtEl>
-                    <p:sldTgt/>
-                  </p:tgtEl>
-                </p:cond>
-              </p:nextCondLst>
-            </p:seq>
-          </p:childTnLst>
-        </p:cTn>
-      </p:par>
-    </p:tnLst>
-  </p:timing>
-</p:sld>
-</file>
-
-<file path=ppt/slides/slide20.xml><?xml version="1.0" encoding="utf-8"?>
+<file path=ppt/slides/slide18.xml><?xml version="1.0" encoding="utf-8"?>
 <p:sld xmlns:a="http://schemas.openxmlformats.org/drawingml/2006/main" xmlns:r="http://schemas.openxmlformats.org/officeDocument/2006/relationships" xmlns:p="http://schemas.openxmlformats.org/presentationml/2006/main">
   <p:cSld>
     <p:spTree>
@@ -11982,7 +9289,7 @@
               <a:pPr>
                 <a:defRPr/>
               </a:pPr>
-              <a:t>20</a:t>
+              <a:t>18</a:t>
             </a:fld>
             <a:endParaRPr lang="en-US"/>
           </a:p>
@@ -12049,7 +9356,7 @@
 </p:sld>
 </file>
 
-<file path=ppt/slides/slide21.xml><?xml version="1.0" encoding="utf-8"?>
+<file path=ppt/slides/slide19.xml><?xml version="1.0" encoding="utf-8"?>
 <p:sld xmlns:a="http://schemas.openxmlformats.org/drawingml/2006/main" xmlns:r="http://schemas.openxmlformats.org/officeDocument/2006/relationships" xmlns:p="http://schemas.openxmlformats.org/presentationml/2006/main">
   <p:cSld>
     <p:spTree>
@@ -12097,7 +9404,7 @@
                     <m:oMathParaPr>
                       <m:jc m:val="left"/>
                     </m:oMathParaPr>
-                    <m:oMath xmlns:m="http://schemas.openxmlformats.org/officeDocument/2006/math">
+                    <m:oMath>
                       <m:r>
                         <a:rPr lang="en-US" sz="2800" i="1" smtClean="0">
                           <a:latin typeface="Cambria Math" panose="02040503050406030204" pitchFamily="18" charset="0"/>
@@ -12170,7 +9477,7 @@
                     <m:oMathParaPr>
                       <m:jc m:val="center"/>
                     </m:oMathParaPr>
-                    <m:oMath xmlns:m="http://schemas.openxmlformats.org/officeDocument/2006/math">
+                    <m:oMath>
                       <m:sSub>
                         <m:sSubPr>
                           <m:ctrlPr>
@@ -12350,11 +9657,11 @@
                     <m:oMathParaPr>
                       <m:jc m:val="left"/>
                     </m:oMathParaPr>
-                    <m:oMath xmlns:m="http://schemas.openxmlformats.org/officeDocument/2006/math">
+                    <m:oMath>
                       <m:sSub>
                         <m:sSubPr>
                           <m:ctrlPr>
-                            <a:rPr lang="en-US" b="0" i="1" smtClean="0">
+                            <a:rPr lang="en-US" i="1">
                               <a:latin typeface="Cambria Math" panose="02040503050406030204" pitchFamily="18" charset="0"/>
                             </a:rPr>
                           </m:ctrlPr>
@@ -12385,7 +9692,7 @@
                       <m:d>
                         <m:dPr>
                           <m:ctrlPr>
-                            <a:rPr lang="en-US" i="1">
+                            <a:rPr lang="en-US" b="0" i="1" smtClean="0">
                               <a:latin typeface="Cambria Math" panose="02040503050406030204" pitchFamily="18" charset="0"/>
                             </a:rPr>
                           </m:ctrlPr>
@@ -12408,7 +9715,7 @@
                       <m:sSub>
                         <m:sSubPr>
                           <m:ctrlPr>
-                            <a:rPr lang="en-US" b="0" i="1" smtClean="0">
+                            <a:rPr lang="en-US" i="1">
                               <a:latin typeface="Cambria Math" panose="02040503050406030204" pitchFamily="18" charset="0"/>
                             </a:rPr>
                           </m:ctrlPr>
@@ -12453,10 +9760,7 @@
                 </a:pPr>
                 <a14:m>
                   <m:oMathPara xmlns:m="http://schemas.openxmlformats.org/officeDocument/2006/math">
-                    <m:oMathParaPr>
-                      <m:jc m:val="centerGroup"/>
-                    </m:oMathParaPr>
-                    <m:oMath xmlns:m="http://schemas.openxmlformats.org/officeDocument/2006/math">
+                    <m:oMath>
                       <m:sSub>
                         <m:sSubPr>
                           <m:ctrlPr>
@@ -12619,11 +9923,11 @@
                     <m:oMathParaPr>
                       <m:jc m:val="left"/>
                     </m:oMathParaPr>
-                    <m:oMath xmlns:m="http://schemas.openxmlformats.org/officeDocument/2006/math">
+                    <m:oMath>
                       <m:sSub>
                         <m:sSubPr>
                           <m:ctrlPr>
-                            <a:rPr lang="en-US" b="0" i="1" smtClean="0">
+                            <a:rPr lang="en-US" i="1">
                               <a:latin typeface="Cambria Math" panose="02040503050406030204" pitchFamily="18" charset="0"/>
                             </a:rPr>
                           </m:ctrlPr>
@@ -12654,7 +9958,7 @@
                       <m:d>
                         <m:dPr>
                           <m:ctrlPr>
-                            <a:rPr lang="en-US" i="1">
+                            <a:rPr lang="en-US" b="0" i="1" smtClean="0">
                               <a:latin typeface="Cambria Math" panose="02040503050406030204" pitchFamily="18" charset="0"/>
                             </a:rPr>
                           </m:ctrlPr>
@@ -12677,7 +9981,7 @@
                       <m:sSub>
                         <m:sSubPr>
                           <m:ctrlPr>
-                            <a:rPr lang="en-US" b="0" i="1" smtClean="0">
+                            <a:rPr lang="en-US" i="1">
                               <a:latin typeface="Cambria Math" panose="02040503050406030204" pitchFamily="18" charset="0"/>
                             </a:rPr>
                           </m:ctrlPr>
@@ -12871,10 +10175,7 @@
                     <a:pPr/>
                     <a14:m>
                       <m:oMathPara xmlns:m="http://schemas.openxmlformats.org/officeDocument/2006/math">
-                        <m:oMathParaPr>
-                          <m:jc m:val="centerGroup"/>
-                        </m:oMathParaPr>
-                        <m:oMath xmlns:m="http://schemas.openxmlformats.org/officeDocument/2006/math">
+                        <m:oMath>
                           <m:sSub>
                             <m:sSubPr>
                               <m:ctrlPr>
@@ -12914,10 +10215,7 @@
                     <a:pPr/>
                     <a14:m>
                       <m:oMathPara xmlns:m="http://schemas.openxmlformats.org/officeDocument/2006/math">
-                        <m:oMathParaPr>
-                          <m:jc m:val="centerGroup"/>
-                        </m:oMathParaPr>
-                        <m:oMath xmlns:m="http://schemas.openxmlformats.org/officeDocument/2006/math">
+                        <m:oMath>
                           <m:sSub>
                             <m:sSubPr>
                               <m:ctrlPr>
@@ -12958,10 +10256,7 @@
                     <a:pPr/>
                     <a14:m>
                       <m:oMathPara xmlns:m="http://schemas.openxmlformats.org/officeDocument/2006/math">
-                        <m:oMathParaPr>
-                          <m:jc m:val="centerGroup"/>
-                        </m:oMathParaPr>
-                        <m:oMath xmlns:m="http://schemas.openxmlformats.org/officeDocument/2006/math">
+                        <m:oMath>
                           <m:r>
                             <a:rPr lang="en-US" sz="3200" b="0" i="1" smtClean="0">
                               <a:latin typeface="Cambria Math" panose="02040503050406030204" pitchFamily="18" charset="0"/>
@@ -12978,10 +10273,7 @@
                     <a:pPr/>
                     <a14:m>
                       <m:oMathPara xmlns:m="http://schemas.openxmlformats.org/officeDocument/2006/math">
-                        <m:oMathParaPr>
-                          <m:jc m:val="centerGroup"/>
-                        </m:oMathParaPr>
-                        <m:oMath xmlns:m="http://schemas.openxmlformats.org/officeDocument/2006/math">
+                        <m:oMath>
                           <m:sSub>
                             <m:sSubPr>
                               <m:ctrlPr>
@@ -13182,10 +10474,7 @@
                       </a:pPr>
                       <a14:m>
                         <m:oMathPara xmlns:m="http://schemas.openxmlformats.org/officeDocument/2006/math">
-                          <m:oMathParaPr>
-                            <m:jc m:val="centerGroup"/>
-                          </m:oMathParaPr>
-                          <m:oMath xmlns:m="http://schemas.openxmlformats.org/officeDocument/2006/math">
+                          <m:oMath>
                             <m:sSub>
                               <m:sSubPr>
                                 <m:ctrlPr>
@@ -13780,10 +11069,7 @@
                       <a:pPr/>
                       <a14:m>
                         <m:oMathPara xmlns:m="http://schemas.openxmlformats.org/officeDocument/2006/math">
-                          <m:oMathParaPr>
-                            <m:jc m:val="centerGroup"/>
-                          </m:oMathParaPr>
-                          <m:oMath xmlns:m="http://schemas.openxmlformats.org/officeDocument/2006/math">
+                          <m:oMath>
                             <m:sSub>
                               <m:sSubPr>
                                 <m:ctrlPr>
@@ -13925,10 +11211,7 @@
                   </a:pPr>
                   <a14:m>
                     <m:oMathPara xmlns:m="http://schemas.openxmlformats.org/officeDocument/2006/math">
-                      <m:oMathParaPr>
-                        <m:jc m:val="centerGroup"/>
-                      </m:oMathParaPr>
-                      <m:oMath xmlns:m="http://schemas.openxmlformats.org/officeDocument/2006/math">
+                      <m:oMath>
                         <m:r>
                           <a:rPr kumimoji="0" lang="en-US" sz="2800" b="0" i="1" u="none" strike="noStrike" cap="none" normalizeH="0" baseline="0" smtClean="0">
                             <a:ln>
@@ -14142,7 +11425,7 @@
               <a:pPr>
                 <a:defRPr/>
               </a:pPr>
-              <a:t>21</a:t>
+              <a:t>19</a:t>
             </a:fld>
             <a:endParaRPr lang="en-US"/>
           </a:p>
@@ -14241,10 +11524,7 @@
                       <a:pPr/>
                       <a14:m>
                         <m:oMathPara xmlns:m="http://schemas.openxmlformats.org/officeDocument/2006/math">
-                          <m:oMathParaPr>
-                            <m:jc m:val="centerGroup"/>
-                          </m:oMathParaPr>
-                          <m:oMath xmlns:m="http://schemas.openxmlformats.org/officeDocument/2006/math">
+                          <m:oMath>
                             <m:sSub>
                               <m:sSubPr>
                                 <m:ctrlPr>
@@ -14284,10 +11564,7 @@
                       <a:pPr/>
                       <a14:m>
                         <m:oMathPara xmlns:m="http://schemas.openxmlformats.org/officeDocument/2006/math">
-                          <m:oMathParaPr>
-                            <m:jc m:val="centerGroup"/>
-                          </m:oMathParaPr>
-                          <m:oMath xmlns:m="http://schemas.openxmlformats.org/officeDocument/2006/math">
+                          <m:oMath>
                             <m:sSub>
                               <m:sSubPr>
                                 <m:ctrlPr>
@@ -14328,10 +11605,7 @@
                       <a:pPr/>
                       <a14:m>
                         <m:oMathPara xmlns:m="http://schemas.openxmlformats.org/officeDocument/2006/math">
-                          <m:oMathParaPr>
-                            <m:jc m:val="centerGroup"/>
-                          </m:oMathParaPr>
-                          <m:oMath xmlns:m="http://schemas.openxmlformats.org/officeDocument/2006/math">
+                          <m:oMath>
                             <m:r>
                               <a:rPr lang="en-US" sz="3200" b="0" i="1" smtClean="0">
                                 <a:latin typeface="Cambria Math" panose="02040503050406030204" pitchFamily="18" charset="0"/>
@@ -14509,10 +11783,7 @@
                         </a:pPr>
                         <a14:m>
                           <m:oMathPara xmlns:m="http://schemas.openxmlformats.org/officeDocument/2006/math">
-                            <m:oMathParaPr>
-                              <m:jc m:val="centerGroup"/>
-                            </m:oMathParaPr>
-                            <m:oMath xmlns:m="http://schemas.openxmlformats.org/officeDocument/2006/math">
+                            <m:oMath>
                               <m:sSub>
                                 <m:sSubPr>
                                   <m:ctrlPr>
@@ -15142,10 +12413,7 @@
                         <a:pPr/>
                         <a14:m>
                           <m:oMathPara xmlns:m="http://schemas.openxmlformats.org/officeDocument/2006/math">
-                            <m:oMathParaPr>
-                              <m:jc m:val="centerGroup"/>
-                            </m:oMathParaPr>
-                            <m:oMath xmlns:m="http://schemas.openxmlformats.org/officeDocument/2006/math">
+                            <m:oMath>
                               <m:sSub>
                                 <m:sSubPr>
                                   <m:ctrlPr>
@@ -15287,10 +12555,7 @@
                     </a:pPr>
                     <a14:m>
                       <m:oMathPara xmlns:m="http://schemas.openxmlformats.org/officeDocument/2006/math">
-                        <m:oMathParaPr>
-                          <m:jc m:val="centerGroup"/>
-                        </m:oMathParaPr>
-                        <m:oMath xmlns:m="http://schemas.openxmlformats.org/officeDocument/2006/math">
+                        <m:oMath>
                           <m:r>
                             <a:rPr kumimoji="0" lang="en-US" sz="2800" b="0" i="1" u="none" strike="noStrike" cap="none" normalizeH="0" baseline="0" smtClean="0">
                               <a:ln>
@@ -15605,7 +12870,346 @@
 </p:sld>
 </file>
 
-<file path=ppt/slides/slide22.xml><?xml version="1.0" encoding="utf-8"?>
+<file path=ppt/slides/slide2.xml><?xml version="1.0" encoding="utf-8"?>
+<p:sld xmlns:a="http://schemas.openxmlformats.org/drawingml/2006/main" xmlns:r="http://schemas.openxmlformats.org/officeDocument/2006/relationships" xmlns:p="http://schemas.openxmlformats.org/presentationml/2006/main">
+  <p:cSld>
+    <p:spTree>
+      <p:nvGrpSpPr>
+        <p:cNvPr id="1" name=""/>
+        <p:cNvGrpSpPr/>
+        <p:nvPr/>
+      </p:nvGrpSpPr>
+      <p:grpSpPr>
+        <a:xfrm>
+          <a:off x="0" y="0"/>
+          <a:ext cx="0" cy="0"/>
+          <a:chOff x="0" y="0"/>
+          <a:chExt cx="0" cy="0"/>
+        </a:xfrm>
+      </p:grpSpPr>
+      <p:sp>
+        <p:nvSpPr>
+          <p:cNvPr id="3" name="Title 2">
+            <a:extLst>
+              <a:ext uri="{FF2B5EF4-FFF2-40B4-BE49-F238E27FC236}">
+                <a16:creationId xmlns:a16="http://schemas.microsoft.com/office/drawing/2014/main" id="{F07DFD11-B4D0-7399-FC57-2E795EDC9417}"/>
+              </a:ext>
+            </a:extLst>
+          </p:cNvPr>
+          <p:cNvSpPr>
+            <a:spLocks noGrp="1"/>
+          </p:cNvSpPr>
+          <p:nvPr>
+            <p:ph type="title"/>
+          </p:nvPr>
+        </p:nvSpPr>
+        <p:spPr/>
+        <p:txBody>
+          <a:bodyPr/>
+          <a:lstStyle/>
+          <a:p>
+            <a:r>
+              <a:rPr lang="en-US" dirty="0"/>
+              <a:t>Goals of this Course</a:t>
+            </a:r>
+          </a:p>
+        </p:txBody>
+      </p:sp>
+      <p:sp>
+        <p:nvSpPr>
+          <p:cNvPr id="4" name="Content Placeholder 3">
+            <a:extLst>
+              <a:ext uri="{FF2B5EF4-FFF2-40B4-BE49-F238E27FC236}">
+                <a16:creationId xmlns:a16="http://schemas.microsoft.com/office/drawing/2014/main" id="{098AC74C-D46C-DC2D-A2A6-253EDFA513E5}"/>
+              </a:ext>
+            </a:extLst>
+          </p:cNvPr>
+          <p:cNvSpPr>
+            <a:spLocks noGrp="1"/>
+          </p:cNvSpPr>
+          <p:nvPr>
+            <p:ph idx="1"/>
+          </p:nvPr>
+        </p:nvSpPr>
+        <p:spPr/>
+        <p:txBody>
+          <a:bodyPr/>
+          <a:lstStyle/>
+          <a:p>
+            <a:pPr marL="457200" indent="-457200">
+              <a:buFont typeface="+mj-lt"/>
+              <a:buAutoNum type="arabicPeriod"/>
+            </a:pPr>
+            <a:r>
+              <a:rPr lang="en-US" dirty="0"/>
+              <a:t>Gain a good understanding of the mathematical basis of machine learning (ML), which is a foundational component of artificial intelligence (AI).</a:t>
+            </a:r>
+            <a:br>
+              <a:rPr lang="en-US" dirty="0"/>
+            </a:br>
+            <a:endParaRPr lang="en-US" dirty="0"/>
+          </a:p>
+          <a:p>
+            <a:pPr marL="457200" indent="-457200">
+              <a:buFont typeface="+mj-lt"/>
+              <a:buAutoNum type="arabicPeriod"/>
+            </a:pPr>
+            <a:r>
+              <a:rPr lang="en-US" dirty="0"/>
+              <a:t>Gain experience building ML models using </a:t>
+            </a:r>
+            <a:r>
+              <a:rPr lang="en-US" b="1" dirty="0" err="1">
+                <a:solidFill>
+                  <a:srgbClr val="0033CC"/>
+                </a:solidFill>
+              </a:rPr>
+              <a:t>PyTorch</a:t>
+            </a:r>
+            <a:r>
+              <a:rPr lang="en-US" dirty="0"/>
+              <a:t> to solve data science problems in physics.</a:t>
+            </a:r>
+            <a:br>
+              <a:rPr lang="en-US" dirty="0"/>
+            </a:br>
+            <a:endParaRPr lang="en-US" dirty="0"/>
+          </a:p>
+          <a:p>
+            <a:pPr marL="457200" indent="-457200">
+              <a:buFont typeface="+mj-lt"/>
+              <a:buAutoNum type="arabicPeriod"/>
+            </a:pPr>
+            <a:r>
+              <a:rPr lang="en-US" dirty="0"/>
+              <a:t>Gain experience with different ML models.</a:t>
+            </a:r>
+            <a:br>
+              <a:rPr lang="en-US" dirty="0"/>
+            </a:br>
+            <a:endParaRPr lang="en-US" dirty="0"/>
+          </a:p>
+          <a:p>
+            <a:pPr marL="457200" indent="-457200">
+              <a:buFont typeface="+mj-lt"/>
+              <a:buAutoNum type="arabicPeriod"/>
+            </a:pPr>
+            <a:r>
+              <a:rPr lang="en-US" dirty="0"/>
+              <a:t>Gain an appreciation of the power of ML models as well as their (current) limitations.</a:t>
+            </a:r>
+          </a:p>
+          <a:p>
+            <a:pPr marL="0" indent="0">
+              <a:buNone/>
+            </a:pPr>
+            <a:endParaRPr lang="en-US" dirty="0"/>
+          </a:p>
+        </p:txBody>
+      </p:sp>
+    </p:spTree>
+    <p:extLst>
+      <p:ext uri="{BB962C8B-B14F-4D97-AF65-F5344CB8AC3E}">
+        <p14:creationId xmlns:p14="http://schemas.microsoft.com/office/powerpoint/2010/main" val="2535860759"/>
+      </p:ext>
+    </p:extLst>
+  </p:cSld>
+  <p:clrMapOvr>
+    <a:masterClrMapping/>
+  </p:clrMapOvr>
+  <mc:AlternateContent xmlns:mc="http://schemas.openxmlformats.org/markup-compatibility/2006" xmlns:p14="http://schemas.microsoft.com/office/powerpoint/2010/main">
+    <mc:Choice Requires="p14">
+      <p:transition spd="med" p14:dur="700">
+        <p:fade/>
+      </p:transition>
+    </mc:Choice>
+    <mc:Fallback xmlns="">
+      <p:transition spd="med">
+        <p:fade/>
+      </p:transition>
+    </mc:Fallback>
+  </mc:AlternateContent>
+  <p:timing>
+    <p:tnLst>
+      <p:par>
+        <p:cTn id="1" dur="indefinite" restart="never" nodeType="tmRoot">
+          <p:childTnLst>
+            <p:seq concurrent="1" nextAc="seek">
+              <p:cTn id="2" dur="indefinite" nodeType="mainSeq">
+                <p:childTnLst>
+                  <p:par>
+                    <p:cTn id="3" fill="hold">
+                      <p:stCondLst>
+                        <p:cond delay="indefinite"/>
+                      </p:stCondLst>
+                      <p:childTnLst>
+                        <p:par>
+                          <p:cTn id="4" fill="hold">
+                            <p:stCondLst>
+                              <p:cond delay="0"/>
+                            </p:stCondLst>
+                            <p:childTnLst>
+                              <p:par>
+                                <p:cTn id="5" presetID="1" presetClass="entr" presetSubtype="0" fill="hold" nodeType="clickEffect">
+                                  <p:stCondLst>
+                                    <p:cond delay="0"/>
+                                  </p:stCondLst>
+                                  <p:childTnLst>
+                                    <p:set>
+                                      <p:cBhvr>
+                                        <p:cTn id="6" dur="1" fill="hold">
+                                          <p:stCondLst>
+                                            <p:cond delay="0"/>
+                                          </p:stCondLst>
+                                        </p:cTn>
+                                        <p:tgtEl>
+                                          <p:spTgt spid="4">
+                                            <p:txEl>
+                                              <p:pRg st="1" end="1"/>
+                                            </p:txEl>
+                                          </p:spTgt>
+                                        </p:tgtEl>
+                                        <p:attrNameLst>
+                                          <p:attrName>style.visibility</p:attrName>
+                                        </p:attrNameLst>
+                                      </p:cBhvr>
+                                      <p:to>
+                                        <p:strVal val="visible"/>
+                                      </p:to>
+                                    </p:set>
+                                  </p:childTnLst>
+                                </p:cTn>
+                              </p:par>
+                            </p:childTnLst>
+                          </p:cTn>
+                        </p:par>
+                      </p:childTnLst>
+                    </p:cTn>
+                  </p:par>
+                  <p:par>
+                    <p:cTn id="7" fill="hold">
+                      <p:stCondLst>
+                        <p:cond delay="indefinite"/>
+                      </p:stCondLst>
+                      <p:childTnLst>
+                        <p:par>
+                          <p:cTn id="8" fill="hold">
+                            <p:stCondLst>
+                              <p:cond delay="0"/>
+                            </p:stCondLst>
+                            <p:childTnLst>
+                              <p:par>
+                                <p:cTn id="9" presetID="1" presetClass="entr" presetSubtype="0" fill="hold" nodeType="clickEffect">
+                                  <p:stCondLst>
+                                    <p:cond delay="0"/>
+                                  </p:stCondLst>
+                                  <p:childTnLst>
+                                    <p:set>
+                                      <p:cBhvr>
+                                        <p:cTn id="10" dur="1" fill="hold">
+                                          <p:stCondLst>
+                                            <p:cond delay="0"/>
+                                          </p:stCondLst>
+                                        </p:cTn>
+                                        <p:tgtEl>
+                                          <p:spTgt spid="4">
+                                            <p:txEl>
+                                              <p:pRg st="2" end="2"/>
+                                            </p:txEl>
+                                          </p:spTgt>
+                                        </p:tgtEl>
+                                        <p:attrNameLst>
+                                          <p:attrName>style.visibility</p:attrName>
+                                        </p:attrNameLst>
+                                      </p:cBhvr>
+                                      <p:to>
+                                        <p:strVal val="visible"/>
+                                      </p:to>
+                                    </p:set>
+                                  </p:childTnLst>
+                                </p:cTn>
+                              </p:par>
+                            </p:childTnLst>
+                          </p:cTn>
+                        </p:par>
+                      </p:childTnLst>
+                    </p:cTn>
+                  </p:par>
+                  <p:par>
+                    <p:cTn id="11" fill="hold">
+                      <p:stCondLst>
+                        <p:cond delay="indefinite"/>
+                      </p:stCondLst>
+                      <p:childTnLst>
+                        <p:par>
+                          <p:cTn id="12" fill="hold">
+                            <p:stCondLst>
+                              <p:cond delay="0"/>
+                            </p:stCondLst>
+                            <p:childTnLst>
+                              <p:par>
+                                <p:cTn id="13" presetID="1" presetClass="entr" presetSubtype="0" fill="hold" nodeType="clickEffect">
+                                  <p:stCondLst>
+                                    <p:cond delay="0"/>
+                                  </p:stCondLst>
+                                  <p:childTnLst>
+                                    <p:set>
+                                      <p:cBhvr>
+                                        <p:cTn id="14" dur="1" fill="hold">
+                                          <p:stCondLst>
+                                            <p:cond delay="0"/>
+                                          </p:stCondLst>
+                                        </p:cTn>
+                                        <p:tgtEl>
+                                          <p:spTgt spid="4">
+                                            <p:txEl>
+                                              <p:pRg st="3" end="3"/>
+                                            </p:txEl>
+                                          </p:spTgt>
+                                        </p:tgtEl>
+                                        <p:attrNameLst>
+                                          <p:attrName>style.visibility</p:attrName>
+                                        </p:attrNameLst>
+                                      </p:cBhvr>
+                                      <p:to>
+                                        <p:strVal val="visible"/>
+                                      </p:to>
+                                    </p:set>
+                                  </p:childTnLst>
+                                </p:cTn>
+                              </p:par>
+                            </p:childTnLst>
+                          </p:cTn>
+                        </p:par>
+                      </p:childTnLst>
+                    </p:cTn>
+                  </p:par>
+                </p:childTnLst>
+              </p:cTn>
+              <p:prevCondLst>
+                <p:cond evt="onPrev" delay="0">
+                  <p:tgtEl>
+                    <p:sldTgt/>
+                  </p:tgtEl>
+                </p:cond>
+              </p:prevCondLst>
+              <p:nextCondLst>
+                <p:cond evt="onNext" delay="0">
+                  <p:tgtEl>
+                    <p:sldTgt/>
+                  </p:tgtEl>
+                </p:cond>
+              </p:nextCondLst>
+            </p:seq>
+          </p:childTnLst>
+        </p:cTn>
+      </p:par>
+    </p:tnLst>
+  </p:timing>
+</p:sld>
+</file>
+
+<file path=ppt/slides/slide20.xml><?xml version="1.0" encoding="utf-8"?>
 <p:sld xmlns:a="http://schemas.openxmlformats.org/drawingml/2006/main" xmlns:r="http://schemas.openxmlformats.org/officeDocument/2006/relationships" xmlns:p="http://schemas.openxmlformats.org/presentationml/2006/main">
   <p:cSld>
     <p:spTree>
@@ -15751,7 +13355,7 @@
                     <m:sSup>
                       <m:sSupPr>
                         <m:ctrlPr>
-                          <a:rPr lang="en-US" i="1">
+                          <a:rPr lang="en-US" b="1" i="1">
                             <a:latin typeface="Cambria Math" panose="02040503050406030204" pitchFamily="18" charset="0"/>
                           </a:rPr>
                         </m:ctrlPr>
@@ -15971,7 +13575,7 @@
               <a:pPr>
                 <a:defRPr/>
               </a:pPr>
-              <a:t>22</a:t>
+              <a:t>20</a:t>
             </a:fld>
             <a:endParaRPr lang="en-US"/>
           </a:p>
@@ -16070,10 +13674,7 @@
                       <a:pPr/>
                       <a14:m>
                         <m:oMathPara xmlns:m="http://schemas.openxmlformats.org/officeDocument/2006/math">
-                          <m:oMathParaPr>
-                            <m:jc m:val="centerGroup"/>
-                          </m:oMathParaPr>
-                          <m:oMath xmlns:m="http://schemas.openxmlformats.org/officeDocument/2006/math">
+                          <m:oMath>
                             <m:sSub>
                               <m:sSubPr>
                                 <m:ctrlPr>
@@ -16113,10 +13714,7 @@
                       <a:pPr/>
                       <a14:m>
                         <m:oMathPara xmlns:m="http://schemas.openxmlformats.org/officeDocument/2006/math">
-                          <m:oMathParaPr>
-                            <m:jc m:val="centerGroup"/>
-                          </m:oMathParaPr>
-                          <m:oMath xmlns:m="http://schemas.openxmlformats.org/officeDocument/2006/math">
+                          <m:oMath>
                             <m:sSub>
                               <m:sSubPr>
                                 <m:ctrlPr>
@@ -16157,10 +13755,7 @@
                       <a:pPr/>
                       <a14:m>
                         <m:oMathPara xmlns:m="http://schemas.openxmlformats.org/officeDocument/2006/math">
-                          <m:oMathParaPr>
-                            <m:jc m:val="centerGroup"/>
-                          </m:oMathParaPr>
-                          <m:oMath xmlns:m="http://schemas.openxmlformats.org/officeDocument/2006/math">
+                          <m:oMath>
                             <m:r>
                               <a:rPr lang="en-US" sz="3200" b="0" i="1" smtClean="0">
                                 <a:latin typeface="Cambria Math" panose="02040503050406030204" pitchFamily="18" charset="0"/>
@@ -16177,10 +13772,7 @@
                       <a:pPr/>
                       <a14:m>
                         <m:oMathPara xmlns:m="http://schemas.openxmlformats.org/officeDocument/2006/math">
-                          <m:oMathParaPr>
-                            <m:jc m:val="centerGroup"/>
-                          </m:oMathParaPr>
-                          <m:oMath xmlns:m="http://schemas.openxmlformats.org/officeDocument/2006/math">
+                          <m:oMath>
                             <m:sSub>
                               <m:sSubPr>
                                 <m:ctrlPr>
@@ -16340,10 +13932,7 @@
                         </a:pPr>
                         <a14:m>
                           <m:oMathPara xmlns:m="http://schemas.openxmlformats.org/officeDocument/2006/math">
-                            <m:oMathParaPr>
-                              <m:jc m:val="centerGroup"/>
-                            </m:oMathParaPr>
-                            <m:oMath xmlns:m="http://schemas.openxmlformats.org/officeDocument/2006/math">
+                            <m:oMath>
                               <m:sSub>
                                 <m:sSubPr>
                                   <m:ctrlPr>
@@ -16976,10 +14565,7 @@
                         <a:pPr/>
                         <a14:m>
                           <m:oMathPara xmlns:m="http://schemas.openxmlformats.org/officeDocument/2006/math">
-                            <m:oMathParaPr>
-                              <m:jc m:val="centerGroup"/>
-                            </m:oMathParaPr>
-                            <m:oMath xmlns:m="http://schemas.openxmlformats.org/officeDocument/2006/math">
+                            <m:oMath>
                               <m:sSub>
                                 <m:sSubPr>
                                   <m:ctrlPr>
@@ -17121,10 +14707,7 @@
                     </a:pPr>
                     <a14:m>
                       <m:oMathPara xmlns:m="http://schemas.openxmlformats.org/officeDocument/2006/math">
-                        <m:oMathParaPr>
-                          <m:jc m:val="centerGroup"/>
-                        </m:oMathParaPr>
-                        <m:oMath xmlns:m="http://schemas.openxmlformats.org/officeDocument/2006/math">
+                        <m:oMath>
                           <m:r>
                             <a:rPr kumimoji="0" lang="en-US" sz="2800" b="0" i="1" u="none" strike="noStrike" cap="none" normalizeH="0" baseline="0" smtClean="0">
                               <a:ln>
@@ -17345,10 +14928,7 @@
                       </a:pPr>
                       <a14:m>
                         <m:oMathPara xmlns:m="http://schemas.openxmlformats.org/officeDocument/2006/math">
-                          <m:oMathParaPr>
-                            <m:jc m:val="centerGroup"/>
-                          </m:oMathParaPr>
-                          <m:oMath xmlns:m="http://schemas.openxmlformats.org/officeDocument/2006/math">
+                          <m:oMath>
                             <m:sSub>
                               <m:sSubPr>
                                 <m:ctrlPr>
@@ -17773,10 +15353,7 @@
                       <a:pPr/>
                       <a14:m>
                         <m:oMathPara xmlns:m="http://schemas.openxmlformats.org/officeDocument/2006/math">
-                          <m:oMathParaPr>
-                            <m:jc m:val="centerGroup"/>
-                          </m:oMathParaPr>
-                          <m:oMath xmlns:m="http://schemas.openxmlformats.org/officeDocument/2006/math">
+                          <m:oMath>
                             <m:sSub>
                               <m:sSubPr>
                                 <m:ctrlPr>
@@ -17917,10 +15494,7 @@
                     </a:pPr>
                     <a14:m>
                       <m:oMathPara xmlns:m="http://schemas.openxmlformats.org/officeDocument/2006/math">
-                        <m:oMathParaPr>
-                          <m:jc m:val="centerGroup"/>
-                        </m:oMathParaPr>
-                        <m:oMath xmlns:m="http://schemas.openxmlformats.org/officeDocument/2006/math">
+                        <m:oMath>
                           <m:r>
                             <a:rPr kumimoji="0" lang="en-US" sz="2800" b="0" i="1" u="none" strike="noStrike" cap="none" normalizeH="0" baseline="0" smtClean="0">
                               <a:ln>
@@ -18066,7 +15640,7 @@
 </p:sld>
 </file>
 
-<file path=ppt/slides/slide23.xml><?xml version="1.0" encoding="utf-8"?>
+<file path=ppt/slides/slide21.xml><?xml version="1.0" encoding="utf-8"?>
 <p:sld xmlns:a="http://schemas.openxmlformats.org/drawingml/2006/main" xmlns:r="http://schemas.openxmlformats.org/officeDocument/2006/relationships" xmlns:p="http://schemas.openxmlformats.org/presentationml/2006/main">
   <p:cSld>
     <p:spTree>
@@ -18147,10 +15721,7 @@
                 </a:pPr>
                 <a14:m>
                   <m:oMathPara xmlns:m="http://schemas.openxmlformats.org/officeDocument/2006/math">
-                    <m:oMathParaPr>
-                      <m:jc m:val="centerGroup"/>
-                    </m:oMathParaPr>
-                    <m:oMath xmlns:m="http://schemas.openxmlformats.org/officeDocument/2006/math">
+                    <m:oMath>
                       <m:r>
                         <a:rPr lang="en-US" sz="2400" b="0" i="1" smtClean="0">
                           <a:latin typeface="Cambria Math" panose="02040503050406030204" pitchFamily="18" charset="0"/>
@@ -18457,7 +16028,7 @@
                     <m:d>
                       <m:dPr>
                         <m:ctrlPr>
-                          <a:rPr lang="en-US" b="0" i="1" smtClean="0">
+                          <a:rPr lang="en-US" i="1">
                             <a:solidFill>
                               <a:srgbClr val="0033CC"/>
                             </a:solidFill>
@@ -18493,7 +16064,7 @@
                           <m:rPr>
                             <m:nor/>
                           </m:rPr>
-                          <a:rPr lang="en-US" dirty="0">
+                          <a:rPr lang="en-US" i="0" dirty="0">
                             <a:solidFill>
                               <a:srgbClr val="0033CC"/>
                             </a:solidFill>
@@ -18710,7 +16281,7 @@
                         <m:d>
                           <m:dPr>
                             <m:ctrlPr>
-                              <a:rPr lang="en-US" i="1">
+                              <a:rPr lang="en-US" b="0" i="1" smtClean="0">
                                 <a:solidFill>
                                   <a:srgbClr val="0033CC"/>
                                 </a:solidFill>
@@ -18897,7 +16468,7 @@
               <a:pPr>
                 <a:defRPr/>
               </a:pPr>
-              <a:t>23</a:t>
+              <a:t>21</a:t>
             </a:fld>
             <a:endParaRPr lang="en-US"/>
           </a:p>
@@ -18996,10 +16567,7 @@
                       <a:pPr/>
                       <a14:m>
                         <m:oMathPara xmlns:m="http://schemas.openxmlformats.org/officeDocument/2006/math">
-                          <m:oMathParaPr>
-                            <m:jc m:val="centerGroup"/>
-                          </m:oMathParaPr>
-                          <m:oMath xmlns:m="http://schemas.openxmlformats.org/officeDocument/2006/math">
+                          <m:oMath>
                             <m:sSub>
                               <m:sSubPr>
                                 <m:ctrlPr>
@@ -19039,10 +16607,7 @@
                       <a:pPr/>
                       <a14:m>
                         <m:oMathPara xmlns:m="http://schemas.openxmlformats.org/officeDocument/2006/math">
-                          <m:oMathParaPr>
-                            <m:jc m:val="centerGroup"/>
-                          </m:oMathParaPr>
-                          <m:oMath xmlns:m="http://schemas.openxmlformats.org/officeDocument/2006/math">
+                          <m:oMath>
                             <m:sSub>
                               <m:sSubPr>
                                 <m:ctrlPr>
@@ -19083,10 +16648,7 @@
                       <a:pPr/>
                       <a14:m>
                         <m:oMathPara xmlns:m="http://schemas.openxmlformats.org/officeDocument/2006/math">
-                          <m:oMathParaPr>
-                            <m:jc m:val="centerGroup"/>
-                          </m:oMathParaPr>
-                          <m:oMath xmlns:m="http://schemas.openxmlformats.org/officeDocument/2006/math">
+                          <m:oMath>
                             <m:r>
                               <a:rPr lang="en-US" sz="3200" b="0" i="1" smtClean="0">
                                 <a:latin typeface="Cambria Math" panose="02040503050406030204" pitchFamily="18" charset="0"/>
@@ -19103,10 +16665,7 @@
                       <a:pPr/>
                       <a14:m>
                         <m:oMathPara xmlns:m="http://schemas.openxmlformats.org/officeDocument/2006/math">
-                          <m:oMathParaPr>
-                            <m:jc m:val="centerGroup"/>
-                          </m:oMathParaPr>
-                          <m:oMath xmlns:m="http://schemas.openxmlformats.org/officeDocument/2006/math">
+                          <m:oMath>
                             <m:sSub>
                               <m:sSubPr>
                                 <m:ctrlPr>
@@ -19266,10 +16825,7 @@
                         </a:pPr>
                         <a14:m>
                           <m:oMathPara xmlns:m="http://schemas.openxmlformats.org/officeDocument/2006/math">
-                            <m:oMathParaPr>
-                              <m:jc m:val="centerGroup"/>
-                            </m:oMathParaPr>
-                            <m:oMath xmlns:m="http://schemas.openxmlformats.org/officeDocument/2006/math">
+                            <m:oMath>
                               <m:sSub>
                                 <m:sSubPr>
                                   <m:ctrlPr>
@@ -19902,10 +17458,7 @@
                         <a:pPr/>
                         <a14:m>
                           <m:oMathPara xmlns:m="http://schemas.openxmlformats.org/officeDocument/2006/math">
-                            <m:oMathParaPr>
-                              <m:jc m:val="centerGroup"/>
-                            </m:oMathParaPr>
-                            <m:oMath xmlns:m="http://schemas.openxmlformats.org/officeDocument/2006/math">
+                            <m:oMath>
                               <m:sSub>
                                 <m:sSubPr>
                                   <m:ctrlPr>
@@ -20047,10 +17600,7 @@
                     </a:pPr>
                     <a14:m>
                       <m:oMathPara xmlns:m="http://schemas.openxmlformats.org/officeDocument/2006/math">
-                        <m:oMathParaPr>
-                          <m:jc m:val="centerGroup"/>
-                        </m:oMathParaPr>
-                        <m:oMath xmlns:m="http://schemas.openxmlformats.org/officeDocument/2006/math">
+                        <m:oMath>
                           <m:r>
                             <a:rPr kumimoji="0" lang="en-US" sz="2800" b="0" i="1" u="none" strike="noStrike" cap="none" normalizeH="0" baseline="0" smtClean="0">
                               <a:ln>
@@ -20271,10 +17821,7 @@
                       </a:pPr>
                       <a14:m>
                         <m:oMathPara xmlns:m="http://schemas.openxmlformats.org/officeDocument/2006/math">
-                          <m:oMathParaPr>
-                            <m:jc m:val="centerGroup"/>
-                          </m:oMathParaPr>
-                          <m:oMath xmlns:m="http://schemas.openxmlformats.org/officeDocument/2006/math">
+                          <m:oMath>
                             <m:sSub>
                               <m:sSubPr>
                                 <m:ctrlPr>
@@ -20699,10 +18246,7 @@
                       <a:pPr/>
                       <a14:m>
                         <m:oMathPara xmlns:m="http://schemas.openxmlformats.org/officeDocument/2006/math">
-                          <m:oMathParaPr>
-                            <m:jc m:val="centerGroup"/>
-                          </m:oMathParaPr>
-                          <m:oMath xmlns:m="http://schemas.openxmlformats.org/officeDocument/2006/math">
+                          <m:oMath>
                             <m:sSub>
                               <m:sSubPr>
                                 <m:ctrlPr>
@@ -20843,10 +18387,7 @@
                     </a:pPr>
                     <a14:m>
                       <m:oMathPara xmlns:m="http://schemas.openxmlformats.org/officeDocument/2006/math">
-                        <m:oMathParaPr>
-                          <m:jc m:val="centerGroup"/>
-                        </m:oMathParaPr>
-                        <m:oMath xmlns:m="http://schemas.openxmlformats.org/officeDocument/2006/math">
+                        <m:oMath>
                           <m:r>
                             <a:rPr kumimoji="0" lang="en-US" sz="2800" b="0" i="1" u="none" strike="noStrike" cap="none" normalizeH="0" baseline="0" smtClean="0">
                               <a:ln>
@@ -20980,7 +18521,7 @@
 </p:sld>
 </file>
 
-<file path=ppt/slides/slide24.xml><?xml version="1.0" encoding="utf-8"?>
+<file path=ppt/slides/slide22.xml><?xml version="1.0" encoding="utf-8"?>
 <p:sld xmlns:a="http://schemas.openxmlformats.org/drawingml/2006/main" xmlns:r="http://schemas.openxmlformats.org/officeDocument/2006/relationships" xmlns:p="http://schemas.openxmlformats.org/presentationml/2006/main">
   <p:cSld>
     <p:spTree>
@@ -20997,8 +18538,8 @@
           <a:chExt cx="0" cy="0"/>
         </a:xfrm>
       </p:grpSpPr>
-      <mc:AlternateContent xmlns:mc="http://schemas.openxmlformats.org/markup-compatibility/2006" xmlns:a14="http://schemas.microsoft.com/office/drawing/2010/main">
-        <mc:Choice Requires="a14">
+      <mc:AlternateContent xmlns:mc="http://schemas.openxmlformats.org/markup-compatibility/2006">
+        <mc:Choice xmlns:a14="http://schemas.microsoft.com/office/drawing/2010/main" Requires="a14">
           <p:sp>
             <p:nvSpPr>
               <p:cNvPr id="8" name="Content Placeholder 7">
@@ -21017,7 +18558,7 @@
             </p:nvSpPr>
             <p:spPr>
               <a:xfrm>
-                <a:off x="685800" y="1295400"/>
+                <a:off x="711200" y="1295400"/>
                 <a:ext cx="8001000" cy="4819650"/>
               </a:xfrm>
             </p:spPr>
@@ -21029,20 +18570,13 @@
                   <a:buNone/>
                 </a:pPr>
                 <a:r>
-                  <a:rPr lang="en-US" sz="2400" dirty="0"/>
-                  <a:t>Consider the task of modeling the </a:t>
+                  <a:rPr lang="en-US" dirty="0"/>
+                  <a:t>Consider modeling the data triplets </a:t>
                 </a:r>
-                <a:r>
-                  <a:rPr lang="en-US" dirty="0"/>
-                  <a:t>data triplets </a:t>
-                </a:r>
-                <a:br>
-                  <a:rPr lang="en-US" dirty="0"/>
-                </a:br>
                 <a14:m>
                   <m:oMath xmlns:m="http://schemas.openxmlformats.org/officeDocument/2006/math">
                     <m:r>
-                      <a:rPr lang="en-US" b="0" i="1" smtClean="0">
+                      <a:rPr lang="en-US" i="1">
                         <a:solidFill>
                           <a:srgbClr val="0033CC"/>
                         </a:solidFill>
@@ -21051,7 +18585,7 @@
                       <m:t>𝐷</m:t>
                     </m:r>
                     <m:r>
-                      <a:rPr lang="en-US" b="0" i="1" smtClean="0">
+                      <a:rPr lang="en-US" i="1">
                         <a:solidFill>
                           <a:srgbClr val="0033CC"/>
                         </a:solidFill>
@@ -21064,7 +18598,7 @@
                         <m:begChr m:val="{"/>
                         <m:endChr m:val="}"/>
                         <m:ctrlPr>
-                          <a:rPr lang="en-US" b="0" i="1" smtClean="0">
+                          <a:rPr lang="en-US" i="1">
                             <a:solidFill>
                               <a:srgbClr val="0033CC"/>
                             </a:solidFill>
@@ -21076,7 +18610,7 @@
                         <m:sSubSup>
                           <m:sSubSupPr>
                             <m:ctrlPr>
-                              <a:rPr lang="en-US" b="0" i="1" smtClean="0">
+                              <a:rPr lang="en-US" i="1">
                                 <a:solidFill>
                                   <a:srgbClr val="0033CC"/>
                                 </a:solidFill>
@@ -21088,7 +18622,7 @@
                             <m:d>
                               <m:dPr>
                                 <m:ctrlPr>
-                                  <a:rPr lang="en-US" b="0" i="1" smtClean="0">
+                                  <a:rPr lang="en-US" i="1">
                                     <a:solidFill>
                                       <a:srgbClr val="0033CC"/>
                                     </a:solidFill>
@@ -21100,7 +18634,7 @@
                                 <m:sSub>
                                   <m:sSubPr>
                                     <m:ctrlPr>
-                                      <a:rPr lang="en-US" b="0" i="1" smtClean="0">
+                                      <a:rPr lang="en-US" i="1">
                                         <a:solidFill>
                                           <a:srgbClr val="0033CC"/>
                                         </a:solidFill>
@@ -21110,7 +18644,7 @@
                                   </m:sSubPr>
                                   <m:e>
                                     <m:r>
-                                      <a:rPr lang="en-US" b="0" i="1" smtClean="0">
+                                      <a:rPr lang="en-US" i="1">
                                         <a:solidFill>
                                           <a:srgbClr val="0033CC"/>
                                         </a:solidFill>
@@ -21121,7 +18655,7 @@
                                   </m:e>
                                   <m:sub>
                                     <m:r>
-                                      <a:rPr lang="en-US" b="0" i="1" smtClean="0">
+                                      <a:rPr lang="en-US" i="1">
                                         <a:solidFill>
                                           <a:srgbClr val="0033CC"/>
                                         </a:solidFill>
@@ -21132,7 +18666,7 @@
                                   </m:sub>
                                 </m:sSub>
                                 <m:r>
-                                  <a:rPr lang="en-US" b="0" i="1" smtClean="0">
+                                  <a:rPr lang="en-US" i="1">
                                     <a:solidFill>
                                       <a:srgbClr val="0033CC"/>
                                     </a:solidFill>
@@ -21143,7 +18677,7 @@
                                 <m:sSub>
                                   <m:sSubPr>
                                     <m:ctrlPr>
-                                      <a:rPr lang="en-US" b="0" i="1" smtClean="0">
+                                      <a:rPr lang="en-US" i="1">
                                         <a:solidFill>
                                           <a:srgbClr val="0033CC"/>
                                         </a:solidFill>
@@ -21153,7 +18687,7 @@
                                   </m:sSubPr>
                                   <m:e>
                                     <m:r>
-                                      <a:rPr lang="en-US" b="0" i="1" smtClean="0">
+                                      <a:rPr lang="en-US" i="1">
                                         <a:solidFill>
                                           <a:srgbClr val="0033CC"/>
                                         </a:solidFill>
@@ -21164,7 +18698,7 @@
                                   </m:e>
                                   <m:sub>
                                     <m:r>
-                                      <a:rPr lang="en-US" b="0" i="1" smtClean="0">
+                                      <a:rPr lang="en-US" i="1">
                                         <a:solidFill>
                                           <a:srgbClr val="0033CC"/>
                                         </a:solidFill>
@@ -21175,7 +18709,7 @@
                                   </m:sub>
                                 </m:sSub>
                                 <m:r>
-                                  <a:rPr lang="en-US" b="0" i="1" smtClean="0">
+                                  <a:rPr lang="en-US" i="1">
                                     <a:solidFill>
                                       <a:srgbClr val="0033CC"/>
                                     </a:solidFill>
@@ -21184,7 +18718,7 @@
                                   <m:t>,</m:t>
                                 </m:r>
                                 <m:r>
-                                  <a:rPr lang="en-US" b="0" i="1" smtClean="0">
+                                  <a:rPr lang="en-US" i="1">
                                     <a:solidFill>
                                       <a:srgbClr val="0033CC"/>
                                     </a:solidFill>
@@ -21197,7 +18731,7 @@
                           </m:e>
                           <m:sub>
                             <m:r>
-                              <a:rPr lang="en-US" b="0" i="1" smtClean="0">
+                              <a:rPr lang="en-US" i="1">
                                 <a:solidFill>
                                   <a:srgbClr val="0033CC"/>
                                 </a:solidFill>
@@ -21206,7 +18740,7 @@
                               <m:t>𝑖</m:t>
                             </m:r>
                             <m:r>
-                              <a:rPr lang="en-US" b="0" i="1" smtClean="0">
+                              <a:rPr lang="en-US" i="1">
                                 <a:solidFill>
                                   <a:srgbClr val="0033CC"/>
                                 </a:solidFill>
@@ -21217,7 +18751,7 @@
                           </m:sub>
                           <m:sup>
                             <m:r>
-                              <a:rPr lang="en-US" b="0" i="1" smtClean="0">
+                              <a:rPr lang="en-US" i="1">
                                 <a:solidFill>
                                   <a:srgbClr val="0033CC"/>
                                 </a:solidFill>
@@ -21232,18 +18766,13 @@
                   </m:oMath>
                 </a14:m>
                 <a:r>
-                  <a:rPr lang="en-US" sz="2400" dirty="0"/>
+                  <a:rPr lang="en-US" dirty="0"/>
                   <a:t> with a function of the form </a:t>
                 </a:r>
-              </a:p>
-              <a:p>
-                <a:pPr marL="0" indent="0">
-                  <a:buNone/>
-                </a:pPr>
                 <a14:m>
                   <m:oMath xmlns:m="http://schemas.openxmlformats.org/officeDocument/2006/math">
                     <m:r>
-                      <a:rPr lang="en-US" sz="2400" b="0" i="1" smtClean="0">
+                      <a:rPr lang="en-US" i="1">
                         <a:solidFill>
                           <a:srgbClr val="0033CC"/>
                         </a:solidFill>
@@ -21252,7 +18781,7 @@
                       <m:t>𝑦</m:t>
                     </m:r>
                     <m:r>
-                      <a:rPr lang="en-US" sz="2400" b="0" i="1" smtClean="0">
+                      <a:rPr lang="en-US" i="1">
                         <a:solidFill>
                           <a:srgbClr val="0033CC"/>
                         </a:solidFill>
@@ -21261,7 +18790,7 @@
                       <m:t>=</m:t>
                     </m:r>
                     <m:r>
-                      <a:rPr lang="en-US" sz="2400" b="0" i="1" smtClean="0">
+                      <a:rPr lang="en-US" i="1">
                         <a:solidFill>
                           <a:srgbClr val="0033CC"/>
                         </a:solidFill>
@@ -21272,7 +18801,7 @@
                     <m:d>
                       <m:dPr>
                         <m:ctrlPr>
-                          <a:rPr lang="en-US" sz="2400" i="1" smtClean="0">
+                          <a:rPr lang="en-US" i="1">
                             <a:solidFill>
                               <a:srgbClr val="0033CC"/>
                             </a:solidFill>
@@ -21284,7 +18813,7 @@
                         <m:sSub>
                           <m:sSubPr>
                             <m:ctrlPr>
-                              <a:rPr lang="en-US" sz="2400" i="1" smtClean="0">
+                              <a:rPr lang="en-US" i="1">
                                 <a:solidFill>
                                   <a:srgbClr val="0033CC"/>
                                 </a:solidFill>
@@ -21294,7 +18823,7 @@
                           </m:sSubPr>
                           <m:e>
                             <m:r>
-                              <a:rPr lang="en-US" sz="2400" b="0" i="1" smtClean="0">
+                              <a:rPr lang="en-US" i="1">
                                 <a:solidFill>
                                   <a:srgbClr val="0033CC"/>
                                 </a:solidFill>
@@ -21305,7 +18834,7 @@
                           </m:e>
                           <m:sub>
                             <m:r>
-                              <a:rPr lang="en-US" sz="2400" b="0" i="1" smtClean="0">
+                              <a:rPr lang="en-US" i="1">
                                 <a:solidFill>
                                   <a:srgbClr val="0033CC"/>
                                 </a:solidFill>
@@ -21316,7 +18845,7 @@
                           </m:sub>
                         </m:sSub>
                         <m:r>
-                          <a:rPr lang="en-US" sz="2400" b="0" i="1" smtClean="0">
+                          <a:rPr lang="en-US" i="1">
                             <a:solidFill>
                               <a:srgbClr val="0033CC"/>
                             </a:solidFill>
@@ -21327,7 +18856,7 @@
                         <m:sSub>
                           <m:sSubPr>
                             <m:ctrlPr>
-                              <a:rPr lang="en-US" sz="2400" i="1" smtClean="0">
+                              <a:rPr lang="en-US" i="1">
                                 <a:solidFill>
                                   <a:srgbClr val="0033CC"/>
                                 </a:solidFill>
@@ -21337,7 +18866,7 @@
                           </m:sSubPr>
                           <m:e>
                             <m:r>
-                              <a:rPr lang="en-US" sz="2400" b="0" i="1" smtClean="0">
+                              <a:rPr lang="en-US" i="1">
                                 <a:solidFill>
                                   <a:srgbClr val="0033CC"/>
                                 </a:solidFill>
@@ -21348,7 +18877,7 @@
                           </m:e>
                           <m:sub>
                             <m:r>
-                              <a:rPr lang="en-US" sz="2400" b="0" i="1" smtClean="0">
+                              <a:rPr lang="en-US" i="1">
                                 <a:solidFill>
                                   <a:srgbClr val="0033CC"/>
                                 </a:solidFill>
@@ -21359,7 +18888,7 @@
                           </m:sub>
                         </m:sSub>
                         <m:r>
-                          <a:rPr lang="en-US" sz="2400" b="0" i="1" smtClean="0">
+                          <a:rPr lang="en-US" i="1">
                             <a:solidFill>
                               <a:srgbClr val="0033CC"/>
                             </a:solidFill>
@@ -21368,7 +18897,7 @@
                           <m:t>,</m:t>
                         </m:r>
                         <m:r>
-                          <a:rPr lang="en-US" sz="2400" b="0" i="1" smtClean="0">
+                          <a:rPr lang="en-US" i="1">
                             <a:solidFill>
                               <a:srgbClr val="0033CC"/>
                             </a:solidFill>
@@ -21381,319 +18910,9 @@
                   </m:oMath>
                 </a14:m>
                 <a:r>
-                  <a:rPr lang="en-US" sz="2400" dirty="0"/>
-                  <a:t>. Let’s </a:t>
-                </a:r>
-                <a:r>
                   <a:rPr lang="en-US" dirty="0"/>
-                  <a:t>start with</a:t>
-                </a:r>
-                <a:r>
-                  <a:rPr lang="en-US" sz="2400" dirty="0"/>
-                  <a:t> a 2-input 4-node perceptron </a:t>
-                </a:r>
-                <a:r>
-                  <a:rPr lang="en-US" dirty="0"/>
-                  <a:t>with </a:t>
-                </a:r>
-                <a14:m>
-                  <m:oMath xmlns:m="http://schemas.openxmlformats.org/officeDocument/2006/math">
-                    <m:r>
-                      <a:rPr lang="en-US" b="0" i="1" smtClean="0">
-                        <a:solidFill>
-                          <a:srgbClr val="0033CC"/>
-                        </a:solidFill>
-                        <a:latin typeface="Cambria Math" panose="02040503050406030204" pitchFamily="18" charset="0"/>
-                      </a:rPr>
-                      <m:t>𝑔</m:t>
-                    </m:r>
-                    <m:d>
-                      <m:dPr>
-                        <m:ctrlPr>
-                          <a:rPr lang="en-US" b="0" i="1" smtClean="0">
-                            <a:solidFill>
-                              <a:srgbClr val="0033CC"/>
-                            </a:solidFill>
-                            <a:latin typeface="Cambria Math" panose="02040503050406030204" pitchFamily="18" charset="0"/>
-                          </a:rPr>
-                        </m:ctrlPr>
-                      </m:dPr>
-                      <m:e>
-                        <m:r>
-                          <a:rPr lang="en-US" b="0" i="1" smtClean="0">
-                            <a:solidFill>
-                              <a:srgbClr val="0033CC"/>
-                            </a:solidFill>
-                            <a:latin typeface="Cambria Math" panose="02040503050406030204" pitchFamily="18" charset="0"/>
-                          </a:rPr>
-                          <m:t>𝑧</m:t>
-                        </m:r>
-                      </m:e>
-                    </m:d>
-                    <m:r>
-                      <a:rPr lang="en-US" b="0" i="1" smtClean="0">
-                        <a:solidFill>
-                          <a:srgbClr val="0033CC"/>
-                        </a:solidFill>
-                        <a:latin typeface="Cambria Math" panose="02040503050406030204" pitchFamily="18" charset="0"/>
-                      </a:rPr>
-                      <m:t>=</m:t>
-                    </m:r>
-                    <m:r>
-                      <a:rPr lang="en-US" b="0" i="1" smtClean="0">
-                        <a:solidFill>
-                          <a:srgbClr val="0033CC"/>
-                        </a:solidFill>
-                        <a:latin typeface="Cambria Math" panose="02040503050406030204" pitchFamily="18" charset="0"/>
-                      </a:rPr>
-                      <m:t>𝑧</m:t>
-                    </m:r>
-                    <m:r>
-                      <a:rPr lang="en-US" b="0" i="1" smtClean="0">
-                        <a:solidFill>
-                          <a:srgbClr val="0033CC"/>
-                        </a:solidFill>
-                        <a:latin typeface="Cambria Math" panose="02040503050406030204" pitchFamily="18" charset="0"/>
-                      </a:rPr>
-                      <m:t>𝜎</m:t>
-                    </m:r>
-                    <m:d>
-                      <m:dPr>
-                        <m:ctrlPr>
-                          <a:rPr lang="en-US" b="0" i="1" smtClean="0">
-                            <a:solidFill>
-                              <a:srgbClr val="0033CC"/>
-                            </a:solidFill>
-                            <a:latin typeface="Cambria Math" panose="02040503050406030204" pitchFamily="18" charset="0"/>
-                          </a:rPr>
-                        </m:ctrlPr>
-                      </m:dPr>
-                      <m:e>
-                        <m:r>
-                          <a:rPr lang="en-US" b="0" i="1" smtClean="0">
-                            <a:solidFill>
-                              <a:srgbClr val="0033CC"/>
-                            </a:solidFill>
-                            <a:latin typeface="Cambria Math" panose="02040503050406030204" pitchFamily="18" charset="0"/>
-                          </a:rPr>
-                          <m:t>𝑧</m:t>
-                        </m:r>
-                      </m:e>
-                    </m:d>
-                  </m:oMath>
-                </a14:m>
-                <a:r>
-                  <a:rPr lang="en-US" sz="2400" dirty="0"/>
-                  <a:t>,</a:t>
-                </a:r>
-              </a:p>
-              <a:p>
-                <a:pPr marL="0" indent="0">
-                  <a:buNone/>
-                </a:pPr>
-                <a:r>
-                  <a:rPr lang="en-US" dirty="0"/>
-                  <a:t>where,</a:t>
-                </a:r>
-              </a:p>
-              <a:p>
-                <a:pPr marL="0" indent="0">
-                  <a:buNone/>
-                </a:pPr>
-                <a14:m>
-                  <m:oMathPara xmlns:m="http://schemas.openxmlformats.org/officeDocument/2006/math">
-                    <m:oMathParaPr>
-                      <m:jc m:val="left"/>
-                    </m:oMathParaPr>
-                    <m:oMath xmlns:m="http://schemas.openxmlformats.org/officeDocument/2006/math">
-                      <m:r>
-                        <a:rPr lang="en-US" b="0" i="1" smtClean="0">
-                          <a:latin typeface="Cambria Math" panose="02040503050406030204" pitchFamily="18" charset="0"/>
-                        </a:rPr>
-                        <m:t>𝜎</m:t>
-                      </m:r>
-                      <m:d>
-                        <m:dPr>
-                          <m:ctrlPr>
-                            <a:rPr lang="en-US" b="0" i="1" smtClean="0">
-                              <a:latin typeface="Cambria Math" panose="02040503050406030204" pitchFamily="18" charset="0"/>
-                            </a:rPr>
-                          </m:ctrlPr>
-                        </m:dPr>
-                        <m:e>
-                          <m:r>
-                            <a:rPr lang="en-US" b="0" i="1" smtClean="0">
-                              <a:latin typeface="Cambria Math" panose="02040503050406030204" pitchFamily="18" charset="0"/>
-                            </a:rPr>
-                            <m:t>𝑧</m:t>
-                          </m:r>
-                        </m:e>
-                      </m:d>
-                      <m:r>
-                        <a:rPr lang="en-US" b="0" i="1" smtClean="0">
-                          <a:latin typeface="Cambria Math" panose="02040503050406030204" pitchFamily="18" charset="0"/>
-                        </a:rPr>
-                        <m:t>=</m:t>
-                      </m:r>
-                      <m:f>
-                        <m:fPr>
-                          <m:ctrlPr>
-                            <a:rPr lang="en-US" b="0" i="1" smtClean="0">
-                              <a:latin typeface="Cambria Math" panose="02040503050406030204" pitchFamily="18" charset="0"/>
-                            </a:rPr>
-                          </m:ctrlPr>
-                        </m:fPr>
-                        <m:num>
-                          <m:r>
-                            <a:rPr lang="en-US" b="0" i="1" smtClean="0">
-                              <a:latin typeface="Cambria Math" panose="02040503050406030204" pitchFamily="18" charset="0"/>
-                            </a:rPr>
-                            <m:t>1</m:t>
-                          </m:r>
-                        </m:num>
-                        <m:den>
-                          <m:d>
-                            <m:dPr>
-                              <m:ctrlPr>
-                                <a:rPr lang="en-US" b="0" i="1" smtClean="0">
-                                  <a:latin typeface="Cambria Math" panose="02040503050406030204" pitchFamily="18" charset="0"/>
-                                </a:rPr>
-                              </m:ctrlPr>
-                            </m:dPr>
-                            <m:e>
-                              <m:r>
-                                <a:rPr lang="en-US" b="0" i="1" smtClean="0">
-                                  <a:latin typeface="Cambria Math" panose="02040503050406030204" pitchFamily="18" charset="0"/>
-                                </a:rPr>
-                                <m:t>1+</m:t>
-                              </m:r>
-                              <m:sSup>
-                                <m:sSupPr>
-                                  <m:ctrlPr>
-                                    <a:rPr lang="en-US" b="0" i="1" smtClean="0">
-                                      <a:latin typeface="Cambria Math" panose="02040503050406030204" pitchFamily="18" charset="0"/>
-                                    </a:rPr>
-                                  </m:ctrlPr>
-                                </m:sSupPr>
-                                <m:e>
-                                  <m:r>
-                                    <a:rPr lang="en-US" b="0" i="1" smtClean="0">
-                                      <a:latin typeface="Cambria Math" panose="02040503050406030204" pitchFamily="18" charset="0"/>
-                                    </a:rPr>
-                                    <m:t>𝑒</m:t>
-                                  </m:r>
-                                </m:e>
-                                <m:sup>
-                                  <m:r>
-                                    <a:rPr lang="en-US" b="0" i="1" smtClean="0">
-                                      <a:latin typeface="Cambria Math" panose="02040503050406030204" pitchFamily="18" charset="0"/>
-                                    </a:rPr>
-                                    <m:t>−</m:t>
-                                  </m:r>
-                                  <m:r>
-                                    <a:rPr lang="en-US" b="0" i="1" smtClean="0">
-                                      <a:latin typeface="Cambria Math" panose="02040503050406030204" pitchFamily="18" charset="0"/>
-                                    </a:rPr>
-                                    <m:t>𝑧</m:t>
-                                  </m:r>
-                                </m:sup>
-                              </m:sSup>
-                            </m:e>
-                          </m:d>
-                        </m:den>
-                      </m:f>
-                    </m:oMath>
-                  </m:oMathPara>
-                </a14:m>
-                <a:endParaRPr lang="en-US" b="0" dirty="0"/>
-              </a:p>
-              <a:p>
-                <a:pPr marL="0" indent="0">
-                  <a:buNone/>
-                </a:pPr>
-                <a:endParaRPr lang="en-US" dirty="0"/>
-              </a:p>
-              <a:p>
-                <a:pPr marL="0" indent="0">
-                  <a:buNone/>
-                </a:pPr>
-                <a14:m>
-                  <m:oMath xmlns:m="http://schemas.openxmlformats.org/officeDocument/2006/math">
-                    <m:r>
-                      <a:rPr lang="en-US" i="1">
-                        <a:latin typeface="Cambria Math" panose="02040503050406030204" pitchFamily="18" charset="0"/>
-                      </a:rPr>
-                      <m:t>𝑧</m:t>
-                    </m:r>
-                    <m:r>
-                      <a:rPr lang="en-US" i="1">
-                        <a:latin typeface="Cambria Math" panose="02040503050406030204" pitchFamily="18" charset="0"/>
-                      </a:rPr>
-                      <m:t>𝜎</m:t>
-                    </m:r>
-                    <m:r>
-                      <a:rPr lang="en-US" i="1">
-                        <a:latin typeface="Cambria Math" panose="02040503050406030204" pitchFamily="18" charset="0"/>
-                      </a:rPr>
-                      <m:t>(</m:t>
-                    </m:r>
-                    <m:r>
-                      <a:rPr lang="en-US" i="1">
-                        <a:latin typeface="Cambria Math" panose="02040503050406030204" pitchFamily="18" charset="0"/>
-                      </a:rPr>
-                      <m:t>𝑧</m:t>
-                    </m:r>
-                    <m:r>
-                      <a:rPr lang="en-US" i="1">
-                        <a:latin typeface="Cambria Math" panose="02040503050406030204" pitchFamily="18" charset="0"/>
-                      </a:rPr>
-                      <m:t>)</m:t>
-                    </m:r>
-                  </m:oMath>
-                </a14:m>
-                <a:r>
-                  <a:rPr lang="en-US" b="0" dirty="0"/>
-                  <a:t> is called a </a:t>
-                </a:r>
-                <a:r>
-                  <a:rPr lang="en-US" b="0" dirty="0" err="1">
-                    <a:solidFill>
-                      <a:srgbClr val="0033CC"/>
-                    </a:solidFill>
-                  </a:rPr>
-                  <a:t>silu</a:t>
-                </a:r>
-                <a:r>
-                  <a:rPr lang="en-US" b="0" dirty="0"/>
                   <a:t>.</a:t>
                 </a:r>
-              </a:p>
-              <a:p>
-                <a:pPr marL="0" indent="0">
-                  <a:buNone/>
-                </a:pPr>
-                <a14:m>
-                  <m:oMath xmlns:m="http://schemas.openxmlformats.org/officeDocument/2006/math">
-                    <m:r>
-                      <a:rPr lang="en-US" b="0" i="1" smtClean="0">
-                        <a:solidFill>
-                          <a:srgbClr val="0033CC"/>
-                        </a:solidFill>
-                        <a:latin typeface="Cambria Math" panose="02040503050406030204" pitchFamily="18" charset="0"/>
-                      </a:rPr>
-                      <m:t>𝜔</m:t>
-                    </m:r>
-                  </m:oMath>
-                </a14:m>
-                <a:r>
-                  <a:rPr lang="en-US" b="0" dirty="0"/>
-                  <a:t> are free parameters.</a:t>
-                </a:r>
-              </a:p>
-              <a:p>
-                <a:pPr marL="0" indent="0">
-                  <a:buNone/>
-                </a:pPr>
                 <a:endParaRPr lang="en-US" sz="2400" dirty="0"/>
               </a:p>
               <a:p>
@@ -21738,7 +18957,7 @@
             </p:txBody>
           </p:sp>
         </mc:Choice>
-        <mc:Fallback xmlns="">
+        <mc:Fallback>
           <p:sp>
             <p:nvSpPr>
               <p:cNvPr id="8" name="Content Placeholder 7">
@@ -21757,13 +18976,13 @@
             </p:nvSpPr>
             <p:spPr>
               <a:xfrm>
-                <a:off x="685800" y="1295400"/>
+                <a:off x="711200" y="1295400"/>
                 <a:ext cx="8001000" cy="4819650"/>
               </a:xfrm>
               <a:blipFill>
                 <a:blip r:embed="rId3"/>
                 <a:stretch>
-                  <a:fillRect l="-1270" t="-1316"/>
+                  <a:fillRect l="-1270" t="-526" r="-317"/>
                 </a:stretch>
               </a:blipFill>
             </p:spPr>
@@ -21870,7 +19089,7 @@
               <a:pPr>
                 <a:defRPr/>
               </a:pPr>
-              <a:t>24</a:t>
+              <a:t>22</a:t>
             </a:fld>
             <a:endParaRPr lang="en-US"/>
           </a:p>
@@ -21890,7 +19109,7 @@
         </p:nvGrpSpPr>
         <p:grpSpPr>
           <a:xfrm>
-            <a:off x="304800" y="5562600"/>
+            <a:off x="304800" y="5578495"/>
             <a:ext cx="4928856" cy="822305"/>
             <a:chOff x="2157744" y="5424994"/>
             <a:chExt cx="4928856" cy="822305"/>
@@ -21957,10 +19176,7 @@
                   </a:pPr>
                   <a14:m>
                     <m:oMathPara xmlns:m="http://schemas.openxmlformats.org/officeDocument/2006/math">
-                      <m:oMathParaPr>
-                        <m:jc m:val="centerGroup"/>
-                      </m:oMathParaPr>
-                      <m:oMath xmlns:m="http://schemas.openxmlformats.org/officeDocument/2006/math">
+                      <m:oMath>
                         <m:r>
                           <a:rPr kumimoji="0" lang="en-US" sz="3200" b="0" i="1" u="none" strike="noStrike" cap="none" normalizeH="0" baseline="0" smtClean="0">
                             <a:ln>
@@ -22131,10 +19347,7 @@
                   </a:pPr>
                   <a14:m>
                     <m:oMathPara xmlns:m="http://schemas.openxmlformats.org/officeDocument/2006/math">
-                      <m:oMathParaPr>
-                        <m:jc m:val="centerGroup"/>
-                      </m:oMathParaPr>
-                      <m:oMath xmlns:m="http://schemas.openxmlformats.org/officeDocument/2006/math">
+                      <m:oMath>
                         <m:r>
                           <a:rPr kumimoji="0" lang="en-US" sz="2800" b="0" i="1" u="none" strike="noStrike" cap="none" normalizeH="0" baseline="0" smtClean="0">
                             <a:ln>
@@ -22356,10 +19569,7 @@
                   <a:pPr/>
                   <a14:m>
                     <m:oMathPara xmlns:m="http://schemas.openxmlformats.org/officeDocument/2006/math">
-                      <m:oMathParaPr>
-                        <m:jc m:val="centerGroup"/>
-                      </m:oMathParaPr>
-                      <m:oMath xmlns:m="http://schemas.openxmlformats.org/officeDocument/2006/math">
+                      <m:oMath>
                         <m:r>
                           <a:rPr lang="en-US" sz="2800" b="0" i="1" smtClean="0">
                             <a:latin typeface="Cambria Math" panose="02040503050406030204" pitchFamily="18" charset="0"/>
@@ -22422,2753 +19632,6 @@
       </p:grpSp>
       <p:grpSp>
         <p:nvGrpSpPr>
-          <p:cNvPr id="145" name="Group 144">
-            <a:extLst>
-              <a:ext uri="{FF2B5EF4-FFF2-40B4-BE49-F238E27FC236}">
-                <a16:creationId xmlns:a16="http://schemas.microsoft.com/office/drawing/2014/main" id="{2D9BF164-3FBE-2C82-B7C7-ABFC2137628F}"/>
-              </a:ext>
-            </a:extLst>
-          </p:cNvPr>
-          <p:cNvGrpSpPr/>
-          <p:nvPr/>
-        </p:nvGrpSpPr>
-        <p:grpSpPr>
-          <a:xfrm>
-            <a:off x="3632207" y="2514600"/>
-            <a:ext cx="4902193" cy="3232615"/>
-            <a:chOff x="2962310" y="1951961"/>
-            <a:chExt cx="4902193" cy="3232615"/>
-          </a:xfrm>
-        </p:grpSpPr>
-        <p:grpSp>
-          <p:nvGrpSpPr>
-            <p:cNvPr id="140" name="Group 139">
-              <a:extLst>
-                <a:ext uri="{FF2B5EF4-FFF2-40B4-BE49-F238E27FC236}">
-                  <a16:creationId xmlns:a16="http://schemas.microsoft.com/office/drawing/2014/main" id="{53EAAA61-A3EF-22EA-0843-8AB04951D0FA}"/>
-                </a:ext>
-              </a:extLst>
-            </p:cNvPr>
-            <p:cNvGrpSpPr/>
-            <p:nvPr/>
-          </p:nvGrpSpPr>
-          <p:grpSpPr>
-            <a:xfrm>
-              <a:off x="3657600" y="1981200"/>
-              <a:ext cx="4206903" cy="3203376"/>
-              <a:chOff x="3641697" y="2130624"/>
-              <a:chExt cx="4206903" cy="3203376"/>
-            </a:xfrm>
-          </p:grpSpPr>
-          <mc:AlternateContent xmlns:mc="http://schemas.openxmlformats.org/markup-compatibility/2006" xmlns:a14="http://schemas.microsoft.com/office/drawing/2010/main">
-            <mc:Choice Requires="a14">
-              <p:sp>
-                <p:nvSpPr>
-                  <p:cNvPr id="32" name="TextBox 31">
-                    <a:extLst>
-                      <a:ext uri="{FF2B5EF4-FFF2-40B4-BE49-F238E27FC236}">
-                        <a16:creationId xmlns:a16="http://schemas.microsoft.com/office/drawing/2014/main" id="{657888F4-5766-1D68-D916-E6B53E1C7307}"/>
-                      </a:ext>
-                    </a:extLst>
-                  </p:cNvPr>
-                  <p:cNvSpPr txBox="1"/>
-                  <p:nvPr/>
-                </p:nvSpPr>
-                <p:spPr>
-                  <a:xfrm>
-                    <a:off x="7039468" y="3048000"/>
-                    <a:ext cx="809132" cy="1569660"/>
-                  </a:xfrm>
-                  <a:prstGeom prst="rect">
-                    <a:avLst/>
-                  </a:prstGeom>
-                  <a:noFill/>
-                </p:spPr>
-                <p:txBody>
-                  <a:bodyPr wrap="none" rtlCol="0">
-                    <a:spAutoFit/>
-                  </a:bodyPr>
-                  <a:lstStyle/>
-                  <a:p>
-                    <a:pPr/>
-                    <a14:m>
-                      <m:oMathPara xmlns:m="http://schemas.openxmlformats.org/officeDocument/2006/math">
-                        <m:oMathParaPr>
-                          <m:jc m:val="centerGroup"/>
-                        </m:oMathParaPr>
-                        <m:oMath xmlns:m="http://schemas.openxmlformats.org/officeDocument/2006/math">
-                          <m:sSub>
-                            <m:sSubPr>
-                              <m:ctrlPr>
-                                <a:rPr lang="en-US" sz="3200" b="0" i="1" smtClean="0">
-                                  <a:latin typeface="Cambria Math" panose="02040503050406030204" pitchFamily="18" charset="0"/>
-                                </a:rPr>
-                              </m:ctrlPr>
-                            </m:sSubPr>
-                            <m:e>
-                              <m:r>
-                                <a:rPr lang="en-US" sz="3200" b="0" i="1" smtClean="0">
-                                  <a:latin typeface="Cambria Math" panose="02040503050406030204" pitchFamily="18" charset="0"/>
-                                </a:rPr>
-                                <m:t>𝑥</m:t>
-                              </m:r>
-                            </m:e>
-                            <m:sub>
-                              <m:r>
-                                <a:rPr lang="en-US" sz="3200" b="0" i="1" smtClean="0">
-                                  <a:latin typeface="Cambria Math" panose="02040503050406030204" pitchFamily="18" charset="0"/>
-                                </a:rPr>
-                                <m:t>1</m:t>
-                              </m:r>
-                            </m:sub>
-                          </m:sSub>
-                        </m:oMath>
-                      </m:oMathPara>
-                    </a14:m>
-                    <a:endParaRPr lang="en-US" sz="3200" dirty="0"/>
-                  </a:p>
-                  <a:p>
-                    <a:endParaRPr lang="en-US" sz="3200" b="0" i="1" dirty="0">
-                      <a:latin typeface="Cambria Math" panose="02040503050406030204" pitchFamily="18" charset="0"/>
-                    </a:endParaRPr>
-                  </a:p>
-                  <a:p>
-                    <a:pPr/>
-                    <a14:m>
-                      <m:oMathPara xmlns:m="http://schemas.openxmlformats.org/officeDocument/2006/math">
-                        <m:oMathParaPr>
-                          <m:jc m:val="centerGroup"/>
-                        </m:oMathParaPr>
-                        <m:oMath xmlns:m="http://schemas.openxmlformats.org/officeDocument/2006/math">
-                          <m:sSub>
-                            <m:sSubPr>
-                              <m:ctrlPr>
-                                <a:rPr lang="en-US" sz="3200" b="0" i="1" smtClean="0">
-                                  <a:latin typeface="Cambria Math" panose="02040503050406030204" pitchFamily="18" charset="0"/>
-                                </a:rPr>
-                              </m:ctrlPr>
-                            </m:sSubPr>
-                            <m:e>
-                              <m:r>
-                                <a:rPr lang="en-US" sz="3200" b="0" i="1" smtClean="0">
-                                  <a:latin typeface="Cambria Math" panose="02040503050406030204" pitchFamily="18" charset="0"/>
-                                </a:rPr>
-                                <m:t>𝑥</m:t>
-                              </m:r>
-                            </m:e>
-                            <m:sub>
-                              <m:r>
-                                <a:rPr lang="en-US" sz="3200" b="0" i="1" smtClean="0">
-                                  <a:latin typeface="Cambria Math" panose="02040503050406030204" pitchFamily="18" charset="0"/>
-                                </a:rPr>
-                                <m:t>2</m:t>
-                              </m:r>
-                            </m:sub>
-                          </m:sSub>
-                        </m:oMath>
-                      </m:oMathPara>
-                    </a14:m>
-                    <a:endParaRPr lang="en-US" sz="3200" dirty="0"/>
-                  </a:p>
-                </p:txBody>
-              </p:sp>
-            </mc:Choice>
-            <mc:Fallback xmlns="">
-              <p:sp>
-                <p:nvSpPr>
-                  <p:cNvPr id="32" name="TextBox 31">
-                    <a:extLst>
-                      <a:ext uri="{FF2B5EF4-FFF2-40B4-BE49-F238E27FC236}">
-                        <a16:creationId xmlns:a16="http://schemas.microsoft.com/office/drawing/2014/main" id="{657888F4-5766-1D68-D916-E6B53E1C7307}"/>
-                      </a:ext>
-                    </a:extLst>
-                  </p:cNvPr>
-                  <p:cNvSpPr txBox="1">
-                    <a:spLocks noRot="1" noChangeAspect="1" noMove="1" noResize="1" noEditPoints="1" noAdjustHandles="1" noChangeArrowheads="1" noChangeShapeType="1" noTextEdit="1"/>
-                  </p:cNvSpPr>
-                  <p:nvPr/>
-                </p:nvSpPr>
-                <p:spPr>
-                  <a:xfrm>
-                    <a:off x="7039468" y="3048000"/>
-                    <a:ext cx="809132" cy="1569660"/>
-                  </a:xfrm>
-                  <a:prstGeom prst="rect">
-                    <a:avLst/>
-                  </a:prstGeom>
-                  <a:blipFill>
-                    <a:blip r:embed="rId7"/>
-                    <a:stretch>
-                      <a:fillRect b="-1613"/>
-                    </a:stretch>
-                  </a:blipFill>
-                </p:spPr>
-                <p:txBody>
-                  <a:bodyPr/>
-                  <a:lstStyle/>
-                  <a:p>
-                    <a:r>
-                      <a:rPr lang="en-US">
-                        <a:noFill/>
-                      </a:rPr>
-                      <a:t> </a:t>
-                    </a:r>
-                  </a:p>
-                </p:txBody>
-              </p:sp>
-            </mc:Fallback>
-          </mc:AlternateContent>
-          <p:cxnSp>
-            <p:nvCxnSpPr>
-              <p:cNvPr id="99" name="Straight Arrow Connector 98">
-                <a:extLst>
-                  <a:ext uri="{FF2B5EF4-FFF2-40B4-BE49-F238E27FC236}">
-                    <a16:creationId xmlns:a16="http://schemas.microsoft.com/office/drawing/2014/main" id="{5756964B-9268-E65A-B06B-ECA10C1F5D53}"/>
-                  </a:ext>
-                </a:extLst>
-              </p:cNvPr>
-              <p:cNvCxnSpPr>
-                <a:cxnSpLocks/>
-              </p:cNvCxnSpPr>
-              <p:nvPr/>
-            </p:nvCxnSpPr>
-            <p:spPr bwMode="auto">
-              <a:xfrm flipH="1" flipV="1">
-                <a:off x="5298825" y="3131710"/>
-                <a:ext cx="1641484" cy="1211690"/>
-              </a:xfrm>
-              <a:prstGeom prst="straightConnector1">
-                <a:avLst/>
-              </a:prstGeom>
-              <a:noFill/>
-              <a:ln w="50800" cap="flat" cmpd="sng" algn="ctr">
-                <a:solidFill>
-                  <a:schemeClr val="accent1"/>
-                </a:solidFill>
-                <a:prstDash val="solid"/>
-                <a:round/>
-                <a:headEnd type="none" w="med" len="med"/>
-                <a:tailEnd type="stealth"/>
-              </a:ln>
-              <a:effectLst/>
-            </p:spPr>
-          </p:cxnSp>
-          <p:cxnSp>
-            <p:nvCxnSpPr>
-              <p:cNvPr id="106" name="Straight Arrow Connector 105">
-                <a:extLst>
-                  <a:ext uri="{FF2B5EF4-FFF2-40B4-BE49-F238E27FC236}">
-                    <a16:creationId xmlns:a16="http://schemas.microsoft.com/office/drawing/2014/main" id="{87DC779E-1488-63EB-F99D-773E88C4F68C}"/>
-                  </a:ext>
-                </a:extLst>
-              </p:cNvPr>
-              <p:cNvCxnSpPr>
-                <a:cxnSpLocks/>
-              </p:cNvCxnSpPr>
-              <p:nvPr/>
-            </p:nvCxnSpPr>
-            <p:spPr bwMode="auto">
-              <a:xfrm flipH="1" flipV="1">
-                <a:off x="5246690" y="4006757"/>
-                <a:ext cx="1681930" cy="364863"/>
-              </a:xfrm>
-              <a:prstGeom prst="straightConnector1">
-                <a:avLst/>
-              </a:prstGeom>
-              <a:noFill/>
-              <a:ln w="50800" cap="flat" cmpd="sng" algn="ctr">
-                <a:solidFill>
-                  <a:schemeClr val="accent1"/>
-                </a:solidFill>
-                <a:prstDash val="solid"/>
-                <a:round/>
-                <a:headEnd type="none" w="med" len="med"/>
-                <a:tailEnd type="stealth"/>
-              </a:ln>
-              <a:effectLst/>
-            </p:spPr>
-          </p:cxnSp>
-          <p:cxnSp>
-            <p:nvCxnSpPr>
-              <p:cNvPr id="115" name="Straight Arrow Connector 114">
-                <a:extLst>
-                  <a:ext uri="{FF2B5EF4-FFF2-40B4-BE49-F238E27FC236}">
-                    <a16:creationId xmlns:a16="http://schemas.microsoft.com/office/drawing/2014/main" id="{5B431E5C-C671-2DC4-233D-6A3F8E47EEF9}"/>
-                  </a:ext>
-                </a:extLst>
-              </p:cNvPr>
-              <p:cNvCxnSpPr>
-                <a:cxnSpLocks/>
-              </p:cNvCxnSpPr>
-              <p:nvPr/>
-            </p:nvCxnSpPr>
-            <p:spPr bwMode="auto">
-              <a:xfrm flipH="1">
-                <a:off x="5332369" y="4353219"/>
-                <a:ext cx="1596251" cy="656187"/>
-              </a:xfrm>
-              <a:prstGeom prst="straightConnector1">
-                <a:avLst/>
-              </a:prstGeom>
-              <a:noFill/>
-              <a:ln w="50800" cap="flat" cmpd="sng" algn="ctr">
-                <a:solidFill>
-                  <a:schemeClr val="accent1"/>
-                </a:solidFill>
-                <a:prstDash val="solid"/>
-                <a:round/>
-                <a:headEnd type="none" w="med" len="med"/>
-                <a:tailEnd type="stealth"/>
-              </a:ln>
-              <a:effectLst/>
-            </p:spPr>
-          </p:cxnSp>
-          <p:grpSp>
-            <p:nvGrpSpPr>
-              <p:cNvPr id="124" name="Group 123">
-                <a:extLst>
-                  <a:ext uri="{FF2B5EF4-FFF2-40B4-BE49-F238E27FC236}">
-                    <a16:creationId xmlns:a16="http://schemas.microsoft.com/office/drawing/2014/main" id="{0280C6B6-AAE0-A5E7-0C1F-DE917E5C61CB}"/>
-                  </a:ext>
-                </a:extLst>
-              </p:cNvPr>
-              <p:cNvGrpSpPr/>
-              <p:nvPr/>
-            </p:nvGrpSpPr>
-            <p:grpSpPr>
-              <a:xfrm>
-                <a:off x="5246690" y="2388345"/>
-                <a:ext cx="1827003" cy="2601267"/>
-                <a:chOff x="5246690" y="2377503"/>
-                <a:chExt cx="1827003" cy="2601267"/>
-              </a:xfrm>
-            </p:grpSpPr>
-            <p:cxnSp>
-              <p:nvCxnSpPr>
-                <p:cNvPr id="35" name="Straight Arrow Connector 34">
-                  <a:extLst>
-                    <a:ext uri="{FF2B5EF4-FFF2-40B4-BE49-F238E27FC236}">
-                      <a16:creationId xmlns:a16="http://schemas.microsoft.com/office/drawing/2014/main" id="{DD189A39-8C16-D70F-C19E-6E3743B8D1A8}"/>
-                    </a:ext>
-                  </a:extLst>
-                </p:cNvPr>
-                <p:cNvCxnSpPr>
-                  <a:cxnSpLocks/>
-                </p:cNvCxnSpPr>
-                <p:nvPr/>
-              </p:nvCxnSpPr>
-              <p:spPr bwMode="auto">
-                <a:xfrm flipH="1" flipV="1">
-                  <a:off x="5326829" y="2424734"/>
-                  <a:ext cx="1666725" cy="1004266"/>
-                </a:xfrm>
-                <a:prstGeom prst="straightConnector1">
-                  <a:avLst/>
-                </a:prstGeom>
-                <a:noFill/>
-                <a:ln w="50800" cap="flat" cmpd="sng" algn="ctr">
-                  <a:solidFill>
-                    <a:schemeClr val="accent1"/>
-                  </a:solidFill>
-                  <a:prstDash val="solid"/>
-                  <a:round/>
-                  <a:headEnd type="none" w="med" len="med"/>
-                  <a:tailEnd type="stealth"/>
-                </a:ln>
-                <a:effectLst/>
-              </p:spPr>
-            </p:cxnSp>
-            <p:cxnSp>
-              <p:nvCxnSpPr>
-                <p:cNvPr id="36" name="Straight Arrow Connector 35">
-                  <a:extLst>
-                    <a:ext uri="{FF2B5EF4-FFF2-40B4-BE49-F238E27FC236}">
-                      <a16:creationId xmlns:a16="http://schemas.microsoft.com/office/drawing/2014/main" id="{1ADF4AE2-48E4-93FF-6E92-2436575A666F}"/>
-                    </a:ext>
-                  </a:extLst>
-                </p:cNvPr>
-                <p:cNvCxnSpPr>
-                  <a:cxnSpLocks/>
-                </p:cNvCxnSpPr>
-                <p:nvPr/>
-              </p:nvCxnSpPr>
-              <p:spPr bwMode="auto">
-                <a:xfrm flipH="1" flipV="1">
-                  <a:off x="5338518" y="2377503"/>
-                  <a:ext cx="1655036" cy="1986898"/>
-                </a:xfrm>
-                <a:prstGeom prst="straightConnector1">
-                  <a:avLst/>
-                </a:prstGeom>
-                <a:noFill/>
-                <a:ln w="50800" cap="flat" cmpd="sng" algn="ctr">
-                  <a:solidFill>
-                    <a:schemeClr val="accent1"/>
-                  </a:solidFill>
-                  <a:prstDash val="solid"/>
-                  <a:round/>
-                  <a:headEnd type="none" w="med" len="med"/>
-                  <a:tailEnd type="stealth"/>
-                </a:ln>
-                <a:effectLst/>
-              </p:spPr>
-            </p:cxnSp>
-            <p:cxnSp>
-              <p:nvCxnSpPr>
-                <p:cNvPr id="96" name="Straight Arrow Connector 95">
-                  <a:extLst>
-                    <a:ext uri="{FF2B5EF4-FFF2-40B4-BE49-F238E27FC236}">
-                      <a16:creationId xmlns:a16="http://schemas.microsoft.com/office/drawing/2014/main" id="{4FD604B9-3862-209B-CCB8-EFB2AE3A6216}"/>
-                    </a:ext>
-                  </a:extLst>
-                </p:cNvPr>
-                <p:cNvCxnSpPr>
-                  <a:cxnSpLocks/>
-                </p:cNvCxnSpPr>
-                <p:nvPr/>
-              </p:nvCxnSpPr>
-              <p:spPr bwMode="auto">
-                <a:xfrm flipH="1" flipV="1">
-                  <a:off x="5246690" y="3109363"/>
-                  <a:ext cx="1681930" cy="319637"/>
-                </a:xfrm>
-                <a:prstGeom prst="straightConnector1">
-                  <a:avLst/>
-                </a:prstGeom>
-                <a:noFill/>
-                <a:ln w="50800" cap="flat" cmpd="sng" algn="ctr">
-                  <a:solidFill>
-                    <a:schemeClr val="accent1"/>
-                  </a:solidFill>
-                  <a:prstDash val="solid"/>
-                  <a:round/>
-                  <a:headEnd type="none" w="med" len="med"/>
-                  <a:tailEnd type="stealth"/>
-                </a:ln>
-                <a:effectLst/>
-              </p:spPr>
-            </p:cxnSp>
-            <p:cxnSp>
-              <p:nvCxnSpPr>
-                <p:cNvPr id="103" name="Straight Arrow Connector 102">
-                  <a:extLst>
-                    <a:ext uri="{FF2B5EF4-FFF2-40B4-BE49-F238E27FC236}">
-                      <a16:creationId xmlns:a16="http://schemas.microsoft.com/office/drawing/2014/main" id="{98A1160A-EAA6-DECD-5044-55E5F8383812}"/>
-                    </a:ext>
-                  </a:extLst>
-                </p:cNvPr>
-                <p:cNvCxnSpPr>
-                  <a:cxnSpLocks/>
-                </p:cNvCxnSpPr>
-                <p:nvPr/>
-              </p:nvCxnSpPr>
-              <p:spPr bwMode="auto">
-                <a:xfrm flipH="1">
-                  <a:off x="5292604" y="3414535"/>
-                  <a:ext cx="1700950" cy="595135"/>
-                </a:xfrm>
-                <a:prstGeom prst="straightConnector1">
-                  <a:avLst/>
-                </a:prstGeom>
-                <a:noFill/>
-                <a:ln w="50800" cap="flat" cmpd="sng" algn="ctr">
-                  <a:solidFill>
-                    <a:schemeClr val="accent1"/>
-                  </a:solidFill>
-                  <a:prstDash val="solid"/>
-                  <a:round/>
-                  <a:headEnd type="none" w="med" len="med"/>
-                  <a:tailEnd type="stealth"/>
-                </a:ln>
-                <a:effectLst/>
-              </p:spPr>
-            </p:cxnSp>
-            <p:cxnSp>
-              <p:nvCxnSpPr>
-                <p:cNvPr id="112" name="Straight Arrow Connector 111">
-                  <a:extLst>
-                    <a:ext uri="{FF2B5EF4-FFF2-40B4-BE49-F238E27FC236}">
-                      <a16:creationId xmlns:a16="http://schemas.microsoft.com/office/drawing/2014/main" id="{BB120C84-600E-65C8-8718-08AC34358F9C}"/>
-                    </a:ext>
-                  </a:extLst>
-                </p:cNvPr>
-                <p:cNvCxnSpPr>
-                  <a:cxnSpLocks/>
-                </p:cNvCxnSpPr>
-                <p:nvPr/>
-              </p:nvCxnSpPr>
-              <p:spPr bwMode="auto">
-                <a:xfrm flipH="1">
-                  <a:off x="5366753" y="3476231"/>
-                  <a:ext cx="1561867" cy="1502539"/>
-                </a:xfrm>
-                <a:prstGeom prst="straightConnector1">
-                  <a:avLst/>
-                </a:prstGeom>
-                <a:noFill/>
-                <a:ln w="50800" cap="flat" cmpd="sng" algn="ctr">
-                  <a:solidFill>
-                    <a:schemeClr val="accent1"/>
-                  </a:solidFill>
-                  <a:prstDash val="solid"/>
-                  <a:round/>
-                  <a:headEnd type="none" w="med" len="med"/>
-                  <a:tailEnd type="stealth"/>
-                </a:ln>
-                <a:effectLst/>
-              </p:spPr>
-            </p:cxnSp>
-            <p:sp>
-              <p:nvSpPr>
-                <p:cNvPr id="119" name="Oval 118">
-                  <a:extLst>
-                    <a:ext uri="{FF2B5EF4-FFF2-40B4-BE49-F238E27FC236}">
-                      <a16:creationId xmlns:a16="http://schemas.microsoft.com/office/drawing/2014/main" id="{48DC9CA8-D3E4-A3A4-7E2B-E217411F28D4}"/>
-                    </a:ext>
-                  </a:extLst>
-                </p:cNvPr>
-                <p:cNvSpPr/>
-                <p:nvPr/>
-              </p:nvSpPr>
-              <p:spPr bwMode="auto">
-                <a:xfrm>
-                  <a:off x="6794015" y="3290880"/>
-                  <a:ext cx="279678" cy="279678"/>
-                </a:xfrm>
-                <a:prstGeom prst="ellipse">
-                  <a:avLst/>
-                </a:prstGeom>
-                <a:solidFill>
-                  <a:schemeClr val="accent1"/>
-                </a:solidFill>
-                <a:ln w="12700" cap="flat" cmpd="sng" algn="ctr">
-                  <a:noFill/>
-                  <a:prstDash val="solid"/>
-                  <a:round/>
-                  <a:headEnd type="none" w="med" len="med"/>
-                  <a:tailEnd type="none" w="med" len="med"/>
-                </a:ln>
-                <a:effectLst/>
-              </p:spPr>
-              <p:txBody>
-                <a:bodyPr vert="horz" wrap="square" lIns="91440" tIns="45720" rIns="91440" bIns="45720" numCol="1" rtlCol="0" anchor="t" anchorCtr="0" compatLnSpc="1">
-                  <a:prstTxWarp prst="textNoShape">
-                    <a:avLst/>
-                  </a:prstTxWarp>
-                  <a:spAutoFit/>
-                </a:bodyPr>
-                <a:lstStyle/>
-                <a:p>
-                  <a:pPr marL="0" marR="0" indent="0" algn="l" defTabSz="914400" rtl="0" eaLnBrk="0" fontAlgn="base" latinLnBrk="0" hangingPunct="0">
-                    <a:lnSpc>
-                      <a:spcPct val="100000"/>
-                    </a:lnSpc>
-                    <a:spcBef>
-                      <a:spcPct val="0"/>
-                    </a:spcBef>
-                    <a:spcAft>
-                      <a:spcPct val="0"/>
-                    </a:spcAft>
-                    <a:buClrTx/>
-                    <a:buSzTx/>
-                    <a:buFontTx/>
-                    <a:buNone/>
-                    <a:tabLst/>
-                  </a:pPr>
-                  <a:endParaRPr kumimoji="0" lang="en-US" sz="2400" b="0" i="0" u="none" strike="noStrike" cap="none" normalizeH="0" baseline="0">
-                    <a:ln>
-                      <a:noFill/>
-                    </a:ln>
-                    <a:solidFill>
-                      <a:schemeClr val="tx1"/>
-                    </a:solidFill>
-                    <a:effectLst/>
-                    <a:latin typeface="Times New Roman" pitchFamily="-65" charset="0"/>
-                  </a:endParaRPr>
-                </a:p>
-              </p:txBody>
-            </p:sp>
-          </p:grpSp>
-          <p:sp>
-            <p:nvSpPr>
-              <p:cNvPr id="120" name="Oval 119">
-                <a:extLst>
-                  <a:ext uri="{FF2B5EF4-FFF2-40B4-BE49-F238E27FC236}">
-                    <a16:creationId xmlns:a16="http://schemas.microsoft.com/office/drawing/2014/main" id="{A34A11F6-5223-72FB-5EAE-1CC72E6324E3}"/>
-                  </a:ext>
-                </a:extLst>
-              </p:cNvPr>
-              <p:cNvSpPr/>
-              <p:nvPr/>
-            </p:nvSpPr>
-            <p:spPr bwMode="auto">
-              <a:xfrm>
-                <a:off x="6806922" y="4216122"/>
-                <a:ext cx="279678" cy="279678"/>
-              </a:xfrm>
-              <a:prstGeom prst="ellipse">
-                <a:avLst/>
-              </a:prstGeom>
-              <a:solidFill>
-                <a:schemeClr val="accent1"/>
-              </a:solidFill>
-              <a:ln w="12700" cap="flat" cmpd="sng" algn="ctr">
-                <a:noFill/>
-                <a:prstDash val="solid"/>
-                <a:round/>
-                <a:headEnd type="none" w="med" len="med"/>
-                <a:tailEnd type="none" w="med" len="med"/>
-              </a:ln>
-              <a:effectLst/>
-            </p:spPr>
-            <p:txBody>
-              <a:bodyPr vert="horz" wrap="square" lIns="91440" tIns="45720" rIns="91440" bIns="45720" numCol="1" rtlCol="0" anchor="t" anchorCtr="0" compatLnSpc="1">
-                <a:prstTxWarp prst="textNoShape">
-                  <a:avLst/>
-                </a:prstTxWarp>
-                <a:spAutoFit/>
-              </a:bodyPr>
-              <a:lstStyle/>
-              <a:p>
-                <a:pPr marL="0" marR="0" indent="0" algn="l" defTabSz="914400" rtl="0" eaLnBrk="0" fontAlgn="base" latinLnBrk="0" hangingPunct="0">
-                  <a:lnSpc>
-                    <a:spcPct val="100000"/>
-                  </a:lnSpc>
-                  <a:spcBef>
-                    <a:spcPct val="0"/>
-                  </a:spcBef>
-                  <a:spcAft>
-                    <a:spcPct val="0"/>
-                  </a:spcAft>
-                  <a:buClrTx/>
-                  <a:buSzTx/>
-                  <a:buFontTx/>
-                  <a:buNone/>
-                  <a:tabLst/>
-                </a:pPr>
-                <a:endParaRPr kumimoji="0" lang="en-US" sz="2400" b="0" i="0" u="none" strike="noStrike" cap="none" normalizeH="0" baseline="0">
-                  <a:ln>
-                    <a:noFill/>
-                  </a:ln>
-                  <a:solidFill>
-                    <a:schemeClr val="tx1"/>
-                  </a:solidFill>
-                  <a:effectLst/>
-                  <a:latin typeface="Times New Roman" pitchFamily="-65" charset="0"/>
-                </a:endParaRPr>
-              </a:p>
-            </p:txBody>
-          </p:sp>
-          <p:sp>
-            <p:nvSpPr>
-              <p:cNvPr id="126" name="Oval 125">
-                <a:extLst>
-                  <a:ext uri="{FF2B5EF4-FFF2-40B4-BE49-F238E27FC236}">
-                    <a16:creationId xmlns:a16="http://schemas.microsoft.com/office/drawing/2014/main" id="{D677B9F5-8EEB-4939-19C4-B52C44B8BDFD}"/>
-                  </a:ext>
-                </a:extLst>
-              </p:cNvPr>
-              <p:cNvSpPr/>
-              <p:nvPr/>
-            </p:nvSpPr>
-            <p:spPr bwMode="auto">
-              <a:xfrm>
-                <a:off x="3657600" y="2311122"/>
-                <a:ext cx="279678" cy="279678"/>
-              </a:xfrm>
-              <a:prstGeom prst="ellipse">
-                <a:avLst/>
-              </a:prstGeom>
-              <a:solidFill>
-                <a:schemeClr val="accent1"/>
-              </a:solidFill>
-              <a:ln w="12700" cap="flat" cmpd="sng" algn="ctr">
-                <a:noFill/>
-                <a:prstDash val="solid"/>
-                <a:round/>
-                <a:headEnd type="none" w="med" len="med"/>
-                <a:tailEnd type="none" w="med" len="med"/>
-              </a:ln>
-              <a:effectLst/>
-            </p:spPr>
-            <p:txBody>
-              <a:bodyPr vert="horz" wrap="square" lIns="91440" tIns="45720" rIns="91440" bIns="45720" numCol="1" rtlCol="0" anchor="t" anchorCtr="0" compatLnSpc="1">
-                <a:prstTxWarp prst="textNoShape">
-                  <a:avLst/>
-                </a:prstTxWarp>
-                <a:spAutoFit/>
-              </a:bodyPr>
-              <a:lstStyle/>
-              <a:p>
-                <a:pPr marL="0" marR="0" indent="0" algn="l" defTabSz="914400" rtl="0" eaLnBrk="0" fontAlgn="base" latinLnBrk="0" hangingPunct="0">
-                  <a:lnSpc>
-                    <a:spcPct val="100000"/>
-                  </a:lnSpc>
-                  <a:spcBef>
-                    <a:spcPct val="0"/>
-                  </a:spcBef>
-                  <a:spcAft>
-                    <a:spcPct val="0"/>
-                  </a:spcAft>
-                  <a:buClrTx/>
-                  <a:buSzTx/>
-                  <a:buFontTx/>
-                  <a:buNone/>
-                  <a:tabLst/>
-                </a:pPr>
-                <a:endParaRPr kumimoji="0" lang="en-US" sz="2400" b="0" i="0" u="none" strike="noStrike" cap="none" normalizeH="0" baseline="0">
-                  <a:ln>
-                    <a:noFill/>
-                  </a:ln>
-                  <a:solidFill>
-                    <a:schemeClr val="tx1"/>
-                  </a:solidFill>
-                  <a:effectLst/>
-                  <a:latin typeface="Times New Roman" pitchFamily="-65" charset="0"/>
-                </a:endParaRPr>
-              </a:p>
-            </p:txBody>
-          </p:sp>
-          <p:grpSp>
-            <p:nvGrpSpPr>
-              <p:cNvPr id="131" name="Group 130">
-                <a:extLst>
-                  <a:ext uri="{FF2B5EF4-FFF2-40B4-BE49-F238E27FC236}">
-                    <a16:creationId xmlns:a16="http://schemas.microsoft.com/office/drawing/2014/main" id="{6187CC1D-7673-7125-36C7-D18DED72242F}"/>
-                  </a:ext>
-                </a:extLst>
-              </p:cNvPr>
-              <p:cNvGrpSpPr/>
-              <p:nvPr/>
-            </p:nvGrpSpPr>
-            <p:grpSpPr>
-              <a:xfrm>
-                <a:off x="3641697" y="2130624"/>
-                <a:ext cx="1920903" cy="3203376"/>
-                <a:chOff x="3429000" y="2017812"/>
-                <a:chExt cx="1920903" cy="3203376"/>
-              </a:xfrm>
-            </p:grpSpPr>
-            <p:cxnSp>
-              <p:nvCxnSpPr>
-                <p:cNvPr id="37" name="Straight Arrow Connector 36">
-                  <a:extLst>
-                    <a:ext uri="{FF2B5EF4-FFF2-40B4-BE49-F238E27FC236}">
-                      <a16:creationId xmlns:a16="http://schemas.microsoft.com/office/drawing/2014/main" id="{6E8B4CF6-364A-77E6-B080-BD7581F16D7A}"/>
-                    </a:ext>
-                  </a:extLst>
-                </p:cNvPr>
-                <p:cNvCxnSpPr>
-                  <a:cxnSpLocks/>
-                </p:cNvCxnSpPr>
-                <p:nvPr/>
-              </p:nvCxnSpPr>
-              <p:spPr bwMode="auto">
-                <a:xfrm flipH="1">
-                  <a:off x="3522165" y="2342406"/>
-                  <a:ext cx="1143000" cy="0"/>
-                </a:xfrm>
-                <a:prstGeom prst="straightConnector1">
-                  <a:avLst/>
-                </a:prstGeom>
-                <a:noFill/>
-                <a:ln w="50800" cap="flat" cmpd="sng" algn="ctr">
-                  <a:solidFill>
-                    <a:schemeClr val="accent1"/>
-                  </a:solidFill>
-                  <a:prstDash val="solid"/>
-                  <a:round/>
-                  <a:headEnd type="none" w="med" len="med"/>
-                  <a:tailEnd type="stealth"/>
-                </a:ln>
-                <a:effectLst/>
-              </p:spPr>
-            </p:cxnSp>
-            <p:sp>
-              <p:nvSpPr>
-                <p:cNvPr id="30" name="Oval 29">
-                  <a:extLst>
-                    <a:ext uri="{FF2B5EF4-FFF2-40B4-BE49-F238E27FC236}">
-                      <a16:creationId xmlns:a16="http://schemas.microsoft.com/office/drawing/2014/main" id="{6CF8115F-0072-B177-E764-D447B26F5F15}"/>
-                    </a:ext>
-                  </a:extLst>
-                </p:cNvPr>
-                <p:cNvSpPr/>
-                <p:nvPr/>
-              </p:nvSpPr>
-              <p:spPr bwMode="auto">
-                <a:xfrm>
-                  <a:off x="4648200" y="2017812"/>
-                  <a:ext cx="684738" cy="649188"/>
-                </a:xfrm>
-                <a:prstGeom prst="ellipse">
-                  <a:avLst/>
-                </a:prstGeom>
-                <a:solidFill>
-                  <a:srgbClr val="E395F6"/>
-                </a:solidFill>
-                <a:ln w="12700" cap="flat" cmpd="sng" algn="ctr">
-                  <a:noFill/>
-                  <a:prstDash val="solid"/>
-                  <a:round/>
-                  <a:headEnd type="none" w="med" len="med"/>
-                  <a:tailEnd type="none" w="med" len="med"/>
-                </a:ln>
-                <a:effectLst/>
-              </p:spPr>
-              <p:txBody>
-                <a:bodyPr vert="horz" wrap="square" lIns="91440" tIns="45720" rIns="91440" bIns="45720" numCol="1" rtlCol="0" anchor="t" anchorCtr="0" compatLnSpc="1">
-                  <a:prstTxWarp prst="textNoShape">
-                    <a:avLst/>
-                  </a:prstTxWarp>
-                  <a:spAutoFit/>
-                </a:bodyPr>
-                <a:lstStyle/>
-                <a:p>
-                  <a:pPr marL="0" marR="0" indent="0" algn="l" defTabSz="914400" rtl="0" eaLnBrk="0" fontAlgn="base" latinLnBrk="0" hangingPunct="0">
-                    <a:lnSpc>
-                      <a:spcPct val="100000"/>
-                    </a:lnSpc>
-                    <a:spcBef>
-                      <a:spcPct val="0"/>
-                    </a:spcBef>
-                    <a:spcAft>
-                      <a:spcPct val="0"/>
-                    </a:spcAft>
-                    <a:buClrTx/>
-                    <a:buSzTx/>
-                    <a:buFontTx/>
-                    <a:buNone/>
-                    <a:tabLst/>
-                  </a:pPr>
-                  <a:endParaRPr kumimoji="0" lang="en-US" b="0" i="1" u="none" strike="noStrike" cap="none" normalizeH="0" baseline="0" dirty="0">
-                    <a:ln>
-                      <a:noFill/>
-                    </a:ln>
-                    <a:solidFill>
-                      <a:schemeClr val="tx1"/>
-                    </a:solidFill>
-                    <a:effectLst/>
-                    <a:latin typeface="Cambria Math" panose="02040503050406030204" pitchFamily="18" charset="0"/>
-                  </a:endParaRPr>
-                </a:p>
-              </p:txBody>
-            </p:sp>
-            <p:sp>
-              <p:nvSpPr>
-                <p:cNvPr id="90" name="Oval 89">
-                  <a:extLst>
-                    <a:ext uri="{FF2B5EF4-FFF2-40B4-BE49-F238E27FC236}">
-                      <a16:creationId xmlns:a16="http://schemas.microsoft.com/office/drawing/2014/main" id="{40ECD2C7-AB9A-1B07-E86F-47B19AC97CF5}"/>
-                    </a:ext>
-                  </a:extLst>
-                </p:cNvPr>
-                <p:cNvSpPr/>
-                <p:nvPr/>
-              </p:nvSpPr>
-              <p:spPr bwMode="auto">
-                <a:xfrm>
-                  <a:off x="4665165" y="2856012"/>
-                  <a:ext cx="684738" cy="649188"/>
-                </a:xfrm>
-                <a:prstGeom prst="ellipse">
-                  <a:avLst/>
-                </a:prstGeom>
-                <a:solidFill>
-                  <a:srgbClr val="E395F6"/>
-                </a:solidFill>
-                <a:ln w="12700" cap="flat" cmpd="sng" algn="ctr">
-                  <a:noFill/>
-                  <a:prstDash val="solid"/>
-                  <a:round/>
-                  <a:headEnd type="none" w="med" len="med"/>
-                  <a:tailEnd type="none" w="med" len="med"/>
-                </a:ln>
-                <a:effectLst/>
-              </p:spPr>
-              <p:txBody>
-                <a:bodyPr vert="horz" wrap="square" lIns="91440" tIns="45720" rIns="91440" bIns="45720" numCol="1" rtlCol="0" anchor="t" anchorCtr="0" compatLnSpc="1">
-                  <a:prstTxWarp prst="textNoShape">
-                    <a:avLst/>
-                  </a:prstTxWarp>
-                  <a:spAutoFit/>
-                </a:bodyPr>
-                <a:lstStyle/>
-                <a:p>
-                  <a:pPr marL="0" marR="0" indent="0" algn="l" defTabSz="914400" rtl="0" eaLnBrk="0" fontAlgn="base" latinLnBrk="0" hangingPunct="0">
-                    <a:lnSpc>
-                      <a:spcPct val="100000"/>
-                    </a:lnSpc>
-                    <a:spcBef>
-                      <a:spcPct val="0"/>
-                    </a:spcBef>
-                    <a:spcAft>
-                      <a:spcPct val="0"/>
-                    </a:spcAft>
-                    <a:buClrTx/>
-                    <a:buSzTx/>
-                    <a:buFontTx/>
-                    <a:buNone/>
-                    <a:tabLst/>
-                  </a:pPr>
-                  <a:endParaRPr kumimoji="0" lang="en-US" b="0" i="1" u="none" strike="noStrike" cap="none" normalizeH="0" baseline="0" dirty="0">
-                    <a:ln>
-                      <a:noFill/>
-                    </a:ln>
-                    <a:solidFill>
-                      <a:schemeClr val="tx1"/>
-                    </a:solidFill>
-                    <a:effectLst/>
-                    <a:latin typeface="Cambria Math" panose="02040503050406030204" pitchFamily="18" charset="0"/>
-                  </a:endParaRPr>
-                </a:p>
-              </p:txBody>
-            </p:sp>
-            <p:sp>
-              <p:nvSpPr>
-                <p:cNvPr id="91" name="Oval 90">
-                  <a:extLst>
-                    <a:ext uri="{FF2B5EF4-FFF2-40B4-BE49-F238E27FC236}">
-                      <a16:creationId xmlns:a16="http://schemas.microsoft.com/office/drawing/2014/main" id="{B4F95913-AC87-CBE5-2B43-45323EAF4457}"/>
-                    </a:ext>
-                  </a:extLst>
-                </p:cNvPr>
-                <p:cNvSpPr/>
-                <p:nvPr/>
-              </p:nvSpPr>
-              <p:spPr bwMode="auto">
-                <a:xfrm>
-                  <a:off x="4665165" y="3770412"/>
-                  <a:ext cx="684738" cy="649188"/>
-                </a:xfrm>
-                <a:prstGeom prst="ellipse">
-                  <a:avLst/>
-                </a:prstGeom>
-                <a:solidFill>
-                  <a:srgbClr val="E395F6"/>
-                </a:solidFill>
-                <a:ln w="12700" cap="flat" cmpd="sng" algn="ctr">
-                  <a:noFill/>
-                  <a:prstDash val="solid"/>
-                  <a:round/>
-                  <a:headEnd type="none" w="med" len="med"/>
-                  <a:tailEnd type="none" w="med" len="med"/>
-                </a:ln>
-                <a:effectLst/>
-              </p:spPr>
-              <p:txBody>
-                <a:bodyPr vert="horz" wrap="square" lIns="91440" tIns="45720" rIns="91440" bIns="45720" numCol="1" rtlCol="0" anchor="t" anchorCtr="0" compatLnSpc="1">
-                  <a:prstTxWarp prst="textNoShape">
-                    <a:avLst/>
-                  </a:prstTxWarp>
-                  <a:spAutoFit/>
-                </a:bodyPr>
-                <a:lstStyle/>
-                <a:p>
-                  <a:pPr marL="0" marR="0" indent="0" algn="l" defTabSz="914400" rtl="0" eaLnBrk="0" fontAlgn="base" latinLnBrk="0" hangingPunct="0">
-                    <a:lnSpc>
-                      <a:spcPct val="100000"/>
-                    </a:lnSpc>
-                    <a:spcBef>
-                      <a:spcPct val="0"/>
-                    </a:spcBef>
-                    <a:spcAft>
-                      <a:spcPct val="0"/>
-                    </a:spcAft>
-                    <a:buClrTx/>
-                    <a:buSzTx/>
-                    <a:buFontTx/>
-                    <a:buNone/>
-                    <a:tabLst/>
-                  </a:pPr>
-                  <a:endParaRPr kumimoji="0" lang="en-US" b="0" i="1" u="none" strike="noStrike" cap="none" normalizeH="0" baseline="0" dirty="0">
-                    <a:ln>
-                      <a:noFill/>
-                    </a:ln>
-                    <a:solidFill>
-                      <a:schemeClr val="tx1"/>
-                    </a:solidFill>
-                    <a:effectLst/>
-                    <a:latin typeface="Cambria Math" panose="02040503050406030204" pitchFamily="18" charset="0"/>
-                  </a:endParaRPr>
-                </a:p>
-              </p:txBody>
-            </p:sp>
-            <p:sp>
-              <p:nvSpPr>
-                <p:cNvPr id="92" name="Oval 91">
-                  <a:extLst>
-                    <a:ext uri="{FF2B5EF4-FFF2-40B4-BE49-F238E27FC236}">
-                      <a16:creationId xmlns:a16="http://schemas.microsoft.com/office/drawing/2014/main" id="{B711A980-4D3C-A1FC-3F14-0349C88EEFF1}"/>
-                    </a:ext>
-                  </a:extLst>
-                </p:cNvPr>
-                <p:cNvSpPr/>
-                <p:nvPr/>
-              </p:nvSpPr>
-              <p:spPr bwMode="auto">
-                <a:xfrm>
-                  <a:off x="4665165" y="4572000"/>
-                  <a:ext cx="684738" cy="649188"/>
-                </a:xfrm>
-                <a:prstGeom prst="ellipse">
-                  <a:avLst/>
-                </a:prstGeom>
-                <a:solidFill>
-                  <a:srgbClr val="E395F6"/>
-                </a:solidFill>
-                <a:ln w="12700" cap="flat" cmpd="sng" algn="ctr">
-                  <a:noFill/>
-                  <a:prstDash val="solid"/>
-                  <a:round/>
-                  <a:headEnd type="none" w="med" len="med"/>
-                  <a:tailEnd type="none" w="med" len="med"/>
-                </a:ln>
-                <a:effectLst/>
-              </p:spPr>
-              <p:txBody>
-                <a:bodyPr vert="horz" wrap="square" lIns="91440" tIns="45720" rIns="91440" bIns="45720" numCol="1" rtlCol="0" anchor="t" anchorCtr="0" compatLnSpc="1">
-                  <a:prstTxWarp prst="textNoShape">
-                    <a:avLst/>
-                  </a:prstTxWarp>
-                  <a:spAutoFit/>
-                </a:bodyPr>
-                <a:lstStyle/>
-                <a:p>
-                  <a:pPr marL="0" marR="0" indent="0" algn="l" defTabSz="914400" rtl="0" eaLnBrk="0" fontAlgn="base" latinLnBrk="0" hangingPunct="0">
-                    <a:lnSpc>
-                      <a:spcPct val="100000"/>
-                    </a:lnSpc>
-                    <a:spcBef>
-                      <a:spcPct val="0"/>
-                    </a:spcBef>
-                    <a:spcAft>
-                      <a:spcPct val="0"/>
-                    </a:spcAft>
-                    <a:buClrTx/>
-                    <a:buSzTx/>
-                    <a:buFontTx/>
-                    <a:buNone/>
-                    <a:tabLst/>
-                  </a:pPr>
-                  <a:endParaRPr kumimoji="0" lang="en-US" b="0" i="1" u="none" strike="noStrike" cap="none" normalizeH="0" baseline="0" dirty="0">
-                    <a:ln>
-                      <a:noFill/>
-                    </a:ln>
-                    <a:solidFill>
-                      <a:schemeClr val="tx1"/>
-                    </a:solidFill>
-                    <a:effectLst/>
-                    <a:latin typeface="Cambria Math" panose="02040503050406030204" pitchFamily="18" charset="0"/>
-                  </a:endParaRPr>
-                </a:p>
-              </p:txBody>
-            </p:sp>
-            <p:cxnSp>
-              <p:nvCxnSpPr>
-                <p:cNvPr id="121" name="Straight Arrow Connector 120">
-                  <a:extLst>
-                    <a:ext uri="{FF2B5EF4-FFF2-40B4-BE49-F238E27FC236}">
-                      <a16:creationId xmlns:a16="http://schemas.microsoft.com/office/drawing/2014/main" id="{A1419763-2FEF-A213-84AA-D768E3DC84C8}"/>
-                    </a:ext>
-                  </a:extLst>
-                </p:cNvPr>
-                <p:cNvCxnSpPr>
-                  <a:cxnSpLocks/>
-                </p:cNvCxnSpPr>
-                <p:nvPr/>
-              </p:nvCxnSpPr>
-              <p:spPr bwMode="auto">
-                <a:xfrm flipH="1">
-                  <a:off x="3505200" y="3200400"/>
-                  <a:ext cx="1143000" cy="0"/>
-                </a:xfrm>
-                <a:prstGeom prst="straightConnector1">
-                  <a:avLst/>
-                </a:prstGeom>
-                <a:noFill/>
-                <a:ln w="50800" cap="flat" cmpd="sng" algn="ctr">
-                  <a:solidFill>
-                    <a:schemeClr val="accent1"/>
-                  </a:solidFill>
-                  <a:prstDash val="solid"/>
-                  <a:round/>
-                  <a:headEnd type="none" w="med" len="med"/>
-                  <a:tailEnd type="stealth"/>
-                </a:ln>
-                <a:effectLst/>
-              </p:spPr>
-            </p:cxnSp>
-            <p:cxnSp>
-              <p:nvCxnSpPr>
-                <p:cNvPr id="122" name="Straight Arrow Connector 121">
-                  <a:extLst>
-                    <a:ext uri="{FF2B5EF4-FFF2-40B4-BE49-F238E27FC236}">
-                      <a16:creationId xmlns:a16="http://schemas.microsoft.com/office/drawing/2014/main" id="{69CC3B0D-98CB-5F2C-283A-45E5DD7E94C5}"/>
-                    </a:ext>
-                  </a:extLst>
-                </p:cNvPr>
-                <p:cNvCxnSpPr>
-                  <a:cxnSpLocks/>
-                </p:cNvCxnSpPr>
-                <p:nvPr/>
-              </p:nvCxnSpPr>
-              <p:spPr bwMode="auto">
-                <a:xfrm flipH="1">
-                  <a:off x="3505200" y="4038600"/>
-                  <a:ext cx="1143000" cy="0"/>
-                </a:xfrm>
-                <a:prstGeom prst="straightConnector1">
-                  <a:avLst/>
-                </a:prstGeom>
-                <a:noFill/>
-                <a:ln w="50800" cap="flat" cmpd="sng" algn="ctr">
-                  <a:solidFill>
-                    <a:schemeClr val="accent1"/>
-                  </a:solidFill>
-                  <a:prstDash val="solid"/>
-                  <a:round/>
-                  <a:headEnd type="none" w="med" len="med"/>
-                  <a:tailEnd type="stealth"/>
-                </a:ln>
-                <a:effectLst/>
-              </p:spPr>
-            </p:cxnSp>
-            <p:cxnSp>
-              <p:nvCxnSpPr>
-                <p:cNvPr id="123" name="Straight Arrow Connector 122">
-                  <a:extLst>
-                    <a:ext uri="{FF2B5EF4-FFF2-40B4-BE49-F238E27FC236}">
-                      <a16:creationId xmlns:a16="http://schemas.microsoft.com/office/drawing/2014/main" id="{24FFB7C6-ACE4-F1C9-4405-F47792E3B73C}"/>
-                    </a:ext>
-                  </a:extLst>
-                </p:cNvPr>
-                <p:cNvCxnSpPr>
-                  <a:cxnSpLocks/>
-                </p:cNvCxnSpPr>
-                <p:nvPr/>
-              </p:nvCxnSpPr>
-              <p:spPr bwMode="auto">
-                <a:xfrm flipH="1">
-                  <a:off x="3505200" y="4876800"/>
-                  <a:ext cx="1143000" cy="0"/>
-                </a:xfrm>
-                <a:prstGeom prst="straightConnector1">
-                  <a:avLst/>
-                </a:prstGeom>
-                <a:noFill/>
-                <a:ln w="50800" cap="flat" cmpd="sng" algn="ctr">
-                  <a:solidFill>
-                    <a:schemeClr val="accent1"/>
-                  </a:solidFill>
-                  <a:prstDash val="solid"/>
-                  <a:round/>
-                  <a:headEnd type="none" w="med" len="med"/>
-                  <a:tailEnd type="stealth"/>
-                </a:ln>
-                <a:effectLst/>
-              </p:spPr>
-            </p:cxnSp>
-            <p:sp>
-              <p:nvSpPr>
-                <p:cNvPr id="127" name="Oval 126">
-                  <a:extLst>
-                    <a:ext uri="{FF2B5EF4-FFF2-40B4-BE49-F238E27FC236}">
-                      <a16:creationId xmlns:a16="http://schemas.microsoft.com/office/drawing/2014/main" id="{DEC98E1D-11A3-E74B-9323-F6FADAAA94C0}"/>
-                    </a:ext>
-                  </a:extLst>
-                </p:cNvPr>
-                <p:cNvSpPr/>
-                <p:nvPr/>
-              </p:nvSpPr>
-              <p:spPr bwMode="auto">
-                <a:xfrm>
-                  <a:off x="3429000" y="3073122"/>
-                  <a:ext cx="279678" cy="279678"/>
-                </a:xfrm>
-                <a:prstGeom prst="ellipse">
-                  <a:avLst/>
-                </a:prstGeom>
-                <a:solidFill>
-                  <a:schemeClr val="accent1"/>
-                </a:solidFill>
-                <a:ln w="12700" cap="flat" cmpd="sng" algn="ctr">
-                  <a:noFill/>
-                  <a:prstDash val="solid"/>
-                  <a:round/>
-                  <a:headEnd type="none" w="med" len="med"/>
-                  <a:tailEnd type="none" w="med" len="med"/>
-                </a:ln>
-                <a:effectLst/>
-              </p:spPr>
-              <p:txBody>
-                <a:bodyPr vert="horz" wrap="square" lIns="91440" tIns="45720" rIns="91440" bIns="45720" numCol="1" rtlCol="0" anchor="t" anchorCtr="0" compatLnSpc="1">
-                  <a:prstTxWarp prst="textNoShape">
-                    <a:avLst/>
-                  </a:prstTxWarp>
-                  <a:spAutoFit/>
-                </a:bodyPr>
-                <a:lstStyle/>
-                <a:p>
-                  <a:pPr marL="0" marR="0" indent="0" algn="l" defTabSz="914400" rtl="0" eaLnBrk="0" fontAlgn="base" latinLnBrk="0" hangingPunct="0">
-                    <a:lnSpc>
-                      <a:spcPct val="100000"/>
-                    </a:lnSpc>
-                    <a:spcBef>
-                      <a:spcPct val="0"/>
-                    </a:spcBef>
-                    <a:spcAft>
-                      <a:spcPct val="0"/>
-                    </a:spcAft>
-                    <a:buClrTx/>
-                    <a:buSzTx/>
-                    <a:buFontTx/>
-                    <a:buNone/>
-                    <a:tabLst/>
-                  </a:pPr>
-                  <a:endParaRPr kumimoji="0" lang="en-US" sz="2400" b="0" i="0" u="none" strike="noStrike" cap="none" normalizeH="0" baseline="0">
-                    <a:ln>
-                      <a:noFill/>
-                    </a:ln>
-                    <a:solidFill>
-                      <a:schemeClr val="tx1"/>
-                    </a:solidFill>
-                    <a:effectLst/>
-                    <a:latin typeface="Times New Roman" pitchFamily="-65" charset="0"/>
-                  </a:endParaRPr>
-                </a:p>
-              </p:txBody>
-            </p:sp>
-            <p:sp>
-              <p:nvSpPr>
-                <p:cNvPr id="128" name="Oval 127">
-                  <a:extLst>
-                    <a:ext uri="{FF2B5EF4-FFF2-40B4-BE49-F238E27FC236}">
-                      <a16:creationId xmlns:a16="http://schemas.microsoft.com/office/drawing/2014/main" id="{BA521086-45D2-6E5B-DAFF-C91042F160FA}"/>
-                    </a:ext>
-                  </a:extLst>
-                </p:cNvPr>
-                <p:cNvSpPr/>
-                <p:nvPr/>
-              </p:nvSpPr>
-              <p:spPr bwMode="auto">
-                <a:xfrm>
-                  <a:off x="3429000" y="3835122"/>
-                  <a:ext cx="279678" cy="279678"/>
-                </a:xfrm>
-                <a:prstGeom prst="ellipse">
-                  <a:avLst/>
-                </a:prstGeom>
-                <a:solidFill>
-                  <a:schemeClr val="accent1"/>
-                </a:solidFill>
-                <a:ln w="12700" cap="flat" cmpd="sng" algn="ctr">
-                  <a:noFill/>
-                  <a:prstDash val="solid"/>
-                  <a:round/>
-                  <a:headEnd type="none" w="med" len="med"/>
-                  <a:tailEnd type="none" w="med" len="med"/>
-                </a:ln>
-                <a:effectLst/>
-              </p:spPr>
-              <p:txBody>
-                <a:bodyPr vert="horz" wrap="square" lIns="91440" tIns="45720" rIns="91440" bIns="45720" numCol="1" rtlCol="0" anchor="t" anchorCtr="0" compatLnSpc="1">
-                  <a:prstTxWarp prst="textNoShape">
-                    <a:avLst/>
-                  </a:prstTxWarp>
-                  <a:spAutoFit/>
-                </a:bodyPr>
-                <a:lstStyle/>
-                <a:p>
-                  <a:pPr marL="0" marR="0" indent="0" algn="l" defTabSz="914400" rtl="0" eaLnBrk="0" fontAlgn="base" latinLnBrk="0" hangingPunct="0">
-                    <a:lnSpc>
-                      <a:spcPct val="100000"/>
-                    </a:lnSpc>
-                    <a:spcBef>
-                      <a:spcPct val="0"/>
-                    </a:spcBef>
-                    <a:spcAft>
-                      <a:spcPct val="0"/>
-                    </a:spcAft>
-                    <a:buClrTx/>
-                    <a:buSzTx/>
-                    <a:buFontTx/>
-                    <a:buNone/>
-                    <a:tabLst/>
-                  </a:pPr>
-                  <a:endParaRPr kumimoji="0" lang="en-US" sz="2400" b="0" i="0" u="none" strike="noStrike" cap="none" normalizeH="0" baseline="0">
-                    <a:ln>
-                      <a:noFill/>
-                    </a:ln>
-                    <a:solidFill>
-                      <a:schemeClr val="tx1"/>
-                    </a:solidFill>
-                    <a:effectLst/>
-                    <a:latin typeface="Times New Roman" pitchFamily="-65" charset="0"/>
-                  </a:endParaRPr>
-                </a:p>
-              </p:txBody>
-            </p:sp>
-            <p:sp>
-              <p:nvSpPr>
-                <p:cNvPr id="129" name="Oval 128">
-                  <a:extLst>
-                    <a:ext uri="{FF2B5EF4-FFF2-40B4-BE49-F238E27FC236}">
-                      <a16:creationId xmlns:a16="http://schemas.microsoft.com/office/drawing/2014/main" id="{8A3FC05E-028A-A33D-53E4-A168EF9D4ACB}"/>
-                    </a:ext>
-                  </a:extLst>
-                </p:cNvPr>
-                <p:cNvSpPr/>
-                <p:nvPr/>
-              </p:nvSpPr>
-              <p:spPr bwMode="auto">
-                <a:xfrm>
-                  <a:off x="3454122" y="4749522"/>
-                  <a:ext cx="279678" cy="279678"/>
-                </a:xfrm>
-                <a:prstGeom prst="ellipse">
-                  <a:avLst/>
-                </a:prstGeom>
-                <a:solidFill>
-                  <a:schemeClr val="accent1"/>
-                </a:solidFill>
-                <a:ln w="12700" cap="flat" cmpd="sng" algn="ctr">
-                  <a:noFill/>
-                  <a:prstDash val="solid"/>
-                  <a:round/>
-                  <a:headEnd type="none" w="med" len="med"/>
-                  <a:tailEnd type="none" w="med" len="med"/>
-                </a:ln>
-                <a:effectLst/>
-              </p:spPr>
-              <p:txBody>
-                <a:bodyPr vert="horz" wrap="square" lIns="91440" tIns="45720" rIns="91440" bIns="45720" numCol="1" rtlCol="0" anchor="t" anchorCtr="0" compatLnSpc="1">
-                  <a:prstTxWarp prst="textNoShape">
-                    <a:avLst/>
-                  </a:prstTxWarp>
-                  <a:spAutoFit/>
-                </a:bodyPr>
-                <a:lstStyle/>
-                <a:p>
-                  <a:pPr marL="0" marR="0" indent="0" algn="l" defTabSz="914400" rtl="0" eaLnBrk="0" fontAlgn="base" latinLnBrk="0" hangingPunct="0">
-                    <a:lnSpc>
-                      <a:spcPct val="100000"/>
-                    </a:lnSpc>
-                    <a:spcBef>
-                      <a:spcPct val="0"/>
-                    </a:spcBef>
-                    <a:spcAft>
-                      <a:spcPct val="0"/>
-                    </a:spcAft>
-                    <a:buClrTx/>
-                    <a:buSzTx/>
-                    <a:buFontTx/>
-                    <a:buNone/>
-                    <a:tabLst/>
-                  </a:pPr>
-                  <a:endParaRPr kumimoji="0" lang="en-US" sz="2400" b="0" i="0" u="none" strike="noStrike" cap="none" normalizeH="0" baseline="0">
-                    <a:ln>
-                      <a:noFill/>
-                    </a:ln>
-                    <a:solidFill>
-                      <a:schemeClr val="tx1"/>
-                    </a:solidFill>
-                    <a:effectLst/>
-                    <a:latin typeface="Times New Roman" pitchFamily="-65" charset="0"/>
-                  </a:endParaRPr>
-                </a:p>
-              </p:txBody>
-            </p:sp>
-          </p:grpSp>
-        </p:grpSp>
-        <p:grpSp>
-          <p:nvGrpSpPr>
-            <p:cNvPr id="144" name="Group 143">
-              <a:extLst>
-                <a:ext uri="{FF2B5EF4-FFF2-40B4-BE49-F238E27FC236}">
-                  <a16:creationId xmlns:a16="http://schemas.microsoft.com/office/drawing/2014/main" id="{C3072439-07DC-549D-7A95-7E227DE42356}"/>
-                </a:ext>
-              </a:extLst>
-            </p:cNvPr>
-            <p:cNvGrpSpPr/>
-            <p:nvPr/>
-          </p:nvGrpSpPr>
-          <p:grpSpPr>
-            <a:xfrm>
-              <a:off x="2962310" y="1951961"/>
-              <a:ext cx="695290" cy="3106478"/>
-              <a:chOff x="2886110" y="1951961"/>
-              <a:chExt cx="695290" cy="3106478"/>
-            </a:xfrm>
-          </p:grpSpPr>
-          <mc:AlternateContent xmlns:mc="http://schemas.openxmlformats.org/markup-compatibility/2006" xmlns:a14="http://schemas.microsoft.com/office/drawing/2010/main">
-            <mc:Choice Requires="a14">
-              <p:sp>
-                <p:nvSpPr>
-                  <p:cNvPr id="43" name="TextBox 42">
-                    <a:extLst>
-                      <a:ext uri="{FF2B5EF4-FFF2-40B4-BE49-F238E27FC236}">
-                        <a16:creationId xmlns:a16="http://schemas.microsoft.com/office/drawing/2014/main" id="{673BC42A-BCD6-2A2D-6975-B0A8FFAA5CF9}"/>
-                      </a:ext>
-                    </a:extLst>
-                  </p:cNvPr>
-                  <p:cNvSpPr txBox="1"/>
-                  <p:nvPr/>
-                </p:nvSpPr>
-                <p:spPr>
-                  <a:xfrm>
-                    <a:off x="2962310" y="1951961"/>
-                    <a:ext cx="565899" cy="643253"/>
-                  </a:xfrm>
-                  <a:prstGeom prst="rect">
-                    <a:avLst/>
-                  </a:prstGeom>
-                  <a:noFill/>
-                </p:spPr>
-                <p:txBody>
-                  <a:bodyPr wrap="none" rtlCol="0">
-                    <a:spAutoFit/>
-                  </a:bodyPr>
-                  <a:lstStyle/>
-                  <a:p>
-                    <a:pPr/>
-                    <a14:m>
-                      <m:oMathPara xmlns:m="http://schemas.openxmlformats.org/officeDocument/2006/math">
-                        <m:oMathParaPr>
-                          <m:jc m:val="centerGroup"/>
-                        </m:oMathParaPr>
-                        <m:oMath xmlns:m="http://schemas.openxmlformats.org/officeDocument/2006/math">
-                          <m:sSub>
-                            <m:sSubPr>
-                              <m:ctrlPr>
-                                <a:rPr lang="en-US" sz="3200" b="0" i="1" smtClean="0">
-                                  <a:latin typeface="Cambria Math" panose="02040503050406030204" pitchFamily="18" charset="0"/>
-                                </a:rPr>
-                              </m:ctrlPr>
-                            </m:sSubPr>
-                            <m:e>
-                              <m:r>
-                                <a:rPr lang="en-US" sz="3200" b="0" i="1" smtClean="0">
-                                  <a:latin typeface="Cambria Math" panose="02040503050406030204" pitchFamily="18" charset="0"/>
-                                </a:rPr>
-                                <m:t>𝑦</m:t>
-                              </m:r>
-                            </m:e>
-                            <m:sub>
-                              <m:r>
-                                <a:rPr lang="en-US" sz="3200" b="0" i="1" smtClean="0">
-                                  <a:latin typeface="Cambria Math" panose="02040503050406030204" pitchFamily="18" charset="0"/>
-                                </a:rPr>
-                                <m:t>1</m:t>
-                              </m:r>
-                            </m:sub>
-                          </m:sSub>
-                        </m:oMath>
-                      </m:oMathPara>
-                    </a14:m>
-                    <a:endParaRPr lang="en-US" sz="3200" dirty="0"/>
-                  </a:p>
-                </p:txBody>
-              </p:sp>
-            </mc:Choice>
-            <mc:Fallback xmlns="">
-              <p:sp>
-                <p:nvSpPr>
-                  <p:cNvPr id="43" name="TextBox 42">
-                    <a:extLst>
-                      <a:ext uri="{FF2B5EF4-FFF2-40B4-BE49-F238E27FC236}">
-                        <a16:creationId xmlns:a16="http://schemas.microsoft.com/office/drawing/2014/main" id="{673BC42A-BCD6-2A2D-6975-B0A8FFAA5CF9}"/>
-                      </a:ext>
-                    </a:extLst>
-                  </p:cNvPr>
-                  <p:cNvSpPr txBox="1">
-                    <a:spLocks noRot="1" noChangeAspect="1" noMove="1" noResize="1" noEditPoints="1" noAdjustHandles="1" noChangeArrowheads="1" noChangeShapeType="1" noTextEdit="1"/>
-                  </p:cNvSpPr>
-                  <p:nvPr/>
-                </p:nvSpPr>
-                <p:spPr>
-                  <a:xfrm>
-                    <a:off x="2962310" y="1951961"/>
-                    <a:ext cx="565899" cy="643253"/>
-                  </a:xfrm>
-                  <a:prstGeom prst="rect">
-                    <a:avLst/>
-                  </a:prstGeom>
-                  <a:blipFill>
-                    <a:blip r:embed="rId8"/>
-                    <a:stretch>
-                      <a:fillRect l="-6522" b="-5882"/>
-                    </a:stretch>
-                  </a:blipFill>
-                </p:spPr>
-                <p:txBody>
-                  <a:bodyPr/>
-                  <a:lstStyle/>
-                  <a:p>
-                    <a:r>
-                      <a:rPr lang="en-US">
-                        <a:noFill/>
-                      </a:rPr>
-                      <a:t> </a:t>
-                    </a:r>
-                  </a:p>
-                </p:txBody>
-              </p:sp>
-            </mc:Fallback>
-          </mc:AlternateContent>
-          <mc:AlternateContent xmlns:mc="http://schemas.openxmlformats.org/markup-compatibility/2006" xmlns:a14="http://schemas.microsoft.com/office/drawing/2010/main">
-            <mc:Choice Requires="a14">
-              <p:sp>
-                <p:nvSpPr>
-                  <p:cNvPr id="141" name="TextBox 140">
-                    <a:extLst>
-                      <a:ext uri="{FF2B5EF4-FFF2-40B4-BE49-F238E27FC236}">
-                        <a16:creationId xmlns:a16="http://schemas.microsoft.com/office/drawing/2014/main" id="{5F878C71-19F4-9F43-6201-AFAED46A8116}"/>
-                      </a:ext>
-                    </a:extLst>
-                  </p:cNvPr>
-                  <p:cNvSpPr txBox="1"/>
-                  <p:nvPr/>
-                </p:nvSpPr>
-                <p:spPr>
-                  <a:xfrm>
-                    <a:off x="2887172" y="2738786"/>
-                    <a:ext cx="694228" cy="643253"/>
-                  </a:xfrm>
-                  <a:prstGeom prst="rect">
-                    <a:avLst/>
-                  </a:prstGeom>
-                  <a:noFill/>
-                </p:spPr>
-                <p:txBody>
-                  <a:bodyPr wrap="none" rtlCol="0">
-                    <a:spAutoFit/>
-                  </a:bodyPr>
-                  <a:lstStyle/>
-                  <a:p>
-                    <a:pPr/>
-                    <a14:m>
-                      <m:oMathPara xmlns:m="http://schemas.openxmlformats.org/officeDocument/2006/math">
-                        <m:oMathParaPr>
-                          <m:jc m:val="centerGroup"/>
-                        </m:oMathParaPr>
-                        <m:oMath xmlns:m="http://schemas.openxmlformats.org/officeDocument/2006/math">
-                          <m:sSub>
-                            <m:sSubPr>
-                              <m:ctrlPr>
-                                <a:rPr lang="en-US" sz="3200" b="0" i="1" smtClean="0">
-                                  <a:latin typeface="Cambria Math" panose="02040503050406030204" pitchFamily="18" charset="0"/>
-                                </a:rPr>
-                              </m:ctrlPr>
-                            </m:sSubPr>
-                            <m:e>
-                              <m:r>
-                                <a:rPr lang="en-US" sz="3200" b="0" i="1" smtClean="0">
-                                  <a:latin typeface="Cambria Math" panose="02040503050406030204" pitchFamily="18" charset="0"/>
-                                </a:rPr>
-                                <m:t>𝑦</m:t>
-                              </m:r>
-                            </m:e>
-                            <m:sub>
-                              <m:r>
-                                <a:rPr lang="en-US" sz="3200" b="0" i="1" smtClean="0">
-                                  <a:latin typeface="Cambria Math" panose="02040503050406030204" pitchFamily="18" charset="0"/>
-                                </a:rPr>
-                                <m:t>2</m:t>
-                              </m:r>
-                            </m:sub>
-                          </m:sSub>
-                        </m:oMath>
-                      </m:oMathPara>
-                    </a14:m>
-                    <a:endParaRPr lang="en-US" sz="3200" dirty="0"/>
-                  </a:p>
-                </p:txBody>
-              </p:sp>
-            </mc:Choice>
-            <mc:Fallback xmlns="">
-              <p:sp>
-                <p:nvSpPr>
-                  <p:cNvPr id="141" name="TextBox 140">
-                    <a:extLst>
-                      <a:ext uri="{FF2B5EF4-FFF2-40B4-BE49-F238E27FC236}">
-                        <a16:creationId xmlns:a16="http://schemas.microsoft.com/office/drawing/2014/main" id="{5F878C71-19F4-9F43-6201-AFAED46A8116}"/>
-                      </a:ext>
-                    </a:extLst>
-                  </p:cNvPr>
-                  <p:cNvSpPr txBox="1">
-                    <a:spLocks noRot="1" noChangeAspect="1" noMove="1" noResize="1" noEditPoints="1" noAdjustHandles="1" noChangeArrowheads="1" noChangeShapeType="1" noTextEdit="1"/>
-                  </p:cNvSpPr>
-                  <p:nvPr/>
-                </p:nvSpPr>
-                <p:spPr>
-                  <a:xfrm>
-                    <a:off x="2887172" y="2738786"/>
-                    <a:ext cx="694228" cy="643253"/>
-                  </a:xfrm>
-                  <a:prstGeom prst="rect">
-                    <a:avLst/>
-                  </a:prstGeom>
-                  <a:blipFill>
-                    <a:blip r:embed="rId9"/>
-                    <a:stretch>
-                      <a:fillRect b="-3922"/>
-                    </a:stretch>
-                  </a:blipFill>
-                </p:spPr>
-                <p:txBody>
-                  <a:bodyPr/>
-                  <a:lstStyle/>
-                  <a:p>
-                    <a:r>
-                      <a:rPr lang="en-US">
-                        <a:noFill/>
-                      </a:rPr>
-                      <a:t> </a:t>
-                    </a:r>
-                  </a:p>
-                </p:txBody>
-              </p:sp>
-            </mc:Fallback>
-          </mc:AlternateContent>
-          <mc:AlternateContent xmlns:mc="http://schemas.openxmlformats.org/markup-compatibility/2006" xmlns:a14="http://schemas.microsoft.com/office/drawing/2010/main">
-            <mc:Choice Requires="a14">
-              <p:sp>
-                <p:nvSpPr>
-                  <p:cNvPr id="142" name="TextBox 141">
-                    <a:extLst>
-                      <a:ext uri="{FF2B5EF4-FFF2-40B4-BE49-F238E27FC236}">
-                        <a16:creationId xmlns:a16="http://schemas.microsoft.com/office/drawing/2014/main" id="{9A9BFDAE-EC79-5347-323E-4C6E8A3F4DDD}"/>
-                      </a:ext>
-                    </a:extLst>
-                  </p:cNvPr>
-                  <p:cNvSpPr txBox="1"/>
-                  <p:nvPr/>
-                </p:nvSpPr>
-                <p:spPr>
-                  <a:xfrm>
-                    <a:off x="2886110" y="3576986"/>
-                    <a:ext cx="694228" cy="643253"/>
-                  </a:xfrm>
-                  <a:prstGeom prst="rect">
-                    <a:avLst/>
-                  </a:prstGeom>
-                  <a:noFill/>
-                </p:spPr>
-                <p:txBody>
-                  <a:bodyPr wrap="none" rtlCol="0">
-                    <a:spAutoFit/>
-                  </a:bodyPr>
-                  <a:lstStyle/>
-                  <a:p>
-                    <a:pPr/>
-                    <a14:m>
-                      <m:oMathPara xmlns:m="http://schemas.openxmlformats.org/officeDocument/2006/math">
-                        <m:oMathParaPr>
-                          <m:jc m:val="centerGroup"/>
-                        </m:oMathParaPr>
-                        <m:oMath xmlns:m="http://schemas.openxmlformats.org/officeDocument/2006/math">
-                          <m:sSub>
-                            <m:sSubPr>
-                              <m:ctrlPr>
-                                <a:rPr lang="en-US" sz="3200" b="0" i="1" smtClean="0">
-                                  <a:latin typeface="Cambria Math" panose="02040503050406030204" pitchFamily="18" charset="0"/>
-                                </a:rPr>
-                              </m:ctrlPr>
-                            </m:sSubPr>
-                            <m:e>
-                              <m:r>
-                                <a:rPr lang="en-US" sz="3200" b="0" i="1" smtClean="0">
-                                  <a:latin typeface="Cambria Math" panose="02040503050406030204" pitchFamily="18" charset="0"/>
-                                </a:rPr>
-                                <m:t>𝑦</m:t>
-                              </m:r>
-                            </m:e>
-                            <m:sub>
-                              <m:r>
-                                <a:rPr lang="en-US" sz="3200" b="0" i="1" smtClean="0">
-                                  <a:latin typeface="Cambria Math" panose="02040503050406030204" pitchFamily="18" charset="0"/>
-                                </a:rPr>
-                                <m:t>3</m:t>
-                              </m:r>
-                            </m:sub>
-                          </m:sSub>
-                        </m:oMath>
-                      </m:oMathPara>
-                    </a14:m>
-                    <a:endParaRPr lang="en-US" sz="3200" dirty="0"/>
-                  </a:p>
-                </p:txBody>
-              </p:sp>
-            </mc:Choice>
-            <mc:Fallback xmlns="">
-              <p:sp>
-                <p:nvSpPr>
-                  <p:cNvPr id="142" name="TextBox 141">
-                    <a:extLst>
-                      <a:ext uri="{FF2B5EF4-FFF2-40B4-BE49-F238E27FC236}">
-                        <a16:creationId xmlns:a16="http://schemas.microsoft.com/office/drawing/2014/main" id="{9A9BFDAE-EC79-5347-323E-4C6E8A3F4DDD}"/>
-                      </a:ext>
-                    </a:extLst>
-                  </p:cNvPr>
-                  <p:cNvSpPr txBox="1">
-                    <a:spLocks noRot="1" noChangeAspect="1" noMove="1" noResize="1" noEditPoints="1" noAdjustHandles="1" noChangeArrowheads="1" noChangeShapeType="1" noTextEdit="1"/>
-                  </p:cNvSpPr>
-                  <p:nvPr/>
-                </p:nvSpPr>
-                <p:spPr>
-                  <a:xfrm>
-                    <a:off x="2886110" y="3576986"/>
-                    <a:ext cx="694228" cy="643253"/>
-                  </a:xfrm>
-                  <a:prstGeom prst="rect">
-                    <a:avLst/>
-                  </a:prstGeom>
-                  <a:blipFill>
-                    <a:blip r:embed="rId10"/>
-                    <a:stretch>
-                      <a:fillRect b="-3846"/>
-                    </a:stretch>
-                  </a:blipFill>
-                </p:spPr>
-                <p:txBody>
-                  <a:bodyPr/>
-                  <a:lstStyle/>
-                  <a:p>
-                    <a:r>
-                      <a:rPr lang="en-US">
-                        <a:noFill/>
-                      </a:rPr>
-                      <a:t> </a:t>
-                    </a:r>
-                  </a:p>
-                </p:txBody>
-              </p:sp>
-            </mc:Fallback>
-          </mc:AlternateContent>
-          <mc:AlternateContent xmlns:mc="http://schemas.openxmlformats.org/markup-compatibility/2006" xmlns:a14="http://schemas.microsoft.com/office/drawing/2010/main">
-            <mc:Choice Requires="a14">
-              <p:sp>
-                <p:nvSpPr>
-                  <p:cNvPr id="143" name="TextBox 142">
-                    <a:extLst>
-                      <a:ext uri="{FF2B5EF4-FFF2-40B4-BE49-F238E27FC236}">
-                        <a16:creationId xmlns:a16="http://schemas.microsoft.com/office/drawing/2014/main" id="{C66450CE-2DD1-B278-6386-F7568143A43D}"/>
-                      </a:ext>
-                    </a:extLst>
-                  </p:cNvPr>
-                  <p:cNvSpPr txBox="1"/>
-                  <p:nvPr/>
-                </p:nvSpPr>
-                <p:spPr>
-                  <a:xfrm>
-                    <a:off x="2886110" y="4415186"/>
-                    <a:ext cx="676660" cy="643253"/>
-                  </a:xfrm>
-                  <a:prstGeom prst="rect">
-                    <a:avLst/>
-                  </a:prstGeom>
-                  <a:noFill/>
-                </p:spPr>
-                <p:txBody>
-                  <a:bodyPr wrap="none" rtlCol="0">
-                    <a:spAutoFit/>
-                  </a:bodyPr>
-                  <a:lstStyle/>
-                  <a:p>
-                    <a:pPr/>
-                    <a14:m>
-                      <m:oMathPara xmlns:m="http://schemas.openxmlformats.org/officeDocument/2006/math">
-                        <m:oMathParaPr>
-                          <m:jc m:val="centerGroup"/>
-                        </m:oMathParaPr>
-                        <m:oMath xmlns:m="http://schemas.openxmlformats.org/officeDocument/2006/math">
-                          <m:sSub>
-                            <m:sSubPr>
-                              <m:ctrlPr>
-                                <a:rPr lang="en-US" sz="3200" b="0" i="1" smtClean="0">
-                                  <a:latin typeface="Cambria Math" panose="02040503050406030204" pitchFamily="18" charset="0"/>
-                                </a:rPr>
-                              </m:ctrlPr>
-                            </m:sSubPr>
-                            <m:e>
-                              <m:r>
-                                <a:rPr lang="en-US" sz="3200" b="0" i="1" smtClean="0">
-                                  <a:latin typeface="Cambria Math" panose="02040503050406030204" pitchFamily="18" charset="0"/>
-                                </a:rPr>
-                                <m:t>𝑦</m:t>
-                              </m:r>
-                            </m:e>
-                            <m:sub>
-                              <m:r>
-                                <a:rPr lang="en-US" sz="3200" b="0" i="1" smtClean="0">
-                                  <a:latin typeface="Cambria Math" panose="02040503050406030204" pitchFamily="18" charset="0"/>
-                                </a:rPr>
-                                <m:t>4</m:t>
-                              </m:r>
-                            </m:sub>
-                          </m:sSub>
-                        </m:oMath>
-                      </m:oMathPara>
-                    </a14:m>
-                    <a:endParaRPr lang="en-US" sz="3200" dirty="0"/>
-                  </a:p>
-                </p:txBody>
-              </p:sp>
-            </mc:Choice>
-            <mc:Fallback xmlns="">
-              <p:sp>
-                <p:nvSpPr>
-                  <p:cNvPr id="143" name="TextBox 142">
-                    <a:extLst>
-                      <a:ext uri="{FF2B5EF4-FFF2-40B4-BE49-F238E27FC236}">
-                        <a16:creationId xmlns:a16="http://schemas.microsoft.com/office/drawing/2014/main" id="{C66450CE-2DD1-B278-6386-F7568143A43D}"/>
-                      </a:ext>
-                    </a:extLst>
-                  </p:cNvPr>
-                  <p:cNvSpPr txBox="1">
-                    <a:spLocks noRot="1" noChangeAspect="1" noMove="1" noResize="1" noEditPoints="1" noAdjustHandles="1" noChangeArrowheads="1" noChangeShapeType="1" noTextEdit="1"/>
-                  </p:cNvSpPr>
-                  <p:nvPr/>
-                </p:nvSpPr>
-                <p:spPr>
-                  <a:xfrm>
-                    <a:off x="2886110" y="4415186"/>
-                    <a:ext cx="676660" cy="643253"/>
-                  </a:xfrm>
-                  <a:prstGeom prst="rect">
-                    <a:avLst/>
-                  </a:prstGeom>
-                  <a:blipFill>
-                    <a:blip r:embed="rId11"/>
-                    <a:stretch>
-                      <a:fillRect b="-3922"/>
-                    </a:stretch>
-                  </a:blipFill>
-                </p:spPr>
-                <p:txBody>
-                  <a:bodyPr/>
-                  <a:lstStyle/>
-                  <a:p>
-                    <a:r>
-                      <a:rPr lang="en-US">
-                        <a:noFill/>
-                      </a:rPr>
-                      <a:t> </a:t>
-                    </a:r>
-                  </a:p>
-                </p:txBody>
-              </p:sp>
-            </mc:Fallback>
-          </mc:AlternateContent>
-        </p:grpSp>
-      </p:grpSp>
-    </p:spTree>
-    <p:extLst>
-      <p:ext uri="{BB962C8B-B14F-4D97-AF65-F5344CB8AC3E}">
-        <p14:creationId xmlns:p14="http://schemas.microsoft.com/office/powerpoint/2010/main" val="1401816873"/>
-      </p:ext>
-    </p:extLst>
-  </p:cSld>
-  <p:clrMapOvr>
-    <a:masterClrMapping/>
-  </p:clrMapOvr>
-  <mc:AlternateContent xmlns:mc="http://schemas.openxmlformats.org/markup-compatibility/2006" xmlns:p14="http://schemas.microsoft.com/office/powerpoint/2010/main">
-    <mc:Choice Requires="p14">
-      <p:transition spd="med" p14:dur="700">
-        <p:fade/>
-      </p:transition>
-    </mc:Choice>
-    <mc:Fallback xmlns="">
-      <p:transition spd="med">
-        <p:fade/>
-      </p:transition>
-    </mc:Fallback>
-  </mc:AlternateContent>
-  <p:timing>
-    <p:tnLst>
-      <p:par>
-        <p:cTn id="1" dur="indefinite" restart="never" nodeType="tmRoot">
-          <p:childTnLst>
-            <p:seq concurrent="1" nextAc="seek">
-              <p:cTn id="2" dur="indefinite" nodeType="mainSeq">
-                <p:childTnLst>
-                  <p:par>
-                    <p:cTn id="3" fill="hold">
-                      <p:stCondLst>
-                        <p:cond delay="indefinite"/>
-                        <p:cond evt="onBegin" delay="0">
-                          <p:tn val="2"/>
-                        </p:cond>
-                      </p:stCondLst>
-                      <p:childTnLst>
-                        <p:par>
-                          <p:cTn id="4" fill="hold">
-                            <p:stCondLst>
-                              <p:cond delay="0"/>
-                            </p:stCondLst>
-                            <p:childTnLst>
-                              <p:par>
-                                <p:cTn id="5" presetID="10" presetClass="entr" presetSubtype="0" fill="hold" nodeType="afterEffect">
-                                  <p:stCondLst>
-                                    <p:cond delay="0"/>
-                                  </p:stCondLst>
-                                  <p:childTnLst>
-                                    <p:set>
-                                      <p:cBhvr>
-                                        <p:cTn id="6" dur="1" fill="hold">
-                                          <p:stCondLst>
-                                            <p:cond delay="0"/>
-                                          </p:stCondLst>
-                                        </p:cTn>
-                                        <p:tgtEl>
-                                          <p:spTgt spid="145"/>
-                                        </p:tgtEl>
-                                        <p:attrNameLst>
-                                          <p:attrName>style.visibility</p:attrName>
-                                        </p:attrNameLst>
-                                      </p:cBhvr>
-                                      <p:to>
-                                        <p:strVal val="visible"/>
-                                      </p:to>
-                                    </p:set>
-                                    <p:animEffect transition="in" filter="fade">
-                                      <p:cBhvr>
-                                        <p:cTn id="7" dur="500"/>
-                                        <p:tgtEl>
-                                          <p:spTgt spid="145"/>
-                                        </p:tgtEl>
-                                      </p:cBhvr>
-                                    </p:animEffect>
-                                  </p:childTnLst>
-                                </p:cTn>
-                              </p:par>
-                              <p:par>
-                                <p:cTn id="8" presetID="10" presetClass="entr" presetSubtype="0" fill="hold" nodeType="withEffect">
-                                  <p:stCondLst>
-                                    <p:cond delay="0"/>
-                                  </p:stCondLst>
-                                  <p:childTnLst>
-                                    <p:set>
-                                      <p:cBhvr>
-                                        <p:cTn id="9" dur="1" fill="hold">
-                                          <p:stCondLst>
-                                            <p:cond delay="0"/>
-                                          </p:stCondLst>
-                                        </p:cTn>
-                                        <p:tgtEl>
-                                          <p:spTgt spid="139"/>
-                                        </p:tgtEl>
-                                        <p:attrNameLst>
-                                          <p:attrName>style.visibility</p:attrName>
-                                        </p:attrNameLst>
-                                      </p:cBhvr>
-                                      <p:to>
-                                        <p:strVal val="visible"/>
-                                      </p:to>
-                                    </p:set>
-                                    <p:animEffect transition="in" filter="fade">
-                                      <p:cBhvr>
-                                        <p:cTn id="10" dur="500"/>
-                                        <p:tgtEl>
-                                          <p:spTgt spid="139"/>
-                                        </p:tgtEl>
-                                      </p:cBhvr>
-                                    </p:animEffect>
-                                  </p:childTnLst>
-                                </p:cTn>
-                              </p:par>
-                            </p:childTnLst>
-                          </p:cTn>
-                        </p:par>
-                      </p:childTnLst>
-                    </p:cTn>
-                  </p:par>
-                </p:childTnLst>
-              </p:cTn>
-              <p:prevCondLst>
-                <p:cond evt="onPrev" delay="0">
-                  <p:tgtEl>
-                    <p:sldTgt/>
-                  </p:tgtEl>
-                </p:cond>
-              </p:prevCondLst>
-              <p:nextCondLst>
-                <p:cond evt="onNext" delay="0">
-                  <p:tgtEl>
-                    <p:sldTgt/>
-                  </p:tgtEl>
-                </p:cond>
-              </p:nextCondLst>
-            </p:seq>
-          </p:childTnLst>
-        </p:cTn>
-      </p:par>
-    </p:tnLst>
-  </p:timing>
-</p:sld>
-</file>
-
-<file path=ppt/slides/slide25.xml><?xml version="1.0" encoding="utf-8"?>
-<p:sld xmlns:a="http://schemas.openxmlformats.org/drawingml/2006/main" xmlns:r="http://schemas.openxmlformats.org/officeDocument/2006/relationships" xmlns:p="http://schemas.openxmlformats.org/presentationml/2006/main">
-  <p:cSld>
-    <p:spTree>
-      <p:nvGrpSpPr>
-        <p:cNvPr id="1" name=""/>
-        <p:cNvGrpSpPr/>
-        <p:nvPr/>
-      </p:nvGrpSpPr>
-      <p:grpSpPr>
-        <a:xfrm>
-          <a:off x="0" y="0"/>
-          <a:ext cx="0" cy="0"/>
-          <a:chOff x="0" y="0"/>
-          <a:chExt cx="0" cy="0"/>
-        </a:xfrm>
-      </p:grpSpPr>
-      <p:sp>
-        <p:nvSpPr>
-          <p:cNvPr id="8" name="Content Placeholder 7">
-            <a:extLst>
-              <a:ext uri="{FF2B5EF4-FFF2-40B4-BE49-F238E27FC236}">
-                <a16:creationId xmlns:a16="http://schemas.microsoft.com/office/drawing/2014/main" id="{A189D3E5-DE11-4089-AF21-B25A702BB830}"/>
-              </a:ext>
-            </a:extLst>
-          </p:cNvPr>
-          <p:cNvSpPr>
-            <a:spLocks noGrp="1"/>
-          </p:cNvSpPr>
-          <p:nvPr>
-            <p:ph idx="1"/>
-          </p:nvPr>
-        </p:nvSpPr>
-        <p:spPr>
-          <a:xfrm>
-            <a:off x="711200" y="1295400"/>
-            <a:ext cx="8001000" cy="4819650"/>
-          </a:xfrm>
-        </p:spPr>
-        <p:txBody>
-          <a:bodyPr/>
-          <a:lstStyle/>
-          <a:p>
-            <a:pPr marL="0" indent="0">
-              <a:buNone/>
-            </a:pPr>
-            <a:r>
-              <a:rPr lang="en-US" dirty="0"/>
-              <a:t>Then,</a:t>
-            </a:r>
-            <a:r>
-              <a:rPr lang="en-US" sz="2400" dirty="0"/>
-              <a:t> </a:t>
-            </a:r>
-            <a:r>
-              <a:rPr lang="en-US" dirty="0"/>
-              <a:t>we </a:t>
-            </a:r>
-            <a:r>
-              <a:rPr lang="en-US" sz="2400" dirty="0"/>
-              <a:t>feed the outputs of the 4-output</a:t>
-            </a:r>
-            <a:r>
-              <a:rPr lang="en-US" dirty="0"/>
-              <a:t> </a:t>
-            </a:r>
-            <a:r>
-              <a:rPr lang="en-US" sz="2400" dirty="0"/>
-              <a:t>perceptro</a:t>
-            </a:r>
-            <a:r>
-              <a:rPr lang="en-US" dirty="0"/>
-              <a:t>n into one with</a:t>
-            </a:r>
-            <a:r>
-              <a:rPr lang="en-US" sz="2400" dirty="0"/>
-              <a:t> 4 inputs 1 node:</a:t>
-            </a:r>
-          </a:p>
-          <a:p>
-            <a:pPr marL="0" indent="0">
-              <a:buNone/>
-            </a:pPr>
-            <a:r>
-              <a:rPr lang="en-US" sz="2400" dirty="0"/>
-              <a:t>	</a:t>
-            </a:r>
-          </a:p>
-          <a:p>
-            <a:pPr marL="0" indent="0">
-              <a:buNone/>
-            </a:pPr>
-            <a:endParaRPr lang="en-US" dirty="0"/>
-          </a:p>
-          <a:p>
-            <a:pPr marL="0" indent="0">
-              <a:buNone/>
-            </a:pPr>
-            <a:endParaRPr lang="en-US" sz="2400" dirty="0"/>
-          </a:p>
-          <a:p>
-            <a:pPr marL="0" indent="0">
-              <a:buNone/>
-            </a:pPr>
-            <a:endParaRPr lang="en-US" dirty="0"/>
-          </a:p>
-          <a:p>
-            <a:pPr marL="0" indent="0">
-              <a:buNone/>
-            </a:pPr>
-            <a:endParaRPr lang="en-US" sz="2400" dirty="0"/>
-          </a:p>
-          <a:p>
-            <a:pPr marL="0" indent="0">
-              <a:buNone/>
-            </a:pPr>
-            <a:endParaRPr lang="en-US" dirty="0"/>
-          </a:p>
-        </p:txBody>
-      </p:sp>
-      <p:sp>
-        <p:nvSpPr>
-          <p:cNvPr id="7" name="Title 6">
-            <a:extLst>
-              <a:ext uri="{FF2B5EF4-FFF2-40B4-BE49-F238E27FC236}">
-                <a16:creationId xmlns:a16="http://schemas.microsoft.com/office/drawing/2014/main" id="{588E3757-806D-8007-1104-115F11A5354A}"/>
-              </a:ext>
-            </a:extLst>
-          </p:cNvPr>
-          <p:cNvSpPr>
-            <a:spLocks noGrp="1"/>
-          </p:cNvSpPr>
-          <p:nvPr>
-            <p:ph type="title"/>
-          </p:nvPr>
-        </p:nvSpPr>
-        <p:spPr/>
-        <p:txBody>
-          <a:bodyPr/>
-          <a:lstStyle/>
-          <a:p>
-            <a:r>
-              <a:rPr lang="en-US" dirty="0"/>
-              <a:t>Multi-Node Perceptron</a:t>
-            </a:r>
-          </a:p>
-        </p:txBody>
-      </p:sp>
-      <p:sp>
-        <p:nvSpPr>
-          <p:cNvPr id="6" name="Footer Placeholder 5">
-            <a:extLst>
-              <a:ext uri="{FF2B5EF4-FFF2-40B4-BE49-F238E27FC236}">
-                <a16:creationId xmlns:a16="http://schemas.microsoft.com/office/drawing/2014/main" id="{8B4BE63B-94BE-CF62-5F13-00EEA5FD0093}"/>
-              </a:ext>
-            </a:extLst>
-          </p:cNvPr>
-          <p:cNvSpPr>
-            <a:spLocks noGrp="1"/>
-          </p:cNvSpPr>
-          <p:nvPr>
-            <p:ph type="ftr" sz="quarter" idx="10"/>
-          </p:nvPr>
-        </p:nvSpPr>
-        <p:spPr/>
-        <p:txBody>
-          <a:bodyPr/>
-          <a:lstStyle/>
-          <a:p>
-            <a:pPr>
-              <a:defRPr/>
-            </a:pPr>
-            <a:r>
-              <a:rPr lang="en-US" dirty="0"/>
-              <a:t>FSU: Machine Learning in Physics</a:t>
-            </a:r>
-          </a:p>
-        </p:txBody>
-      </p:sp>
-      <p:sp>
-        <p:nvSpPr>
-          <p:cNvPr id="5" name="Slide Number Placeholder 4">
-            <a:extLst>
-              <a:ext uri="{FF2B5EF4-FFF2-40B4-BE49-F238E27FC236}">
-                <a16:creationId xmlns:a16="http://schemas.microsoft.com/office/drawing/2014/main" id="{009B41E1-0F46-C47E-E38D-FC14D8A04D08}"/>
-              </a:ext>
-            </a:extLst>
-          </p:cNvPr>
-          <p:cNvSpPr>
-            <a:spLocks noGrp="1"/>
-          </p:cNvSpPr>
-          <p:nvPr>
-            <p:ph type="sldNum" sz="quarter" idx="11"/>
-          </p:nvPr>
-        </p:nvSpPr>
-        <p:spPr/>
-        <p:txBody>
-          <a:bodyPr/>
-          <a:lstStyle/>
-          <a:p>
-            <a:pPr>
-              <a:defRPr/>
-            </a:pPr>
-            <a:fld id="{84EEE8D3-405F-8246-8864-9DF28E2D288A}" type="slidenum">
-              <a:rPr lang="en-US" smtClean="0"/>
-              <a:pPr>
-                <a:defRPr/>
-              </a:pPr>
-              <a:t>25</a:t>
-            </a:fld>
-            <a:endParaRPr lang="en-US"/>
-          </a:p>
-        </p:txBody>
-      </p:sp>
-      <p:grpSp>
-        <p:nvGrpSpPr>
-          <p:cNvPr id="139" name="Group 138">
-            <a:extLst>
-              <a:ext uri="{FF2B5EF4-FFF2-40B4-BE49-F238E27FC236}">
-                <a16:creationId xmlns:a16="http://schemas.microsoft.com/office/drawing/2014/main" id="{31F0BBA9-2ACF-C1AE-0570-0CB2EE45B939}"/>
-              </a:ext>
-            </a:extLst>
-          </p:cNvPr>
-          <p:cNvGrpSpPr/>
-          <p:nvPr/>
-        </p:nvGrpSpPr>
-        <p:grpSpPr>
-          <a:xfrm>
-            <a:off x="304800" y="5562600"/>
-            <a:ext cx="4928856" cy="822305"/>
-            <a:chOff x="2157744" y="5424994"/>
-            <a:chExt cx="4928856" cy="822305"/>
-          </a:xfrm>
-        </p:grpSpPr>
-        <mc:AlternateContent xmlns:mc="http://schemas.openxmlformats.org/markup-compatibility/2006" xmlns:a14="http://schemas.microsoft.com/office/drawing/2010/main">
-          <mc:Choice Requires="a14">
-            <p:sp>
-              <p:nvSpPr>
-                <p:cNvPr id="134" name="Oval 133">
-                  <a:extLst>
-                    <a:ext uri="{FF2B5EF4-FFF2-40B4-BE49-F238E27FC236}">
-                      <a16:creationId xmlns:a16="http://schemas.microsoft.com/office/drawing/2014/main" id="{B243D2E0-108D-1A27-6FE5-B4DEE671E435}"/>
-                    </a:ext>
-                  </a:extLst>
-                </p:cNvPr>
-                <p:cNvSpPr/>
-                <p:nvPr/>
-              </p:nvSpPr>
-              <p:spPr bwMode="auto">
-                <a:xfrm>
-                  <a:off x="5658501" y="5424994"/>
-                  <a:ext cx="1428099" cy="822305"/>
-                </a:xfrm>
-                <a:prstGeom prst="ellipse">
-                  <a:avLst/>
-                </a:prstGeom>
-                <a:solidFill>
-                  <a:srgbClr val="92D050"/>
-                </a:solidFill>
-                <a:ln w="12700" cap="flat" cmpd="sng" algn="ctr">
-                  <a:noFill/>
-                  <a:prstDash val="solid"/>
-                  <a:round/>
-                  <a:headEnd type="none" w="med" len="med"/>
-                  <a:tailEnd type="none" w="med" len="med"/>
-                </a:ln>
-                <a:effectLst/>
-              </p:spPr>
-              <p:txBody>
-                <a:bodyPr vert="horz" wrap="square" lIns="91440" tIns="45720" rIns="91440" bIns="45720" numCol="1" rtlCol="0" anchor="t" anchorCtr="0" compatLnSpc="1">
-                  <a:prstTxWarp prst="textNoShape">
-                    <a:avLst/>
-                  </a:prstTxWarp>
-                  <a:spAutoFit/>
-                </a:bodyPr>
-                <a:lstStyle/>
-                <a:p>
-                  <a:pPr marL="0" marR="0" indent="0" algn="l" defTabSz="914400" rtl="0" eaLnBrk="0" fontAlgn="base" latinLnBrk="0" hangingPunct="0">
-                    <a:lnSpc>
-                      <a:spcPct val="100000"/>
-                    </a:lnSpc>
-                    <a:spcBef>
-                      <a:spcPct val="0"/>
-                    </a:spcBef>
-                    <a:spcAft>
-                      <a:spcPct val="0"/>
-                    </a:spcAft>
-                    <a:buClrTx/>
-                    <a:buSzTx/>
-                    <a:buFontTx/>
-                    <a:buNone/>
-                    <a:tabLst/>
-                  </a:pPr>
-                  <a14:m>
-                    <m:oMathPara xmlns:m="http://schemas.openxmlformats.org/officeDocument/2006/math">
-                      <m:oMathParaPr>
-                        <m:jc m:val="centerGroup"/>
-                      </m:oMathParaPr>
-                      <m:oMath xmlns:m="http://schemas.openxmlformats.org/officeDocument/2006/math">
-                        <m:r>
-                          <a:rPr kumimoji="0" lang="en-US" sz="3200" b="0" i="1" u="none" strike="noStrike" cap="none" normalizeH="0" baseline="0" smtClean="0">
-                            <a:ln>
-                              <a:noFill/>
-                            </a:ln>
-                            <a:solidFill>
-                              <a:schemeClr val="tx1"/>
-                            </a:solidFill>
-                            <a:effectLst/>
-                            <a:latin typeface="Cambria Math" panose="02040503050406030204" pitchFamily="18" charset="0"/>
-                          </a:rPr>
-                          <m:t>𝐴</m:t>
-                        </m:r>
-                        <m:r>
-                          <a:rPr kumimoji="0" lang="en-US" sz="3200" b="0" i="1" u="none" strike="noStrike" cap="none" normalizeH="0" baseline="0" smtClean="0">
-                            <a:ln>
-                              <a:noFill/>
-                            </a:ln>
-                            <a:solidFill>
-                              <a:schemeClr val="tx1"/>
-                            </a:solidFill>
-                            <a:effectLst/>
-                            <a:latin typeface="Cambria Math" panose="02040503050406030204" pitchFamily="18" charset="0"/>
-                          </a:rPr>
-                          <m:t>, </m:t>
-                        </m:r>
-                        <m:r>
-                          <a:rPr kumimoji="0" lang="en-US" sz="3200" b="0" i="1" u="none" strike="noStrike" cap="none" normalizeH="0" baseline="0" smtClean="0">
-                            <a:ln>
-                              <a:noFill/>
-                            </a:ln>
-                            <a:solidFill>
-                              <a:schemeClr val="tx1"/>
-                            </a:solidFill>
-                            <a:effectLst/>
-                            <a:latin typeface="Cambria Math" panose="02040503050406030204" pitchFamily="18" charset="0"/>
-                          </a:rPr>
-                          <m:t>𝑏</m:t>
-                        </m:r>
-                      </m:oMath>
-                    </m:oMathPara>
-                  </a14:m>
-                  <a:endParaRPr kumimoji="0" lang="en-US" sz="3200" b="0" i="0" u="none" strike="noStrike" cap="none" normalizeH="0" baseline="0" dirty="0">
-                    <a:ln>
-                      <a:noFill/>
-                    </a:ln>
-                    <a:solidFill>
-                      <a:schemeClr val="tx1"/>
-                    </a:solidFill>
-                    <a:effectLst/>
-                    <a:latin typeface="Times New Roman" pitchFamily="-65" charset="0"/>
-                  </a:endParaRPr>
-                </a:p>
-              </p:txBody>
-            </p:sp>
-          </mc:Choice>
-          <mc:Fallback xmlns="">
-            <p:sp>
-              <p:nvSpPr>
-                <p:cNvPr id="134" name="Oval 133">
-                  <a:extLst>
-                    <a:ext uri="{FF2B5EF4-FFF2-40B4-BE49-F238E27FC236}">
-                      <a16:creationId xmlns:a16="http://schemas.microsoft.com/office/drawing/2014/main" id="{B243D2E0-108D-1A27-6FE5-B4DEE671E435}"/>
-                    </a:ext>
-                  </a:extLst>
-                </p:cNvPr>
-                <p:cNvSpPr>
-                  <a:spLocks noRot="1" noChangeAspect="1" noMove="1" noResize="1" noEditPoints="1" noAdjustHandles="1" noChangeArrowheads="1" noChangeShapeType="1" noTextEdit="1"/>
-                </p:cNvSpPr>
-                <p:nvPr/>
-              </p:nvSpPr>
-              <p:spPr bwMode="auto">
-                <a:xfrm>
-                  <a:off x="5658501" y="5424994"/>
-                  <a:ext cx="1428099" cy="822305"/>
-                </a:xfrm>
-                <a:prstGeom prst="ellipse">
-                  <a:avLst/>
-                </a:prstGeom>
-                <a:blipFill>
-                  <a:blip r:embed="rId3"/>
-                  <a:stretch>
-                    <a:fillRect/>
-                  </a:stretch>
-                </a:blipFill>
-                <a:ln w="12700" cap="flat" cmpd="sng" algn="ctr">
-                  <a:noFill/>
-                  <a:prstDash val="solid"/>
-                  <a:round/>
-                  <a:headEnd type="none" w="med" len="med"/>
-                  <a:tailEnd type="none" w="med" len="med"/>
-                </a:ln>
-                <a:effectLst/>
-              </p:spPr>
-              <p:txBody>
-                <a:bodyPr/>
-                <a:lstStyle/>
-                <a:p>
-                  <a:r>
-                    <a:rPr lang="en-US">
-                      <a:noFill/>
-                    </a:rPr>
-                    <a:t> </a:t>
-                  </a:r>
-                </a:p>
-              </p:txBody>
-            </p:sp>
-          </mc:Fallback>
-        </mc:AlternateContent>
-        <mc:AlternateContent xmlns:mc="http://schemas.openxmlformats.org/markup-compatibility/2006" xmlns:a14="http://schemas.microsoft.com/office/drawing/2010/main">
-          <mc:Choice Requires="a14">
-            <p:sp>
-              <p:nvSpPr>
-                <p:cNvPr id="135" name="Oval 134">
-                  <a:extLst>
-                    <a:ext uri="{FF2B5EF4-FFF2-40B4-BE49-F238E27FC236}">
-                      <a16:creationId xmlns:a16="http://schemas.microsoft.com/office/drawing/2014/main" id="{84BCDC28-0C79-8AE7-29C3-E218383D297D}"/>
-                    </a:ext>
-                  </a:extLst>
-                </p:cNvPr>
-                <p:cNvSpPr/>
-                <p:nvPr/>
-              </p:nvSpPr>
-              <p:spPr bwMode="auto">
-                <a:xfrm>
-                  <a:off x="3806997" y="5432235"/>
-                  <a:ext cx="752595" cy="735747"/>
-                </a:xfrm>
-                <a:prstGeom prst="ellipse">
-                  <a:avLst/>
-                </a:prstGeom>
-                <a:solidFill>
-                  <a:srgbClr val="FFC000"/>
-                </a:solidFill>
-                <a:ln w="12700" cap="flat" cmpd="sng" algn="ctr">
-                  <a:noFill/>
-                  <a:prstDash val="solid"/>
-                  <a:round/>
-                  <a:headEnd type="none" w="med" len="med"/>
-                  <a:tailEnd type="none" w="med" len="med"/>
-                </a:ln>
-                <a:effectLst/>
-              </p:spPr>
-              <p:txBody>
-                <a:bodyPr vert="horz" wrap="square" lIns="91440" tIns="45720" rIns="91440" bIns="45720" numCol="1" rtlCol="0" anchor="t" anchorCtr="0" compatLnSpc="1">
-                  <a:prstTxWarp prst="textNoShape">
-                    <a:avLst/>
-                  </a:prstTxWarp>
-                  <a:spAutoFit/>
-                </a:bodyPr>
-                <a:lstStyle/>
-                <a:p>
-                  <a:pPr marL="0" marR="0" indent="0" algn="l" defTabSz="914400" rtl="0" eaLnBrk="0" fontAlgn="base" latinLnBrk="0" hangingPunct="0">
-                    <a:lnSpc>
-                      <a:spcPct val="100000"/>
-                    </a:lnSpc>
-                    <a:spcBef>
-                      <a:spcPct val="0"/>
-                    </a:spcBef>
-                    <a:spcAft>
-                      <a:spcPct val="0"/>
-                    </a:spcAft>
-                    <a:buClrTx/>
-                    <a:buSzTx/>
-                    <a:buFontTx/>
-                    <a:buNone/>
-                    <a:tabLst/>
-                  </a:pPr>
-                  <a14:m>
-                    <m:oMathPara xmlns:m="http://schemas.openxmlformats.org/officeDocument/2006/math">
-                      <m:oMathParaPr>
-                        <m:jc m:val="centerGroup"/>
-                      </m:oMathParaPr>
-                      <m:oMath xmlns:m="http://schemas.openxmlformats.org/officeDocument/2006/math">
-                        <m:r>
-                          <a:rPr kumimoji="0" lang="en-US" sz="2800" b="0" i="1" u="none" strike="noStrike" cap="none" normalizeH="0" baseline="0" smtClean="0">
-                            <a:ln>
-                              <a:noFill/>
-                            </a:ln>
-                            <a:solidFill>
-                              <a:schemeClr val="tx1"/>
-                            </a:solidFill>
-                            <a:effectLst/>
-                            <a:latin typeface="Cambria Math" panose="02040503050406030204" pitchFamily="18" charset="0"/>
-                          </a:rPr>
-                          <m:t>𝑔</m:t>
-                        </m:r>
-                      </m:oMath>
-                    </m:oMathPara>
-                  </a14:m>
-                  <a:endParaRPr kumimoji="0" lang="en-US" sz="2800" b="0" i="1" u="none" strike="noStrike" cap="none" normalizeH="0" baseline="0" dirty="0">
-                    <a:ln>
-                      <a:noFill/>
-                    </a:ln>
-                    <a:solidFill>
-                      <a:schemeClr val="tx1"/>
-                    </a:solidFill>
-                    <a:effectLst/>
-                    <a:latin typeface="Cambria Math" panose="02040503050406030204" pitchFamily="18" charset="0"/>
-                  </a:endParaRPr>
-                </a:p>
-              </p:txBody>
-            </p:sp>
-          </mc:Choice>
-          <mc:Fallback xmlns="">
-            <p:sp>
-              <p:nvSpPr>
-                <p:cNvPr id="135" name="Oval 134">
-                  <a:extLst>
-                    <a:ext uri="{FF2B5EF4-FFF2-40B4-BE49-F238E27FC236}">
-                      <a16:creationId xmlns:a16="http://schemas.microsoft.com/office/drawing/2014/main" id="{84BCDC28-0C79-8AE7-29C3-E218383D297D}"/>
-                    </a:ext>
-                  </a:extLst>
-                </p:cNvPr>
-                <p:cNvSpPr>
-                  <a:spLocks noRot="1" noChangeAspect="1" noMove="1" noResize="1" noEditPoints="1" noAdjustHandles="1" noChangeArrowheads="1" noChangeShapeType="1" noTextEdit="1"/>
-                </p:cNvSpPr>
-                <p:nvPr/>
-              </p:nvSpPr>
-              <p:spPr bwMode="auto">
-                <a:xfrm>
-                  <a:off x="3806997" y="5432235"/>
-                  <a:ext cx="752595" cy="735747"/>
-                </a:xfrm>
-                <a:prstGeom prst="ellipse">
-                  <a:avLst/>
-                </a:prstGeom>
-                <a:blipFill>
-                  <a:blip r:embed="rId4"/>
-                  <a:stretch>
-                    <a:fillRect/>
-                  </a:stretch>
-                </a:blipFill>
-                <a:ln w="12700" cap="flat" cmpd="sng" algn="ctr">
-                  <a:noFill/>
-                  <a:prstDash val="solid"/>
-                  <a:round/>
-                  <a:headEnd type="none" w="med" len="med"/>
-                  <a:tailEnd type="none" w="med" len="med"/>
-                </a:ln>
-                <a:effectLst/>
-              </p:spPr>
-              <p:txBody>
-                <a:bodyPr/>
-                <a:lstStyle/>
-                <a:p>
-                  <a:r>
-                    <a:rPr lang="en-US">
-                      <a:noFill/>
-                    </a:rPr>
-                    <a:t> </a:t>
-                  </a:r>
-                </a:p>
-              </p:txBody>
-            </p:sp>
-          </mc:Fallback>
-        </mc:AlternateContent>
-        <p:sp>
-          <p:nvSpPr>
-            <p:cNvPr id="136" name="Oval 135">
-              <a:extLst>
-                <a:ext uri="{FF2B5EF4-FFF2-40B4-BE49-F238E27FC236}">
-                  <a16:creationId xmlns:a16="http://schemas.microsoft.com/office/drawing/2014/main" id="{86343BA5-AADD-5B9C-915A-2106C078D2CE}"/>
-                </a:ext>
-              </a:extLst>
-            </p:cNvPr>
-            <p:cNvSpPr/>
-            <p:nvPr/>
-          </p:nvSpPr>
-          <p:spPr bwMode="auto">
-            <a:xfrm>
-              <a:off x="2157744" y="5475514"/>
-              <a:ext cx="684738" cy="649188"/>
-            </a:xfrm>
-            <a:prstGeom prst="ellipse">
-              <a:avLst/>
-            </a:prstGeom>
-            <a:solidFill>
-              <a:srgbClr val="E395F6"/>
-            </a:solidFill>
-            <a:ln w="12700" cap="flat" cmpd="sng" algn="ctr">
-              <a:noFill/>
-              <a:prstDash val="solid"/>
-              <a:round/>
-              <a:headEnd type="none" w="med" len="med"/>
-              <a:tailEnd type="none" w="med" len="med"/>
-            </a:ln>
-            <a:effectLst/>
-          </p:spPr>
-          <p:txBody>
-            <a:bodyPr vert="horz" wrap="square" lIns="91440" tIns="45720" rIns="91440" bIns="45720" numCol="1" rtlCol="0" anchor="t" anchorCtr="0" compatLnSpc="1">
-              <a:prstTxWarp prst="textNoShape">
-                <a:avLst/>
-              </a:prstTxWarp>
-              <a:spAutoFit/>
-            </a:bodyPr>
-            <a:lstStyle/>
-            <a:p>
-              <a:pPr marL="0" marR="0" indent="0" algn="l" defTabSz="914400" rtl="0" eaLnBrk="0" fontAlgn="base" latinLnBrk="0" hangingPunct="0">
-                <a:lnSpc>
-                  <a:spcPct val="100000"/>
-                </a:lnSpc>
-                <a:spcBef>
-                  <a:spcPct val="0"/>
-                </a:spcBef>
-                <a:spcAft>
-                  <a:spcPct val="0"/>
-                </a:spcAft>
-                <a:buClrTx/>
-                <a:buSzTx/>
-                <a:buFontTx/>
-                <a:buNone/>
-                <a:tabLst/>
-              </a:pPr>
-              <a:endParaRPr kumimoji="0" lang="en-US" b="0" i="1" u="none" strike="noStrike" cap="none" normalizeH="0" baseline="0" dirty="0">
-                <a:ln>
-                  <a:noFill/>
-                </a:ln>
-                <a:solidFill>
-                  <a:schemeClr val="tx1"/>
-                </a:solidFill>
-                <a:effectLst/>
-                <a:latin typeface="Cambria Math" panose="02040503050406030204" pitchFamily="18" charset="0"/>
-              </a:endParaRPr>
-            </a:p>
-          </p:txBody>
-        </p:sp>
-        <p:cxnSp>
-          <p:nvCxnSpPr>
-            <p:cNvPr id="137" name="Straight Arrow Connector 136">
-              <a:extLst>
-                <a:ext uri="{FF2B5EF4-FFF2-40B4-BE49-F238E27FC236}">
-                  <a16:creationId xmlns:a16="http://schemas.microsoft.com/office/drawing/2014/main" id="{1FF81D43-9037-7687-ED81-3BD9753A09B7}"/>
-                </a:ext>
-              </a:extLst>
-            </p:cNvPr>
-            <p:cNvCxnSpPr>
-              <a:cxnSpLocks/>
-            </p:cNvCxnSpPr>
-            <p:nvPr/>
-          </p:nvCxnSpPr>
-          <p:spPr bwMode="auto">
-            <a:xfrm flipH="1">
-              <a:off x="4515501" y="5847622"/>
-              <a:ext cx="1143000" cy="0"/>
-            </a:xfrm>
-            <a:prstGeom prst="straightConnector1">
-              <a:avLst/>
-            </a:prstGeom>
-            <a:noFill/>
-            <a:ln w="50800" cap="flat" cmpd="sng" algn="ctr">
-              <a:solidFill>
-                <a:schemeClr val="accent1"/>
-              </a:solidFill>
-              <a:prstDash val="solid"/>
-              <a:round/>
-              <a:headEnd type="none" w="med" len="med"/>
-              <a:tailEnd type="stealth"/>
-            </a:ln>
-            <a:effectLst/>
-          </p:spPr>
-        </p:cxnSp>
-        <mc:AlternateContent xmlns:mc="http://schemas.openxmlformats.org/markup-compatibility/2006" xmlns:a14="http://schemas.microsoft.com/office/drawing/2010/main">
-          <mc:Choice Requires="a14">
-            <p:sp>
-              <p:nvSpPr>
-                <p:cNvPr id="138" name="TextBox 137">
-                  <a:extLst>
-                    <a:ext uri="{FF2B5EF4-FFF2-40B4-BE49-F238E27FC236}">
-                      <a16:creationId xmlns:a16="http://schemas.microsoft.com/office/drawing/2014/main" id="{DCA74143-6358-C281-95FF-626287741FD3}"/>
-                    </a:ext>
-                  </a:extLst>
-                </p:cNvPr>
-                <p:cNvSpPr txBox="1"/>
-                <p:nvPr/>
-              </p:nvSpPr>
-              <p:spPr>
-                <a:xfrm>
-                  <a:off x="3118501" y="5562600"/>
-                  <a:ext cx="542135" cy="523220"/>
-                </a:xfrm>
-                <a:prstGeom prst="rect">
-                  <a:avLst/>
-                </a:prstGeom>
-                <a:noFill/>
-              </p:spPr>
-              <p:txBody>
-                <a:bodyPr wrap="none" rtlCol="0">
-                  <a:spAutoFit/>
-                </a:bodyPr>
-                <a:lstStyle/>
-                <a:p>
-                  <a:pPr/>
-                  <a14:m>
-                    <m:oMathPara xmlns:m="http://schemas.openxmlformats.org/officeDocument/2006/math">
-                      <m:oMathParaPr>
-                        <m:jc m:val="centerGroup"/>
-                      </m:oMathParaPr>
-                      <m:oMath xmlns:m="http://schemas.openxmlformats.org/officeDocument/2006/math">
-                        <m:r>
-                          <a:rPr lang="en-US" sz="2800" b="0" i="1" smtClean="0">
-                            <a:latin typeface="Cambria Math" panose="02040503050406030204" pitchFamily="18" charset="0"/>
-                          </a:rPr>
-                          <m:t>≡</m:t>
-                        </m:r>
-                      </m:oMath>
-                    </m:oMathPara>
-                  </a14:m>
-                  <a:endParaRPr lang="en-US" sz="2800" dirty="0"/>
-                </a:p>
-              </p:txBody>
-            </p:sp>
-          </mc:Choice>
-          <mc:Fallback xmlns="">
-            <p:sp>
-              <p:nvSpPr>
-                <p:cNvPr id="138" name="TextBox 137">
-                  <a:extLst>
-                    <a:ext uri="{FF2B5EF4-FFF2-40B4-BE49-F238E27FC236}">
-                      <a16:creationId xmlns:a16="http://schemas.microsoft.com/office/drawing/2014/main" id="{DCA74143-6358-C281-95FF-626287741FD3}"/>
-                    </a:ext>
-                  </a:extLst>
-                </p:cNvPr>
-                <p:cNvSpPr txBox="1">
-                  <a:spLocks noRot="1" noChangeAspect="1" noMove="1" noResize="1" noEditPoints="1" noAdjustHandles="1" noChangeArrowheads="1" noChangeShapeType="1" noTextEdit="1"/>
-                </p:cNvSpPr>
-                <p:nvPr/>
-              </p:nvSpPr>
-              <p:spPr>
-                <a:xfrm>
-                  <a:off x="3118501" y="5562600"/>
-                  <a:ext cx="542135" cy="523220"/>
-                </a:xfrm>
-                <a:prstGeom prst="rect">
-                  <a:avLst/>
-                </a:prstGeom>
-                <a:blipFill>
-                  <a:blip r:embed="rId5"/>
-                  <a:stretch>
-                    <a:fillRect/>
-                  </a:stretch>
-                </a:blipFill>
-              </p:spPr>
-              <p:txBody>
-                <a:bodyPr/>
-                <a:lstStyle/>
-                <a:p>
-                  <a:r>
-                    <a:rPr lang="en-US">
-                      <a:noFill/>
-                    </a:rPr>
-                    <a:t> </a:t>
-                  </a:r>
-                </a:p>
-              </p:txBody>
-            </p:sp>
-          </mc:Fallback>
-        </mc:AlternateContent>
-      </p:grpSp>
-      <p:grpSp>
-        <p:nvGrpSpPr>
           <p:cNvPr id="17" name="Group 16">
             <a:extLst>
               <a:ext uri="{FF2B5EF4-FFF2-40B4-BE49-F238E27FC236}">
@@ -25181,7 +19644,7 @@
         </p:nvGrpSpPr>
         <p:grpSpPr>
           <a:xfrm>
-            <a:off x="1262161" y="2315028"/>
+            <a:off x="1262161" y="2586534"/>
             <a:ext cx="7272239" cy="3433266"/>
             <a:chOff x="1185961" y="1824534"/>
             <a:chExt cx="7272239" cy="3433266"/>
@@ -25260,10 +19723,7 @@
                       <a:pPr/>
                       <a14:m>
                         <m:oMathPara xmlns:m="http://schemas.openxmlformats.org/officeDocument/2006/math">
-                          <m:oMathParaPr>
-                            <m:jc m:val="centerGroup"/>
-                          </m:oMathParaPr>
-                          <m:oMath xmlns:m="http://schemas.openxmlformats.org/officeDocument/2006/math">
+                          <m:oMath>
                             <m:sSub>
                               <m:sSubPr>
                                 <m:ctrlPr>
@@ -25303,10 +19763,7 @@
                       <a:pPr/>
                       <a14:m>
                         <m:oMathPara xmlns:m="http://schemas.openxmlformats.org/officeDocument/2006/math">
-                          <m:oMathParaPr>
-                            <m:jc m:val="centerGroup"/>
-                          </m:oMathParaPr>
-                          <m:oMath xmlns:m="http://schemas.openxmlformats.org/officeDocument/2006/math">
+                          <m:oMath>
                             <m:sSub>
                               <m:sSubPr>
                                 <m:ctrlPr>
@@ -25364,7 +19821,7 @@
                       <a:avLst/>
                     </a:prstGeom>
                     <a:blipFill>
-                      <a:blip r:embed="rId6"/>
+                      <a:blip r:embed="rId7"/>
                       <a:stretch>
                         <a:fillRect b="-1613"/>
                       </a:stretch>
@@ -26393,10 +20850,7 @@
                       <a:pPr/>
                       <a14:m>
                         <m:oMathPara xmlns:m="http://schemas.openxmlformats.org/officeDocument/2006/math">
-                          <m:oMathParaPr>
-                            <m:jc m:val="centerGroup"/>
-                          </m:oMathParaPr>
-                          <m:oMath xmlns:m="http://schemas.openxmlformats.org/officeDocument/2006/math">
+                          <m:oMath>
                             <m:sSub>
                               <m:sSubPr>
                                 <m:ctrlPr>
@@ -26454,7 +20908,7 @@
                       <a:avLst/>
                     </a:prstGeom>
                     <a:blipFill>
-                      <a:blip r:embed="rId7"/>
+                      <a:blip r:embed="rId8"/>
                       <a:stretch>
                         <a:fillRect l="-8696" b="-5882"/>
                       </a:stretch>
@@ -26508,10 +20962,7 @@
                       <a:pPr/>
                       <a14:m>
                         <m:oMathPara xmlns:m="http://schemas.openxmlformats.org/officeDocument/2006/math">
-                          <m:oMathParaPr>
-                            <m:jc m:val="centerGroup"/>
-                          </m:oMathParaPr>
-                          <m:oMath xmlns:m="http://schemas.openxmlformats.org/officeDocument/2006/math">
+                          <m:oMath>
                             <m:sSub>
                               <m:sSubPr>
                                 <m:ctrlPr>
@@ -26569,7 +21020,7 @@
                       <a:avLst/>
                     </a:prstGeom>
                     <a:blipFill>
-                      <a:blip r:embed="rId8"/>
+                      <a:blip r:embed="rId9"/>
                       <a:stretch>
                         <a:fillRect b="-1923"/>
                       </a:stretch>
@@ -26623,10 +21074,7 @@
                       <a:pPr/>
                       <a14:m>
                         <m:oMathPara xmlns:m="http://schemas.openxmlformats.org/officeDocument/2006/math">
-                          <m:oMathParaPr>
-                            <m:jc m:val="centerGroup"/>
-                          </m:oMathParaPr>
-                          <m:oMath xmlns:m="http://schemas.openxmlformats.org/officeDocument/2006/math">
+                          <m:oMath>
                             <m:sSub>
                               <m:sSubPr>
                                 <m:ctrlPr>
@@ -26684,7 +21132,7 @@
                       <a:avLst/>
                     </a:prstGeom>
                     <a:blipFill>
-                      <a:blip r:embed="rId9"/>
+                      <a:blip r:embed="rId10"/>
                       <a:stretch>
                         <a:fillRect b="-3846"/>
                       </a:stretch>
@@ -26738,10 +21186,7 @@
                       <a:pPr/>
                       <a14:m>
                         <m:oMathPara xmlns:m="http://schemas.openxmlformats.org/officeDocument/2006/math">
-                          <m:oMathParaPr>
-                            <m:jc m:val="centerGroup"/>
-                          </m:oMathParaPr>
-                          <m:oMath xmlns:m="http://schemas.openxmlformats.org/officeDocument/2006/math">
+                          <m:oMath>
                             <m:sSub>
                               <m:sSubPr>
                                 <m:ctrlPr>
@@ -26799,7 +21244,7 @@
                       <a:avLst/>
                     </a:prstGeom>
                     <a:blipFill>
-                      <a:blip r:embed="rId10"/>
+                      <a:blip r:embed="rId11"/>
                       <a:stretch>
                         <a:fillRect b="-3922"/>
                       </a:stretch>
@@ -26962,10 +21407,7 @@
                 <a:pPr/>
                 <a14:m>
                   <m:oMathPara xmlns:m="http://schemas.openxmlformats.org/officeDocument/2006/math">
-                    <m:oMathParaPr>
-                      <m:jc m:val="centerGroup"/>
-                    </m:oMathParaPr>
-                    <m:oMath xmlns:m="http://schemas.openxmlformats.org/officeDocument/2006/math">
+                    <m:oMath>
                       <m:r>
                         <a:rPr lang="en-US" sz="2800" b="0" i="1" smtClean="0">
                           <a:latin typeface="Cambria Math" panose="02040503050406030204" pitchFamily="18" charset="0"/>
@@ -27095,7 +21537,7 @@
                 <a:avLst/>
               </a:prstGeom>
               <a:blipFill>
-                <a:blip r:embed="rId11"/>
+                <a:blip r:embed="rId12"/>
                 <a:stretch>
                   <a:fillRect b="-21951"/>
                 </a:stretch>
@@ -27130,7 +21572,7 @@
         </p:nvSpPr>
         <p:spPr bwMode="auto">
           <a:xfrm rot="16200000">
-            <a:off x="6542387" y="1469260"/>
+            <a:off x="6542387" y="1790364"/>
             <a:ext cx="418714" cy="1725353"/>
           </a:xfrm>
           <a:prstGeom prst="rightBrace">
@@ -27203,7 +21645,7 @@
         </p:nvSpPr>
         <p:spPr>
           <a:xfrm>
-            <a:off x="6640359" y="1723560"/>
+            <a:off x="6792759" y="2129135"/>
             <a:ext cx="1132041" cy="461665"/>
           </a:xfrm>
           <a:prstGeom prst="rect">
@@ -27242,7 +21684,7 @@
         </p:nvSpPr>
         <p:spPr bwMode="auto">
           <a:xfrm rot="16200000">
-            <a:off x="3568029" y="784160"/>
+            <a:off x="3568029" y="1105264"/>
             <a:ext cx="410237" cy="3076510"/>
           </a:xfrm>
           <a:prstGeom prst="rightBrace">
@@ -27315,7 +21757,7 @@
         </p:nvSpPr>
         <p:spPr>
           <a:xfrm>
-            <a:off x="3700990" y="1734480"/>
+            <a:off x="3744759" y="2129135"/>
             <a:ext cx="1132041" cy="461665"/>
           </a:xfrm>
           <a:prstGeom prst="rect">
@@ -27365,7 +21807,7 @@
 </p:sld>
 </file>
 
-<file path=ppt/slides/slide26.xml><?xml version="1.0" encoding="utf-8"?>
+<file path=ppt/slides/slide23.xml><?xml version="1.0" encoding="utf-8"?>
 <p:sld xmlns:a="http://schemas.openxmlformats.org/drawingml/2006/main" xmlns:r="http://schemas.openxmlformats.org/officeDocument/2006/relationships" xmlns:p="http://schemas.openxmlformats.org/presentationml/2006/main">
   <p:cSld>
     <p:spTree>
@@ -27816,7 +22258,7 @@
               <a:pPr>
                 <a:defRPr/>
               </a:pPr>
-              <a:t>26</a:t>
+              <a:t>23</a:t>
             </a:fld>
             <a:endParaRPr lang="en-US"/>
           </a:p>
@@ -28161,10 +22603,7 @@
                   </a:pPr>
                   <a14:m>
                     <m:oMathPara xmlns:m="http://schemas.openxmlformats.org/officeDocument/2006/math">
-                      <m:oMathParaPr>
-                        <m:jc m:val="centerGroup"/>
-                      </m:oMathParaPr>
-                      <m:oMath xmlns:m="http://schemas.openxmlformats.org/officeDocument/2006/math">
+                      <m:oMath>
                         <m:r>
                           <m:rPr>
                             <m:nor/>
@@ -28367,10 +22806,7 @@
                   </a:pPr>
                   <a14:m>
                     <m:oMathPara xmlns:m="http://schemas.openxmlformats.org/officeDocument/2006/math">
-                      <m:oMathParaPr>
-                        <m:jc m:val="centerGroup"/>
-                      </m:oMathParaPr>
-                      <m:oMath xmlns:m="http://schemas.openxmlformats.org/officeDocument/2006/math">
+                      <m:oMath>
                         <m:r>
                           <a:rPr kumimoji="0" lang="en-US" sz="2400" b="0" i="1" u="none" strike="noStrike" cap="none" normalizeH="0" baseline="0" smtClean="0">
                             <a:ln>
@@ -28685,10 +23121,7 @@
                   <a:pPr/>
                   <a14:m>
                     <m:oMathPara xmlns:m="http://schemas.openxmlformats.org/officeDocument/2006/math">
-                      <m:oMathParaPr>
-                        <m:jc m:val="centerGroup"/>
-                      </m:oMathParaPr>
-                      <m:oMath xmlns:m="http://schemas.openxmlformats.org/officeDocument/2006/math">
+                      <m:oMath>
                         <m:r>
                           <a:rPr lang="en-US" sz="3200" b="0" i="1" smtClean="0">
                             <a:latin typeface="Cambria Math" panose="02040503050406030204" pitchFamily="18" charset="0"/>
@@ -29330,7 +23763,7 @@
 </p:sld>
 </file>
 
-<file path=ppt/slides/slide27.xml><?xml version="1.0" encoding="utf-8"?>
+<file path=ppt/slides/slide24.xml><?xml version="1.0" encoding="utf-8"?>
 <p:sld xmlns:a="http://schemas.openxmlformats.org/drawingml/2006/main" xmlns:r="http://schemas.openxmlformats.org/officeDocument/2006/relationships" xmlns:p="http://schemas.openxmlformats.org/presentationml/2006/main">
   <p:cSld>
     <p:spTree>
@@ -29400,7 +23833,7 @@
           <a:p>
             <a:r>
               <a:rPr lang="en-US" dirty="0"/>
-              <a:t>Multi-Node Perceptron</a:t>
+              <a:t>Large Language Model</a:t>
             </a:r>
           </a:p>
         </p:txBody>
@@ -29436,7 +23869,7 @@
             </a:pPr>
             <a:r>
               <a:rPr lang="en-US" dirty="0"/>
-              <a:t>Here, for example, is high-level graphical representation of a </a:t>
+              <a:t>Here, for example, is high-level graphical representation of an ML model called a </a:t>
             </a:r>
             <a:r>
               <a:rPr lang="en-US" b="1" dirty="0">
@@ -29448,7 +23881,7 @@
             </a:r>
             <a:r>
               <a:rPr lang="en-US" dirty="0"/>
-              <a:t>, the model that powers ChatGPT. </a:t>
+              <a:t>.</a:t>
             </a:r>
           </a:p>
           <a:p>
@@ -29533,7 +23966,7 @@
               <a:pPr>
                 <a:defRPr/>
               </a:pPr>
-              <a:t>27</a:t>
+              <a:t>24</a:t>
             </a:fld>
             <a:endParaRPr lang="en-US"/>
           </a:p>
@@ -29663,7 +24096,7 @@
 </p:sld>
 </file>
 
-<file path=ppt/slides/slide28.xml><?xml version="1.0" encoding="utf-8"?>
+<file path=ppt/slides/slide25.xml><?xml version="1.0" encoding="utf-8"?>
 <p:sld xmlns:a="http://schemas.openxmlformats.org/drawingml/2006/main" xmlns:r="http://schemas.openxmlformats.org/officeDocument/2006/relationships" xmlns:p="http://schemas.openxmlformats.org/presentationml/2006/main">
   <p:cSld>
     <p:spTree>
@@ -29859,7 +24292,7 @@
               <a:pPr>
                 <a:defRPr/>
               </a:pPr>
-              <a:t>28</a:t>
+              <a:t>25</a:t>
             </a:fld>
             <a:endParaRPr lang="en-US"/>
           </a:p>
@@ -30037,7 +24470,7 @@
             </a:pPr>
             <a:r>
               <a:rPr lang="en-US" dirty="0"/>
-              <a:t>Presentations: Week 13, Nov. 18, 20, Dec. 2.</a:t>
+              <a:t>Presentations: Last week of the semester.</a:t>
             </a:r>
             <a:br>
               <a:rPr lang="en-US" dirty="0"/>
@@ -30114,260 +24547,6 @@
       </p:grpSpPr>
       <p:sp>
         <p:nvSpPr>
-          <p:cNvPr id="7" name="Title 6">
-            <a:extLst>
-              <a:ext uri="{FF2B5EF4-FFF2-40B4-BE49-F238E27FC236}">
-                <a16:creationId xmlns:a16="http://schemas.microsoft.com/office/drawing/2014/main" id="{BBC79465-B393-ECA7-8F5A-4399B9C593AB}"/>
-              </a:ext>
-            </a:extLst>
-          </p:cNvPr>
-          <p:cNvSpPr>
-            <a:spLocks noGrp="1"/>
-          </p:cNvSpPr>
-          <p:nvPr>
-            <p:ph type="title"/>
-          </p:nvPr>
-        </p:nvSpPr>
-        <p:spPr/>
-        <p:txBody>
-          <a:bodyPr/>
-          <a:lstStyle/>
-          <a:p>
-            <a:r>
-              <a:rPr lang="en-US" dirty="0"/>
-              <a:t>Why </a:t>
-            </a:r>
-            <a:r>
-              <a:rPr lang="en-US" dirty="0" err="1"/>
-              <a:t>PyTorch</a:t>
-            </a:r>
-            <a:r>
-              <a:rPr lang="en-US" dirty="0"/>
-              <a:t>?</a:t>
-            </a:r>
-          </a:p>
-        </p:txBody>
-      </p:sp>
-      <p:sp>
-        <p:nvSpPr>
-          <p:cNvPr id="5" name="Slide Number Placeholder 4">
-            <a:extLst>
-              <a:ext uri="{FF2B5EF4-FFF2-40B4-BE49-F238E27FC236}">
-                <a16:creationId xmlns:a16="http://schemas.microsoft.com/office/drawing/2014/main" id="{CFE67BD0-734C-1A01-0F31-637ECFBD5DBF}"/>
-              </a:ext>
-            </a:extLst>
-          </p:cNvPr>
-          <p:cNvSpPr>
-            <a:spLocks noGrp="1"/>
-          </p:cNvSpPr>
-          <p:nvPr>
-            <p:ph type="sldNum" sz="quarter" idx="11"/>
-          </p:nvPr>
-        </p:nvSpPr>
-        <p:spPr/>
-        <p:txBody>
-          <a:bodyPr/>
-          <a:lstStyle/>
-          <a:p>
-            <a:pPr>
-              <a:defRPr/>
-            </a:pPr>
-            <a:fld id="{84EEE8D3-405F-8246-8864-9DF28E2D288A}" type="slidenum">
-              <a:rPr lang="en-US" smtClean="0"/>
-              <a:pPr>
-                <a:defRPr/>
-              </a:pPr>
-              <a:t>4</a:t>
-            </a:fld>
-            <a:endParaRPr lang="en-US"/>
-          </a:p>
-        </p:txBody>
-      </p:sp>
-      <p:sp>
-        <p:nvSpPr>
-          <p:cNvPr id="6" name="Footer Placeholder 5">
-            <a:extLst>
-              <a:ext uri="{FF2B5EF4-FFF2-40B4-BE49-F238E27FC236}">
-                <a16:creationId xmlns:a16="http://schemas.microsoft.com/office/drawing/2014/main" id="{9A220D3E-6122-4EB9-9977-BB323FC6E8A6}"/>
-              </a:ext>
-            </a:extLst>
-          </p:cNvPr>
-          <p:cNvSpPr>
-            <a:spLocks noGrp="1"/>
-          </p:cNvSpPr>
-          <p:nvPr>
-            <p:ph type="ftr" sz="quarter" idx="10"/>
-          </p:nvPr>
-        </p:nvSpPr>
-        <p:spPr/>
-        <p:txBody>
-          <a:bodyPr/>
-          <a:lstStyle/>
-          <a:p>
-            <a:pPr>
-              <a:defRPr/>
-            </a:pPr>
-            <a:r>
-              <a:rPr lang="en-US"/>
-              <a:t>FSU: Machine Learning in Physics</a:t>
-            </a:r>
-            <a:endParaRPr lang="en-US" dirty="0"/>
-          </a:p>
-        </p:txBody>
-      </p:sp>
-      <p:pic>
-        <p:nvPicPr>
-          <p:cNvPr id="9" name="Picture 8" descr="A graph of a number of people&#10;&#10;Description automatically generated with medium confidence">
-            <a:extLst>
-              <a:ext uri="{FF2B5EF4-FFF2-40B4-BE49-F238E27FC236}">
-                <a16:creationId xmlns:a16="http://schemas.microsoft.com/office/drawing/2014/main" id="{50A0B9E1-DB8F-B283-8639-BAA2CA4D7574}"/>
-              </a:ext>
-            </a:extLst>
-          </p:cNvPr>
-          <p:cNvPicPr>
-            <a:picLocks noChangeAspect="1"/>
-          </p:cNvPicPr>
-          <p:nvPr/>
-        </p:nvPicPr>
-        <p:blipFill>
-          <a:blip r:embed="rId2"/>
-          <a:stretch>
-            <a:fillRect/>
-          </a:stretch>
-        </p:blipFill>
-        <p:spPr>
-          <a:xfrm>
-            <a:off x="152400" y="1879219"/>
-            <a:ext cx="8806640" cy="3835781"/>
-          </a:xfrm>
-          <a:prstGeom prst="rect">
-            <a:avLst/>
-          </a:prstGeom>
-          <a:effectLst>
-            <a:outerShdw blurRad="50800" dist="38100" dir="2700000" algn="tl" rotWithShape="0">
-              <a:prstClr val="black">
-                <a:alpha val="40000"/>
-              </a:prstClr>
-            </a:outerShdw>
-          </a:effectLst>
-        </p:spPr>
-      </p:pic>
-      <p:sp>
-        <p:nvSpPr>
-          <p:cNvPr id="10" name="TextBox 9">
-            <a:extLst>
-              <a:ext uri="{FF2B5EF4-FFF2-40B4-BE49-F238E27FC236}">
-                <a16:creationId xmlns:a16="http://schemas.microsoft.com/office/drawing/2014/main" id="{B6AA2525-D71E-298F-979D-A9CAA1FFA209}"/>
-              </a:ext>
-            </a:extLst>
-          </p:cNvPr>
-          <p:cNvSpPr txBox="1"/>
-          <p:nvPr/>
-        </p:nvSpPr>
-        <p:spPr>
-          <a:xfrm>
-            <a:off x="1291845" y="5765065"/>
-            <a:ext cx="6527749" cy="830997"/>
-          </a:xfrm>
-          <a:prstGeom prst="rect">
-            <a:avLst/>
-          </a:prstGeom>
-          <a:noFill/>
-        </p:spPr>
-        <p:txBody>
-          <a:bodyPr wrap="none" rtlCol="0">
-            <a:spAutoFit/>
-          </a:bodyPr>
-          <a:lstStyle/>
-          <a:p>
-            <a:r>
-              <a:rPr lang="en-US" dirty="0">
-                <a:hlinkClick r:id="rId3"/>
-              </a:rPr>
-              <a:t>https://viso.ai/deep-learning/pytorch-vs-tensorflow/</a:t>
-            </a:r>
-            <a:endParaRPr lang="en-US" dirty="0"/>
-          </a:p>
-          <a:p>
-            <a:endParaRPr lang="en-US" dirty="0"/>
-          </a:p>
-        </p:txBody>
-      </p:sp>
-      <p:sp>
-        <p:nvSpPr>
-          <p:cNvPr id="2" name="TextBox 1">
-            <a:extLst>
-              <a:ext uri="{FF2B5EF4-FFF2-40B4-BE49-F238E27FC236}">
-                <a16:creationId xmlns:a16="http://schemas.microsoft.com/office/drawing/2014/main" id="{536FE609-B385-AB62-F928-4088474367D6}"/>
-              </a:ext>
-            </a:extLst>
-          </p:cNvPr>
-          <p:cNvSpPr txBox="1"/>
-          <p:nvPr/>
-        </p:nvSpPr>
-        <p:spPr>
-          <a:xfrm>
-            <a:off x="914400" y="1367135"/>
-            <a:ext cx="7705956" cy="461665"/>
-          </a:xfrm>
-          <a:prstGeom prst="rect">
-            <a:avLst/>
-          </a:prstGeom>
-          <a:noFill/>
-        </p:spPr>
-        <p:txBody>
-          <a:bodyPr wrap="none" rtlCol="0">
-            <a:spAutoFit/>
-          </a:bodyPr>
-          <a:lstStyle/>
-          <a:p>
-            <a:r>
-              <a:rPr lang="en-US" dirty="0"/>
-              <a:t>80% of research-level AI development uses </a:t>
-            </a:r>
-            <a:r>
-              <a:rPr lang="en-US" dirty="0" err="1"/>
-              <a:t>PyTorch</a:t>
-            </a:r>
-            <a:r>
-              <a:rPr lang="en-US" dirty="0"/>
-              <a:t> (2025). </a:t>
-            </a:r>
-          </a:p>
-        </p:txBody>
-      </p:sp>
-    </p:spTree>
-    <p:extLst>
-      <p:ext uri="{BB962C8B-B14F-4D97-AF65-F5344CB8AC3E}">
-        <p14:creationId xmlns:p14="http://schemas.microsoft.com/office/powerpoint/2010/main" val="2656264849"/>
-      </p:ext>
-    </p:extLst>
-  </p:cSld>
-  <p:clrMapOvr>
-    <a:masterClrMapping/>
-  </p:clrMapOvr>
-</p:sld>
-</file>
-
-<file path=ppt/slides/slide5.xml><?xml version="1.0" encoding="utf-8"?>
-<p:sld xmlns:a="http://schemas.openxmlformats.org/drawingml/2006/main" xmlns:r="http://schemas.openxmlformats.org/officeDocument/2006/relationships" xmlns:p="http://schemas.openxmlformats.org/presentationml/2006/main">
-  <p:cSld>
-    <p:spTree>
-      <p:nvGrpSpPr>
-        <p:cNvPr id="1" name=""/>
-        <p:cNvGrpSpPr/>
-        <p:nvPr/>
-      </p:nvGrpSpPr>
-      <p:grpSpPr>
-        <a:xfrm>
-          <a:off x="0" y="0"/>
-          <a:ext cx="0" cy="0"/>
-          <a:chOff x="0" y="0"/>
-          <a:chExt cx="0" cy="0"/>
-        </a:xfrm>
-      </p:grpSpPr>
-      <p:sp>
-        <p:nvSpPr>
           <p:cNvPr id="3" name="Title 2">
             <a:extLst>
               <a:ext uri="{FF2B5EF4-FFF2-40B4-BE49-F238E27FC236}">
@@ -30423,7 +24602,7 @@
               <a:pPr>
                 <a:defRPr/>
               </a:pPr>
-              <a:t>5</a:t>
+              <a:t>4</a:t>
             </a:fld>
             <a:endParaRPr lang="en-US"/>
           </a:p>
@@ -30658,144 +24837,7 @@
 </p:sld>
 </file>
 
-<file path=ppt/slides/slide6.xml><?xml version="1.0" encoding="utf-8"?>
-<p:sld xmlns:a="http://schemas.openxmlformats.org/drawingml/2006/main" xmlns:r="http://schemas.openxmlformats.org/officeDocument/2006/relationships" xmlns:p="http://schemas.openxmlformats.org/presentationml/2006/main">
-  <p:cSld>
-    <p:spTree>
-      <p:nvGrpSpPr>
-        <p:cNvPr id="1" name=""/>
-        <p:cNvGrpSpPr/>
-        <p:nvPr/>
-      </p:nvGrpSpPr>
-      <p:grpSpPr>
-        <a:xfrm>
-          <a:off x="0" y="0"/>
-          <a:ext cx="0" cy="0"/>
-          <a:chOff x="0" y="0"/>
-          <a:chExt cx="0" cy="0"/>
-        </a:xfrm>
-      </p:grpSpPr>
-      <p:pic>
-        <p:nvPicPr>
-          <p:cNvPr id="8" name="Picture 7"/>
-          <p:cNvPicPr>
-            <a:picLocks noChangeAspect="1"/>
-          </p:cNvPicPr>
-          <p:nvPr/>
-        </p:nvPicPr>
-        <p:blipFill>
-          <a:blip r:embed="rId2">
-            <a:extLst>
-              <a:ext uri="{28A0092B-C50C-407E-A947-70E740481C1C}">
-                <a14:useLocalDpi xmlns:a14="http://schemas.microsoft.com/office/drawing/2010/main" val="0"/>
-              </a:ext>
-            </a:extLst>
-          </a:blip>
-          <a:stretch>
-            <a:fillRect/>
-          </a:stretch>
-        </p:blipFill>
-        <p:spPr>
-          <a:xfrm>
-            <a:off x="0" y="684050"/>
-            <a:ext cx="9144000" cy="5411950"/>
-          </a:xfrm>
-          <a:prstGeom prst="rect">
-            <a:avLst/>
-          </a:prstGeom>
-        </p:spPr>
-      </p:pic>
-      <p:sp>
-        <p:nvSpPr>
-          <p:cNvPr id="10" name="TextBox 9"/>
-          <p:cNvSpPr txBox="1"/>
-          <p:nvPr/>
-        </p:nvSpPr>
-        <p:spPr>
-          <a:xfrm>
-            <a:off x="2098631" y="6019800"/>
-            <a:ext cx="5039265" cy="369332"/>
-          </a:xfrm>
-          <a:prstGeom prst="rect">
-            <a:avLst/>
-          </a:prstGeom>
-          <a:noFill/>
-        </p:spPr>
-        <p:txBody>
-          <a:bodyPr wrap="none" rtlCol="0">
-            <a:spAutoFit/>
-          </a:bodyPr>
-          <a:lstStyle/>
-          <a:p>
-            <a:r>
-              <a:rPr lang="hr-HR" dirty="0"/>
-              <a:t>356 | NATURE | VOL 550 | 19 OCTOBER 2017 </a:t>
-            </a:r>
-          </a:p>
-        </p:txBody>
-      </p:sp>
-      <p:pic>
-        <p:nvPicPr>
-          <p:cNvPr id="2" name="Picture 1">
-            <a:extLst>
-              <a:ext uri="{FF2B5EF4-FFF2-40B4-BE49-F238E27FC236}">
-                <a16:creationId xmlns:a16="http://schemas.microsoft.com/office/drawing/2014/main" id="{5040A403-00EA-A620-2EB5-4879F69C11AB}"/>
-              </a:ext>
-            </a:extLst>
-          </p:cNvPr>
-          <p:cNvPicPr>
-            <a:picLocks noChangeAspect="1"/>
-          </p:cNvPicPr>
-          <p:nvPr/>
-        </p:nvPicPr>
-        <p:blipFill>
-          <a:blip r:embed="rId3">
-            <a:extLst>
-              <a:ext uri="{28A0092B-C50C-407E-A947-70E740481C1C}">
-                <a14:useLocalDpi xmlns:a14="http://schemas.microsoft.com/office/drawing/2010/main" val="0"/>
-              </a:ext>
-            </a:extLst>
-          </a:blip>
-          <a:stretch>
-            <a:fillRect/>
-          </a:stretch>
-        </p:blipFill>
-        <p:spPr>
-          <a:xfrm>
-            <a:off x="3733799" y="0"/>
-            <a:ext cx="2027463" cy="2027463"/>
-          </a:xfrm>
-          <a:prstGeom prst="rect">
-            <a:avLst/>
-          </a:prstGeom>
-        </p:spPr>
-      </p:pic>
-    </p:spTree>
-    <p:extLst>
-      <p:ext uri="{BB962C8B-B14F-4D97-AF65-F5344CB8AC3E}">
-        <p14:creationId xmlns:p14="http://schemas.microsoft.com/office/powerpoint/2010/main" val="3270796755"/>
-      </p:ext>
-    </p:extLst>
-  </p:cSld>
-  <p:clrMapOvr>
-    <a:masterClrMapping/>
-  </p:clrMapOvr>
-  <mc:AlternateContent xmlns:mc="http://schemas.openxmlformats.org/markup-compatibility/2006" xmlns:p14="http://schemas.microsoft.com/office/powerpoint/2010/main">
-    <mc:Choice Requires="p14">
-      <p:transition spd="med" p14:dur="700">
-        <p:fade/>
-      </p:transition>
-    </mc:Choice>
-    <mc:Fallback xmlns="">
-      <p:transition spd="med">
-        <p:fade/>
-      </p:transition>
-    </mc:Fallback>
-  </mc:AlternateContent>
-</p:sld>
-</file>
-
-<file path=ppt/slides/slide7.xml><?xml version="1.0" encoding="utf-8"?>
+<file path=ppt/slides/slide5.xml><?xml version="1.0" encoding="utf-8"?>
 <p:sld xmlns:a="http://schemas.openxmlformats.org/drawingml/2006/main" xmlns:r="http://schemas.openxmlformats.org/officeDocument/2006/relationships" xmlns:p="http://schemas.openxmlformats.org/presentationml/2006/main">
   <p:cSld>
     <p:spTree>
@@ -30814,143 +24856,10 @@
       </p:grpSpPr>
       <p:sp>
         <p:nvSpPr>
-          <p:cNvPr id="4" name="Slide Number Placeholder 3">
+          <p:cNvPr id="6" name="Footer Placeholder 5">
             <a:extLst>
               <a:ext uri="{FF2B5EF4-FFF2-40B4-BE49-F238E27FC236}">
-                <a16:creationId xmlns:a16="http://schemas.microsoft.com/office/drawing/2014/main" id="{A2B4C596-340F-5E4E-A30C-BBCA31BAD5DB}"/>
-              </a:ext>
-            </a:extLst>
-          </p:cNvPr>
-          <p:cNvSpPr>
-            <a:spLocks noGrp="1"/>
-          </p:cNvSpPr>
-          <p:nvPr>
-            <p:ph type="sldNum" sz="quarter" idx="11"/>
-          </p:nvPr>
-        </p:nvSpPr>
-        <p:spPr/>
-        <p:txBody>
-          <a:bodyPr/>
-          <a:lstStyle/>
-          <a:p>
-            <a:pPr>
-              <a:defRPr/>
-            </a:pPr>
-            <a:fld id="{046487E0-6C48-9842-89A3-09BD27C7057F}" type="slidenum">
-              <a:rPr lang="en-US" smtClean="0"/>
-              <a:pPr>
-                <a:defRPr/>
-              </a:pPr>
-              <a:t>7</a:t>
-            </a:fld>
-            <a:endParaRPr lang="en-US"/>
-          </a:p>
-        </p:txBody>
-      </p:sp>
-      <p:pic>
-        <p:nvPicPr>
-          <p:cNvPr id="1026" name="Picture 2" descr="https://en.chessbase.com/Portals/all/2017/_eng/misc/alphazero-chess-TrainingTime-Graph-171019-r01.gif">
-            <a:extLst>
-              <a:ext uri="{FF2B5EF4-FFF2-40B4-BE49-F238E27FC236}">
-                <a16:creationId xmlns:a16="http://schemas.microsoft.com/office/drawing/2014/main" id="{26A1CDE4-0D8D-004D-B7D6-4555312A9853}"/>
-              </a:ext>
-            </a:extLst>
-          </p:cNvPr>
-          <p:cNvPicPr>
-            <a:picLocks noChangeAspect="1" noChangeArrowheads="1"/>
-          </p:cNvPicPr>
-          <p:nvPr/>
-        </p:nvPicPr>
-        <p:blipFill>
-          <a:blip r:embed="rId2">
-            <a:extLst>
-              <a:ext uri="{28A0092B-C50C-407E-A947-70E740481C1C}">
-                <a14:useLocalDpi xmlns:a14="http://schemas.microsoft.com/office/drawing/2010/main" val="0"/>
-              </a:ext>
-            </a:extLst>
-          </a:blip>
-          <a:srcRect/>
-          <a:stretch>
-            <a:fillRect/>
-          </a:stretch>
-        </p:blipFill>
-        <p:spPr bwMode="auto">
-          <a:xfrm>
-            <a:off x="0" y="927100"/>
-            <a:ext cx="9144000" cy="5003800"/>
-          </a:xfrm>
-          <a:prstGeom prst="rect">
-            <a:avLst/>
-          </a:prstGeom>
-          <a:noFill/>
-          <a:extLst>
-            <a:ext uri="{909E8E84-426E-40DD-AFC4-6F175D3DCCD1}">
-              <a14:hiddenFill xmlns:a14="http://schemas.microsoft.com/office/drawing/2010/main">
-                <a:solidFill>
-                  <a:srgbClr val="FFFFFF"/>
-                </a:solidFill>
-              </a14:hiddenFill>
-            </a:ext>
-          </a:extLst>
-        </p:spPr>
-      </p:pic>
-      <p:sp>
-        <p:nvSpPr>
-          <p:cNvPr id="6" name="TextBox 5">
-            <a:extLst>
-              <a:ext uri="{FF2B5EF4-FFF2-40B4-BE49-F238E27FC236}">
-                <a16:creationId xmlns:a16="http://schemas.microsoft.com/office/drawing/2014/main" id="{DFDF0D45-1288-DF4B-8129-3C5615C999E4}"/>
-              </a:ext>
-            </a:extLst>
-          </p:cNvPr>
-          <p:cNvSpPr txBox="1"/>
-          <p:nvPr/>
-        </p:nvSpPr>
-        <p:spPr>
-          <a:xfrm>
-            <a:off x="962123" y="381000"/>
-            <a:ext cx="7343677" cy="461665"/>
-          </a:xfrm>
-          <a:prstGeom prst="rect">
-            <a:avLst/>
-          </a:prstGeom>
-          <a:noFill/>
-        </p:spPr>
-        <p:txBody>
-          <a:bodyPr wrap="none" rtlCol="0">
-            <a:spAutoFit/>
-          </a:bodyPr>
-          <a:lstStyle/>
-          <a:p>
-            <a:r>
-              <a:rPr lang="en-US" dirty="0"/>
-              <a:t>https://</a:t>
-            </a:r>
-            <a:r>
-              <a:rPr lang="en-US" dirty="0" err="1"/>
-              <a:t>deepmind.com</a:t>
-            </a:r>
-            <a:r>
-              <a:rPr lang="en-US" dirty="0"/>
-              <a:t>/blog/</a:t>
-            </a:r>
-            <a:r>
-              <a:rPr lang="en-US" dirty="0" err="1"/>
-              <a:t>alphago</a:t>
-            </a:r>
-            <a:r>
-              <a:rPr lang="en-US" dirty="0"/>
-              <a:t>-zero-learning-scratch/</a:t>
-            </a:r>
-          </a:p>
-        </p:txBody>
-      </p:sp>
-      <p:sp>
-        <p:nvSpPr>
-          <p:cNvPr id="2" name="Footer Placeholder 1">
-            <a:extLst>
-              <a:ext uri="{FF2B5EF4-FFF2-40B4-BE49-F238E27FC236}">
-                <a16:creationId xmlns:a16="http://schemas.microsoft.com/office/drawing/2014/main" id="{7B2AB6B5-0224-8A70-4BAA-3C8F49083553}"/>
+                <a16:creationId xmlns:a16="http://schemas.microsoft.com/office/drawing/2014/main" id="{B1AA5662-D508-36C9-59CC-F694F0E27019}"/>
               </a:ext>
             </a:extLst>
           </p:cNvPr>
@@ -30977,32 +24886,288 @@
           </a:p>
         </p:txBody>
       </p:sp>
+      <p:sp>
+        <p:nvSpPr>
+          <p:cNvPr id="5" name="Slide Number Placeholder 4">
+            <a:extLst>
+              <a:ext uri="{FF2B5EF4-FFF2-40B4-BE49-F238E27FC236}">
+                <a16:creationId xmlns:a16="http://schemas.microsoft.com/office/drawing/2014/main" id="{2F4A2233-EFBF-F4A6-CB98-DD45B6059F97}"/>
+              </a:ext>
+            </a:extLst>
+          </p:cNvPr>
+          <p:cNvSpPr>
+            <a:spLocks noGrp="1"/>
+          </p:cNvSpPr>
+          <p:nvPr>
+            <p:ph type="sldNum" sz="quarter" idx="11"/>
+          </p:nvPr>
+        </p:nvSpPr>
+        <p:spPr/>
+        <p:txBody>
+          <a:bodyPr/>
+          <a:lstStyle/>
+          <a:p>
+            <a:pPr>
+              <a:defRPr/>
+            </a:pPr>
+            <a:fld id="{84EEE8D3-405F-8246-8864-9DF28E2D288A}" type="slidenum">
+              <a:rPr lang="en-US" smtClean="0"/>
+              <a:pPr>
+                <a:defRPr/>
+              </a:pPr>
+              <a:t>5</a:t>
+            </a:fld>
+            <a:endParaRPr lang="en-US"/>
+          </a:p>
+        </p:txBody>
+      </p:sp>
+      <p:grpSp>
+        <p:nvGrpSpPr>
+          <p:cNvPr id="4" name="Group 3">
+            <a:extLst>
+              <a:ext uri="{FF2B5EF4-FFF2-40B4-BE49-F238E27FC236}">
+                <a16:creationId xmlns:a16="http://schemas.microsoft.com/office/drawing/2014/main" id="{63BC707D-8A17-B15C-1E82-09AA95F2771F}"/>
+              </a:ext>
+            </a:extLst>
+          </p:cNvPr>
+          <p:cNvGrpSpPr/>
+          <p:nvPr/>
+        </p:nvGrpSpPr>
+        <p:grpSpPr>
+          <a:xfrm>
+            <a:off x="2213899" y="762000"/>
+            <a:ext cx="4716201" cy="4838700"/>
+            <a:chOff x="2213899" y="762000"/>
+            <a:chExt cx="4716201" cy="4838700"/>
+          </a:xfrm>
+        </p:grpSpPr>
+        <p:pic>
+          <p:nvPicPr>
+            <p:cNvPr id="11" name="Picture 10" descr="A screenshot of a phone&#10;&#10;AI-generated content may be incorrect.">
+              <a:extLst>
+                <a:ext uri="{FF2B5EF4-FFF2-40B4-BE49-F238E27FC236}">
+                  <a16:creationId xmlns:a16="http://schemas.microsoft.com/office/drawing/2014/main" id="{1ADDAD57-19E1-16EF-9E91-B6F05D266C15}"/>
+                </a:ext>
+              </a:extLst>
+            </p:cNvPr>
+            <p:cNvPicPr>
+              <a:picLocks noChangeAspect="1"/>
+            </p:cNvPicPr>
+            <p:nvPr/>
+          </p:nvPicPr>
+          <p:blipFill>
+            <a:blip r:embed="rId2"/>
+            <a:stretch>
+              <a:fillRect/>
+            </a:stretch>
+          </p:blipFill>
+          <p:spPr>
+            <a:xfrm>
+              <a:off x="2213899" y="762000"/>
+              <a:ext cx="4716201" cy="4838700"/>
+            </a:xfrm>
+            <a:prstGeom prst="rect">
+              <a:avLst/>
+            </a:prstGeom>
+            <a:effectLst>
+              <a:outerShdw blurRad="50800" dist="38100" dir="2700000" algn="tl" rotWithShape="0">
+                <a:prstClr val="black">
+                  <a:alpha val="40000"/>
+                </a:prstClr>
+              </a:outerShdw>
+            </a:effectLst>
+          </p:spPr>
+        </p:pic>
+        <p:sp>
+          <p:nvSpPr>
+            <p:cNvPr id="2" name="Rectangle 1">
+              <a:extLst>
+                <a:ext uri="{FF2B5EF4-FFF2-40B4-BE49-F238E27FC236}">
+                  <a16:creationId xmlns:a16="http://schemas.microsoft.com/office/drawing/2014/main" id="{4144EFB2-63EA-1991-FECB-9215E70075A0}"/>
+                </a:ext>
+              </a:extLst>
+            </p:cNvPr>
+            <p:cNvSpPr/>
+            <p:nvPr/>
+          </p:nvSpPr>
+          <p:spPr bwMode="auto">
+            <a:xfrm>
+              <a:off x="3657600" y="4114800"/>
+              <a:ext cx="2438400" cy="381000"/>
+            </a:xfrm>
+            <a:prstGeom prst="rect">
+              <a:avLst/>
+            </a:prstGeom>
+            <a:solidFill>
+              <a:srgbClr val="F2F2F2"/>
+            </a:solidFill>
+            <a:ln w="12700" cap="flat" cmpd="sng" algn="ctr">
+              <a:noFill/>
+              <a:prstDash val="solid"/>
+              <a:round/>
+              <a:headEnd type="none" w="med" len="med"/>
+              <a:tailEnd type="none" w="med" len="med"/>
+            </a:ln>
+            <a:effectLst/>
+          </p:spPr>
+          <p:txBody>
+            <a:bodyPr vert="horz" wrap="square" lIns="91440" tIns="45720" rIns="91440" bIns="45720" numCol="1" rtlCol="0" anchor="t" anchorCtr="0" compatLnSpc="1">
+              <a:prstTxWarp prst="textNoShape">
+                <a:avLst/>
+              </a:prstTxWarp>
+              <a:spAutoFit/>
+            </a:bodyPr>
+            <a:lstStyle/>
+            <a:p>
+              <a:pPr marL="0" marR="0" indent="0" algn="l" defTabSz="914400" rtl="0" eaLnBrk="0" fontAlgn="base" latinLnBrk="0" hangingPunct="0">
+                <a:lnSpc>
+                  <a:spcPct val="100000"/>
+                </a:lnSpc>
+                <a:spcBef>
+                  <a:spcPct val="0"/>
+                </a:spcBef>
+                <a:spcAft>
+                  <a:spcPct val="0"/>
+                </a:spcAft>
+                <a:buClrTx/>
+                <a:buSzTx/>
+                <a:buFontTx/>
+                <a:buNone/>
+                <a:tabLst/>
+              </a:pPr>
+              <a:endParaRPr kumimoji="0" lang="en-US" sz="2400" b="0" i="0" u="none" strike="noStrike" cap="none" normalizeH="0" baseline="0">
+                <a:ln>
+                  <a:noFill/>
+                </a:ln>
+                <a:solidFill>
+                  <a:schemeClr val="tx1"/>
+                </a:solidFill>
+                <a:effectLst/>
+                <a:latin typeface="Times New Roman" pitchFamily="-65" charset="0"/>
+              </a:endParaRPr>
+            </a:p>
+          </p:txBody>
+        </p:sp>
+        <p:sp>
+          <p:nvSpPr>
+            <p:cNvPr id="3" name="Rectangle 2">
+              <a:extLst>
+                <a:ext uri="{FF2B5EF4-FFF2-40B4-BE49-F238E27FC236}">
+                  <a16:creationId xmlns:a16="http://schemas.microsoft.com/office/drawing/2014/main" id="{7D0947FE-D767-2D45-1FDE-4C10F87CF143}"/>
+                </a:ext>
+              </a:extLst>
+            </p:cNvPr>
+            <p:cNvSpPr/>
+            <p:nvPr/>
+          </p:nvSpPr>
+          <p:spPr bwMode="auto">
+            <a:xfrm>
+              <a:off x="3674808" y="4876800"/>
+              <a:ext cx="2438400" cy="381000"/>
+            </a:xfrm>
+            <a:prstGeom prst="rect">
+              <a:avLst/>
+            </a:prstGeom>
+            <a:solidFill>
+              <a:srgbClr val="F2F2F2"/>
+            </a:solidFill>
+            <a:ln w="12700" cap="flat" cmpd="sng" algn="ctr">
+              <a:noFill/>
+              <a:prstDash val="solid"/>
+              <a:round/>
+              <a:headEnd type="none" w="med" len="med"/>
+              <a:tailEnd type="none" w="med" len="med"/>
+            </a:ln>
+            <a:effectLst/>
+          </p:spPr>
+          <p:txBody>
+            <a:bodyPr vert="horz" wrap="square" lIns="91440" tIns="45720" rIns="91440" bIns="45720" numCol="1" rtlCol="0" anchor="t" anchorCtr="0" compatLnSpc="1">
+              <a:prstTxWarp prst="textNoShape">
+                <a:avLst/>
+              </a:prstTxWarp>
+              <a:spAutoFit/>
+            </a:bodyPr>
+            <a:lstStyle/>
+            <a:p>
+              <a:pPr marL="0" marR="0" indent="0" algn="l" defTabSz="914400" rtl="0" eaLnBrk="0" fontAlgn="base" latinLnBrk="0" hangingPunct="0">
+                <a:lnSpc>
+                  <a:spcPct val="100000"/>
+                </a:lnSpc>
+                <a:spcBef>
+                  <a:spcPct val="0"/>
+                </a:spcBef>
+                <a:spcAft>
+                  <a:spcPct val="0"/>
+                </a:spcAft>
+                <a:buClrTx/>
+                <a:buSzTx/>
+                <a:buFontTx/>
+                <a:buNone/>
+                <a:tabLst/>
+              </a:pPr>
+              <a:endParaRPr kumimoji="0" lang="en-US" sz="2400" b="0" i="0" u="none" strike="noStrike" cap="none" normalizeH="0" baseline="0">
+                <a:ln>
+                  <a:noFill/>
+                </a:ln>
+                <a:solidFill>
+                  <a:schemeClr val="tx1"/>
+                </a:solidFill>
+                <a:effectLst/>
+                <a:latin typeface="Times New Roman" pitchFamily="-65" charset="0"/>
+              </a:endParaRPr>
+            </a:p>
+          </p:txBody>
+        </p:sp>
+      </p:grpSp>
+      <p:sp>
+        <p:nvSpPr>
+          <p:cNvPr id="7" name="TextBox 6">
+            <a:extLst>
+              <a:ext uri="{FF2B5EF4-FFF2-40B4-BE49-F238E27FC236}">
+                <a16:creationId xmlns:a16="http://schemas.microsoft.com/office/drawing/2014/main" id="{6A73DA6A-85A7-8E5D-F584-B33101B6763B}"/>
+              </a:ext>
+            </a:extLst>
+          </p:cNvPr>
+          <p:cNvSpPr txBox="1"/>
+          <p:nvPr/>
+        </p:nvSpPr>
+        <p:spPr>
+          <a:xfrm>
+            <a:off x="2513967" y="5750867"/>
+            <a:ext cx="4116063" cy="461665"/>
+          </a:xfrm>
+          <a:prstGeom prst="rect">
+            <a:avLst/>
+          </a:prstGeom>
+          <a:noFill/>
+        </p:spPr>
+        <p:txBody>
+          <a:bodyPr wrap="none" rtlCol="0">
+            <a:spAutoFit/>
+          </a:bodyPr>
+          <a:lstStyle/>
+          <a:p>
+            <a:r>
+              <a:rPr lang="en-US" dirty="0"/>
+              <a:t>Large Language Model (LLM)</a:t>
+            </a:r>
+          </a:p>
+        </p:txBody>
+      </p:sp>
     </p:spTree>
     <p:extLst>
       <p:ext uri="{BB962C8B-B14F-4D97-AF65-F5344CB8AC3E}">
-        <p14:creationId xmlns:p14="http://schemas.microsoft.com/office/powerpoint/2010/main" val="2929725749"/>
+        <p14:creationId xmlns:p14="http://schemas.microsoft.com/office/powerpoint/2010/main" val="2359021910"/>
       </p:ext>
     </p:extLst>
   </p:cSld>
   <p:clrMapOvr>
     <a:masterClrMapping/>
   </p:clrMapOvr>
-  <mc:AlternateContent xmlns:mc="http://schemas.openxmlformats.org/markup-compatibility/2006" xmlns:p14="http://schemas.microsoft.com/office/powerpoint/2010/main">
-    <mc:Choice Requires="p14">
-      <p:transition spd="med" p14:dur="700">
-        <p:fade/>
-      </p:transition>
-    </mc:Choice>
-    <mc:Fallback xmlns="">
-      <p:transition spd="med">
-        <p:fade/>
-      </p:transition>
-    </mc:Fallback>
-  </mc:AlternateContent>
 </p:sld>
 </file>
 
-<file path=ppt/slides/slide8.xml><?xml version="1.0" encoding="utf-8"?>
+<file path=ppt/slides/slide6.xml><?xml version="1.0" encoding="utf-8"?>
 <p:sld xmlns:a="http://schemas.openxmlformats.org/drawingml/2006/main" xmlns:r="http://schemas.openxmlformats.org/officeDocument/2006/relationships" xmlns:p="http://schemas.openxmlformats.org/presentationml/2006/main">
   <p:cSld>
     <p:spTree>
@@ -31021,10 +25186,10 @@
       </p:grpSpPr>
       <p:sp>
         <p:nvSpPr>
-          <p:cNvPr id="7" name="Title 6">
+          <p:cNvPr id="2" name="Footer Placeholder 1">
             <a:extLst>
               <a:ext uri="{FF2B5EF4-FFF2-40B4-BE49-F238E27FC236}">
-                <a16:creationId xmlns:a16="http://schemas.microsoft.com/office/drawing/2014/main" id="{971474D3-8D67-874C-FE27-9B78CEE1E921}"/>
+                <a16:creationId xmlns:a16="http://schemas.microsoft.com/office/drawing/2014/main" id="{56013EC3-03F2-7B51-246D-DAD21B3D5DDC}"/>
               </a:ext>
             </a:extLst>
           </p:cNvPr>
@@ -31032,7 +25197,7 @@
             <a:spLocks noGrp="1"/>
           </p:cNvSpPr>
           <p:nvPr>
-            <p:ph type="title"/>
+            <p:ph type="ftr" sz="quarter" idx="10"/>
           </p:nvPr>
         </p:nvSpPr>
         <p:spPr/>
@@ -31040,19 +25205,22 @@
           <a:bodyPr/>
           <a:lstStyle/>
           <a:p>
+            <a:pPr>
+              <a:defRPr/>
+            </a:pPr>
             <a:r>
-              <a:rPr lang="en-US" dirty="0"/>
-              <a:t>Symbolic Mathematics</a:t>
+              <a:rPr lang="en-US"/>
+              <a:t>FSU: Machine Learning in Physics</a:t>
             </a:r>
           </a:p>
         </p:txBody>
       </p:sp>
       <p:sp>
         <p:nvSpPr>
-          <p:cNvPr id="8" name="Content Placeholder 7">
+          <p:cNvPr id="3" name="Slide Number Placeholder 2">
             <a:extLst>
               <a:ext uri="{FF2B5EF4-FFF2-40B4-BE49-F238E27FC236}">
-                <a16:creationId xmlns:a16="http://schemas.microsoft.com/office/drawing/2014/main" id="{E23832F2-1A5B-1306-7E33-899AE22BE997}"/>
+                <a16:creationId xmlns:a16="http://schemas.microsoft.com/office/drawing/2014/main" id="{3DBFDFE3-0971-C38F-F993-704B20B891CB}"/>
               </a:ext>
             </a:extLst>
           </p:cNvPr>
@@ -31060,7 +25228,7 @@
             <a:spLocks noGrp="1"/>
           </p:cNvSpPr>
           <p:nvPr>
-            <p:ph idx="1"/>
+            <p:ph type="sldNum" sz="quarter" idx="11"/>
           </p:nvPr>
         </p:nvSpPr>
         <p:spPr/>
@@ -31068,173 +25236,26 @@
           <a:bodyPr/>
           <a:lstStyle/>
           <a:p>
-            <a:pPr marL="0" indent="0">
-              <a:buNone/>
+            <a:pPr>
+              <a:defRPr/>
             </a:pPr>
-            <a:r>
-              <a:rPr lang="en-US" dirty="0"/>
-              <a:t>In December 2019, Guillaume </a:t>
-            </a:r>
-            <a:r>
-              <a:rPr lang="en-US" dirty="0" err="1"/>
-              <a:t>Lample</a:t>
-            </a:r>
-            <a:r>
-              <a:rPr lang="en-US" dirty="0"/>
-              <a:t> and François </a:t>
-            </a:r>
-            <a:r>
-              <a:rPr lang="en-US" dirty="0" err="1"/>
-              <a:t>Charton</a:t>
-            </a:r>
-            <a:r>
-              <a:rPr lang="en-US" dirty="0"/>
-              <a:t>* (Meta </a:t>
-            </a:r>
-            <a:r>
-              <a:rPr lang="en-US" dirty="0" err="1"/>
-              <a:t>fka</a:t>
-            </a:r>
-            <a:r>
-              <a:rPr lang="en-US" dirty="0"/>
-              <a:t> Facebook AI Research, Paris) claimed: “</a:t>
-            </a:r>
-            <a:r>
-              <a:rPr lang="en-US" i="1" dirty="0">
-                <a:solidFill>
-                  <a:srgbClr val="0033CC"/>
-                </a:solidFill>
-              </a:rPr>
-              <a:t>We achieve results that outperform commercial Computer Algebra Systems such as </a:t>
-            </a:r>
-            <a:r>
-              <a:rPr lang="en-US" i="1" dirty="0" err="1">
-                <a:solidFill>
-                  <a:srgbClr val="0033CC"/>
-                </a:solidFill>
-              </a:rPr>
-              <a:t>Matlab</a:t>
-            </a:r>
-            <a:r>
-              <a:rPr lang="en-US" i="1" dirty="0">
-                <a:solidFill>
-                  <a:srgbClr val="0033CC"/>
-                </a:solidFill>
-              </a:rPr>
-              <a:t> or Mathematica</a:t>
-            </a:r>
-            <a:r>
-              <a:rPr lang="en-US" dirty="0"/>
-              <a:t>.”</a:t>
-            </a:r>
-          </a:p>
-          <a:p>
-            <a:pPr marL="0" indent="0">
-              <a:buNone/>
-            </a:pPr>
-            <a:endParaRPr lang="en-US" dirty="0"/>
-          </a:p>
-          <a:p>
-            <a:pPr marL="0" indent="0">
-              <a:buNone/>
-            </a:pPr>
-            <a:endParaRPr lang="en-US" dirty="0"/>
-          </a:p>
-          <a:p>
-            <a:pPr marL="0" indent="0">
-              <a:buNone/>
-            </a:pPr>
-            <a:endParaRPr lang="en-US" dirty="0"/>
-          </a:p>
-          <a:p>
-            <a:pPr marL="0" indent="0">
-              <a:buNone/>
-            </a:pPr>
-            <a:endParaRPr lang="en-US" dirty="0"/>
-          </a:p>
-          <a:p>
-            <a:pPr marL="0" indent="0">
-              <a:buNone/>
-            </a:pPr>
-            <a:endParaRPr lang="en-US" dirty="0"/>
-          </a:p>
-          <a:p>
-            <a:pPr marL="0" indent="0">
-              <a:buNone/>
-            </a:pPr>
-            <a:endParaRPr lang="en-US" dirty="0"/>
-          </a:p>
-          <a:p>
-            <a:pPr marL="68263" indent="0">
-              <a:buNone/>
-            </a:pPr>
-            <a:endParaRPr lang="en-US" sz="3600" dirty="0"/>
-          </a:p>
-          <a:p>
-            <a:pPr marL="68263" indent="0">
-              <a:buNone/>
-            </a:pPr>
-            <a:r>
-              <a:rPr lang="en-US" sz="1400" dirty="0"/>
-              <a:t>* G. </a:t>
-            </a:r>
-            <a:r>
-              <a:rPr lang="en-US" sz="1400" dirty="0" err="1"/>
-              <a:t>Lample</a:t>
-            </a:r>
-            <a:r>
-              <a:rPr lang="en-US" sz="1400" dirty="0"/>
-              <a:t> and F. </a:t>
-            </a:r>
-            <a:r>
-              <a:rPr lang="en-US" sz="1400" dirty="0" err="1"/>
-              <a:t>Charton</a:t>
-            </a:r>
-            <a:r>
-              <a:rPr lang="en-US" sz="1400" dirty="0"/>
-              <a:t>, Deep Learning for Symbolic Mathematics, </a:t>
-            </a:r>
-            <a:r>
-              <a:rPr lang="en-US" sz="1400" dirty="0" err="1"/>
-              <a:t>arXiv</a:t>
-            </a:r>
-            <a:r>
-              <a:rPr lang="en-US" sz="1400" dirty="0"/>
-              <a:t>: 1912.01412v1</a:t>
-            </a:r>
-          </a:p>
-          <a:p>
-            <a:pPr marL="68263" indent="0">
-              <a:buNone/>
-            </a:pPr>
-            <a:endParaRPr lang="en-US" sz="1400" dirty="0"/>
-          </a:p>
-          <a:p>
-            <a:pPr marL="68263" indent="0">
-              <a:buNone/>
-            </a:pPr>
-            <a:endParaRPr lang="en-US" sz="1400" dirty="0"/>
-          </a:p>
-          <a:p>
-            <a:pPr marL="0" indent="0">
-              <a:buNone/>
-            </a:pPr>
-            <a:endParaRPr lang="en-US" dirty="0"/>
-          </a:p>
-          <a:p>
-            <a:pPr marL="0" indent="0">
-              <a:buNone/>
-            </a:pPr>
-            <a:endParaRPr lang="en-US" dirty="0"/>
+            <a:fld id="{75711B93-8128-4F43-B650-5CAB5BC252AE}" type="slidenum">
+              <a:rPr lang="en-US" smtClean="0"/>
+              <a:pPr>
+                <a:defRPr/>
+              </a:pPr>
+              <a:t>6</a:t>
+            </a:fld>
+            <a:endParaRPr lang="en-US"/>
           </a:p>
         </p:txBody>
       </p:sp>
       <p:pic>
         <p:nvPicPr>
-          <p:cNvPr id="9" name="Picture 8" descr="A picture containing person, tree, outdoor, person&#10;&#10;Description automatically generated">
+          <p:cNvPr id="4" name="Picture 3" descr="Anthropic Introduces Projects for Claude AI, a New Collaborative Tool to Organise Information">
             <a:extLst>
               <a:ext uri="{FF2B5EF4-FFF2-40B4-BE49-F238E27FC236}">
-                <a16:creationId xmlns:a16="http://schemas.microsoft.com/office/drawing/2014/main" id="{09BDAA97-3FDA-3874-8DFD-DDEE188E598D}"/>
+                <a16:creationId xmlns:a16="http://schemas.microsoft.com/office/drawing/2014/main" id="{DDB2CC8E-2283-37C0-1EE8-CA7D828380FA}"/>
               </a:ext>
             </a:extLst>
           </p:cNvPr>
@@ -31244,64 +25265,15 @@
           <p:nvPr/>
         </p:nvPicPr>
         <p:blipFill>
-          <a:blip r:embed="rId2">
-            <a:extLst>
-              <a:ext uri="{28A0092B-C50C-407E-A947-70E740481C1C}">
-                <a14:useLocalDpi xmlns:a14="http://schemas.microsoft.com/office/drawing/2010/main" val="0"/>
-              </a:ext>
-            </a:extLst>
-          </a:blip>
+          <a:blip r:embed="rId2"/>
           <a:stretch>
             <a:fillRect/>
           </a:stretch>
         </p:blipFill>
         <p:spPr>
           <a:xfrm>
-            <a:off x="2209800" y="2965252"/>
-            <a:ext cx="2006600" cy="2743200"/>
-          </a:xfrm>
-          <a:prstGeom prst="rect">
-            <a:avLst/>
-          </a:prstGeom>
-          <a:effectLst>
-            <a:outerShdw blurRad="50800" dist="38100" dir="2700000" algn="tl" rotWithShape="0">
-              <a:prstClr val="black">
-                <a:alpha val="40000"/>
-              </a:prstClr>
-            </a:outerShdw>
-          </a:effectLst>
-        </p:spPr>
-      </p:pic>
-      <p:pic>
-        <p:nvPicPr>
-          <p:cNvPr id="10" name="Picture 9" descr="A picture containing person, person, outdoor&#10;&#10;Description automatically generated">
-            <a:extLst>
-              <a:ext uri="{FF2B5EF4-FFF2-40B4-BE49-F238E27FC236}">
-                <a16:creationId xmlns:a16="http://schemas.microsoft.com/office/drawing/2014/main" id="{10EDC6B5-F047-C1FD-8A79-3EC1B4E4E679}"/>
-              </a:ext>
-            </a:extLst>
-          </p:cNvPr>
-          <p:cNvPicPr>
-            <a:picLocks noChangeAspect="1"/>
-          </p:cNvPicPr>
-          <p:nvPr/>
-        </p:nvPicPr>
-        <p:blipFill>
-          <a:blip r:embed="rId3">
-            <a:extLst>
-              <a:ext uri="{28A0092B-C50C-407E-A947-70E740481C1C}">
-                <a14:useLocalDpi xmlns:a14="http://schemas.microsoft.com/office/drawing/2010/main" val="0"/>
-              </a:ext>
-            </a:extLst>
-          </a:blip>
-          <a:stretch>
-            <a:fillRect/>
-          </a:stretch>
-        </p:blipFill>
-        <p:spPr>
-          <a:xfrm>
-            <a:off x="4900932" y="2965252"/>
-            <a:ext cx="2146300" cy="2743200"/>
+            <a:off x="1146175" y="1066800"/>
+            <a:ext cx="6877050" cy="3868932"/>
           </a:xfrm>
           <a:prstGeom prst="rect">
             <a:avLst/>
@@ -31317,10 +25289,10 @@
       </p:pic>
       <p:sp>
         <p:nvSpPr>
-          <p:cNvPr id="11" name="TextBox 10">
+          <p:cNvPr id="5" name="TextBox 4">
             <a:extLst>
               <a:ext uri="{FF2B5EF4-FFF2-40B4-BE49-F238E27FC236}">
-                <a16:creationId xmlns:a16="http://schemas.microsoft.com/office/drawing/2014/main" id="{819068AF-17EC-182C-07E3-318ADADB17CF}"/>
+                <a16:creationId xmlns:a16="http://schemas.microsoft.com/office/drawing/2014/main" id="{A0C023B7-EECB-A8E5-9CAF-708B59E00F0E}"/>
               </a:ext>
             </a:extLst>
           </p:cNvPr>
@@ -31329,8 +25301,8 @@
         </p:nvSpPr>
         <p:spPr>
           <a:xfrm>
-            <a:off x="2714522" y="5708452"/>
-            <a:ext cx="856325" cy="338554"/>
+            <a:off x="2513967" y="5750867"/>
+            <a:ext cx="4116063" cy="461665"/>
           </a:xfrm>
           <a:prstGeom prst="rect">
             <a:avLst/>
@@ -31344,19 +25316,85 @@
           <a:lstStyle/>
           <a:p>
             <a:r>
-              <a:rPr lang="en-US" sz="1600" dirty="0" err="1"/>
-              <a:t>Lample</a:t>
+              <a:rPr lang="en-US" dirty="0"/>
+              <a:t>Large Language Model (LLM)</a:t>
             </a:r>
-            <a:endParaRPr lang="en-US" sz="1600" dirty="0"/>
           </a:p>
         </p:txBody>
       </p:sp>
+    </p:spTree>
+    <p:extLst>
+      <p:ext uri="{BB962C8B-B14F-4D97-AF65-F5344CB8AC3E}">
+        <p14:creationId xmlns:p14="http://schemas.microsoft.com/office/powerpoint/2010/main" val="2374839790"/>
+      </p:ext>
+    </p:extLst>
+  </p:cSld>
+  <p:clrMapOvr>
+    <a:masterClrMapping/>
+  </p:clrMapOvr>
+</p:sld>
+</file>
+
+<file path=ppt/slides/slide7.xml><?xml version="1.0" encoding="utf-8"?>
+<p:sld xmlns:a="http://schemas.openxmlformats.org/drawingml/2006/main" xmlns:r="http://schemas.openxmlformats.org/officeDocument/2006/relationships" xmlns:p="http://schemas.openxmlformats.org/presentationml/2006/main">
+  <p:cSld>
+    <p:spTree>
+      <p:nvGrpSpPr>
+        <p:cNvPr id="1" name=""/>
+        <p:cNvGrpSpPr/>
+        <p:nvPr/>
+      </p:nvGrpSpPr>
+      <p:grpSpPr>
+        <a:xfrm>
+          <a:off x="0" y="0"/>
+          <a:ext cx="0" cy="0"/>
+          <a:chOff x="0" y="0"/>
+          <a:chExt cx="0" cy="0"/>
+        </a:xfrm>
+      </p:grpSpPr>
+      <p:pic>
+        <p:nvPicPr>
+          <p:cNvPr id="4" name="Picture 3">
+            <a:extLst>
+              <a:ext uri="{FF2B5EF4-FFF2-40B4-BE49-F238E27FC236}">
+                <a16:creationId xmlns:a16="http://schemas.microsoft.com/office/drawing/2014/main" id="{61E5F7A1-4F6D-FF1D-E98F-7079A941EB90}"/>
+              </a:ext>
+            </a:extLst>
+          </p:cNvPr>
+          <p:cNvPicPr>
+            <a:picLocks noChangeAspect="1"/>
+          </p:cNvPicPr>
+          <p:nvPr/>
+        </p:nvPicPr>
+        <p:blipFill>
+          <a:blip r:embed="rId2"/>
+          <a:stretch>
+            <a:fillRect/>
+          </a:stretch>
+        </p:blipFill>
+        <p:spPr>
+          <a:xfrm>
+            <a:off x="685800" y="914400"/>
+            <a:ext cx="7772400" cy="4766011"/>
+          </a:xfrm>
+          <a:prstGeom prst="rect">
+            <a:avLst/>
+          </a:prstGeom>
+          <a:effectLst>
+            <a:outerShdw blurRad="50800" dist="38100" dir="2700000" algn="tl" rotWithShape="0">
+              <a:prstClr val="black">
+                <a:alpha val="40000"/>
+              </a:prstClr>
+            </a:outerShdw>
+          </a:effectLst>
+        </p:spPr>
+      </p:pic>
       <p:sp>
         <p:nvSpPr>
-          <p:cNvPr id="12" name="TextBox 11">
+          <p:cNvPr id="25" name="TextBox 24">
             <a:extLst>
               <a:ext uri="{FF2B5EF4-FFF2-40B4-BE49-F238E27FC236}">
-                <a16:creationId xmlns:a16="http://schemas.microsoft.com/office/drawing/2014/main" id="{D6C873D7-EF7A-2EB5-F807-3804517F462D}"/>
+                <a16:creationId xmlns:a16="http://schemas.microsoft.com/office/drawing/2014/main" id="{C90E1042-A3A0-04FA-688A-C5613C464A11}"/>
               </a:ext>
             </a:extLst>
           </p:cNvPr>
@@ -31365,8 +25403,8 @@
         </p:nvSpPr>
         <p:spPr>
           <a:xfrm>
-            <a:off x="5545919" y="5757446"/>
-            <a:ext cx="914033" cy="338554"/>
+            <a:off x="1981200" y="5791200"/>
+            <a:ext cx="5315942" cy="461665"/>
           </a:xfrm>
           <a:prstGeom prst="rect">
             <a:avLst/>
@@ -31380,17 +25418,130 @@
           <a:lstStyle/>
           <a:p>
             <a:r>
-              <a:rPr lang="en-US" sz="1600" dirty="0" err="1"/>
-              <a:t>Charton</a:t>
+              <a:rPr lang="en-US" dirty="0">
+                <a:hlinkClick r:id="rId3"/>
+              </a:rPr>
+              <a:t>https://www.gradually.ai/en/llm-statistics/</a:t>
             </a:r>
-            <a:endParaRPr lang="en-US" sz="1600" dirty="0"/>
+            <a:endParaRPr lang="en-US" dirty="0"/>
           </a:p>
         </p:txBody>
       </p:sp>
     </p:spTree>
     <p:extLst>
       <p:ext uri="{BB962C8B-B14F-4D97-AF65-F5344CB8AC3E}">
-        <p14:creationId xmlns:p14="http://schemas.microsoft.com/office/powerpoint/2010/main" val="2016528401"/>
+        <p14:creationId xmlns:p14="http://schemas.microsoft.com/office/powerpoint/2010/main" val="3397883490"/>
+      </p:ext>
+    </p:extLst>
+  </p:cSld>
+  <p:clrMapOvr>
+    <a:masterClrMapping/>
+  </p:clrMapOvr>
+</p:sld>
+</file>
+
+<file path=ppt/slides/slide8.xml><?xml version="1.0" encoding="utf-8"?>
+<p:sld xmlns:a="http://schemas.openxmlformats.org/drawingml/2006/main" xmlns:r="http://schemas.openxmlformats.org/officeDocument/2006/relationships" xmlns:p="http://schemas.openxmlformats.org/presentationml/2006/main">
+  <p:cSld>
+    <p:spTree>
+      <p:nvGrpSpPr>
+        <p:cNvPr id="1" name="">
+          <a:extLst>
+            <a:ext uri="{FF2B5EF4-FFF2-40B4-BE49-F238E27FC236}">
+              <a16:creationId xmlns:a16="http://schemas.microsoft.com/office/drawing/2014/main" id="{90C41B16-03F7-3C28-D997-E96C5B788AB6}"/>
+            </a:ext>
+          </a:extLst>
+        </p:cNvPr>
+        <p:cNvGrpSpPr/>
+        <p:nvPr/>
+      </p:nvGrpSpPr>
+      <p:grpSpPr>
+        <a:xfrm>
+          <a:off x="0" y="0"/>
+          <a:ext cx="0" cy="0"/>
+          <a:chOff x="0" y="0"/>
+          <a:chExt cx="0" cy="0"/>
+        </a:xfrm>
+      </p:grpSpPr>
+      <p:sp>
+        <p:nvSpPr>
+          <p:cNvPr id="25" name="TextBox 24">
+            <a:extLst>
+              <a:ext uri="{FF2B5EF4-FFF2-40B4-BE49-F238E27FC236}">
+                <a16:creationId xmlns:a16="http://schemas.microsoft.com/office/drawing/2014/main" id="{D97E6453-B5F2-AAF0-AEEE-39AC441FAA6D}"/>
+              </a:ext>
+            </a:extLst>
+          </p:cNvPr>
+          <p:cNvSpPr txBox="1"/>
+          <p:nvPr/>
+        </p:nvSpPr>
+        <p:spPr>
+          <a:xfrm>
+            <a:off x="1981200" y="5791200"/>
+            <a:ext cx="5315942" cy="461665"/>
+          </a:xfrm>
+          <a:prstGeom prst="rect">
+            <a:avLst/>
+          </a:prstGeom>
+          <a:noFill/>
+        </p:spPr>
+        <p:txBody>
+          <a:bodyPr wrap="none" rtlCol="0">
+            <a:spAutoFit/>
+          </a:bodyPr>
+          <a:lstStyle/>
+          <a:p>
+            <a:r>
+              <a:rPr lang="en-US" dirty="0">
+                <a:hlinkClick r:id="rId2"/>
+              </a:rPr>
+              <a:t>https://www.gradually.ai/en/llm-statistics/</a:t>
+            </a:r>
+            <a:endParaRPr lang="en-US" dirty="0"/>
+          </a:p>
+        </p:txBody>
+      </p:sp>
+      <p:pic>
+        <p:nvPicPr>
+          <p:cNvPr id="27" name="Picture 26">
+            <a:extLst>
+              <a:ext uri="{FF2B5EF4-FFF2-40B4-BE49-F238E27FC236}">
+                <a16:creationId xmlns:a16="http://schemas.microsoft.com/office/drawing/2014/main" id="{06D41735-DCBF-217C-6665-785DD2B7A7EB}"/>
+              </a:ext>
+            </a:extLst>
+          </p:cNvPr>
+          <p:cNvPicPr>
+            <a:picLocks noChangeAspect="1"/>
+          </p:cNvPicPr>
+          <p:nvPr/>
+        </p:nvPicPr>
+        <p:blipFill>
+          <a:blip r:embed="rId3"/>
+          <a:stretch>
+            <a:fillRect/>
+          </a:stretch>
+        </p:blipFill>
+        <p:spPr>
+          <a:xfrm>
+            <a:off x="685800" y="1219200"/>
+            <a:ext cx="7772400" cy="4279683"/>
+          </a:xfrm>
+          <a:prstGeom prst="rect">
+            <a:avLst/>
+          </a:prstGeom>
+          <a:effectLst>
+            <a:outerShdw blurRad="50800" dist="38100" dir="2700000" algn="tl" rotWithShape="0">
+              <a:prstClr val="black">
+                <a:alpha val="40000"/>
+              </a:prstClr>
+            </a:outerShdw>
+          </a:effectLst>
+        </p:spPr>
+      </p:pic>
+    </p:spTree>
+    <p:extLst>
+      <p:ext uri="{BB962C8B-B14F-4D97-AF65-F5344CB8AC3E}">
+        <p14:creationId xmlns:p14="http://schemas.microsoft.com/office/powerpoint/2010/main" val="1940124119"/>
       </p:ext>
     </p:extLst>
   </p:cSld>
@@ -31417,47 +25568,111 @@
           <a:chExt cx="0" cy="0"/>
         </a:xfrm>
       </p:grpSpPr>
-      <p:pic>
-        <p:nvPicPr>
-          <p:cNvPr id="10" name="Picture 9" descr="A screenshot of a computer&#10;&#10;Description automatically generated">
+      <p:sp>
+        <p:nvSpPr>
+          <p:cNvPr id="2" name="Footer Placeholder 1">
             <a:extLst>
               <a:ext uri="{FF2B5EF4-FFF2-40B4-BE49-F238E27FC236}">
-                <a16:creationId xmlns:a16="http://schemas.microsoft.com/office/drawing/2014/main" id="{00769F64-7889-C8EF-278C-D0514910597E}"/>
+                <a16:creationId xmlns:a16="http://schemas.microsoft.com/office/drawing/2014/main" id="{CEEB217B-D59E-AF3E-A4D2-915828B6158C}"/>
               </a:ext>
             </a:extLst>
           </p:cNvPr>
-          <p:cNvPicPr>
-            <a:picLocks noChangeAspect="1"/>
-          </p:cNvPicPr>
+          <p:cNvSpPr>
+            <a:spLocks noGrp="1"/>
+          </p:cNvSpPr>
+          <p:nvPr>
+            <p:ph type="ftr" sz="quarter" idx="10"/>
+          </p:nvPr>
+        </p:nvSpPr>
+        <p:spPr/>
+        <p:txBody>
+          <a:bodyPr/>
+          <a:lstStyle/>
+          <a:p>
+            <a:pPr>
+              <a:defRPr/>
+            </a:pPr>
+            <a:r>
+              <a:rPr lang="en-US"/>
+              <a:t>FSU: Machine Learning in Physics</a:t>
+            </a:r>
+          </a:p>
+        </p:txBody>
+      </p:sp>
+      <p:sp>
+        <p:nvSpPr>
+          <p:cNvPr id="3" name="Slide Number Placeholder 2">
+            <a:extLst>
+              <a:ext uri="{FF2B5EF4-FFF2-40B4-BE49-F238E27FC236}">
+                <a16:creationId xmlns:a16="http://schemas.microsoft.com/office/drawing/2014/main" id="{0E24523D-0D39-B032-F462-8404A81DBA85}"/>
+              </a:ext>
+            </a:extLst>
+          </p:cNvPr>
+          <p:cNvSpPr>
+            <a:spLocks noGrp="1"/>
+          </p:cNvSpPr>
+          <p:nvPr>
+            <p:ph type="sldNum" sz="quarter" idx="11"/>
+          </p:nvPr>
+        </p:nvSpPr>
+        <p:spPr/>
+        <p:txBody>
+          <a:bodyPr/>
+          <a:lstStyle/>
+          <a:p>
+            <a:pPr>
+              <a:defRPr/>
+            </a:pPr>
+            <a:fld id="{75711B93-8128-4F43-B650-5CAB5BC252AE}" type="slidenum">
+              <a:rPr lang="en-US" smtClean="0"/>
+              <a:pPr>
+                <a:defRPr/>
+              </a:pPr>
+              <a:t>9</a:t>
+            </a:fld>
+            <a:endParaRPr lang="en-US"/>
+          </a:p>
+        </p:txBody>
+      </p:sp>
+      <p:sp>
+        <p:nvSpPr>
+          <p:cNvPr id="4" name="TextBox 3">
+            <a:extLst>
+              <a:ext uri="{FF2B5EF4-FFF2-40B4-BE49-F238E27FC236}">
+                <a16:creationId xmlns:a16="http://schemas.microsoft.com/office/drawing/2014/main" id="{03CD2BC9-3DE6-B4D5-2B4A-14165DD6BF66}"/>
+              </a:ext>
+            </a:extLst>
+          </p:cNvPr>
+          <p:cNvSpPr txBox="1"/>
           <p:nvPr/>
-        </p:nvPicPr>
-        <p:blipFill>
-          <a:blip r:embed="rId2"/>
-          <a:stretch>
-            <a:fillRect/>
-          </a:stretch>
-        </p:blipFill>
+        </p:nvSpPr>
         <p:spPr>
           <a:xfrm>
-            <a:off x="381000" y="76200"/>
-            <a:ext cx="8485591" cy="6248400"/>
+            <a:off x="2971800" y="2438400"/>
+            <a:ext cx="2454518" cy="584775"/>
           </a:xfrm>
           <a:prstGeom prst="rect">
             <a:avLst/>
           </a:prstGeom>
-          <a:effectLst>
-            <a:outerShdw blurRad="50800" dist="38100" dir="2700000" algn="tl" rotWithShape="0">
-              <a:prstClr val="black">
-                <a:alpha val="40000"/>
-              </a:prstClr>
-            </a:outerShdw>
-          </a:effectLst>
+          <a:noFill/>
         </p:spPr>
-      </p:pic>
+        <p:txBody>
+          <a:bodyPr wrap="none" rtlCol="0">
+            <a:spAutoFit/>
+          </a:bodyPr>
+          <a:lstStyle/>
+          <a:p>
+            <a:r>
+              <a:rPr lang="en-US" sz="3200" dirty="0"/>
+              <a:t>Claude Demo</a:t>
+            </a:r>
+          </a:p>
+        </p:txBody>
+      </p:sp>
     </p:spTree>
     <p:extLst>
       <p:ext uri="{BB962C8B-B14F-4D97-AF65-F5344CB8AC3E}">
-        <p14:creationId xmlns:p14="http://schemas.microsoft.com/office/powerpoint/2010/main" val="3286155375"/>
+        <p14:creationId xmlns:p14="http://schemas.microsoft.com/office/powerpoint/2010/main" val="4272453574"/>
       </p:ext>
     </p:extLst>
   </p:cSld>

--- a/Lectures/01.Foundations/Lecture01.pptx
+++ b/Lectures/01.Foundations/Lecture01.pptx
@@ -5909,11 +5909,11 @@
                 </a:r>
                 <a:r>
                   <a:rPr lang="en-US" dirty="0"/>
-                  <a:t>. The ChatGPT3 LLM has </a:t>
+                  <a:t>. Kimi K3, from Moonshot AI, has </a:t>
                 </a:r>
                 <a:r>
                   <a:rPr lang="en-US" b="1" dirty="0"/>
-                  <a:t>96</a:t>
+                  <a:t>93</a:t>
                 </a:r>
                 <a:r>
                   <a:rPr lang="en-US" dirty="0"/>
@@ -5921,7 +5921,7 @@
                 </a:r>
                 <a:r>
                   <a:rPr lang="en-US" b="1" dirty="0"/>
-                  <a:t>175 billion </a:t>
+                  <a:t>2.8 trillion </a:t>
                 </a:r>
                 <a:r>
                   <a:rPr lang="en-US" dirty="0"/>
@@ -6501,8 +6501,8 @@
             </p:txBody>
           </p:sp>
         </p:grpSp>
-        <mc:AlternateContent xmlns:mc="http://schemas.openxmlformats.org/markup-compatibility/2006">
-          <mc:Choice xmlns:a14="http://schemas.microsoft.com/office/drawing/2010/main" Requires="a14">
+        <mc:AlternateContent xmlns:mc="http://schemas.openxmlformats.org/markup-compatibility/2006" xmlns:a14="http://schemas.microsoft.com/office/drawing/2010/main">
+          <mc:Choice Requires="a14">
             <p:sp>
               <p:nvSpPr>
                 <p:cNvPr id="14" name="TextBox 13">
@@ -6567,7 +6567,7 @@
               </p:txBody>
             </p:sp>
           </mc:Choice>
-          <mc:Fallback>
+          <mc:Fallback xmlns="">
             <p:sp>
               <p:nvSpPr>
                 <p:cNvPr id="14" name="TextBox 13">
@@ -6612,8 +6612,8 @@
             </p:sp>
           </mc:Fallback>
         </mc:AlternateContent>
-        <mc:AlternateContent xmlns:mc="http://schemas.openxmlformats.org/markup-compatibility/2006">
-          <mc:Choice xmlns:a14="http://schemas.microsoft.com/office/drawing/2010/main" Requires="a14">
+        <mc:AlternateContent xmlns:mc="http://schemas.openxmlformats.org/markup-compatibility/2006" xmlns:a14="http://schemas.microsoft.com/office/drawing/2010/main">
+          <mc:Choice Requires="a14">
             <p:sp>
               <p:nvSpPr>
                 <p:cNvPr id="15" name="TextBox 14">
@@ -6660,7 +6660,7 @@
               </p:txBody>
             </p:sp>
           </mc:Choice>
-          <mc:Fallback>
+          <mc:Fallback xmlns="">
             <p:sp>
               <p:nvSpPr>
                 <p:cNvPr id="15" name="TextBox 14">
@@ -6779,8 +6779,8 @@
             </a:p>
           </p:txBody>
         </p:sp>
-        <mc:AlternateContent xmlns:mc="http://schemas.openxmlformats.org/markup-compatibility/2006">
-          <mc:Choice xmlns:a14="http://schemas.microsoft.com/office/drawing/2010/main" Requires="a14">
+        <mc:AlternateContent xmlns:mc="http://schemas.openxmlformats.org/markup-compatibility/2006" xmlns:a14="http://schemas.microsoft.com/office/drawing/2010/main">
+          <mc:Choice Requires="a14">
             <p:sp>
               <p:nvSpPr>
                 <p:cNvPr id="18" name="TextBox 17">
@@ -6846,7 +6846,7 @@
               </p:txBody>
             </p:sp>
           </mc:Choice>
-          <mc:Fallback>
+          <mc:Fallback xmlns="">
             <p:sp>
               <p:nvSpPr>
                 <p:cNvPr id="18" name="TextBox 17">
@@ -6891,8 +6891,8 @@
             </p:sp>
           </mc:Fallback>
         </mc:AlternateContent>
-        <mc:AlternateContent xmlns:mc="http://schemas.openxmlformats.org/markup-compatibility/2006">
-          <mc:Choice xmlns:a14="http://schemas.microsoft.com/office/drawing/2010/main" Requires="a14">
+        <mc:AlternateContent xmlns:mc="http://schemas.openxmlformats.org/markup-compatibility/2006" xmlns:a14="http://schemas.microsoft.com/office/drawing/2010/main">
+          <mc:Choice Requires="a14">
             <p:sp>
               <p:nvSpPr>
                 <p:cNvPr id="19" name="TextBox 18">
@@ -6964,7 +6964,7 @@
               </p:txBody>
             </p:sp>
           </mc:Choice>
-          <mc:Fallback>
+          <mc:Fallback xmlns="">
             <p:sp>
               <p:nvSpPr>
                 <p:cNvPr id="19" name="TextBox 18">
@@ -7009,8 +7009,8 @@
             </p:sp>
           </mc:Fallback>
         </mc:AlternateContent>
-        <mc:AlternateContent xmlns:mc="http://schemas.openxmlformats.org/markup-compatibility/2006">
-          <mc:Choice xmlns:a14="http://schemas.microsoft.com/office/drawing/2010/main" Requires="a14">
+        <mc:AlternateContent xmlns:mc="http://schemas.openxmlformats.org/markup-compatibility/2006" xmlns:a14="http://schemas.microsoft.com/office/drawing/2010/main">
+          <mc:Choice Requires="a14">
             <p:sp>
               <p:nvSpPr>
                 <p:cNvPr id="20" name="TextBox 19">
@@ -7076,7 +7076,7 @@
               </p:txBody>
             </p:sp>
           </mc:Choice>
-          <mc:Fallback>
+          <mc:Fallback xmlns="">
             <p:sp>
               <p:nvSpPr>
                 <p:cNvPr id="20" name="TextBox 19">
@@ -12996,7 +12996,7 @@
             </a:pPr>
             <a:r>
               <a:rPr lang="en-US" dirty="0"/>
-              <a:t>Gain an appreciation of the power of ML models as well as their (current) limitations.</a:t>
+              <a:t>Gain an understanding of AI agents.</a:t>
             </a:r>
           </a:p>
           <a:p>
@@ -18538,8 +18538,8 @@
           <a:chExt cx="0" cy="0"/>
         </a:xfrm>
       </p:grpSpPr>
-      <mc:AlternateContent xmlns:mc="http://schemas.openxmlformats.org/markup-compatibility/2006">
-        <mc:Choice xmlns:a14="http://schemas.microsoft.com/office/drawing/2010/main" Requires="a14">
+      <mc:AlternateContent xmlns:mc="http://schemas.openxmlformats.org/markup-compatibility/2006" xmlns:a14="http://schemas.microsoft.com/office/drawing/2010/main">
+        <mc:Choice Requires="a14">
           <p:sp>
             <p:nvSpPr>
               <p:cNvPr id="8" name="Content Placeholder 7">
@@ -18957,7 +18957,7 @@
             </p:txBody>
           </p:sp>
         </mc:Choice>
-        <mc:Fallback>
+        <mc:Fallback xmlns="">
           <p:sp>
             <p:nvSpPr>
               <p:cNvPr id="8" name="Content Placeholder 7">
@@ -25538,6 +25538,41 @@
           </a:effectLst>
         </p:spPr>
       </p:pic>
+      <p:sp>
+        <p:nvSpPr>
+          <p:cNvPr id="2" name="TextBox 1">
+            <a:extLst>
+              <a:ext uri="{FF2B5EF4-FFF2-40B4-BE49-F238E27FC236}">
+                <a16:creationId xmlns:a16="http://schemas.microsoft.com/office/drawing/2014/main" id="{418A4EC4-11C8-F644-3D00-47978794B4B5}"/>
+              </a:ext>
+            </a:extLst>
+          </p:cNvPr>
+          <p:cNvSpPr txBox="1"/>
+          <p:nvPr/>
+        </p:nvSpPr>
+        <p:spPr>
+          <a:xfrm>
+            <a:off x="2343510" y="770235"/>
+            <a:ext cx="4879093" cy="461665"/>
+          </a:xfrm>
+          <a:prstGeom prst="rect">
+            <a:avLst/>
+          </a:prstGeom>
+          <a:noFill/>
+        </p:spPr>
+        <p:txBody>
+          <a:bodyPr wrap="none" rtlCol="0">
+            <a:spAutoFit/>
+          </a:bodyPr>
+          <a:lstStyle/>
+          <a:p>
+            <a:r>
+              <a:rPr lang="en-US" b="1" dirty="0"/>
+              <a:t>Model sizes: Number of parameters</a:t>
+            </a:r>
+          </a:p>
+        </p:txBody>
+      </p:sp>
     </p:spTree>
     <p:extLst>
       <p:ext uri="{BB962C8B-B14F-4D97-AF65-F5344CB8AC3E}">
